--- a/說明用工具/張允豪 購物網站 專題 ver.0.1.pptx
+++ b/說明用工具/張允豪 購物網站 專題 ver.0.1.pptx
@@ -7,27 +7,26 @@
   <p:sldIdLst>
     <p:sldId id="256" r:id="rId2"/>
     <p:sldId id="258" r:id="rId3"/>
-    <p:sldId id="259" r:id="rId4"/>
-    <p:sldId id="274" r:id="rId5"/>
-    <p:sldId id="275" r:id="rId6"/>
-    <p:sldId id="280" r:id="rId7"/>
-    <p:sldId id="277" r:id="rId8"/>
-    <p:sldId id="278" r:id="rId9"/>
-    <p:sldId id="279" r:id="rId10"/>
-    <p:sldId id="273" r:id="rId11"/>
-    <p:sldId id="282" r:id="rId12"/>
-    <p:sldId id="283" r:id="rId13"/>
-    <p:sldId id="284" r:id="rId14"/>
-    <p:sldId id="285" r:id="rId15"/>
-    <p:sldId id="286" r:id="rId16"/>
-    <p:sldId id="287" r:id="rId17"/>
-    <p:sldId id="264" r:id="rId18"/>
-    <p:sldId id="265" r:id="rId19"/>
-    <p:sldId id="266" r:id="rId20"/>
-    <p:sldId id="267" r:id="rId21"/>
-    <p:sldId id="268" r:id="rId22"/>
-    <p:sldId id="269" r:id="rId23"/>
-    <p:sldId id="270" r:id="rId24"/>
+    <p:sldId id="275" r:id="rId4"/>
+    <p:sldId id="280" r:id="rId5"/>
+    <p:sldId id="277" r:id="rId6"/>
+    <p:sldId id="278" r:id="rId7"/>
+    <p:sldId id="279" r:id="rId8"/>
+    <p:sldId id="273" r:id="rId9"/>
+    <p:sldId id="265" r:id="rId10"/>
+    <p:sldId id="282" r:id="rId11"/>
+    <p:sldId id="283" r:id="rId12"/>
+    <p:sldId id="286" r:id="rId13"/>
+    <p:sldId id="287" r:id="rId14"/>
+    <p:sldId id="284" r:id="rId15"/>
+    <p:sldId id="285" r:id="rId16"/>
+    <p:sldId id="288" r:id="rId17"/>
+    <p:sldId id="266" r:id="rId18"/>
+    <p:sldId id="289" r:id="rId19"/>
+    <p:sldId id="267" r:id="rId20"/>
+    <p:sldId id="268" r:id="rId21"/>
+    <p:sldId id="269" r:id="rId22"/>
+    <p:sldId id="270" r:id="rId23"/>
   </p:sldIdLst>
   <p:sldSz cx="14630400" cy="8229600"/>
   <p:notesSz cx="6858000" cy="9144000"/>
@@ -265,7 +264,7 @@
           <a:p>
             <a:fld id="{163F0119-99E8-4B39-9AE3-1AFDAA3321B4}" type="datetimeFigureOut">
               <a:rPr lang="zh-TW" altLang="en-US" smtClean="0"/>
-              <a:t>2025/6/23</a:t>
+              <a:t>2025/6/24</a:t>
             </a:fld>
             <a:endParaRPr lang="zh-TW" altLang="en-US"/>
           </a:p>
@@ -435,7 +434,7 @@
           <a:p>
             <a:fld id="{163F0119-99E8-4B39-9AE3-1AFDAA3321B4}" type="datetimeFigureOut">
               <a:rPr lang="zh-TW" altLang="en-US" smtClean="0"/>
-              <a:t>2025/6/23</a:t>
+              <a:t>2025/6/24</a:t>
             </a:fld>
             <a:endParaRPr lang="zh-TW" altLang="en-US"/>
           </a:p>
@@ -615,7 +614,7 @@
           <a:p>
             <a:fld id="{163F0119-99E8-4B39-9AE3-1AFDAA3321B4}" type="datetimeFigureOut">
               <a:rPr lang="zh-TW" altLang="en-US" smtClean="0"/>
-              <a:t>2025/6/23</a:t>
+              <a:t>2025/6/24</a:t>
             </a:fld>
             <a:endParaRPr lang="zh-TW" altLang="en-US"/>
           </a:p>
@@ -785,7 +784,7 @@
           <a:p>
             <a:fld id="{163F0119-99E8-4B39-9AE3-1AFDAA3321B4}" type="datetimeFigureOut">
               <a:rPr lang="zh-TW" altLang="en-US" smtClean="0"/>
-              <a:t>2025/6/23</a:t>
+              <a:t>2025/6/24</a:t>
             </a:fld>
             <a:endParaRPr lang="zh-TW" altLang="en-US"/>
           </a:p>
@@ -1031,7 +1030,7 @@
           <a:p>
             <a:fld id="{163F0119-99E8-4B39-9AE3-1AFDAA3321B4}" type="datetimeFigureOut">
               <a:rPr lang="zh-TW" altLang="en-US" smtClean="0"/>
-              <a:t>2025/6/23</a:t>
+              <a:t>2025/6/24</a:t>
             </a:fld>
             <a:endParaRPr lang="zh-TW" altLang="en-US"/>
           </a:p>
@@ -1263,7 +1262,7 @@
           <a:p>
             <a:fld id="{163F0119-99E8-4B39-9AE3-1AFDAA3321B4}" type="datetimeFigureOut">
               <a:rPr lang="zh-TW" altLang="en-US" smtClean="0"/>
-              <a:t>2025/6/23</a:t>
+              <a:t>2025/6/24</a:t>
             </a:fld>
             <a:endParaRPr lang="zh-TW" altLang="en-US"/>
           </a:p>
@@ -1630,7 +1629,7 @@
           <a:p>
             <a:fld id="{163F0119-99E8-4B39-9AE3-1AFDAA3321B4}" type="datetimeFigureOut">
               <a:rPr lang="zh-TW" altLang="en-US" smtClean="0"/>
-              <a:t>2025/6/23</a:t>
+              <a:t>2025/6/24</a:t>
             </a:fld>
             <a:endParaRPr lang="zh-TW" altLang="en-US"/>
           </a:p>
@@ -1748,7 +1747,7 @@
           <a:p>
             <a:fld id="{163F0119-99E8-4B39-9AE3-1AFDAA3321B4}" type="datetimeFigureOut">
               <a:rPr lang="zh-TW" altLang="en-US" smtClean="0"/>
-              <a:t>2025/6/23</a:t>
+              <a:t>2025/6/24</a:t>
             </a:fld>
             <a:endParaRPr lang="zh-TW" altLang="en-US"/>
           </a:p>
@@ -1843,7 +1842,7 @@
           <a:p>
             <a:fld id="{163F0119-99E8-4B39-9AE3-1AFDAA3321B4}" type="datetimeFigureOut">
               <a:rPr lang="zh-TW" altLang="en-US" smtClean="0"/>
-              <a:t>2025/6/23</a:t>
+              <a:t>2025/6/24</a:t>
             </a:fld>
             <a:endParaRPr lang="zh-TW" altLang="en-US"/>
           </a:p>
@@ -2120,7 +2119,7 @@
           <a:p>
             <a:fld id="{163F0119-99E8-4B39-9AE3-1AFDAA3321B4}" type="datetimeFigureOut">
               <a:rPr lang="zh-TW" altLang="en-US" smtClean="0"/>
-              <a:t>2025/6/23</a:t>
+              <a:t>2025/6/24</a:t>
             </a:fld>
             <a:endParaRPr lang="zh-TW" altLang="en-US"/>
           </a:p>
@@ -2377,7 +2376,7 @@
           <a:p>
             <a:fld id="{163F0119-99E8-4B39-9AE3-1AFDAA3321B4}" type="datetimeFigureOut">
               <a:rPr lang="zh-TW" altLang="en-US" smtClean="0"/>
-              <a:t>2025/6/23</a:t>
+              <a:t>2025/6/24</a:t>
             </a:fld>
             <a:endParaRPr lang="zh-TW" altLang="en-US"/>
           </a:p>
@@ -2595,7 +2594,7 @@
           <a:p>
             <a:fld id="{163F0119-99E8-4B39-9AE3-1AFDAA3321B4}" type="datetimeFigureOut">
               <a:rPr lang="zh-TW" altLang="en-US" smtClean="0"/>
-              <a:t>2025/6/23</a:t>
+              <a:t>2025/6/24</a:t>
             </a:fld>
             <a:endParaRPr lang="zh-TW" altLang="en-US"/>
           </a:p>
@@ -2986,6 +2985,14 @@
 <file path=ppt/slides/slide1.xml><?xml version="1.0" encoding="utf-8"?>
 <p:sld xmlns:a="http://schemas.openxmlformats.org/drawingml/2006/main" xmlns:r="http://schemas.openxmlformats.org/officeDocument/2006/relationships" xmlns:p="http://schemas.openxmlformats.org/presentationml/2006/main">
   <p:cSld>
+    <p:bg>
+      <p:bgPr>
+        <a:solidFill>
+          <a:schemeClr val="bg1"/>
+        </a:solidFill>
+        <a:effectLst/>
+      </p:bgPr>
+    </p:bg>
     <p:spTree>
       <p:nvGrpSpPr>
         <p:cNvPr id="1" name=""/>
@@ -3000,42 +3007,12 @@
           <a:chExt cx="0" cy="0"/>
         </a:xfrm>
       </p:grpSpPr>
-      <p:pic>
-        <p:nvPicPr>
-          <p:cNvPr id="40" name="Image 0" descr="preencoded.png">
-            <a:extLst>
-              <a:ext uri="{FF2B5EF4-FFF2-40B4-BE49-F238E27FC236}">
-                <a16:creationId xmlns="" xmlns:a16="http://schemas.microsoft.com/office/drawing/2014/main" id="{04CEEAB9-DB57-FE01-4F9D-D411E8E1E9FB}"/>
-              </a:ext>
-            </a:extLst>
-          </p:cNvPr>
-          <p:cNvPicPr>
-            <a:picLocks noChangeAspect="1"/>
-          </p:cNvPicPr>
-          <p:nvPr/>
-        </p:nvPicPr>
-        <p:blipFill>
-          <a:blip r:embed="rId2"/>
-          <a:stretch>
-            <a:fillRect/>
-          </a:stretch>
-        </p:blipFill>
-        <p:spPr>
-          <a:xfrm>
-            <a:off x="0" y="0"/>
-            <a:ext cx="5486400" cy="8229600"/>
-          </a:xfrm>
-          <a:prstGeom prst="rect">
-            <a:avLst/>
-          </a:prstGeom>
-        </p:spPr>
-      </p:pic>
       <p:sp>
         <p:nvSpPr>
           <p:cNvPr id="41" name="Text 0">
             <a:extLst>
               <a:ext uri="{FF2B5EF4-FFF2-40B4-BE49-F238E27FC236}">
-                <a16:creationId xmlns="" xmlns:a16="http://schemas.microsoft.com/office/drawing/2014/main" id="{C95CF852-25B4-EB48-5D84-4B7AF9A6D01A}"/>
+                <a16:creationId xmlns:a16="http://schemas.microsoft.com/office/drawing/2014/main" id="{C95CF852-25B4-EB48-5D84-4B7AF9A6D01A}"/>
               </a:ext>
             </a:extLst>
           </p:cNvPr>
@@ -3044,7 +3021,7 @@
         </p:nvSpPr>
         <p:spPr>
           <a:xfrm>
-            <a:off x="6324124" y="2069425"/>
+            <a:off x="5317257" y="2706422"/>
             <a:ext cx="6194822" cy="704017"/>
           </a:xfrm>
           <a:prstGeom prst="rect">
@@ -3064,17 +3041,11 @@
             </a:pPr>
             <a:r>
               <a:rPr lang="en-US" sz="4400" dirty="0" err="1">
-                <a:solidFill>
-                  <a:srgbClr val="FFFFFF"/>
-                </a:solidFill>
                 <a:latin typeface="Unbounded" pitchFamily="34" charset="0"/>
               </a:rPr>
               <a:t>購物網站系統</a:t>
             </a:r>
             <a:endParaRPr lang="en-US" sz="4400" dirty="0">
-              <a:solidFill>
-                <a:srgbClr val="FFFFFF"/>
-              </a:solidFill>
               <a:latin typeface="Unbounded" pitchFamily="34" charset="0"/>
             </a:endParaRPr>
           </a:p>
@@ -3082,10 +3053,10 @@
       </p:sp>
       <p:sp>
         <p:nvSpPr>
-          <p:cNvPr id="42" name="Text 1">
-            <a:extLst>
-              <a:ext uri="{FF2B5EF4-FFF2-40B4-BE49-F238E27FC236}">
-                <a16:creationId xmlns="" xmlns:a16="http://schemas.microsoft.com/office/drawing/2014/main" id="{9B3DF7CB-7692-FF2B-09DA-7A2F18142EA4}"/>
+          <p:cNvPr id="43" name="Text 2">
+            <a:extLst>
+              <a:ext uri="{FF2B5EF4-FFF2-40B4-BE49-F238E27FC236}">
+                <a16:creationId xmlns:a16="http://schemas.microsoft.com/office/drawing/2014/main" id="{4EFFF814-28DB-132B-F97B-D78810258A97}"/>
               </a:ext>
             </a:extLst>
           </p:cNvPr>
@@ -3094,7 +3065,7 @@
         </p:nvSpPr>
         <p:spPr>
           <a:xfrm>
-            <a:off x="6324124" y="3132415"/>
+            <a:off x="5317257" y="3938751"/>
             <a:ext cx="7468553" cy="383024"/>
           </a:xfrm>
           <a:prstGeom prst="rect">
@@ -3115,14 +3086,11 @@
             </a:pPr>
             <a:r>
               <a:rPr lang="en-US" sz="1850" dirty="0">
-                <a:solidFill>
-                  <a:srgbClr val="CAD6DE"/>
-                </a:solidFill>
                 <a:latin typeface="Cabin" pitchFamily="34" charset="0"/>
                 <a:ea typeface="Cabin" pitchFamily="34" charset="-122"/>
                 <a:cs typeface="Cabin" pitchFamily="34" charset="-120"/>
               </a:rPr>
-              <a:t>專案名稱：購物網站系統</a:t>
+              <a:t>技術架構：React + Spring + MySQL</a:t>
             </a:r>
             <a:endParaRPr lang="en-US" sz="1850" dirty="0"/>
           </a:p>
@@ -3130,10 +3098,10 @@
       </p:sp>
       <p:sp>
         <p:nvSpPr>
-          <p:cNvPr id="43" name="Text 2">
-            <a:extLst>
-              <a:ext uri="{FF2B5EF4-FFF2-40B4-BE49-F238E27FC236}">
-                <a16:creationId xmlns="" xmlns:a16="http://schemas.microsoft.com/office/drawing/2014/main" id="{4EFFF814-28DB-132B-F97B-D78810258A97}"/>
+          <p:cNvPr id="44" name="Text 3">
+            <a:extLst>
+              <a:ext uri="{FF2B5EF4-FFF2-40B4-BE49-F238E27FC236}">
+                <a16:creationId xmlns:a16="http://schemas.microsoft.com/office/drawing/2014/main" id="{9AB370BD-A1D1-6909-9B09-0A6E8830B946}"/>
               </a:ext>
             </a:extLst>
           </p:cNvPr>
@@ -3142,7 +3110,7 @@
         </p:nvSpPr>
         <p:spPr>
           <a:xfrm>
-            <a:off x="6324124" y="3784640"/>
+            <a:off x="5317257" y="4590975"/>
             <a:ext cx="7468553" cy="383024"/>
           </a:xfrm>
           <a:prstGeom prst="rect">
@@ -3162,133 +3130,28 @@
               <a:buNone/>
             </a:pPr>
             <a:r>
-              <a:rPr lang="en-US" sz="1850" dirty="0">
-                <a:solidFill>
-                  <a:srgbClr val="CAD6DE"/>
-                </a:solidFill>
+              <a:rPr lang="en-US" sz="1850" dirty="0" err="1">
                 <a:latin typeface="Cabin" pitchFamily="34" charset="0"/>
                 <a:ea typeface="Cabin" pitchFamily="34" charset="-122"/>
                 <a:cs typeface="Cabin" pitchFamily="34" charset="-120"/>
               </a:rPr>
-              <a:t>技術架構：React + Spring + MySQL</a:t>
-            </a:r>
-            <a:endParaRPr lang="en-US" sz="1850" dirty="0"/>
-          </a:p>
-        </p:txBody>
-      </p:sp>
-      <p:sp>
-        <p:nvSpPr>
-          <p:cNvPr id="44" name="Text 3">
-            <a:extLst>
-              <a:ext uri="{FF2B5EF4-FFF2-40B4-BE49-F238E27FC236}">
-                <a16:creationId xmlns="" xmlns:a16="http://schemas.microsoft.com/office/drawing/2014/main" id="{9AB370BD-A1D1-6909-9B09-0A6E8830B946}"/>
-              </a:ext>
-            </a:extLst>
-          </p:cNvPr>
-          <p:cNvSpPr/>
-          <p:nvPr/>
-        </p:nvSpPr>
-        <p:spPr>
-          <a:xfrm>
-            <a:off x="6324124" y="4436864"/>
-            <a:ext cx="7468553" cy="383024"/>
-          </a:xfrm>
-          <a:prstGeom prst="rect">
-            <a:avLst/>
-          </a:prstGeom>
-          <a:noFill/>
-          <a:ln/>
-        </p:spPr>
-        <p:txBody>
-          <a:bodyPr wrap="none" lIns="0" tIns="0" rIns="0" bIns="0" rtlCol="0" anchor="t"/>
-          <a:lstStyle/>
-          <a:p>
-            <a:pPr marL="0" indent="0" algn="l">
-              <a:lnSpc>
-                <a:spcPts val="3000"/>
-              </a:lnSpc>
-              <a:buNone/>
-            </a:pPr>
-            <a:r>
-              <a:rPr lang="en-US" sz="1850" dirty="0" err="1" smtClean="0">
-                <a:solidFill>
-                  <a:srgbClr val="CAD6DE"/>
-                </a:solidFill>
+              <a:t>組員</a:t>
+            </a:r>
+            <a:r>
+              <a:rPr lang="en-US" sz="1850" dirty="0">
                 <a:latin typeface="Cabin" pitchFamily="34" charset="0"/>
                 <a:ea typeface="Cabin" pitchFamily="34" charset="-122"/>
                 <a:cs typeface="Cabin" pitchFamily="34" charset="-120"/>
               </a:rPr>
-              <a:t>組員</a:t>
-            </a:r>
-            <a:r>
-              <a:rPr lang="en-US" sz="1850" dirty="0" smtClean="0">
-                <a:solidFill>
-                  <a:srgbClr val="CAD6DE"/>
-                </a:solidFill>
+              <a:t>：</a:t>
+            </a:r>
+            <a:r>
+              <a:rPr lang="zh-TW" altLang="en-US" sz="1850" dirty="0">
                 <a:latin typeface="Cabin" pitchFamily="34" charset="0"/>
                 <a:ea typeface="Cabin" pitchFamily="34" charset="-122"/>
                 <a:cs typeface="Cabin" pitchFamily="34" charset="-120"/>
               </a:rPr>
-              <a:t>：</a:t>
-            </a:r>
-            <a:r>
-              <a:rPr lang="zh-TW" altLang="en-US" sz="1850" dirty="0" smtClean="0">
-                <a:solidFill>
-                  <a:srgbClr val="CAD6DE"/>
-                </a:solidFill>
-                <a:latin typeface="Cabin" pitchFamily="34" charset="0"/>
-                <a:ea typeface="Cabin" pitchFamily="34" charset="-122"/>
-                <a:cs typeface="Cabin" pitchFamily="34" charset="-120"/>
-              </a:rPr>
               <a:t>張允豪</a:t>
-            </a:r>
-            <a:endParaRPr lang="en-US" sz="1850" dirty="0"/>
-          </a:p>
-        </p:txBody>
-      </p:sp>
-      <p:sp>
-        <p:nvSpPr>
-          <p:cNvPr id="45" name="Text 4">
-            <a:extLst>
-              <a:ext uri="{FF2B5EF4-FFF2-40B4-BE49-F238E27FC236}">
-                <a16:creationId xmlns="" xmlns:a16="http://schemas.microsoft.com/office/drawing/2014/main" id="{1C81B240-1D8B-64E3-7732-8DF6BDD4AFDB}"/>
-              </a:ext>
-            </a:extLst>
-          </p:cNvPr>
-          <p:cNvSpPr/>
-          <p:nvPr/>
-        </p:nvSpPr>
-        <p:spPr>
-          <a:xfrm>
-            <a:off x="6324124" y="5089088"/>
-            <a:ext cx="7468553" cy="383024"/>
-          </a:xfrm>
-          <a:prstGeom prst="rect">
-            <a:avLst/>
-          </a:prstGeom>
-          <a:noFill/>
-          <a:ln/>
-        </p:spPr>
-        <p:txBody>
-          <a:bodyPr wrap="none" lIns="0" tIns="0" rIns="0" bIns="0" rtlCol="0" anchor="t"/>
-          <a:lstStyle/>
-          <a:p>
-            <a:pPr marL="0" indent="0" algn="l">
-              <a:lnSpc>
-                <a:spcPts val="3000"/>
-              </a:lnSpc>
-              <a:buNone/>
-            </a:pPr>
-            <a:r>
-              <a:rPr lang="en-US" sz="1850" dirty="0">
-                <a:solidFill>
-                  <a:srgbClr val="CAD6DE"/>
-                </a:solidFill>
-                <a:latin typeface="Cabin" pitchFamily="34" charset="0"/>
-                <a:ea typeface="Cabin" pitchFamily="34" charset="-122"/>
-                <a:cs typeface="Cabin" pitchFamily="34" charset="-120"/>
-              </a:rPr>
-              <a:t>日期：[日期]</a:t>
             </a:r>
             <a:endParaRPr lang="en-US" sz="1850" dirty="0"/>
           </a:p>
@@ -3310,6 +3173,14 @@
 <file path=ppt/slides/slide10.xml><?xml version="1.0" encoding="utf-8"?>
 <p:sld xmlns:a="http://schemas.openxmlformats.org/drawingml/2006/main" xmlns:r="http://schemas.openxmlformats.org/officeDocument/2006/relationships" xmlns:p="http://schemas.openxmlformats.org/presentationml/2006/main">
   <p:cSld>
+    <p:bg>
+      <p:bgPr>
+        <a:solidFill>
+          <a:schemeClr val="bg1"/>
+        </a:solidFill>
+        <a:effectLst/>
+      </p:bgPr>
+    </p:bg>
     <p:spTree>
       <p:nvGrpSpPr>
         <p:cNvPr id="1" name=""/>
@@ -3326,10 +3197,10 @@
       </p:grpSpPr>
       <p:sp>
         <p:nvSpPr>
-          <p:cNvPr id="2" name="Text 0">
-            <a:extLst>
-              <a:ext uri="{FF2B5EF4-FFF2-40B4-BE49-F238E27FC236}">
-                <a16:creationId xmlns="" xmlns:a16="http://schemas.microsoft.com/office/drawing/2014/main" id="{A7F0C4F0-0F36-4ABB-1894-BDD61C4F5D4E}"/>
+          <p:cNvPr id="3" name="Text 0">
+            <a:extLst>
+              <a:ext uri="{FF2B5EF4-FFF2-40B4-BE49-F238E27FC236}">
+                <a16:creationId xmlns:a16="http://schemas.microsoft.com/office/drawing/2014/main" id="{8BF2A6AB-1F7E-9633-389D-D723B15A9392}"/>
               </a:ext>
             </a:extLst>
           </p:cNvPr>
@@ -3338,8 +3209,8 @@
         </p:nvSpPr>
         <p:spPr>
           <a:xfrm>
-            <a:off x="847603" y="1224196"/>
-            <a:ext cx="5632490" cy="704017"/>
+            <a:off x="768150" y="1358291"/>
+            <a:ext cx="6757988" cy="704017"/>
           </a:xfrm>
           <a:prstGeom prst="rect">
             <a:avLst/>
@@ -3358,42 +3229,135 @@
               <a:buNone/>
             </a:pPr>
             <a:r>
-              <a:rPr lang="en-US" sz="4400" dirty="0">
-                <a:solidFill>
-                  <a:srgbClr val="FFFFFF"/>
-                </a:solidFill>
+              <a:rPr lang="en-US" sz="4400" dirty="0" err="1">
                 <a:latin typeface="Unbounded" pitchFamily="34" charset="0"/>
                 <a:ea typeface="Unbounded" pitchFamily="34" charset="-122"/>
                 <a:cs typeface="Unbounded" pitchFamily="34" charset="-120"/>
               </a:rPr>
-              <a:t>ER</a:t>
-            </a:r>
-            <a:r>
-              <a:rPr lang="zh-TW" altLang="en-US" sz="4400" dirty="0">
-                <a:solidFill>
-                  <a:srgbClr val="FFFFFF"/>
-                </a:solidFill>
+              <a:t>前台功能</a:t>
+            </a:r>
+            <a:endParaRPr lang="en-US" sz="4400" dirty="0"/>
+          </a:p>
+        </p:txBody>
+      </p:sp>
+      <p:sp>
+        <p:nvSpPr>
+          <p:cNvPr id="5" name="Text 2">
+            <a:extLst>
+              <a:ext uri="{FF2B5EF4-FFF2-40B4-BE49-F238E27FC236}">
+                <a16:creationId xmlns:a16="http://schemas.microsoft.com/office/drawing/2014/main" id="{101A07B7-081B-4384-C963-FFC0D5B53663}"/>
+              </a:ext>
+            </a:extLst>
+          </p:cNvPr>
+          <p:cNvSpPr/>
+          <p:nvPr/>
+        </p:nvSpPr>
+        <p:spPr>
+          <a:xfrm>
+            <a:off x="1007465" y="2521407"/>
+            <a:ext cx="2816185" cy="351949"/>
+          </a:xfrm>
+          <a:prstGeom prst="rect">
+            <a:avLst/>
+          </a:prstGeom>
+          <a:noFill/>
+          <a:ln/>
+        </p:spPr>
+        <p:txBody>
+          <a:bodyPr wrap="none" lIns="0" tIns="0" rIns="0" bIns="0" rtlCol="0" anchor="t"/>
+          <a:lstStyle/>
+          <a:p>
+            <a:pPr marL="0" indent="0" algn="l">
+              <a:lnSpc>
+                <a:spcPts val="2750"/>
+              </a:lnSpc>
+              <a:buNone/>
+            </a:pPr>
+            <a:r>
+              <a:rPr lang="en-US" sz="2200" dirty="0">
                 <a:latin typeface="Unbounded" pitchFamily="34" charset="0"/>
                 <a:ea typeface="Unbounded" pitchFamily="34" charset="-122"/>
                 <a:cs typeface="Unbounded" pitchFamily="34" charset="-120"/>
               </a:rPr>
-              <a:t>圖</a:t>
-            </a:r>
-            <a:endParaRPr lang="en-US" sz="4400" dirty="0">
-              <a:solidFill>
-                <a:srgbClr val="FFFFFF"/>
-              </a:solidFill>
-              <a:latin typeface="Unbounded" pitchFamily="34" charset="0"/>
-              <a:ea typeface="Unbounded" pitchFamily="34" charset="-122"/>
-              <a:cs typeface="Unbounded" pitchFamily="34" charset="-120"/>
-            </a:endParaRPr>
-          </a:p>
-        </p:txBody>
-      </p:sp>
+              <a:t>最近看過商品</a:t>
+            </a:r>
+            <a:endParaRPr lang="en-US" sz="2200" dirty="0"/>
+          </a:p>
+        </p:txBody>
+      </p:sp>
+      <p:sp>
+        <p:nvSpPr>
+          <p:cNvPr id="6" name="Text 3">
+            <a:extLst>
+              <a:ext uri="{FF2B5EF4-FFF2-40B4-BE49-F238E27FC236}">
+                <a16:creationId xmlns:a16="http://schemas.microsoft.com/office/drawing/2014/main" id="{462400A2-D484-A8F3-CCF3-32E253FD6954}"/>
+              </a:ext>
+            </a:extLst>
+          </p:cNvPr>
+          <p:cNvSpPr/>
+          <p:nvPr/>
+        </p:nvSpPr>
+        <p:spPr>
+          <a:xfrm>
+            <a:off x="1007465" y="3016945"/>
+            <a:ext cx="3135987" cy="766048"/>
+          </a:xfrm>
+          <a:prstGeom prst="rect">
+            <a:avLst/>
+          </a:prstGeom>
+          <a:noFill/>
+          <a:ln/>
+        </p:spPr>
+        <p:txBody>
+          <a:bodyPr wrap="square" lIns="0" tIns="0" rIns="0" bIns="0" rtlCol="0" anchor="t"/>
+          <a:lstStyle/>
+          <a:p>
+            <a:pPr marL="0" indent="0" algn="l">
+              <a:lnSpc>
+                <a:spcPts val="3000"/>
+              </a:lnSpc>
+              <a:buNone/>
+            </a:pPr>
+            <a:r>
+              <a:rPr lang="en-US" sz="1850" dirty="0">
+                <a:latin typeface="Cabin" pitchFamily="34" charset="0"/>
+                <a:ea typeface="Cabin" pitchFamily="34" charset="-122"/>
+                <a:cs typeface="Cabin" pitchFamily="34" charset="-120"/>
+              </a:rPr>
+              <a:t>追蹤瀏覽紀錄，方便用戶回顧商品</a:t>
+            </a:r>
+            <a:endParaRPr lang="en-US" sz="1850" dirty="0"/>
+          </a:p>
+        </p:txBody>
+      </p:sp>
+      <p:pic>
+        <p:nvPicPr>
+          <p:cNvPr id="15" name="圖片 14"/>
+          <p:cNvPicPr>
+            <a:picLocks noChangeAspect="1"/>
+          </p:cNvPicPr>
+          <p:nvPr/>
+        </p:nvPicPr>
+        <p:blipFill>
+          <a:blip r:embed="rId2"/>
+          <a:stretch>
+            <a:fillRect/>
+          </a:stretch>
+        </p:blipFill>
+        <p:spPr>
+          <a:xfrm>
+            <a:off x="5123061" y="2282091"/>
+            <a:ext cx="9000000" cy="5769536"/>
+          </a:xfrm>
+          <a:prstGeom prst="rect">
+            <a:avLst/>
+          </a:prstGeom>
+        </p:spPr>
+      </p:pic>
     </p:spTree>
     <p:extLst>
       <p:ext uri="{BB962C8B-B14F-4D97-AF65-F5344CB8AC3E}">
-        <p14:creationId xmlns:p14="http://schemas.microsoft.com/office/powerpoint/2010/main" val="1957535455"/>
+        <p14:creationId xmlns:p14="http://schemas.microsoft.com/office/powerpoint/2010/main" val="4210325602"/>
       </p:ext>
     </p:extLst>
   </p:cSld>
@@ -3406,6 +3370,14 @@
 <file path=ppt/slides/slide11.xml><?xml version="1.0" encoding="utf-8"?>
 <p:sld xmlns:a="http://schemas.openxmlformats.org/drawingml/2006/main" xmlns:r="http://schemas.openxmlformats.org/officeDocument/2006/relationships" xmlns:p="http://schemas.openxmlformats.org/presentationml/2006/main">
   <p:cSld>
+    <p:bg>
+      <p:bgPr>
+        <a:solidFill>
+          <a:schemeClr val="bg1"/>
+        </a:solidFill>
+        <a:effectLst/>
+      </p:bgPr>
+    </p:bg>
     <p:spTree>
       <p:nvGrpSpPr>
         <p:cNvPr id="1" name=""/>
@@ -3425,7 +3397,7 @@
           <p:cNvPr id="3" name="Text 0">
             <a:extLst>
               <a:ext uri="{FF2B5EF4-FFF2-40B4-BE49-F238E27FC236}">
-                <a16:creationId xmlns="" xmlns:a16="http://schemas.microsoft.com/office/drawing/2014/main" id="{8BF2A6AB-1F7E-9633-389D-D723B15A9392}"/>
+                <a16:creationId xmlns:a16="http://schemas.microsoft.com/office/drawing/2014/main" id="{8BF2A6AB-1F7E-9633-389D-D723B15A9392}"/>
               </a:ext>
             </a:extLst>
           </p:cNvPr>
@@ -3454,15 +3426,12 @@
               <a:buNone/>
             </a:pPr>
             <a:r>
-              <a:rPr lang="en-US" sz="4400" dirty="0">
-                <a:solidFill>
-                  <a:srgbClr val="FFFFFF"/>
-                </a:solidFill>
+              <a:rPr lang="en-US" sz="4400" dirty="0" err="1">
                 <a:latin typeface="Unbounded" pitchFamily="34" charset="0"/>
                 <a:ea typeface="Unbounded" pitchFamily="34" charset="-122"/>
                 <a:cs typeface="Unbounded" pitchFamily="34" charset="-120"/>
               </a:rPr>
-              <a:t>前台功能：使用者體驗至上</a:t>
+              <a:t>前台功能</a:t>
             </a:r>
             <a:endParaRPr lang="en-US" sz="4400" dirty="0"/>
           </a:p>
@@ -3470,10 +3439,10 @@
       </p:sp>
       <p:sp>
         <p:nvSpPr>
-          <p:cNvPr id="4" name="Shape 1">
-            <a:extLst>
-              <a:ext uri="{FF2B5EF4-FFF2-40B4-BE49-F238E27FC236}">
-                <a16:creationId xmlns="" xmlns:a16="http://schemas.microsoft.com/office/drawing/2014/main" id="{6C660091-FD11-19F4-B101-AD493F3FAABB}"/>
+          <p:cNvPr id="14" name="Text 5">
+            <a:extLst>
+              <a:ext uri="{FF2B5EF4-FFF2-40B4-BE49-F238E27FC236}">
+                <a16:creationId xmlns:a16="http://schemas.microsoft.com/office/drawing/2014/main" id="{F636048F-4C36-6D44-AA6F-5D21733034BE}"/>
               </a:ext>
             </a:extLst>
           </p:cNvPr>
@@ -3482,35 +3451,7 @@
         </p:nvSpPr>
         <p:spPr>
           <a:xfrm>
-            <a:off x="768150" y="2282091"/>
-            <a:ext cx="3614618" cy="1740218"/>
-          </a:xfrm>
-          <a:prstGeom prst="roundRect">
-            <a:avLst>
-              <a:gd name="adj" fmla="val 2063"/>
-            </a:avLst>
-          </a:prstGeom>
-          <a:solidFill>
-            <a:srgbClr val="304755"/>
-          </a:solidFill>
-          <a:ln/>
-        </p:spPr>
-      </p:sp>
-      <p:sp>
-        <p:nvSpPr>
-          <p:cNvPr id="5" name="Text 2">
-            <a:extLst>
-              <a:ext uri="{FF2B5EF4-FFF2-40B4-BE49-F238E27FC236}">
-                <a16:creationId xmlns="" xmlns:a16="http://schemas.microsoft.com/office/drawing/2014/main" id="{101A07B7-081B-4384-C963-FFC0D5B53663}"/>
-              </a:ext>
-            </a:extLst>
-          </p:cNvPr>
-          <p:cNvSpPr/>
-          <p:nvPr/>
-        </p:nvSpPr>
-        <p:spPr>
-          <a:xfrm>
-            <a:off x="1007465" y="2521407"/>
+            <a:off x="1011157" y="2557270"/>
             <a:ext cx="2816185" cy="351949"/>
           </a:xfrm>
           <a:prstGeom prst="rect">
@@ -3531,14 +3472,11 @@
             </a:pPr>
             <a:r>
               <a:rPr lang="en-US" sz="2200" dirty="0">
-                <a:solidFill>
-                  <a:srgbClr val="CAD6DE"/>
-                </a:solidFill>
                 <a:latin typeface="Unbounded" pitchFamily="34" charset="0"/>
                 <a:ea typeface="Unbounded" pitchFamily="34" charset="-122"/>
                 <a:cs typeface="Unbounded" pitchFamily="34" charset="-120"/>
               </a:rPr>
-              <a:t>最近看過商品</a:t>
+              <a:t>購物車管理</a:t>
             </a:r>
             <a:endParaRPr lang="en-US" sz="2200" dirty="0"/>
           </a:p>
@@ -3546,10 +3484,10 @@
       </p:sp>
       <p:sp>
         <p:nvSpPr>
-          <p:cNvPr id="6" name="Text 3">
-            <a:extLst>
-              <a:ext uri="{FF2B5EF4-FFF2-40B4-BE49-F238E27FC236}">
-                <a16:creationId xmlns="" xmlns:a16="http://schemas.microsoft.com/office/drawing/2014/main" id="{462400A2-D484-A8F3-CCF3-32E253FD6954}"/>
+          <p:cNvPr id="16" name="Text 6">
+            <a:extLst>
+              <a:ext uri="{FF2B5EF4-FFF2-40B4-BE49-F238E27FC236}">
+                <a16:creationId xmlns:a16="http://schemas.microsoft.com/office/drawing/2014/main" id="{6BBFCEEE-A067-D3FE-98EA-BF5239A138DB}"/>
               </a:ext>
             </a:extLst>
           </p:cNvPr>
@@ -3558,7 +3496,7 @@
         </p:nvSpPr>
         <p:spPr>
           <a:xfrm>
-            <a:off x="1007465" y="3016945"/>
+            <a:off x="1011157" y="3052808"/>
             <a:ext cx="3135987" cy="766048"/>
           </a:xfrm>
           <a:prstGeom prst="rect">
@@ -3571,30 +3509,30 @@
           <a:bodyPr wrap="square" lIns="0" tIns="0" rIns="0" bIns="0" rtlCol="0" anchor="t"/>
           <a:lstStyle/>
           <a:p>
-            <a:pPr marL="0" indent="0" algn="l">
+            <a:pPr>
               <a:lnSpc>
                 <a:spcPts val="3000"/>
               </a:lnSpc>
-              <a:buNone/>
             </a:pPr>
             <a:r>
-              <a:rPr lang="en-US" sz="1850" dirty="0">
-                <a:solidFill>
-                  <a:srgbClr val="CAD6DE"/>
-                </a:solidFill>
+              <a:rPr lang="zh-TW" altLang="en-US" sz="1850" dirty="0">
                 <a:latin typeface="Cabin" pitchFamily="34" charset="0"/>
                 <a:ea typeface="Cabin" pitchFamily="34" charset="-122"/>
                 <a:cs typeface="Cabin" pitchFamily="34" charset="-120"/>
               </a:rPr>
-              <a:t>追蹤瀏覽紀錄，方便用戶回顧商品</a:t>
-            </a:r>
-            <a:endParaRPr lang="en-US" sz="1850" dirty="0"/>
+              <a:t>新增、修改、刪除商品</a:t>
+            </a:r>
+            <a:endParaRPr lang="en-US" sz="1850" dirty="0">
+              <a:latin typeface="Cabin" pitchFamily="34" charset="0"/>
+              <a:ea typeface="Cabin" pitchFamily="34" charset="-122"/>
+              <a:cs typeface="Cabin" pitchFamily="34" charset="-120"/>
+            </a:endParaRPr>
           </a:p>
         </p:txBody>
       </p:sp>
       <p:pic>
         <p:nvPicPr>
-          <p:cNvPr id="15" name="圖片 14"/>
+          <p:cNvPr id="2" name="圖片 1"/>
           <p:cNvPicPr>
             <a:picLocks noChangeAspect="1"/>
           </p:cNvPicPr>
@@ -3608,8 +3546,8 @@
         </p:blipFill>
         <p:spPr>
           <a:xfrm>
-            <a:off x="5123061" y="2282091"/>
-            <a:ext cx="9000000" cy="5769536"/>
+            <a:off x="4835879" y="2282091"/>
+            <a:ext cx="9000000" cy="3155507"/>
           </a:xfrm>
           <a:prstGeom prst="rect">
             <a:avLst/>
@@ -3619,7 +3557,7 @@
     </p:spTree>
     <p:extLst>
       <p:ext uri="{BB962C8B-B14F-4D97-AF65-F5344CB8AC3E}">
-        <p14:creationId xmlns:p14="http://schemas.microsoft.com/office/powerpoint/2010/main" val="4210325602"/>
+        <p14:creationId xmlns:p14="http://schemas.microsoft.com/office/powerpoint/2010/main" val="2357158065"/>
       </p:ext>
     </p:extLst>
   </p:cSld>
@@ -3632,6 +3570,14 @@
 <file path=ppt/slides/slide12.xml><?xml version="1.0" encoding="utf-8"?>
 <p:sld xmlns:a="http://schemas.openxmlformats.org/drawingml/2006/main" xmlns:r="http://schemas.openxmlformats.org/officeDocument/2006/relationships" xmlns:p="http://schemas.openxmlformats.org/presentationml/2006/main">
   <p:cSld>
+    <p:bg>
+      <p:bgPr>
+        <a:solidFill>
+          <a:schemeClr val="bg1"/>
+        </a:solidFill>
+        <a:effectLst/>
+      </p:bgPr>
+    </p:bg>
     <p:spTree>
       <p:nvGrpSpPr>
         <p:cNvPr id="1" name=""/>
@@ -3651,7 +3597,7 @@
           <p:cNvPr id="3" name="Text 0">
             <a:extLst>
               <a:ext uri="{FF2B5EF4-FFF2-40B4-BE49-F238E27FC236}">
-                <a16:creationId xmlns="" xmlns:a16="http://schemas.microsoft.com/office/drawing/2014/main" id="{8BF2A6AB-1F7E-9633-389D-D723B15A9392}"/>
+                <a16:creationId xmlns:a16="http://schemas.microsoft.com/office/drawing/2014/main" id="{8BF2A6AB-1F7E-9633-389D-D723B15A9392}"/>
               </a:ext>
             </a:extLst>
           </p:cNvPr>
@@ -3680,15 +3626,12 @@
               <a:buNone/>
             </a:pPr>
             <a:r>
-              <a:rPr lang="en-US" sz="4400" dirty="0">
-                <a:solidFill>
-                  <a:srgbClr val="FFFFFF"/>
-                </a:solidFill>
+              <a:rPr lang="en-US" sz="4400" dirty="0" err="1">
                 <a:latin typeface="Unbounded" pitchFamily="34" charset="0"/>
                 <a:ea typeface="Unbounded" pitchFamily="34" charset="-122"/>
                 <a:cs typeface="Unbounded" pitchFamily="34" charset="-120"/>
               </a:rPr>
-              <a:t>前台功能：使用者體驗至上</a:t>
+              <a:t>前台功能</a:t>
             </a:r>
             <a:endParaRPr lang="en-US" sz="4400" dirty="0"/>
           </a:p>
@@ -3696,38 +3639,10 @@
       </p:sp>
       <p:sp>
         <p:nvSpPr>
-          <p:cNvPr id="13" name="Shape 4">
-            <a:extLst>
-              <a:ext uri="{FF2B5EF4-FFF2-40B4-BE49-F238E27FC236}">
-                <a16:creationId xmlns="" xmlns:a16="http://schemas.microsoft.com/office/drawing/2014/main" id="{2B8FEFA1-65DA-DEEF-1B3F-0DC7ECD2278D}"/>
-              </a:ext>
-            </a:extLst>
-          </p:cNvPr>
-          <p:cNvSpPr/>
-          <p:nvPr/>
-        </p:nvSpPr>
-        <p:spPr>
-          <a:xfrm>
-            <a:off x="768150" y="2282091"/>
-            <a:ext cx="3614618" cy="1740218"/>
-          </a:xfrm>
-          <a:prstGeom prst="roundRect">
-            <a:avLst>
-              <a:gd name="adj" fmla="val 2063"/>
-            </a:avLst>
-          </a:prstGeom>
-          <a:solidFill>
-            <a:srgbClr val="304755"/>
-          </a:solidFill>
-          <a:ln/>
-        </p:spPr>
-      </p:sp>
-      <p:sp>
-        <p:nvSpPr>
           <p:cNvPr id="14" name="Text 5">
             <a:extLst>
               <a:ext uri="{FF2B5EF4-FFF2-40B4-BE49-F238E27FC236}">
-                <a16:creationId xmlns="" xmlns:a16="http://schemas.microsoft.com/office/drawing/2014/main" id="{F636048F-4C36-6D44-AA6F-5D21733034BE}"/>
+                <a16:creationId xmlns:a16="http://schemas.microsoft.com/office/drawing/2014/main" id="{F636048F-4C36-6D44-AA6F-5D21733034BE}"/>
               </a:ext>
             </a:extLst>
           </p:cNvPr>
@@ -3749,24 +3664,22 @@
           <a:bodyPr wrap="none" lIns="0" tIns="0" rIns="0" bIns="0" rtlCol="0" anchor="t"/>
           <a:lstStyle/>
           <a:p>
-            <a:pPr marL="0" indent="0" algn="l">
+            <a:pPr>
               <a:lnSpc>
                 <a:spcPts val="2750"/>
               </a:lnSpc>
-              <a:buNone/>
             </a:pPr>
             <a:r>
-              <a:rPr lang="en-US" sz="2200" dirty="0">
-                <a:solidFill>
-                  <a:srgbClr val="CAD6DE"/>
-                </a:solidFill>
+              <a:rPr lang="zh-TW" altLang="en-US" sz="2200" dirty="0">
                 <a:latin typeface="Unbounded" pitchFamily="34" charset="0"/>
                 <a:ea typeface="Unbounded" pitchFamily="34" charset="-122"/>
-                <a:cs typeface="Unbounded" pitchFamily="34" charset="-120"/>
-              </a:rPr>
-              <a:t>購物車管理</a:t>
-            </a:r>
-            <a:endParaRPr lang="en-US" sz="2200" dirty="0"/>
+              </a:rPr>
+              <a:t>訂單管理</a:t>
+            </a:r>
+            <a:endParaRPr lang="en-US" sz="2200" dirty="0">
+              <a:latin typeface="Unbounded" pitchFamily="34" charset="0"/>
+              <a:ea typeface="Unbounded" pitchFamily="34" charset="-122"/>
+            </a:endParaRPr>
           </a:p>
         </p:txBody>
       </p:sp>
@@ -3775,7 +3688,7 @@
           <p:cNvPr id="16" name="Text 6">
             <a:extLst>
               <a:ext uri="{FF2B5EF4-FFF2-40B4-BE49-F238E27FC236}">
-                <a16:creationId xmlns="" xmlns:a16="http://schemas.microsoft.com/office/drawing/2014/main" id="{6BBFCEEE-A067-D3FE-98EA-BF5239A138DB}"/>
+                <a16:creationId xmlns:a16="http://schemas.microsoft.com/office/drawing/2014/main" id="{6BBFCEEE-A067-D3FE-98EA-BF5239A138DB}"/>
               </a:ext>
             </a:extLst>
           </p:cNvPr>
@@ -3804,19 +3717,13 @@
             </a:pPr>
             <a:r>
               <a:rPr lang="zh-TW" altLang="en-US" sz="1850" dirty="0">
-                <a:solidFill>
-                  <a:srgbClr val="CAD6DE"/>
-                </a:solidFill>
                 <a:latin typeface="Cabin" pitchFamily="34" charset="0"/>
                 <a:ea typeface="Cabin" pitchFamily="34" charset="-122"/>
                 <a:cs typeface="Cabin" pitchFamily="34" charset="-120"/>
               </a:rPr>
-              <a:t>新增、修改、刪除商品</a:t>
+              <a:t>可以查看，和一定程度的管理訂單</a:t>
             </a:r>
             <a:endParaRPr lang="en-US" sz="1850" dirty="0">
-              <a:solidFill>
-                <a:srgbClr val="CAD6DE"/>
-              </a:solidFill>
               <a:latin typeface="Cabin" pitchFamily="34" charset="0"/>
               <a:ea typeface="Cabin" pitchFamily="34" charset="-122"/>
               <a:cs typeface="Cabin" pitchFamily="34" charset="-120"/>
@@ -3826,7 +3733,7 @@
       </p:sp>
       <p:pic>
         <p:nvPicPr>
-          <p:cNvPr id="2" name="圖片 1"/>
+          <p:cNvPr id="5" name="圖片 4"/>
           <p:cNvPicPr>
             <a:picLocks noChangeAspect="1"/>
           </p:cNvPicPr>
@@ -3840,8 +3747,8 @@
         </p:blipFill>
         <p:spPr>
           <a:xfrm>
-            <a:off x="4835879" y="2282091"/>
-            <a:ext cx="9000000" cy="3155507"/>
+            <a:off x="6121625" y="2282091"/>
+            <a:ext cx="7200000" cy="5554286"/>
           </a:xfrm>
           <a:prstGeom prst="rect">
             <a:avLst/>
@@ -3851,7 +3758,7 @@
     </p:spTree>
     <p:extLst>
       <p:ext uri="{BB962C8B-B14F-4D97-AF65-F5344CB8AC3E}">
-        <p14:creationId xmlns:p14="http://schemas.microsoft.com/office/powerpoint/2010/main" val="2357158065"/>
+        <p14:creationId xmlns:p14="http://schemas.microsoft.com/office/powerpoint/2010/main" val="3853908940"/>
       </p:ext>
     </p:extLst>
   </p:cSld>
@@ -3864,6 +3771,14 @@
 <file path=ppt/slides/slide13.xml><?xml version="1.0" encoding="utf-8"?>
 <p:sld xmlns:a="http://schemas.openxmlformats.org/drawingml/2006/main" xmlns:r="http://schemas.openxmlformats.org/officeDocument/2006/relationships" xmlns:p="http://schemas.openxmlformats.org/presentationml/2006/main">
   <p:cSld>
+    <p:bg>
+      <p:bgPr>
+        <a:solidFill>
+          <a:schemeClr val="bg1"/>
+        </a:solidFill>
+        <a:effectLst/>
+      </p:bgPr>
+    </p:bg>
     <p:spTree>
       <p:nvGrpSpPr>
         <p:cNvPr id="1" name=""/>
@@ -3883,7 +3798,7 @@
           <p:cNvPr id="3" name="Text 0">
             <a:extLst>
               <a:ext uri="{FF2B5EF4-FFF2-40B4-BE49-F238E27FC236}">
-                <a16:creationId xmlns="" xmlns:a16="http://schemas.microsoft.com/office/drawing/2014/main" id="{8BF2A6AB-1F7E-9633-389D-D723B15A9392}"/>
+                <a16:creationId xmlns:a16="http://schemas.microsoft.com/office/drawing/2014/main" id="{8BF2A6AB-1F7E-9633-389D-D723B15A9392}"/>
               </a:ext>
             </a:extLst>
           </p:cNvPr>
@@ -3912,15 +3827,12 @@
               <a:buNone/>
             </a:pPr>
             <a:r>
-              <a:rPr lang="en-US" sz="4400" dirty="0">
-                <a:solidFill>
-                  <a:srgbClr val="FFFFFF"/>
-                </a:solidFill>
+              <a:rPr lang="en-US" sz="4400" dirty="0" err="1">
                 <a:latin typeface="Unbounded" pitchFamily="34" charset="0"/>
                 <a:ea typeface="Unbounded" pitchFamily="34" charset="-122"/>
                 <a:cs typeface="Unbounded" pitchFamily="34" charset="-120"/>
               </a:rPr>
-              <a:t>前台功能：使用者體驗至上</a:t>
+              <a:t>前台功能</a:t>
             </a:r>
             <a:endParaRPr lang="en-US" sz="4400" dirty="0"/>
           </a:p>
@@ -3928,38 +3840,10 @@
       </p:sp>
       <p:sp>
         <p:nvSpPr>
-          <p:cNvPr id="13" name="Shape 4">
-            <a:extLst>
-              <a:ext uri="{FF2B5EF4-FFF2-40B4-BE49-F238E27FC236}">
-                <a16:creationId xmlns="" xmlns:a16="http://schemas.microsoft.com/office/drawing/2014/main" id="{2B8FEFA1-65DA-DEEF-1B3F-0DC7ECD2278D}"/>
-              </a:ext>
-            </a:extLst>
-          </p:cNvPr>
-          <p:cNvSpPr/>
-          <p:nvPr/>
-        </p:nvSpPr>
-        <p:spPr>
-          <a:xfrm>
-            <a:off x="768150" y="2282091"/>
-            <a:ext cx="3614618" cy="1740218"/>
-          </a:xfrm>
-          <a:prstGeom prst="roundRect">
-            <a:avLst>
-              <a:gd name="adj" fmla="val 2063"/>
-            </a:avLst>
-          </a:prstGeom>
-          <a:solidFill>
-            <a:srgbClr val="304755"/>
-          </a:solidFill>
-          <a:ln/>
-        </p:spPr>
-      </p:sp>
-      <p:sp>
-        <p:nvSpPr>
           <p:cNvPr id="14" name="Text 5">
             <a:extLst>
               <a:ext uri="{FF2B5EF4-FFF2-40B4-BE49-F238E27FC236}">
-                <a16:creationId xmlns="" xmlns:a16="http://schemas.microsoft.com/office/drawing/2014/main" id="{F636048F-4C36-6D44-AA6F-5D21733034BE}"/>
+                <a16:creationId xmlns:a16="http://schemas.microsoft.com/office/drawing/2014/main" id="{F636048F-4C36-6D44-AA6F-5D21733034BE}"/>
               </a:ext>
             </a:extLst>
           </p:cNvPr>
@@ -3981,23 +3865,22 @@
           <a:bodyPr wrap="none" lIns="0" tIns="0" rIns="0" bIns="0" rtlCol="0" anchor="t"/>
           <a:lstStyle/>
           <a:p>
-            <a:pPr marL="0" indent="0" algn="l">
+            <a:pPr>
               <a:lnSpc>
                 <a:spcPts val="2750"/>
               </a:lnSpc>
-              <a:buNone/>
             </a:pPr>
             <a:r>
               <a:rPr lang="zh-TW" altLang="en-US" sz="2200" dirty="0">
-                <a:solidFill>
-                  <a:srgbClr val="CAD6DE"/>
-                </a:solidFill>
                 <a:latin typeface="Unbounded" pitchFamily="34" charset="0"/>
                 <a:ea typeface="Unbounded" pitchFamily="34" charset="-122"/>
               </a:rPr>
-              <a:t>通知中心</a:t>
-            </a:r>
-            <a:endParaRPr lang="en-US" sz="2200" dirty="0"/>
+              <a:t>修改個人資料</a:t>
+            </a:r>
+            <a:endParaRPr lang="en-US" sz="2200" dirty="0">
+              <a:latin typeface="Unbounded" pitchFamily="34" charset="0"/>
+              <a:ea typeface="Unbounded" pitchFamily="34" charset="-122"/>
+            </a:endParaRPr>
           </a:p>
         </p:txBody>
       </p:sp>
@@ -4006,7 +3889,7 @@
           <p:cNvPr id="16" name="Text 6">
             <a:extLst>
               <a:ext uri="{FF2B5EF4-FFF2-40B4-BE49-F238E27FC236}">
-                <a16:creationId xmlns="" xmlns:a16="http://schemas.microsoft.com/office/drawing/2014/main" id="{6BBFCEEE-A067-D3FE-98EA-BF5239A138DB}"/>
+                <a16:creationId xmlns:a16="http://schemas.microsoft.com/office/drawing/2014/main" id="{6BBFCEEE-A067-D3FE-98EA-BF5239A138DB}"/>
               </a:ext>
             </a:extLst>
           </p:cNvPr>
@@ -4035,19 +3918,212 @@
             </a:pPr>
             <a:r>
               <a:rPr lang="zh-TW" altLang="en-US" sz="1850" dirty="0">
-                <a:solidFill>
-                  <a:srgbClr val="CAD6DE"/>
-                </a:solidFill>
                 <a:latin typeface="Cabin" pitchFamily="34" charset="0"/>
                 <a:ea typeface="Cabin" pitchFamily="34" charset="-122"/>
                 <a:cs typeface="Cabin" pitchFamily="34" charset="-120"/>
               </a:rPr>
+              <a:t>可以修改預設的資料</a:t>
+            </a:r>
+            <a:endParaRPr lang="en-US" sz="1850" dirty="0">
+              <a:latin typeface="Cabin" pitchFamily="34" charset="0"/>
+              <a:ea typeface="Cabin" pitchFamily="34" charset="-122"/>
+              <a:cs typeface="Cabin" pitchFamily="34" charset="-120"/>
+            </a:endParaRPr>
+          </a:p>
+        </p:txBody>
+      </p:sp>
+      <p:pic>
+        <p:nvPicPr>
+          <p:cNvPr id="2" name="圖片 1"/>
+          <p:cNvPicPr>
+            <a:picLocks noChangeAspect="1"/>
+          </p:cNvPicPr>
+          <p:nvPr/>
+        </p:nvPicPr>
+        <p:blipFill>
+          <a:blip r:embed="rId2"/>
+          <a:stretch>
+            <a:fillRect/>
+          </a:stretch>
+        </p:blipFill>
+        <p:spPr>
+          <a:xfrm>
+            <a:off x="6206067" y="2282091"/>
+            <a:ext cx="5400000" cy="4972835"/>
+          </a:xfrm>
+          <a:prstGeom prst="rect">
+            <a:avLst/>
+          </a:prstGeom>
+        </p:spPr>
+      </p:pic>
+    </p:spTree>
+    <p:extLst>
+      <p:ext uri="{BB962C8B-B14F-4D97-AF65-F5344CB8AC3E}">
+        <p14:creationId xmlns:p14="http://schemas.microsoft.com/office/powerpoint/2010/main" val="1451927989"/>
+      </p:ext>
+    </p:extLst>
+  </p:cSld>
+  <p:clrMapOvr>
+    <a:masterClrMapping/>
+  </p:clrMapOvr>
+</p:sld>
+</file>
+
+<file path=ppt/slides/slide14.xml><?xml version="1.0" encoding="utf-8"?>
+<p:sld xmlns:a="http://schemas.openxmlformats.org/drawingml/2006/main" xmlns:r="http://schemas.openxmlformats.org/officeDocument/2006/relationships" xmlns:p="http://schemas.openxmlformats.org/presentationml/2006/main">
+  <p:cSld>
+    <p:bg>
+      <p:bgPr>
+        <a:solidFill>
+          <a:schemeClr val="bg1"/>
+        </a:solidFill>
+        <a:effectLst/>
+      </p:bgPr>
+    </p:bg>
+    <p:spTree>
+      <p:nvGrpSpPr>
+        <p:cNvPr id="1" name=""/>
+        <p:cNvGrpSpPr/>
+        <p:nvPr/>
+      </p:nvGrpSpPr>
+      <p:grpSpPr>
+        <a:xfrm>
+          <a:off x="0" y="0"/>
+          <a:ext cx="0" cy="0"/>
+          <a:chOff x="0" y="0"/>
+          <a:chExt cx="0" cy="0"/>
+        </a:xfrm>
+      </p:grpSpPr>
+      <p:sp>
+        <p:nvSpPr>
+          <p:cNvPr id="3" name="Text 0">
+            <a:extLst>
+              <a:ext uri="{FF2B5EF4-FFF2-40B4-BE49-F238E27FC236}">
+                <a16:creationId xmlns:a16="http://schemas.microsoft.com/office/drawing/2014/main" id="{8BF2A6AB-1F7E-9633-389D-D723B15A9392}"/>
+              </a:ext>
+            </a:extLst>
+          </p:cNvPr>
+          <p:cNvSpPr/>
+          <p:nvPr/>
+        </p:nvSpPr>
+        <p:spPr>
+          <a:xfrm>
+            <a:off x="768150" y="1358291"/>
+            <a:ext cx="6757988" cy="704017"/>
+          </a:xfrm>
+          <a:prstGeom prst="rect">
+            <a:avLst/>
+          </a:prstGeom>
+          <a:noFill/>
+          <a:ln/>
+        </p:spPr>
+        <p:txBody>
+          <a:bodyPr wrap="none" lIns="0" tIns="0" rIns="0" bIns="0" rtlCol="0" anchor="t"/>
+          <a:lstStyle/>
+          <a:p>
+            <a:pPr marL="0" indent="0" algn="l">
+              <a:lnSpc>
+                <a:spcPts val="5500"/>
+              </a:lnSpc>
+              <a:buNone/>
+            </a:pPr>
+            <a:r>
+              <a:rPr lang="en-US" sz="4400" dirty="0" err="1">
+                <a:latin typeface="Unbounded" pitchFamily="34" charset="0"/>
+                <a:ea typeface="Unbounded" pitchFamily="34" charset="-122"/>
+                <a:cs typeface="Unbounded" pitchFamily="34" charset="-120"/>
+              </a:rPr>
+              <a:t>前台功能</a:t>
+            </a:r>
+            <a:endParaRPr lang="en-US" sz="4400" dirty="0"/>
+          </a:p>
+        </p:txBody>
+      </p:sp>
+      <p:sp>
+        <p:nvSpPr>
+          <p:cNvPr id="14" name="Text 5">
+            <a:extLst>
+              <a:ext uri="{FF2B5EF4-FFF2-40B4-BE49-F238E27FC236}">
+                <a16:creationId xmlns:a16="http://schemas.microsoft.com/office/drawing/2014/main" id="{F636048F-4C36-6D44-AA6F-5D21733034BE}"/>
+              </a:ext>
+            </a:extLst>
+          </p:cNvPr>
+          <p:cNvSpPr/>
+          <p:nvPr/>
+        </p:nvSpPr>
+        <p:spPr>
+          <a:xfrm>
+            <a:off x="1011157" y="2557270"/>
+            <a:ext cx="2816185" cy="351949"/>
+          </a:xfrm>
+          <a:prstGeom prst="rect">
+            <a:avLst/>
+          </a:prstGeom>
+          <a:noFill/>
+          <a:ln/>
+        </p:spPr>
+        <p:txBody>
+          <a:bodyPr wrap="none" lIns="0" tIns="0" rIns="0" bIns="0" rtlCol="0" anchor="t"/>
+          <a:lstStyle/>
+          <a:p>
+            <a:pPr marL="0" indent="0" algn="l">
+              <a:lnSpc>
+                <a:spcPts val="2750"/>
+              </a:lnSpc>
+              <a:buNone/>
+            </a:pPr>
+            <a:r>
+              <a:rPr lang="zh-TW" altLang="en-US" sz="2200" dirty="0">
+                <a:latin typeface="Unbounded" pitchFamily="34" charset="0"/>
+                <a:ea typeface="Unbounded" pitchFamily="34" charset="-122"/>
+              </a:rPr>
+              <a:t>通知中心</a:t>
+            </a:r>
+            <a:endParaRPr lang="en-US" sz="2200" dirty="0"/>
+          </a:p>
+        </p:txBody>
+      </p:sp>
+      <p:sp>
+        <p:nvSpPr>
+          <p:cNvPr id="16" name="Text 6">
+            <a:extLst>
+              <a:ext uri="{FF2B5EF4-FFF2-40B4-BE49-F238E27FC236}">
+                <a16:creationId xmlns:a16="http://schemas.microsoft.com/office/drawing/2014/main" id="{6BBFCEEE-A067-D3FE-98EA-BF5239A138DB}"/>
+              </a:ext>
+            </a:extLst>
+          </p:cNvPr>
+          <p:cNvSpPr/>
+          <p:nvPr/>
+        </p:nvSpPr>
+        <p:spPr>
+          <a:xfrm>
+            <a:off x="1011157" y="3052808"/>
+            <a:ext cx="3135987" cy="766048"/>
+          </a:xfrm>
+          <a:prstGeom prst="rect">
+            <a:avLst/>
+          </a:prstGeom>
+          <a:noFill/>
+          <a:ln/>
+        </p:spPr>
+        <p:txBody>
+          <a:bodyPr wrap="square" lIns="0" tIns="0" rIns="0" bIns="0" rtlCol="0" anchor="t"/>
+          <a:lstStyle/>
+          <a:p>
+            <a:pPr>
+              <a:lnSpc>
+                <a:spcPts val="3000"/>
+              </a:lnSpc>
+            </a:pPr>
+            <a:r>
+              <a:rPr lang="zh-TW" altLang="en-US" sz="1850" dirty="0">
+                <a:latin typeface="Cabin" pitchFamily="34" charset="0"/>
+                <a:ea typeface="Cabin" pitchFamily="34" charset="-122"/>
+                <a:cs typeface="Cabin" pitchFamily="34" charset="-120"/>
+              </a:rPr>
               <a:t>查看系統或管理員發送的個人化通知訊息</a:t>
             </a:r>
             <a:endParaRPr lang="en-US" sz="1850" dirty="0">
-              <a:solidFill>
-                <a:srgbClr val="CAD6DE"/>
-              </a:solidFill>
               <a:latin typeface="Cabin" pitchFamily="34" charset="0"/>
               <a:ea typeface="Cabin" pitchFamily="34" charset="-122"/>
               <a:cs typeface="Cabin" pitchFamily="34" charset="-120"/>
@@ -4092,9 +4168,17 @@
 </p:sld>
 </file>
 
-<file path=ppt/slides/slide14.xml><?xml version="1.0" encoding="utf-8"?>
+<file path=ppt/slides/slide15.xml><?xml version="1.0" encoding="utf-8"?>
 <p:sld xmlns:a="http://schemas.openxmlformats.org/drawingml/2006/main" xmlns:r="http://schemas.openxmlformats.org/officeDocument/2006/relationships" xmlns:p="http://schemas.openxmlformats.org/presentationml/2006/main">
   <p:cSld>
+    <p:bg>
+      <p:bgPr>
+        <a:solidFill>
+          <a:schemeClr val="bg1"/>
+        </a:solidFill>
+        <a:effectLst/>
+      </p:bgPr>
+    </p:bg>
     <p:spTree>
       <p:nvGrpSpPr>
         <p:cNvPr id="1" name=""/>
@@ -4114,7 +4198,7 @@
           <p:cNvPr id="3" name="Text 0">
             <a:extLst>
               <a:ext uri="{FF2B5EF4-FFF2-40B4-BE49-F238E27FC236}">
-                <a16:creationId xmlns="" xmlns:a16="http://schemas.microsoft.com/office/drawing/2014/main" id="{8BF2A6AB-1F7E-9633-389D-D723B15A9392}"/>
+                <a16:creationId xmlns:a16="http://schemas.microsoft.com/office/drawing/2014/main" id="{8BF2A6AB-1F7E-9633-389D-D723B15A9392}"/>
               </a:ext>
             </a:extLst>
           </p:cNvPr>
@@ -4143,15 +4227,12 @@
               <a:buNone/>
             </a:pPr>
             <a:r>
-              <a:rPr lang="en-US" sz="4400" dirty="0">
-                <a:solidFill>
-                  <a:srgbClr val="FFFFFF"/>
-                </a:solidFill>
+              <a:rPr lang="en-US" sz="4400" dirty="0" err="1">
                 <a:latin typeface="Unbounded" pitchFamily="34" charset="0"/>
                 <a:ea typeface="Unbounded" pitchFamily="34" charset="-122"/>
                 <a:cs typeface="Unbounded" pitchFamily="34" charset="-120"/>
               </a:rPr>
-              <a:t>前台功能：使用者體驗至上</a:t>
+              <a:t>前台功能</a:t>
             </a:r>
             <a:endParaRPr lang="en-US" sz="4400" dirty="0"/>
           </a:p>
@@ -4159,38 +4240,10 @@
       </p:sp>
       <p:sp>
         <p:nvSpPr>
-          <p:cNvPr id="13" name="Shape 4">
-            <a:extLst>
-              <a:ext uri="{FF2B5EF4-FFF2-40B4-BE49-F238E27FC236}">
-                <a16:creationId xmlns="" xmlns:a16="http://schemas.microsoft.com/office/drawing/2014/main" id="{2B8FEFA1-65DA-DEEF-1B3F-0DC7ECD2278D}"/>
-              </a:ext>
-            </a:extLst>
-          </p:cNvPr>
-          <p:cNvSpPr/>
-          <p:nvPr/>
-        </p:nvSpPr>
-        <p:spPr>
-          <a:xfrm>
-            <a:off x="768150" y="2282091"/>
-            <a:ext cx="3614618" cy="1740218"/>
-          </a:xfrm>
-          <a:prstGeom prst="roundRect">
-            <a:avLst>
-              <a:gd name="adj" fmla="val 2063"/>
-            </a:avLst>
-          </a:prstGeom>
-          <a:solidFill>
-            <a:srgbClr val="304755"/>
-          </a:solidFill>
-          <a:ln/>
-        </p:spPr>
-      </p:sp>
-      <p:sp>
-        <p:nvSpPr>
           <p:cNvPr id="14" name="Text 5">
             <a:extLst>
               <a:ext uri="{FF2B5EF4-FFF2-40B4-BE49-F238E27FC236}">
-                <a16:creationId xmlns="" xmlns:a16="http://schemas.microsoft.com/office/drawing/2014/main" id="{F636048F-4C36-6D44-AA6F-5D21733034BE}"/>
+                <a16:creationId xmlns:a16="http://schemas.microsoft.com/office/drawing/2014/main" id="{F636048F-4C36-6D44-AA6F-5D21733034BE}"/>
               </a:ext>
             </a:extLst>
           </p:cNvPr>
@@ -4220,9 +4273,6 @@
             </a:pPr>
             <a:r>
               <a:rPr lang="zh-TW" altLang="en-US" sz="2200" dirty="0">
-                <a:solidFill>
-                  <a:srgbClr val="CAD6DE"/>
-                </a:solidFill>
                 <a:latin typeface="Unbounded" pitchFamily="34" charset="0"/>
                 <a:ea typeface="Unbounded" pitchFamily="34" charset="-122"/>
               </a:rPr>
@@ -4237,7 +4287,7 @@
           <p:cNvPr id="16" name="Text 6">
             <a:extLst>
               <a:ext uri="{FF2B5EF4-FFF2-40B4-BE49-F238E27FC236}">
-                <a16:creationId xmlns="" xmlns:a16="http://schemas.microsoft.com/office/drawing/2014/main" id="{6BBFCEEE-A067-D3FE-98EA-BF5239A138DB}"/>
+                <a16:creationId xmlns:a16="http://schemas.microsoft.com/office/drawing/2014/main" id="{6BBFCEEE-A067-D3FE-98EA-BF5239A138DB}"/>
               </a:ext>
             </a:extLst>
           </p:cNvPr>
@@ -4266,9 +4316,6 @@
             </a:pPr>
             <a:r>
               <a:rPr lang="zh-TW" altLang="en-US" sz="1850" dirty="0">
-                <a:solidFill>
-                  <a:srgbClr val="CAD6DE"/>
-                </a:solidFill>
                 <a:latin typeface="Cabin" pitchFamily="34" charset="0"/>
                 <a:ea typeface="Cabin" pitchFamily="34" charset="-122"/>
                 <a:cs typeface="Cabin" pitchFamily="34" charset="-120"/>
@@ -4276,9 +4323,6 @@
               <a:t>收藏喜愛商品並可快速加入購物車</a:t>
             </a:r>
             <a:endParaRPr lang="en-US" sz="1850" dirty="0">
-              <a:solidFill>
-                <a:srgbClr val="CAD6DE"/>
-              </a:solidFill>
               <a:latin typeface="Cabin" pitchFamily="34" charset="0"/>
               <a:ea typeface="Cabin" pitchFamily="34" charset="-122"/>
               <a:cs typeface="Cabin" pitchFamily="34" charset="-120"/>
@@ -4302,7 +4346,7 @@
         </p:blipFill>
         <p:spPr>
           <a:xfrm>
-            <a:off x="4853531" y="2282091"/>
+            <a:off x="5020791" y="2282091"/>
             <a:ext cx="8841459" cy="4736195"/>
           </a:xfrm>
           <a:prstGeom prst="rect">
@@ -4323,9 +4367,17 @@
 </p:sld>
 </file>
 
-<file path=ppt/slides/slide15.xml><?xml version="1.0" encoding="utf-8"?>
+<file path=ppt/slides/slide16.xml><?xml version="1.0" encoding="utf-8"?>
 <p:sld xmlns:a="http://schemas.openxmlformats.org/drawingml/2006/main" xmlns:r="http://schemas.openxmlformats.org/officeDocument/2006/relationships" xmlns:p="http://schemas.openxmlformats.org/presentationml/2006/main">
   <p:cSld>
+    <p:bg>
+      <p:bgPr>
+        <a:solidFill>
+          <a:schemeClr val="bg1"/>
+        </a:solidFill>
+        <a:effectLst/>
+      </p:bgPr>
+    </p:bg>
     <p:spTree>
       <p:nvGrpSpPr>
         <p:cNvPr id="1" name=""/>
@@ -4345,7 +4397,7 @@
           <p:cNvPr id="3" name="Text 0">
             <a:extLst>
               <a:ext uri="{FF2B5EF4-FFF2-40B4-BE49-F238E27FC236}">
-                <a16:creationId xmlns="" xmlns:a16="http://schemas.microsoft.com/office/drawing/2014/main" id="{8BF2A6AB-1F7E-9633-389D-D723B15A9392}"/>
+                <a16:creationId xmlns:a16="http://schemas.microsoft.com/office/drawing/2014/main" id="{8BF2A6AB-1F7E-9633-389D-D723B15A9392}"/>
               </a:ext>
             </a:extLst>
           </p:cNvPr>
@@ -4374,15 +4426,12 @@
               <a:buNone/>
             </a:pPr>
             <a:r>
-              <a:rPr lang="en-US" sz="4400" dirty="0">
-                <a:solidFill>
-                  <a:srgbClr val="FFFFFF"/>
-                </a:solidFill>
+              <a:rPr lang="en-US" sz="4400" dirty="0" err="1">
                 <a:latin typeface="Unbounded" pitchFamily="34" charset="0"/>
                 <a:ea typeface="Unbounded" pitchFamily="34" charset="-122"/>
                 <a:cs typeface="Unbounded" pitchFamily="34" charset="-120"/>
               </a:rPr>
-              <a:t>前台功能：使用者體驗至上</a:t>
+              <a:t>前台功能</a:t>
             </a:r>
             <a:endParaRPr lang="en-US" sz="4400" dirty="0"/>
           </a:p>
@@ -4390,10 +4439,10 @@
       </p:sp>
       <p:sp>
         <p:nvSpPr>
-          <p:cNvPr id="13" name="Shape 4">
-            <a:extLst>
-              <a:ext uri="{FF2B5EF4-FFF2-40B4-BE49-F238E27FC236}">
-                <a16:creationId xmlns="" xmlns:a16="http://schemas.microsoft.com/office/drawing/2014/main" id="{2B8FEFA1-65DA-DEEF-1B3F-0DC7ECD2278D}"/>
+          <p:cNvPr id="14" name="Text 5">
+            <a:extLst>
+              <a:ext uri="{FF2B5EF4-FFF2-40B4-BE49-F238E27FC236}">
+                <a16:creationId xmlns:a16="http://schemas.microsoft.com/office/drawing/2014/main" id="{F636048F-4C36-6D44-AA6F-5D21733034BE}"/>
               </a:ext>
             </a:extLst>
           </p:cNvPr>
@@ -4402,35 +4451,7 @@
         </p:nvSpPr>
         <p:spPr>
           <a:xfrm>
-            <a:off x="768150" y="2282091"/>
-            <a:ext cx="3614618" cy="1740218"/>
-          </a:xfrm>
-          <a:prstGeom prst="roundRect">
-            <a:avLst>
-              <a:gd name="adj" fmla="val 2063"/>
-            </a:avLst>
-          </a:prstGeom>
-          <a:solidFill>
-            <a:srgbClr val="304755"/>
-          </a:solidFill>
-          <a:ln/>
-        </p:spPr>
-      </p:sp>
-      <p:sp>
-        <p:nvSpPr>
-          <p:cNvPr id="14" name="Text 5">
-            <a:extLst>
-              <a:ext uri="{FF2B5EF4-FFF2-40B4-BE49-F238E27FC236}">
-                <a16:creationId xmlns="" xmlns:a16="http://schemas.microsoft.com/office/drawing/2014/main" id="{F636048F-4C36-6D44-AA6F-5D21733034BE}"/>
-              </a:ext>
-            </a:extLst>
-          </p:cNvPr>
-          <p:cNvSpPr/>
-          <p:nvPr/>
-        </p:nvSpPr>
-        <p:spPr>
-          <a:xfrm>
-            <a:off x="1011157" y="2557270"/>
+            <a:off x="1058912" y="2493624"/>
             <a:ext cx="2816185" cy="351949"/>
           </a:xfrm>
           <a:prstGeom prst="rect">
@@ -4449,29 +4470,13 @@
               </a:lnSpc>
             </a:pPr>
             <a:r>
-              <a:rPr lang="zh-TW" altLang="en-US" sz="2200" dirty="0" smtClean="0">
-                <a:solidFill>
-                  <a:srgbClr val="CAD6DE"/>
-                </a:solidFill>
+              <a:rPr lang="zh-TW" altLang="en-US" sz="2200" dirty="0">
                 <a:latin typeface="Unbounded" pitchFamily="34" charset="0"/>
                 <a:ea typeface="Unbounded" pitchFamily="34" charset="-122"/>
               </a:rPr>
-              <a:t>訂單</a:t>
-            </a:r>
-            <a:r>
-              <a:rPr lang="zh-TW" altLang="en-US" sz="2200" dirty="0">
-                <a:solidFill>
-                  <a:srgbClr val="CAD6DE"/>
-                </a:solidFill>
-                <a:latin typeface="Unbounded" pitchFamily="34" charset="0"/>
-                <a:ea typeface="Unbounded" pitchFamily="34" charset="-122"/>
-              </a:rPr>
-              <a:t>管理</a:t>
+              <a:t>商品管理</a:t>
             </a:r>
             <a:endParaRPr lang="en-US" sz="2200" dirty="0">
-              <a:solidFill>
-                <a:srgbClr val="CAD6DE"/>
-              </a:solidFill>
               <a:latin typeface="Unbounded" pitchFamily="34" charset="0"/>
               <a:ea typeface="Unbounded" pitchFamily="34" charset="-122"/>
             </a:endParaRPr>
@@ -4483,7 +4488,7 @@
           <p:cNvPr id="16" name="Text 6">
             <a:extLst>
               <a:ext uri="{FF2B5EF4-FFF2-40B4-BE49-F238E27FC236}">
-                <a16:creationId xmlns="" xmlns:a16="http://schemas.microsoft.com/office/drawing/2014/main" id="{6BBFCEEE-A067-D3FE-98EA-BF5239A138DB}"/>
+                <a16:creationId xmlns:a16="http://schemas.microsoft.com/office/drawing/2014/main" id="{6BBFCEEE-A067-D3FE-98EA-BF5239A138DB}"/>
               </a:ext>
             </a:extLst>
           </p:cNvPr>
@@ -4492,7 +4497,7 @@
         </p:nvSpPr>
         <p:spPr>
           <a:xfrm>
-            <a:off x="1011157" y="3052808"/>
+            <a:off x="1058912" y="2989162"/>
             <a:ext cx="3135987" cy="766048"/>
           </a:xfrm>
           <a:prstGeom prst="rect">
@@ -4510,17 +4515,6 @@
                 <a:spcPts val="3000"/>
               </a:lnSpc>
             </a:pPr>
-            <a:r>
-              <a:rPr lang="zh-TW" altLang="en-US" sz="1850" dirty="0">
-                <a:solidFill>
-                  <a:srgbClr val="CAD6DE"/>
-                </a:solidFill>
-                <a:latin typeface="Cabin" pitchFamily="34" charset="0"/>
-                <a:ea typeface="Cabin" pitchFamily="34" charset="-122"/>
-                <a:cs typeface="Cabin" pitchFamily="34" charset="-120"/>
-              </a:rPr>
-              <a:t>收藏喜愛商品並可快速加入購物車</a:t>
-            </a:r>
             <a:endParaRPr lang="en-US" sz="1850" dirty="0">
               <a:solidFill>
                 <a:srgbClr val="CAD6DE"/>
@@ -4534,7 +4528,13 @@
       </p:sp>
       <p:pic>
         <p:nvPicPr>
-          <p:cNvPr id="5" name="圖片 4"/>
+          <p:cNvPr id="4" name="圖片 3">
+            <a:extLst>
+              <a:ext uri="{FF2B5EF4-FFF2-40B4-BE49-F238E27FC236}">
+                <a16:creationId xmlns:a16="http://schemas.microsoft.com/office/drawing/2014/main" id="{F735A40E-0876-DC19-B29D-55756CC9AF94}"/>
+              </a:ext>
+            </a:extLst>
+          </p:cNvPr>
           <p:cNvPicPr>
             <a:picLocks noChangeAspect="1"/>
           </p:cNvPicPr>
@@ -4548,50 +4548,20 @@
         </p:blipFill>
         <p:spPr>
           <a:xfrm>
-            <a:off x="6121625" y="2282091"/>
-            <a:ext cx="7200000" cy="5554286"/>
+            <a:off x="6038153" y="246229"/>
+            <a:ext cx="8109361" cy="3944432"/>
           </a:xfrm>
           <a:prstGeom prst="rect">
             <a:avLst/>
           </a:prstGeom>
         </p:spPr>
       </p:pic>
-    </p:spTree>
-    <p:extLst>
-      <p:ext uri="{BB962C8B-B14F-4D97-AF65-F5344CB8AC3E}">
-        <p14:creationId xmlns:p14="http://schemas.microsoft.com/office/powerpoint/2010/main" val="3853908940"/>
-      </p:ext>
-    </p:extLst>
-  </p:cSld>
-  <p:clrMapOvr>
-    <a:masterClrMapping/>
-  </p:clrMapOvr>
-</p:sld>
-</file>
-
-<file path=ppt/slides/slide16.xml><?xml version="1.0" encoding="utf-8"?>
-<p:sld xmlns:a="http://schemas.openxmlformats.org/drawingml/2006/main" xmlns:r="http://schemas.openxmlformats.org/officeDocument/2006/relationships" xmlns:p="http://schemas.openxmlformats.org/presentationml/2006/main">
-  <p:cSld>
-    <p:spTree>
-      <p:nvGrpSpPr>
-        <p:cNvPr id="1" name=""/>
-        <p:cNvGrpSpPr/>
-        <p:nvPr/>
-      </p:nvGrpSpPr>
-      <p:grpSpPr>
-        <a:xfrm>
-          <a:off x="0" y="0"/>
-          <a:ext cx="0" cy="0"/>
-          <a:chOff x="0" y="0"/>
-          <a:chExt cx="0" cy="0"/>
-        </a:xfrm>
-      </p:grpSpPr>
-      <p:sp>
-        <p:nvSpPr>
-          <p:cNvPr id="3" name="Text 0">
-            <a:extLst>
-              <a:ext uri="{FF2B5EF4-FFF2-40B4-BE49-F238E27FC236}">
-                <a16:creationId xmlns="" xmlns:a16="http://schemas.microsoft.com/office/drawing/2014/main" id="{8BF2A6AB-1F7E-9633-389D-D723B15A9392}"/>
+      <p:sp>
+        <p:nvSpPr>
+          <p:cNvPr id="8" name="Text 6">
+            <a:extLst>
+              <a:ext uri="{FF2B5EF4-FFF2-40B4-BE49-F238E27FC236}">
+                <a16:creationId xmlns:a16="http://schemas.microsoft.com/office/drawing/2014/main" id="{1D5B5560-1CFB-0EF1-820B-C009AD3E3EBE}"/>
               </a:ext>
             </a:extLst>
           </p:cNvPr>
@@ -4600,145 +4570,7 @@
         </p:nvSpPr>
         <p:spPr>
           <a:xfrm>
-            <a:off x="768150" y="1358291"/>
-            <a:ext cx="6757988" cy="704017"/>
-          </a:xfrm>
-          <a:prstGeom prst="rect">
-            <a:avLst/>
-          </a:prstGeom>
-          <a:noFill/>
-          <a:ln/>
-        </p:spPr>
-        <p:txBody>
-          <a:bodyPr wrap="none" lIns="0" tIns="0" rIns="0" bIns="0" rtlCol="0" anchor="t"/>
-          <a:lstStyle/>
-          <a:p>
-            <a:pPr marL="0" indent="0" algn="l">
-              <a:lnSpc>
-                <a:spcPts val="5500"/>
-              </a:lnSpc>
-              <a:buNone/>
-            </a:pPr>
-            <a:r>
-              <a:rPr lang="en-US" sz="4400" dirty="0">
-                <a:solidFill>
-                  <a:srgbClr val="FFFFFF"/>
-                </a:solidFill>
-                <a:latin typeface="Unbounded" pitchFamily="34" charset="0"/>
-                <a:ea typeface="Unbounded" pitchFamily="34" charset="-122"/>
-                <a:cs typeface="Unbounded" pitchFamily="34" charset="-120"/>
-              </a:rPr>
-              <a:t>前台功能：使用者體驗至上</a:t>
-            </a:r>
-            <a:endParaRPr lang="en-US" sz="4400" dirty="0"/>
-          </a:p>
-        </p:txBody>
-      </p:sp>
-      <p:sp>
-        <p:nvSpPr>
-          <p:cNvPr id="13" name="Shape 4">
-            <a:extLst>
-              <a:ext uri="{FF2B5EF4-FFF2-40B4-BE49-F238E27FC236}">
-                <a16:creationId xmlns="" xmlns:a16="http://schemas.microsoft.com/office/drawing/2014/main" id="{2B8FEFA1-65DA-DEEF-1B3F-0DC7ECD2278D}"/>
-              </a:ext>
-            </a:extLst>
-          </p:cNvPr>
-          <p:cNvSpPr/>
-          <p:nvPr/>
-        </p:nvSpPr>
-        <p:spPr>
-          <a:xfrm>
-            <a:off x="768150" y="2282091"/>
-            <a:ext cx="3614618" cy="1740218"/>
-          </a:xfrm>
-          <a:prstGeom prst="roundRect">
-            <a:avLst>
-              <a:gd name="adj" fmla="val 2063"/>
-            </a:avLst>
-          </a:prstGeom>
-          <a:solidFill>
-            <a:srgbClr val="304755"/>
-          </a:solidFill>
-          <a:ln/>
-        </p:spPr>
-      </p:sp>
-      <p:sp>
-        <p:nvSpPr>
-          <p:cNvPr id="14" name="Text 5">
-            <a:extLst>
-              <a:ext uri="{FF2B5EF4-FFF2-40B4-BE49-F238E27FC236}">
-                <a16:creationId xmlns="" xmlns:a16="http://schemas.microsoft.com/office/drawing/2014/main" id="{F636048F-4C36-6D44-AA6F-5D21733034BE}"/>
-              </a:ext>
-            </a:extLst>
-          </p:cNvPr>
-          <p:cNvSpPr/>
-          <p:nvPr/>
-        </p:nvSpPr>
-        <p:spPr>
-          <a:xfrm>
-            <a:off x="1011157" y="2557270"/>
-            <a:ext cx="2816185" cy="351949"/>
-          </a:xfrm>
-          <a:prstGeom prst="rect">
-            <a:avLst/>
-          </a:prstGeom>
-          <a:noFill/>
-          <a:ln/>
-        </p:spPr>
-        <p:txBody>
-          <a:bodyPr wrap="none" lIns="0" tIns="0" rIns="0" bIns="0" rtlCol="0" anchor="t"/>
-          <a:lstStyle/>
-          <a:p>
-            <a:pPr>
-              <a:lnSpc>
-                <a:spcPts val="2750"/>
-              </a:lnSpc>
-            </a:pPr>
-            <a:r>
-              <a:rPr lang="zh-TW" altLang="en-US" sz="2200" dirty="0" smtClean="0">
-                <a:solidFill>
-                  <a:srgbClr val="CAD6DE"/>
-                </a:solidFill>
-                <a:latin typeface="Unbounded" pitchFamily="34" charset="0"/>
-                <a:ea typeface="Unbounded" pitchFamily="34" charset="-122"/>
-              </a:rPr>
-              <a:t>修改</a:t>
-            </a:r>
-            <a:r>
-              <a:rPr lang="zh-TW" altLang="en-US" sz="2200" dirty="0">
-                <a:solidFill>
-                  <a:srgbClr val="CAD6DE"/>
-                </a:solidFill>
-                <a:latin typeface="Unbounded" pitchFamily="34" charset="0"/>
-                <a:ea typeface="Unbounded" pitchFamily="34" charset="-122"/>
-              </a:rPr>
-              <a:t>個人資料</a:t>
-            </a:r>
-            <a:endParaRPr lang="en-US" sz="2200" dirty="0">
-              <a:solidFill>
-                <a:srgbClr val="CAD6DE"/>
-              </a:solidFill>
-              <a:latin typeface="Unbounded" pitchFamily="34" charset="0"/>
-              <a:ea typeface="Unbounded" pitchFamily="34" charset="-122"/>
-            </a:endParaRPr>
-          </a:p>
-        </p:txBody>
-      </p:sp>
-      <p:sp>
-        <p:nvSpPr>
-          <p:cNvPr id="16" name="Text 6">
-            <a:extLst>
-              <a:ext uri="{FF2B5EF4-FFF2-40B4-BE49-F238E27FC236}">
-                <a16:creationId xmlns="" xmlns:a16="http://schemas.microsoft.com/office/drawing/2014/main" id="{6BBFCEEE-A067-D3FE-98EA-BF5239A138DB}"/>
-              </a:ext>
-            </a:extLst>
-          </p:cNvPr>
-          <p:cNvSpPr/>
-          <p:nvPr/>
-        </p:nvSpPr>
-        <p:spPr>
-          <a:xfrm>
-            <a:off x="1011157" y="3052808"/>
+            <a:off x="1058912" y="2911318"/>
             <a:ext cx="3135987" cy="766048"/>
           </a:xfrm>
           <a:prstGeom prst="rect">
@@ -4758,19 +4590,13 @@
             </a:pPr>
             <a:r>
               <a:rPr lang="zh-TW" altLang="en-US" sz="1850" dirty="0">
-                <a:solidFill>
-                  <a:srgbClr val="CAD6DE"/>
-                </a:solidFill>
                 <a:latin typeface="Cabin" pitchFamily="34" charset="0"/>
                 <a:ea typeface="Cabin" pitchFamily="34" charset="-122"/>
                 <a:cs typeface="Cabin" pitchFamily="34" charset="-120"/>
               </a:rPr>
-              <a:t>收藏喜愛商品並可快速加入購物車</a:t>
+              <a:t>可以查看新增上架，和一定程度的編輯商品</a:t>
             </a:r>
             <a:endParaRPr lang="en-US" sz="1850" dirty="0">
-              <a:solidFill>
-                <a:srgbClr val="CAD6DE"/>
-              </a:solidFill>
               <a:latin typeface="Cabin" pitchFamily="34" charset="0"/>
               <a:ea typeface="Cabin" pitchFamily="34" charset="-122"/>
               <a:cs typeface="Cabin" pitchFamily="34" charset="-120"/>
@@ -4780,22 +4606,28 @@
       </p:sp>
       <p:pic>
         <p:nvPicPr>
-          <p:cNvPr id="2" name="圖片 1"/>
+          <p:cNvPr id="10" name="圖片 9">
+            <a:extLst>
+              <a:ext uri="{FF2B5EF4-FFF2-40B4-BE49-F238E27FC236}">
+                <a16:creationId xmlns:a16="http://schemas.microsoft.com/office/drawing/2014/main" id="{57022927-96D9-CD30-5601-FA1CCBE4BA89}"/>
+              </a:ext>
+            </a:extLst>
+          </p:cNvPr>
           <p:cNvPicPr>
             <a:picLocks noChangeAspect="1"/>
           </p:cNvPicPr>
           <p:nvPr/>
         </p:nvPicPr>
         <p:blipFill>
-          <a:blip r:embed="rId2"/>
+          <a:blip r:embed="rId3"/>
           <a:stretch>
             <a:fillRect/>
           </a:stretch>
         </p:blipFill>
         <p:spPr>
           <a:xfrm>
-            <a:off x="6206067" y="2282091"/>
-            <a:ext cx="5400000" cy="4972835"/>
+            <a:off x="815905" y="4270937"/>
+            <a:ext cx="6316825" cy="3810668"/>
           </a:xfrm>
           <a:prstGeom prst="rect">
             <a:avLst/>
@@ -4805,7 +4637,7 @@
     </p:spTree>
     <p:extLst>
       <p:ext uri="{BB962C8B-B14F-4D97-AF65-F5344CB8AC3E}">
-        <p14:creationId xmlns:p14="http://schemas.microsoft.com/office/powerpoint/2010/main" val="1451927989"/>
+        <p14:creationId xmlns:p14="http://schemas.microsoft.com/office/powerpoint/2010/main" val="3303974127"/>
       </p:ext>
     </p:extLst>
   </p:cSld>
@@ -4834,10 +4666,10 @@
       </p:grpSpPr>
       <p:sp>
         <p:nvSpPr>
-          <p:cNvPr id="2" name="Text 0">
-            <a:extLst>
-              <a:ext uri="{FF2B5EF4-FFF2-40B4-BE49-F238E27FC236}">
-                <a16:creationId xmlns="" xmlns:a16="http://schemas.microsoft.com/office/drawing/2014/main" id="{4BECE61C-96CC-4A9D-6230-C060D27295AB}"/>
+          <p:cNvPr id="14" name="Text 0">
+            <a:extLst>
+              <a:ext uri="{FF2B5EF4-FFF2-40B4-BE49-F238E27FC236}">
+                <a16:creationId xmlns:a16="http://schemas.microsoft.com/office/drawing/2014/main" id="{3BB6AD06-1FAD-E83C-8A0F-5E1DB2F28494}"/>
               </a:ext>
             </a:extLst>
           </p:cNvPr>
@@ -4846,7 +4678,7 @@
         </p:nvSpPr>
         <p:spPr>
           <a:xfrm>
-            <a:off x="837724" y="2467928"/>
+            <a:off x="7661449" y="2419006"/>
             <a:ext cx="5632490" cy="704017"/>
           </a:xfrm>
           <a:prstGeom prst="rect">
@@ -4874,7 +4706,7 @@
                 <a:ea typeface="Unbounded" pitchFamily="34" charset="-122"/>
                 <a:cs typeface="Unbounded" pitchFamily="34" charset="-120"/>
               </a:rPr>
-              <a:t>前台功能：會員中心</a:t>
+              <a:t>後台功能：商品管理</a:t>
             </a:r>
             <a:endParaRPr lang="en-US" sz="4400" dirty="0"/>
           </a:p>
@@ -4882,10 +4714,10 @@
       </p:sp>
       <p:sp>
         <p:nvSpPr>
-          <p:cNvPr id="3" name="Text 1">
-            <a:extLst>
-              <a:ext uri="{FF2B5EF4-FFF2-40B4-BE49-F238E27FC236}">
-                <a16:creationId xmlns="" xmlns:a16="http://schemas.microsoft.com/office/drawing/2014/main" id="{3F0623C5-E73C-1A4C-5B8B-B7BD4678909F}"/>
+          <p:cNvPr id="15" name="Shape 1">
+            <a:extLst>
+              <a:ext uri="{FF2B5EF4-FFF2-40B4-BE49-F238E27FC236}">
+                <a16:creationId xmlns:a16="http://schemas.microsoft.com/office/drawing/2014/main" id="{A33C417B-80A3-1650-D9D1-6E4EF0A19D1E}"/>
               </a:ext>
             </a:extLst>
           </p:cNvPr>
@@ -4894,7 +4726,35 @@
         </p:nvSpPr>
         <p:spPr>
           <a:xfrm>
-            <a:off x="837724" y="3770233"/>
+            <a:off x="7661449" y="3481996"/>
+            <a:ext cx="179427" cy="351949"/>
+          </a:xfrm>
+          <a:prstGeom prst="roundRect">
+            <a:avLst>
+              <a:gd name="adj" fmla="val 20012"/>
+            </a:avLst>
+          </a:prstGeom>
+          <a:solidFill>
+            <a:srgbClr val="304755"/>
+          </a:solidFill>
+          <a:ln/>
+        </p:spPr>
+      </p:sp>
+      <p:sp>
+        <p:nvSpPr>
+          <p:cNvPr id="16" name="Text 2">
+            <a:extLst>
+              <a:ext uri="{FF2B5EF4-FFF2-40B4-BE49-F238E27FC236}">
+                <a16:creationId xmlns:a16="http://schemas.microsoft.com/office/drawing/2014/main" id="{CA008A43-82F8-359E-FEB4-8F6DACD4D05D}"/>
+              </a:ext>
+            </a:extLst>
+          </p:cNvPr>
+          <p:cNvSpPr/>
+          <p:nvPr/>
+        </p:nvSpPr>
+        <p:spPr>
+          <a:xfrm>
+            <a:off x="8199849" y="3481996"/>
             <a:ext cx="2816185" cy="351949"/>
           </a:xfrm>
           <a:prstGeom prst="rect">
@@ -4916,13 +4776,13 @@
             <a:r>
               <a:rPr lang="en-US" sz="2200" dirty="0">
                 <a:solidFill>
-                  <a:srgbClr val="FFFFFF"/>
+                  <a:srgbClr val="CAD6DE"/>
                 </a:solidFill>
                 <a:latin typeface="Unbounded" pitchFamily="34" charset="0"/>
                 <a:ea typeface="Unbounded" pitchFamily="34" charset="-122"/>
                 <a:cs typeface="Unbounded" pitchFamily="34" charset="-120"/>
               </a:rPr>
-              <a:t>買家頁面</a:t>
+              <a:t>商品新增與修改</a:t>
             </a:r>
             <a:endParaRPr lang="en-US" sz="2200" dirty="0"/>
           </a:p>
@@ -4930,10 +4790,10 @@
       </p:sp>
       <p:sp>
         <p:nvSpPr>
-          <p:cNvPr id="4" name="Text 2">
-            <a:extLst>
-              <a:ext uri="{FF2B5EF4-FFF2-40B4-BE49-F238E27FC236}">
-                <a16:creationId xmlns="" xmlns:a16="http://schemas.microsoft.com/office/drawing/2014/main" id="{05FFC3A7-3EF2-9D59-70E3-4DDDB2E7C90F}"/>
+          <p:cNvPr id="17" name="Shape 3">
+            <a:extLst>
+              <a:ext uri="{FF2B5EF4-FFF2-40B4-BE49-F238E27FC236}">
+                <a16:creationId xmlns:a16="http://schemas.microsoft.com/office/drawing/2014/main" id="{D62AEC18-DF97-B119-A3E5-F51E0F2CE947}"/>
               </a:ext>
             </a:extLst>
           </p:cNvPr>
@@ -4942,47 +4802,26 @@
         </p:nvSpPr>
         <p:spPr>
           <a:xfrm>
-            <a:off x="837724" y="4361498"/>
-            <a:ext cx="6185535" cy="383024"/>
-          </a:xfrm>
-          <a:prstGeom prst="rect">
-            <a:avLst/>
-          </a:prstGeom>
-          <a:noFill/>
+            <a:off x="8020422" y="4073261"/>
+            <a:ext cx="179427" cy="351949"/>
+          </a:xfrm>
+          <a:prstGeom prst="roundRect">
+            <a:avLst>
+              <a:gd name="adj" fmla="val 20012"/>
+            </a:avLst>
+          </a:prstGeom>
+          <a:solidFill>
+            <a:srgbClr val="304755"/>
+          </a:solidFill>
           <a:ln/>
         </p:spPr>
-        <p:txBody>
-          <a:bodyPr wrap="none" lIns="0" tIns="0" rIns="0" bIns="0" rtlCol="0" anchor="t"/>
-          <a:lstStyle/>
-          <a:p>
-            <a:pPr marL="342900" indent="-342900" algn="l">
-              <a:lnSpc>
-                <a:spcPts val="3000"/>
-              </a:lnSpc>
-              <a:buSzPct val="100000"/>
-              <a:buChar char="•"/>
-            </a:pPr>
-            <a:r>
-              <a:rPr lang="en-US" sz="1850" dirty="0">
-                <a:solidFill>
-                  <a:srgbClr val="CAD6DE"/>
-                </a:solidFill>
-                <a:latin typeface="Cabin" pitchFamily="34" charset="0"/>
-                <a:ea typeface="Cabin" pitchFamily="34" charset="-122"/>
-                <a:cs typeface="Cabin" pitchFamily="34" charset="-120"/>
-              </a:rPr>
-              <a:t>訂單查詢</a:t>
-            </a:r>
-            <a:endParaRPr lang="en-US" sz="1850" dirty="0"/>
-          </a:p>
-        </p:txBody>
-      </p:sp>
-      <p:sp>
-        <p:nvSpPr>
-          <p:cNvPr id="5" name="Text 3">
-            <a:extLst>
-              <a:ext uri="{FF2B5EF4-FFF2-40B4-BE49-F238E27FC236}">
-                <a16:creationId xmlns="" xmlns:a16="http://schemas.microsoft.com/office/drawing/2014/main" id="{2A873B31-1202-A43A-F7DC-6B32F75B7E88}"/>
+      </p:sp>
+      <p:sp>
+        <p:nvSpPr>
+          <p:cNvPr id="18" name="Text 4">
+            <a:extLst>
+              <a:ext uri="{FF2B5EF4-FFF2-40B4-BE49-F238E27FC236}">
+                <a16:creationId xmlns:a16="http://schemas.microsoft.com/office/drawing/2014/main" id="{88E4F750-718E-D102-AEF8-2593A6462AAD}"/>
               </a:ext>
             </a:extLst>
           </p:cNvPr>
@@ -4991,105 +4830,7 @@
         </p:nvSpPr>
         <p:spPr>
           <a:xfrm>
-            <a:off x="837724" y="4828223"/>
-            <a:ext cx="6185535" cy="383024"/>
-          </a:xfrm>
-          <a:prstGeom prst="rect">
-            <a:avLst/>
-          </a:prstGeom>
-          <a:noFill/>
-          <a:ln/>
-        </p:spPr>
-        <p:txBody>
-          <a:bodyPr wrap="none" lIns="0" tIns="0" rIns="0" bIns="0" rtlCol="0" anchor="t"/>
-          <a:lstStyle/>
-          <a:p>
-            <a:pPr marL="342900" indent="-342900" algn="l">
-              <a:lnSpc>
-                <a:spcPts val="3000"/>
-              </a:lnSpc>
-              <a:buSzPct val="100000"/>
-              <a:buChar char="•"/>
-            </a:pPr>
-            <a:r>
-              <a:rPr lang="en-US" sz="1850" dirty="0">
-                <a:solidFill>
-                  <a:srgbClr val="CAD6DE"/>
-                </a:solidFill>
-                <a:latin typeface="Cabin" pitchFamily="34" charset="0"/>
-                <a:ea typeface="Cabin" pitchFamily="34" charset="-122"/>
-                <a:cs typeface="Cabin" pitchFamily="34" charset="-120"/>
-              </a:rPr>
-              <a:t>個人資料修改</a:t>
-            </a:r>
-            <a:endParaRPr lang="en-US" sz="1850" dirty="0"/>
-          </a:p>
-        </p:txBody>
-      </p:sp>
-      <p:sp>
-        <p:nvSpPr>
-          <p:cNvPr id="6" name="Text 4">
-            <a:extLst>
-              <a:ext uri="{FF2B5EF4-FFF2-40B4-BE49-F238E27FC236}">
-                <a16:creationId xmlns="" xmlns:a16="http://schemas.microsoft.com/office/drawing/2014/main" id="{36ACA40E-3DB5-B9F5-BF28-EE89C3BA5D12}"/>
-              </a:ext>
-            </a:extLst>
-          </p:cNvPr>
-          <p:cNvSpPr/>
-          <p:nvPr/>
-        </p:nvSpPr>
-        <p:spPr>
-          <a:xfrm>
-            <a:off x="837724" y="5294948"/>
-            <a:ext cx="6185535" cy="383024"/>
-          </a:xfrm>
-          <a:prstGeom prst="rect">
-            <a:avLst/>
-          </a:prstGeom>
-          <a:noFill/>
-          <a:ln/>
-        </p:spPr>
-        <p:txBody>
-          <a:bodyPr wrap="none" lIns="0" tIns="0" rIns="0" bIns="0" rtlCol="0" anchor="t"/>
-          <a:lstStyle/>
-          <a:p>
-            <a:pPr marL="342900" indent="-342900" algn="l">
-              <a:lnSpc>
-                <a:spcPts val="3000"/>
-              </a:lnSpc>
-              <a:buSzPct val="100000"/>
-              <a:buChar char="•"/>
-            </a:pPr>
-            <a:r>
-              <a:rPr lang="en-US" sz="1850" dirty="0">
-                <a:solidFill>
-                  <a:srgbClr val="CAD6DE"/>
-                </a:solidFill>
-                <a:latin typeface="Cabin" pitchFamily="34" charset="0"/>
-                <a:ea typeface="Cabin" pitchFamily="34" charset="-122"/>
-                <a:cs typeface="Cabin" pitchFamily="34" charset="-120"/>
-              </a:rPr>
-              <a:t>收貨地址管理</a:t>
-            </a:r>
-            <a:endParaRPr lang="en-US" sz="1850" dirty="0"/>
-          </a:p>
-        </p:txBody>
-      </p:sp>
-      <p:sp>
-        <p:nvSpPr>
-          <p:cNvPr id="7" name="Text 5">
-            <a:extLst>
-              <a:ext uri="{FF2B5EF4-FFF2-40B4-BE49-F238E27FC236}">
-                <a16:creationId xmlns="" xmlns:a16="http://schemas.microsoft.com/office/drawing/2014/main" id="{A88F8A75-D9ED-614B-F440-BAE0B93102D5}"/>
-              </a:ext>
-            </a:extLst>
-          </p:cNvPr>
-          <p:cNvSpPr/>
-          <p:nvPr/>
-        </p:nvSpPr>
-        <p:spPr>
-          <a:xfrm>
-            <a:off x="7614761" y="3770233"/>
+            <a:off x="8558823" y="4073261"/>
             <a:ext cx="2816185" cy="351949"/>
           </a:xfrm>
           <a:prstGeom prst="rect">
@@ -5111,13 +4852,13 @@
             <a:r>
               <a:rPr lang="en-US" sz="2200" dirty="0">
                 <a:solidFill>
-                  <a:srgbClr val="FFFFFF"/>
+                  <a:srgbClr val="CAD6DE"/>
                 </a:solidFill>
                 <a:latin typeface="Unbounded" pitchFamily="34" charset="0"/>
                 <a:ea typeface="Unbounded" pitchFamily="34" charset="-122"/>
                 <a:cs typeface="Unbounded" pitchFamily="34" charset="-120"/>
               </a:rPr>
-              <a:t>賣家頁面</a:t>
+              <a:t>商品分類管理</a:t>
             </a:r>
             <a:endParaRPr lang="en-US" sz="2200" dirty="0"/>
           </a:p>
@@ -5125,10 +4866,10 @@
       </p:sp>
       <p:sp>
         <p:nvSpPr>
-          <p:cNvPr id="8" name="Text 6">
-            <a:extLst>
-              <a:ext uri="{FF2B5EF4-FFF2-40B4-BE49-F238E27FC236}">
-                <a16:creationId xmlns="" xmlns:a16="http://schemas.microsoft.com/office/drawing/2014/main" id="{31351CE4-7E2B-2C0D-3E71-2533994973CF}"/>
+          <p:cNvPr id="19" name="Shape 5">
+            <a:extLst>
+              <a:ext uri="{FF2B5EF4-FFF2-40B4-BE49-F238E27FC236}">
+                <a16:creationId xmlns:a16="http://schemas.microsoft.com/office/drawing/2014/main" id="{5432BDA9-4F95-67D5-BEE4-D46E966D3BBE}"/>
               </a:ext>
             </a:extLst>
           </p:cNvPr>
@@ -5137,8 +4878,36 @@
         </p:nvSpPr>
         <p:spPr>
           <a:xfrm>
-            <a:off x="7614761" y="4361498"/>
-            <a:ext cx="6185535" cy="383024"/>
+            <a:off x="8379515" y="4664525"/>
+            <a:ext cx="179427" cy="351949"/>
+          </a:xfrm>
+          <a:prstGeom prst="roundRect">
+            <a:avLst>
+              <a:gd name="adj" fmla="val 20012"/>
+            </a:avLst>
+          </a:prstGeom>
+          <a:solidFill>
+            <a:srgbClr val="304755"/>
+          </a:solidFill>
+          <a:ln/>
+        </p:spPr>
+      </p:sp>
+      <p:sp>
+        <p:nvSpPr>
+          <p:cNvPr id="20" name="Text 6">
+            <a:extLst>
+              <a:ext uri="{FF2B5EF4-FFF2-40B4-BE49-F238E27FC236}">
+                <a16:creationId xmlns:a16="http://schemas.microsoft.com/office/drawing/2014/main" id="{FA5E5E96-FE36-AEC1-EAF3-180A8F4F51AC}"/>
+              </a:ext>
+            </a:extLst>
+          </p:cNvPr>
+          <p:cNvSpPr/>
+          <p:nvPr/>
+        </p:nvSpPr>
+        <p:spPr>
+          <a:xfrm>
+            <a:off x="8917915" y="4664525"/>
+            <a:ext cx="2816185" cy="351949"/>
           </a:xfrm>
           <a:prstGeom prst="rect">
             <a:avLst/>
@@ -5150,130 +4919,91 @@
           <a:bodyPr wrap="none" lIns="0" tIns="0" rIns="0" bIns="0" rtlCol="0" anchor="t"/>
           <a:lstStyle/>
           <a:p>
-            <a:pPr marL="342900" indent="-342900" algn="l">
+            <a:pPr marL="0" indent="0" algn="l">
               <a:lnSpc>
-                <a:spcPts val="3000"/>
+                <a:spcPts val="2750"/>
               </a:lnSpc>
-              <a:buSzPct val="100000"/>
-              <a:buChar char="•"/>
+              <a:buNone/>
             </a:pPr>
             <a:r>
-              <a:rPr lang="en-US" sz="1850" dirty="0">
+              <a:rPr lang="en-US" sz="2200" dirty="0">
                 <a:solidFill>
                   <a:srgbClr val="CAD6DE"/>
                 </a:solidFill>
-                <a:latin typeface="Cabin" pitchFamily="34" charset="0"/>
-                <a:ea typeface="Cabin" pitchFamily="34" charset="-122"/>
-                <a:cs typeface="Cabin" pitchFamily="34" charset="-120"/>
-              </a:rPr>
-              <a:t>訂單管理</a:t>
-            </a:r>
-            <a:endParaRPr lang="en-US" sz="1850" dirty="0"/>
-          </a:p>
-        </p:txBody>
-      </p:sp>
-      <p:sp>
-        <p:nvSpPr>
-          <p:cNvPr id="9" name="Text 7">
-            <a:extLst>
-              <a:ext uri="{FF2B5EF4-FFF2-40B4-BE49-F238E27FC236}">
-                <a16:creationId xmlns="" xmlns:a16="http://schemas.microsoft.com/office/drawing/2014/main" id="{DCDAC237-05A6-1705-71C3-CBE3781D0812}"/>
-              </a:ext>
-            </a:extLst>
-          </p:cNvPr>
-          <p:cNvSpPr/>
-          <p:nvPr/>
-        </p:nvSpPr>
-        <p:spPr>
-          <a:xfrm>
-            <a:off x="7614761" y="4828223"/>
-            <a:ext cx="6185535" cy="383024"/>
-          </a:xfrm>
-          <a:prstGeom prst="rect">
-            <a:avLst/>
-          </a:prstGeom>
-          <a:noFill/>
-          <a:ln/>
-        </p:spPr>
-        <p:txBody>
-          <a:bodyPr wrap="none" lIns="0" tIns="0" rIns="0" bIns="0" rtlCol="0" anchor="t"/>
-          <a:lstStyle/>
-          <a:p>
-            <a:pPr marL="342900" indent="-342900" algn="l">
-              <a:lnSpc>
-                <a:spcPts val="3000"/>
-              </a:lnSpc>
-              <a:buSzPct val="100000"/>
-              <a:buChar char="•"/>
-            </a:pPr>
-            <a:r>
-              <a:rPr lang="en-US" sz="1850" dirty="0">
-                <a:solidFill>
-                  <a:srgbClr val="CAD6DE"/>
-                </a:solidFill>
-                <a:latin typeface="Cabin" pitchFamily="34" charset="0"/>
-                <a:ea typeface="Cabin" pitchFamily="34" charset="-122"/>
-                <a:cs typeface="Cabin" pitchFamily="34" charset="-120"/>
-              </a:rPr>
-              <a:t>商品上下架</a:t>
-            </a:r>
-            <a:endParaRPr lang="en-US" sz="1850" dirty="0"/>
-          </a:p>
-        </p:txBody>
-      </p:sp>
-      <p:sp>
-        <p:nvSpPr>
-          <p:cNvPr id="10" name="Text 8">
-            <a:extLst>
-              <a:ext uri="{FF2B5EF4-FFF2-40B4-BE49-F238E27FC236}">
-                <a16:creationId xmlns="" xmlns:a16="http://schemas.microsoft.com/office/drawing/2014/main" id="{7F01AE55-69B8-B24D-BCC6-C9E377D93437}"/>
-              </a:ext>
-            </a:extLst>
-          </p:cNvPr>
-          <p:cNvSpPr/>
-          <p:nvPr/>
-        </p:nvSpPr>
-        <p:spPr>
-          <a:xfrm>
-            <a:off x="7614761" y="5294948"/>
-            <a:ext cx="6185535" cy="383024"/>
-          </a:xfrm>
-          <a:prstGeom prst="rect">
-            <a:avLst/>
-          </a:prstGeom>
-          <a:noFill/>
-          <a:ln/>
-        </p:spPr>
-        <p:txBody>
-          <a:bodyPr wrap="none" lIns="0" tIns="0" rIns="0" bIns="0" rtlCol="0" anchor="t"/>
-          <a:lstStyle/>
-          <a:p>
-            <a:pPr marL="342900" indent="-342900" algn="l">
-              <a:lnSpc>
-                <a:spcPts val="3000"/>
-              </a:lnSpc>
-              <a:buSzPct val="100000"/>
-              <a:buChar char="•"/>
-            </a:pPr>
-            <a:r>
-              <a:rPr lang="en-US" sz="1850" dirty="0">
-                <a:solidFill>
-                  <a:srgbClr val="CAD6DE"/>
-                </a:solidFill>
-                <a:latin typeface="Cabin" pitchFamily="34" charset="0"/>
-                <a:ea typeface="Cabin" pitchFamily="34" charset="-122"/>
-                <a:cs typeface="Cabin" pitchFamily="34" charset="-120"/>
-              </a:rPr>
-              <a:t>商品資訊修改</a:t>
-            </a:r>
-            <a:endParaRPr lang="en-US" sz="1850" dirty="0"/>
-          </a:p>
-        </p:txBody>
-      </p:sp>
+                <a:latin typeface="Unbounded" pitchFamily="34" charset="0"/>
+                <a:ea typeface="Unbounded" pitchFamily="34" charset="-122"/>
+                <a:cs typeface="Unbounded" pitchFamily="34" charset="-120"/>
+              </a:rPr>
+              <a:t>圖片上傳與庫存管控</a:t>
+            </a:r>
+            <a:endParaRPr lang="en-US" sz="2200" dirty="0"/>
+          </a:p>
+        </p:txBody>
+      </p:sp>
+      <p:pic>
+        <p:nvPicPr>
+          <p:cNvPr id="3" name="圖片 2">
+            <a:extLst>
+              <a:ext uri="{FF2B5EF4-FFF2-40B4-BE49-F238E27FC236}">
+                <a16:creationId xmlns:a16="http://schemas.microsoft.com/office/drawing/2014/main" id="{245A4EB3-EB5B-68F8-A630-E9D47F19EBA3}"/>
+              </a:ext>
+            </a:extLst>
+          </p:cNvPr>
+          <p:cNvPicPr>
+            <a:picLocks noChangeAspect="1"/>
+          </p:cNvPicPr>
+          <p:nvPr/>
+        </p:nvPicPr>
+        <p:blipFill>
+          <a:blip r:embed="rId2"/>
+          <a:stretch>
+            <a:fillRect/>
+          </a:stretch>
+        </p:blipFill>
+        <p:spPr>
+          <a:xfrm>
+            <a:off x="129889" y="606732"/>
+            <a:ext cx="6968953" cy="3660100"/>
+          </a:xfrm>
+          <a:prstGeom prst="rect">
+            <a:avLst/>
+          </a:prstGeom>
+        </p:spPr>
+      </p:pic>
+      <p:pic>
+        <p:nvPicPr>
+          <p:cNvPr id="5" name="圖片 4">
+            <a:extLst>
+              <a:ext uri="{FF2B5EF4-FFF2-40B4-BE49-F238E27FC236}">
+                <a16:creationId xmlns:a16="http://schemas.microsoft.com/office/drawing/2014/main" id="{1DE34FE1-B474-3B95-C075-31B31709CAA9}"/>
+              </a:ext>
+            </a:extLst>
+          </p:cNvPr>
+          <p:cNvPicPr>
+            <a:picLocks noChangeAspect="1"/>
+          </p:cNvPicPr>
+          <p:nvPr/>
+        </p:nvPicPr>
+        <p:blipFill>
+          <a:blip r:embed="rId3"/>
+          <a:stretch>
+            <a:fillRect/>
+          </a:stretch>
+        </p:blipFill>
+        <p:spPr>
+          <a:xfrm>
+            <a:off x="167291" y="4425210"/>
+            <a:ext cx="6931551" cy="2277112"/>
+          </a:xfrm>
+          <a:prstGeom prst="rect">
+            <a:avLst/>
+          </a:prstGeom>
+        </p:spPr>
+      </p:pic>
     </p:spTree>
     <p:extLst>
       <p:ext uri="{BB962C8B-B14F-4D97-AF65-F5344CB8AC3E}">
-        <p14:creationId xmlns:p14="http://schemas.microsoft.com/office/powerpoint/2010/main" val="559461770"/>
+        <p14:creationId xmlns:p14="http://schemas.microsoft.com/office/powerpoint/2010/main" val="255648532"/>
       </p:ext>
     </p:extLst>
   </p:cSld>
@@ -5300,12 +5030,348 @@
           <a:chExt cx="0" cy="0"/>
         </a:xfrm>
       </p:grpSpPr>
+      <p:sp>
+        <p:nvSpPr>
+          <p:cNvPr id="14" name="Text 0">
+            <a:extLst>
+              <a:ext uri="{FF2B5EF4-FFF2-40B4-BE49-F238E27FC236}">
+                <a16:creationId xmlns:a16="http://schemas.microsoft.com/office/drawing/2014/main" id="{3BB6AD06-1FAD-E83C-8A0F-5E1DB2F28494}"/>
+              </a:ext>
+            </a:extLst>
+          </p:cNvPr>
+          <p:cNvSpPr/>
+          <p:nvPr/>
+        </p:nvSpPr>
+        <p:spPr>
+          <a:xfrm>
+            <a:off x="7661449" y="2419006"/>
+            <a:ext cx="5632490" cy="704017"/>
+          </a:xfrm>
+          <a:prstGeom prst="rect">
+            <a:avLst/>
+          </a:prstGeom>
+          <a:noFill/>
+          <a:ln/>
+        </p:spPr>
+        <p:txBody>
+          <a:bodyPr wrap="none" lIns="0" tIns="0" rIns="0" bIns="0" rtlCol="0" anchor="t"/>
+          <a:lstStyle/>
+          <a:p>
+            <a:pPr marL="0" indent="0" algn="l">
+              <a:lnSpc>
+                <a:spcPts val="5500"/>
+              </a:lnSpc>
+              <a:buNone/>
+            </a:pPr>
+            <a:r>
+              <a:rPr lang="en-US" sz="4400" dirty="0" err="1">
+                <a:solidFill>
+                  <a:srgbClr val="FFFFFF"/>
+                </a:solidFill>
+                <a:latin typeface="Unbounded" pitchFamily="34" charset="0"/>
+                <a:ea typeface="Unbounded" pitchFamily="34" charset="-122"/>
+                <a:cs typeface="Unbounded" pitchFamily="34" charset="-120"/>
+              </a:rPr>
+              <a:t>後台功能</a:t>
+            </a:r>
+            <a:r>
+              <a:rPr lang="en-US" sz="4400" dirty="0">
+                <a:solidFill>
+                  <a:srgbClr val="FFFFFF"/>
+                </a:solidFill>
+                <a:latin typeface="Unbounded" pitchFamily="34" charset="0"/>
+                <a:ea typeface="Unbounded" pitchFamily="34" charset="-122"/>
+                <a:cs typeface="Unbounded" pitchFamily="34" charset="-120"/>
+              </a:rPr>
+              <a:t>：</a:t>
+            </a:r>
+            <a:r>
+              <a:rPr lang="zh-TW" altLang="en-US" sz="4400" dirty="0">
+                <a:solidFill>
+                  <a:srgbClr val="FFFFFF"/>
+                </a:solidFill>
+                <a:latin typeface="Unbounded" pitchFamily="34" charset="0"/>
+                <a:ea typeface="Unbounded" pitchFamily="34" charset="-122"/>
+                <a:cs typeface="Unbounded" pitchFamily="34" charset="-120"/>
+              </a:rPr>
+              <a:t>評論管理</a:t>
+            </a:r>
+            <a:endParaRPr lang="en-US" sz="4400" dirty="0"/>
+          </a:p>
+        </p:txBody>
+      </p:sp>
+      <p:sp>
+        <p:nvSpPr>
+          <p:cNvPr id="15" name="Shape 1">
+            <a:extLst>
+              <a:ext uri="{FF2B5EF4-FFF2-40B4-BE49-F238E27FC236}">
+                <a16:creationId xmlns:a16="http://schemas.microsoft.com/office/drawing/2014/main" id="{A33C417B-80A3-1650-D9D1-6E4EF0A19D1E}"/>
+              </a:ext>
+            </a:extLst>
+          </p:cNvPr>
+          <p:cNvSpPr/>
+          <p:nvPr/>
+        </p:nvSpPr>
+        <p:spPr>
+          <a:xfrm>
+            <a:off x="7661449" y="3481996"/>
+            <a:ext cx="179427" cy="351949"/>
+          </a:xfrm>
+          <a:prstGeom prst="roundRect">
+            <a:avLst>
+              <a:gd name="adj" fmla="val 20012"/>
+            </a:avLst>
+          </a:prstGeom>
+          <a:solidFill>
+            <a:srgbClr val="304755"/>
+          </a:solidFill>
+          <a:ln/>
+        </p:spPr>
+      </p:sp>
+      <p:sp>
+        <p:nvSpPr>
+          <p:cNvPr id="16" name="Text 2">
+            <a:extLst>
+              <a:ext uri="{FF2B5EF4-FFF2-40B4-BE49-F238E27FC236}">
+                <a16:creationId xmlns:a16="http://schemas.microsoft.com/office/drawing/2014/main" id="{CA008A43-82F8-359E-FEB4-8F6DACD4D05D}"/>
+              </a:ext>
+            </a:extLst>
+          </p:cNvPr>
+          <p:cNvSpPr/>
+          <p:nvPr/>
+        </p:nvSpPr>
+        <p:spPr>
+          <a:xfrm>
+            <a:off x="8199849" y="3481996"/>
+            <a:ext cx="2816185" cy="351949"/>
+          </a:xfrm>
+          <a:prstGeom prst="rect">
+            <a:avLst/>
+          </a:prstGeom>
+          <a:noFill/>
+          <a:ln/>
+        </p:spPr>
+        <p:txBody>
+          <a:bodyPr wrap="none" lIns="0" tIns="0" rIns="0" bIns="0" rtlCol="0" anchor="t"/>
+          <a:lstStyle/>
+          <a:p>
+            <a:pPr marL="0" indent="0" algn="l">
+              <a:lnSpc>
+                <a:spcPts val="2750"/>
+              </a:lnSpc>
+              <a:buNone/>
+            </a:pPr>
+            <a:r>
+              <a:rPr lang="zh-TW" altLang="en-US" sz="2200" dirty="0">
+                <a:solidFill>
+                  <a:srgbClr val="CAD6DE"/>
+                </a:solidFill>
+                <a:latin typeface="Unbounded" pitchFamily="34" charset="0"/>
+                <a:ea typeface="Unbounded" pitchFamily="34" charset="-122"/>
+              </a:rPr>
+              <a:t>可以審核評論</a:t>
+            </a:r>
+            <a:endParaRPr lang="en-US" sz="2200" dirty="0"/>
+          </a:p>
+        </p:txBody>
+      </p:sp>
+      <p:sp>
+        <p:nvSpPr>
+          <p:cNvPr id="17" name="Shape 3">
+            <a:extLst>
+              <a:ext uri="{FF2B5EF4-FFF2-40B4-BE49-F238E27FC236}">
+                <a16:creationId xmlns:a16="http://schemas.microsoft.com/office/drawing/2014/main" id="{D62AEC18-DF97-B119-A3E5-F51E0F2CE947}"/>
+              </a:ext>
+            </a:extLst>
+          </p:cNvPr>
+          <p:cNvSpPr/>
+          <p:nvPr/>
+        </p:nvSpPr>
+        <p:spPr>
+          <a:xfrm>
+            <a:off x="8020422" y="4073261"/>
+            <a:ext cx="179427" cy="351949"/>
+          </a:xfrm>
+          <a:prstGeom prst="roundRect">
+            <a:avLst>
+              <a:gd name="adj" fmla="val 20012"/>
+            </a:avLst>
+          </a:prstGeom>
+          <a:solidFill>
+            <a:srgbClr val="304755"/>
+          </a:solidFill>
+          <a:ln/>
+        </p:spPr>
+      </p:sp>
+      <p:sp>
+        <p:nvSpPr>
+          <p:cNvPr id="18" name="Text 4">
+            <a:extLst>
+              <a:ext uri="{FF2B5EF4-FFF2-40B4-BE49-F238E27FC236}">
+                <a16:creationId xmlns:a16="http://schemas.microsoft.com/office/drawing/2014/main" id="{88E4F750-718E-D102-AEF8-2593A6462AAD}"/>
+              </a:ext>
+            </a:extLst>
+          </p:cNvPr>
+          <p:cNvSpPr/>
+          <p:nvPr/>
+        </p:nvSpPr>
+        <p:spPr>
+          <a:xfrm>
+            <a:off x="8558823" y="4073261"/>
+            <a:ext cx="2816185" cy="351949"/>
+          </a:xfrm>
+          <a:prstGeom prst="rect">
+            <a:avLst/>
+          </a:prstGeom>
+          <a:noFill/>
+          <a:ln/>
+        </p:spPr>
+        <p:txBody>
+          <a:bodyPr wrap="none" lIns="0" tIns="0" rIns="0" bIns="0" rtlCol="0" anchor="t"/>
+          <a:lstStyle/>
+          <a:p>
+            <a:pPr marL="0" indent="0" algn="l">
+              <a:lnSpc>
+                <a:spcPts val="2750"/>
+              </a:lnSpc>
+              <a:buNone/>
+            </a:pPr>
+            <a:r>
+              <a:rPr lang="zh-TW" altLang="en-US" sz="2200" dirty="0">
+                <a:solidFill>
+                  <a:srgbClr val="CAD6DE"/>
+                </a:solidFill>
+                <a:latin typeface="Unbounded" pitchFamily="34" charset="0"/>
+              </a:rPr>
+              <a:t>可以執行</a:t>
+            </a:r>
+            <a:r>
+              <a:rPr lang="en-US" altLang="zh-TW" sz="2200" dirty="0">
+                <a:solidFill>
+                  <a:srgbClr val="CAD6DE"/>
+                </a:solidFill>
+                <a:latin typeface="Unbounded" pitchFamily="34" charset="0"/>
+                <a:ea typeface="Unbounded" pitchFamily="34" charset="-122"/>
+              </a:rPr>
+              <a:t>AI</a:t>
+            </a:r>
+            <a:r>
+              <a:rPr lang="zh-TW" altLang="en-US" sz="2200" dirty="0">
+                <a:solidFill>
+                  <a:srgbClr val="CAD6DE"/>
+                </a:solidFill>
+                <a:latin typeface="Unbounded" pitchFamily="34" charset="0"/>
+              </a:rPr>
+              <a:t>審核 </a:t>
+            </a:r>
+            <a:r>
+              <a:rPr lang="en-US" altLang="zh-TW" sz="2200" dirty="0" err="1">
+                <a:solidFill>
+                  <a:srgbClr val="CAD6DE"/>
+                </a:solidFill>
+                <a:latin typeface="Unbounded" pitchFamily="34" charset="0"/>
+              </a:rPr>
+              <a:t>Ollama</a:t>
+            </a:r>
+            <a:r>
+              <a:rPr lang="en-US" altLang="zh-TW" sz="2200" dirty="0">
+                <a:solidFill>
+                  <a:srgbClr val="CAD6DE"/>
+                </a:solidFill>
+                <a:latin typeface="Unbounded" pitchFamily="34" charset="0"/>
+              </a:rPr>
+              <a:t> model:Qwen2:</a:t>
+            </a:r>
+            <a:endParaRPr lang="en-US" sz="2200" dirty="0">
+              <a:solidFill>
+                <a:srgbClr val="CAD6DE"/>
+              </a:solidFill>
+              <a:latin typeface="Unbounded" pitchFamily="34" charset="0"/>
+              <a:ea typeface="Unbounded" pitchFamily="34" charset="-122"/>
+            </a:endParaRPr>
+          </a:p>
+        </p:txBody>
+      </p:sp>
+      <p:sp>
+        <p:nvSpPr>
+          <p:cNvPr id="19" name="Shape 5">
+            <a:extLst>
+              <a:ext uri="{FF2B5EF4-FFF2-40B4-BE49-F238E27FC236}">
+                <a16:creationId xmlns:a16="http://schemas.microsoft.com/office/drawing/2014/main" id="{5432BDA9-4F95-67D5-BEE4-D46E966D3BBE}"/>
+              </a:ext>
+            </a:extLst>
+          </p:cNvPr>
+          <p:cNvSpPr/>
+          <p:nvPr/>
+        </p:nvSpPr>
+        <p:spPr>
+          <a:xfrm>
+            <a:off x="8379515" y="4664525"/>
+            <a:ext cx="179427" cy="351949"/>
+          </a:xfrm>
+          <a:prstGeom prst="roundRect">
+            <a:avLst>
+              <a:gd name="adj" fmla="val 20012"/>
+            </a:avLst>
+          </a:prstGeom>
+          <a:solidFill>
+            <a:srgbClr val="304755"/>
+          </a:solidFill>
+          <a:ln/>
+        </p:spPr>
+      </p:sp>
+      <p:sp>
+        <p:nvSpPr>
+          <p:cNvPr id="20" name="Text 6">
+            <a:extLst>
+              <a:ext uri="{FF2B5EF4-FFF2-40B4-BE49-F238E27FC236}">
+                <a16:creationId xmlns:a16="http://schemas.microsoft.com/office/drawing/2014/main" id="{FA5E5E96-FE36-AEC1-EAF3-180A8F4F51AC}"/>
+              </a:ext>
+            </a:extLst>
+          </p:cNvPr>
+          <p:cNvSpPr/>
+          <p:nvPr/>
+        </p:nvSpPr>
+        <p:spPr>
+          <a:xfrm>
+            <a:off x="8917915" y="4664525"/>
+            <a:ext cx="2816185" cy="351949"/>
+          </a:xfrm>
+          <a:prstGeom prst="rect">
+            <a:avLst/>
+          </a:prstGeom>
+          <a:noFill/>
+          <a:ln/>
+        </p:spPr>
+        <p:txBody>
+          <a:bodyPr wrap="none" lIns="0" tIns="0" rIns="0" bIns="0" rtlCol="0" anchor="t"/>
+          <a:lstStyle/>
+          <a:p>
+            <a:pPr marL="0" indent="0" algn="l">
+              <a:lnSpc>
+                <a:spcPts val="2750"/>
+              </a:lnSpc>
+              <a:buNone/>
+            </a:pPr>
+            <a:r>
+              <a:rPr lang="zh-TW" altLang="en-US" sz="2200" dirty="0">
+                <a:solidFill>
+                  <a:srgbClr val="CAD6DE"/>
+                </a:solidFill>
+                <a:latin typeface="Unbounded" pitchFamily="34" charset="0"/>
+              </a:rPr>
+              <a:t>可以刪除評論</a:t>
+            </a:r>
+            <a:endParaRPr lang="en-US" sz="2200" dirty="0"/>
+          </a:p>
+        </p:txBody>
+      </p:sp>
       <p:pic>
         <p:nvPicPr>
-          <p:cNvPr id="2" name="Image 0" descr="preencoded.png">
-            <a:extLst>
-              <a:ext uri="{FF2B5EF4-FFF2-40B4-BE49-F238E27FC236}">
-                <a16:creationId xmlns="" xmlns:a16="http://schemas.microsoft.com/office/drawing/2014/main" id="{DB78EE77-4E5E-99A8-7B93-3656A60E8B5C}"/>
+          <p:cNvPr id="4" name="圖片 3">
+            <a:extLst>
+              <a:ext uri="{FF2B5EF4-FFF2-40B4-BE49-F238E27FC236}">
+                <a16:creationId xmlns:a16="http://schemas.microsoft.com/office/drawing/2014/main" id="{17CA52FB-2274-2148-F61E-5924170DA93A}"/>
               </a:ext>
             </a:extLst>
           </p:cNvPr>
@@ -5322,438 +5388,18 @@
         </p:blipFill>
         <p:spPr>
           <a:xfrm>
-            <a:off x="0" y="0"/>
-            <a:ext cx="5486400" cy="8229600"/>
+            <a:off x="88135" y="3362882"/>
+            <a:ext cx="7487917" cy="2124655"/>
           </a:xfrm>
           <a:prstGeom prst="rect">
             <a:avLst/>
           </a:prstGeom>
         </p:spPr>
       </p:pic>
-      <p:sp>
-        <p:nvSpPr>
-          <p:cNvPr id="3" name="Text 0">
-            <a:extLst>
-              <a:ext uri="{FF2B5EF4-FFF2-40B4-BE49-F238E27FC236}">
-                <a16:creationId xmlns="" xmlns:a16="http://schemas.microsoft.com/office/drawing/2014/main" id="{5C17D3ED-A85C-614C-6F5F-0F8B4B8933E8}"/>
-              </a:ext>
-            </a:extLst>
-          </p:cNvPr>
-          <p:cNvSpPr/>
-          <p:nvPr/>
-        </p:nvSpPr>
-        <p:spPr>
-          <a:xfrm>
-            <a:off x="6324124" y="2191583"/>
-            <a:ext cx="5632490" cy="704017"/>
-          </a:xfrm>
-          <a:prstGeom prst="rect">
-            <a:avLst/>
-          </a:prstGeom>
-          <a:noFill/>
-          <a:ln/>
-        </p:spPr>
-        <p:txBody>
-          <a:bodyPr wrap="none" lIns="0" tIns="0" rIns="0" bIns="0" rtlCol="0" anchor="t"/>
-          <a:lstStyle/>
-          <a:p>
-            <a:pPr marL="0" indent="0" algn="l">
-              <a:lnSpc>
-                <a:spcPts val="5500"/>
-              </a:lnSpc>
-              <a:buNone/>
-            </a:pPr>
-            <a:r>
-              <a:rPr lang="en-US" sz="4400" dirty="0">
-                <a:solidFill>
-                  <a:srgbClr val="FFFFFF"/>
-                </a:solidFill>
-                <a:latin typeface="Unbounded" pitchFamily="34" charset="0"/>
-                <a:ea typeface="Unbounded" pitchFamily="34" charset="-122"/>
-                <a:cs typeface="Unbounded" pitchFamily="34" charset="-120"/>
-              </a:rPr>
-              <a:t>前台功能：登錄/註冊</a:t>
-            </a:r>
-            <a:endParaRPr lang="en-US" sz="4400" dirty="0"/>
-          </a:p>
-        </p:txBody>
-      </p:sp>
-      <p:sp>
-        <p:nvSpPr>
-          <p:cNvPr id="4" name="Shape 1">
-            <a:extLst>
-              <a:ext uri="{FF2B5EF4-FFF2-40B4-BE49-F238E27FC236}">
-                <a16:creationId xmlns="" xmlns:a16="http://schemas.microsoft.com/office/drawing/2014/main" id="{1B708920-7D83-2557-C5EE-969F363F688E}"/>
-              </a:ext>
-            </a:extLst>
-          </p:cNvPr>
-          <p:cNvSpPr/>
-          <p:nvPr/>
-        </p:nvSpPr>
-        <p:spPr>
-          <a:xfrm>
-            <a:off x="6324124" y="3254573"/>
-            <a:ext cx="538520" cy="538520"/>
-          </a:xfrm>
-          <a:prstGeom prst="roundRect">
-            <a:avLst>
-              <a:gd name="adj" fmla="val 6668"/>
-            </a:avLst>
-          </a:prstGeom>
-          <a:solidFill>
-            <a:srgbClr val="304755"/>
-          </a:solidFill>
-          <a:ln/>
-        </p:spPr>
-      </p:sp>
-      <p:sp>
-        <p:nvSpPr>
-          <p:cNvPr id="5" name="Text 2">
-            <a:extLst>
-              <a:ext uri="{FF2B5EF4-FFF2-40B4-BE49-F238E27FC236}">
-                <a16:creationId xmlns="" xmlns:a16="http://schemas.microsoft.com/office/drawing/2014/main" id="{525A2525-6238-2A2C-F363-D7B41FF84E72}"/>
-              </a:ext>
-            </a:extLst>
-          </p:cNvPr>
-          <p:cNvSpPr/>
-          <p:nvPr/>
-        </p:nvSpPr>
-        <p:spPr>
-          <a:xfrm>
-            <a:off x="7101959" y="3336846"/>
-            <a:ext cx="2806898" cy="351949"/>
-          </a:xfrm>
-          <a:prstGeom prst="rect">
-            <a:avLst/>
-          </a:prstGeom>
-          <a:noFill/>
-          <a:ln/>
-        </p:spPr>
-        <p:txBody>
-          <a:bodyPr wrap="none" lIns="0" tIns="0" rIns="0" bIns="0" rtlCol="0" anchor="t"/>
-          <a:lstStyle/>
-          <a:p>
-            <a:pPr marL="0" indent="0" algn="l">
-              <a:lnSpc>
-                <a:spcPts val="2750"/>
-              </a:lnSpc>
-              <a:buNone/>
-            </a:pPr>
-            <a:r>
-              <a:rPr lang="en-US" sz="2200" dirty="0">
-                <a:solidFill>
-                  <a:srgbClr val="CAD6DE"/>
-                </a:solidFill>
-                <a:latin typeface="Unbounded" pitchFamily="34" charset="0"/>
-                <a:ea typeface="Unbounded" pitchFamily="34" charset="-122"/>
-                <a:cs typeface="Unbounded" pitchFamily="34" charset="-120"/>
-              </a:rPr>
-              <a:t>快速註冊流程</a:t>
-            </a:r>
-            <a:endParaRPr lang="en-US" sz="2200" dirty="0"/>
-          </a:p>
-        </p:txBody>
-      </p:sp>
-      <p:sp>
-        <p:nvSpPr>
-          <p:cNvPr id="6" name="Text 3">
-            <a:extLst>
-              <a:ext uri="{FF2B5EF4-FFF2-40B4-BE49-F238E27FC236}">
-                <a16:creationId xmlns="" xmlns:a16="http://schemas.microsoft.com/office/drawing/2014/main" id="{003E8AB1-B42E-162E-6AAE-453861A86BDA}"/>
-              </a:ext>
-            </a:extLst>
-          </p:cNvPr>
-          <p:cNvSpPr/>
-          <p:nvPr/>
-        </p:nvSpPr>
-        <p:spPr>
-          <a:xfrm>
-            <a:off x="7101959" y="3832384"/>
-            <a:ext cx="2806898" cy="766048"/>
-          </a:xfrm>
-          <a:prstGeom prst="rect">
-            <a:avLst/>
-          </a:prstGeom>
-          <a:noFill/>
-          <a:ln/>
-        </p:spPr>
-        <p:txBody>
-          <a:bodyPr wrap="square" lIns="0" tIns="0" rIns="0" bIns="0" rtlCol="0" anchor="t"/>
-          <a:lstStyle/>
-          <a:p>
-            <a:pPr marL="0" indent="0" algn="l">
-              <a:lnSpc>
-                <a:spcPts val="3000"/>
-              </a:lnSpc>
-              <a:buNone/>
-            </a:pPr>
-            <a:r>
-              <a:rPr lang="en-US" sz="1850" dirty="0">
-                <a:solidFill>
-                  <a:srgbClr val="CAD6DE"/>
-                </a:solidFill>
-                <a:latin typeface="Cabin" pitchFamily="34" charset="0"/>
-                <a:ea typeface="Cabin" pitchFamily="34" charset="-122"/>
-                <a:cs typeface="Cabin" pitchFamily="34" charset="-120"/>
-              </a:rPr>
-              <a:t>支援 Email 與手機驗證，流程簡便</a:t>
-            </a:r>
-            <a:endParaRPr lang="en-US" sz="1850" dirty="0"/>
-          </a:p>
-        </p:txBody>
-      </p:sp>
-      <p:sp>
-        <p:nvSpPr>
-          <p:cNvPr id="7" name="Shape 4">
-            <a:extLst>
-              <a:ext uri="{FF2B5EF4-FFF2-40B4-BE49-F238E27FC236}">
-                <a16:creationId xmlns="" xmlns:a16="http://schemas.microsoft.com/office/drawing/2014/main" id="{F36587D7-4551-5330-3E6B-68DE097B3EA7}"/>
-              </a:ext>
-            </a:extLst>
-          </p:cNvPr>
-          <p:cNvSpPr/>
-          <p:nvPr/>
-        </p:nvSpPr>
-        <p:spPr>
-          <a:xfrm>
-            <a:off x="10208062" y="3254573"/>
-            <a:ext cx="538520" cy="538520"/>
-          </a:xfrm>
-          <a:prstGeom prst="roundRect">
-            <a:avLst>
-              <a:gd name="adj" fmla="val 6668"/>
-            </a:avLst>
-          </a:prstGeom>
-          <a:solidFill>
-            <a:srgbClr val="304755"/>
-          </a:solidFill>
-          <a:ln/>
-        </p:spPr>
-      </p:sp>
-      <p:sp>
-        <p:nvSpPr>
-          <p:cNvPr id="8" name="Text 5">
-            <a:extLst>
-              <a:ext uri="{FF2B5EF4-FFF2-40B4-BE49-F238E27FC236}">
-                <a16:creationId xmlns="" xmlns:a16="http://schemas.microsoft.com/office/drawing/2014/main" id="{54375555-31C2-0C78-D98D-D284903CFEB0}"/>
-              </a:ext>
-            </a:extLst>
-          </p:cNvPr>
-          <p:cNvSpPr/>
-          <p:nvPr/>
-        </p:nvSpPr>
-        <p:spPr>
-          <a:xfrm>
-            <a:off x="10985897" y="3336846"/>
-            <a:ext cx="2806898" cy="351949"/>
-          </a:xfrm>
-          <a:prstGeom prst="rect">
-            <a:avLst/>
-          </a:prstGeom>
-          <a:noFill/>
-          <a:ln/>
-        </p:spPr>
-        <p:txBody>
-          <a:bodyPr wrap="none" lIns="0" tIns="0" rIns="0" bIns="0" rtlCol="0" anchor="t"/>
-          <a:lstStyle/>
-          <a:p>
-            <a:pPr marL="0" indent="0" algn="l">
-              <a:lnSpc>
-                <a:spcPts val="2750"/>
-              </a:lnSpc>
-              <a:buNone/>
-            </a:pPr>
-            <a:r>
-              <a:rPr lang="en-US" sz="2200" dirty="0">
-                <a:solidFill>
-                  <a:srgbClr val="CAD6DE"/>
-                </a:solidFill>
-                <a:latin typeface="Unbounded" pitchFamily="34" charset="0"/>
-                <a:ea typeface="Unbounded" pitchFamily="34" charset="-122"/>
-                <a:cs typeface="Unbounded" pitchFamily="34" charset="-120"/>
-              </a:rPr>
-              <a:t>社交帳號登錄</a:t>
-            </a:r>
-            <a:endParaRPr lang="en-US" sz="2200" dirty="0"/>
-          </a:p>
-        </p:txBody>
-      </p:sp>
-      <p:sp>
-        <p:nvSpPr>
-          <p:cNvPr id="9" name="Text 6">
-            <a:extLst>
-              <a:ext uri="{FF2B5EF4-FFF2-40B4-BE49-F238E27FC236}">
-                <a16:creationId xmlns="" xmlns:a16="http://schemas.microsoft.com/office/drawing/2014/main" id="{31FA1D24-44A2-B7ED-DA75-DCA52938D7E0}"/>
-              </a:ext>
-            </a:extLst>
-          </p:cNvPr>
-          <p:cNvSpPr/>
-          <p:nvPr/>
-        </p:nvSpPr>
-        <p:spPr>
-          <a:xfrm>
-            <a:off x="10985897" y="3832384"/>
-            <a:ext cx="2806898" cy="766048"/>
-          </a:xfrm>
-          <a:prstGeom prst="rect">
-            <a:avLst/>
-          </a:prstGeom>
-          <a:noFill/>
-          <a:ln/>
-        </p:spPr>
-        <p:txBody>
-          <a:bodyPr wrap="square" lIns="0" tIns="0" rIns="0" bIns="0" rtlCol="0" anchor="t"/>
-          <a:lstStyle/>
-          <a:p>
-            <a:pPr marL="0" indent="0" algn="l">
-              <a:lnSpc>
-                <a:spcPts val="3000"/>
-              </a:lnSpc>
-              <a:buNone/>
-            </a:pPr>
-            <a:r>
-              <a:rPr lang="en-US" sz="1850" dirty="0">
-                <a:solidFill>
-                  <a:srgbClr val="CAD6DE"/>
-                </a:solidFill>
-                <a:latin typeface="Cabin" pitchFamily="34" charset="0"/>
-                <a:ea typeface="Cabin" pitchFamily="34" charset="-122"/>
-                <a:cs typeface="Cabin" pitchFamily="34" charset="-120"/>
-              </a:rPr>
-              <a:t>整合 Google、Facebook 等第三方登入</a:t>
-            </a:r>
-            <a:endParaRPr lang="en-US" sz="1850" dirty="0"/>
-          </a:p>
-        </p:txBody>
-      </p:sp>
-      <p:sp>
-        <p:nvSpPr>
-          <p:cNvPr id="10" name="Shape 7">
-            <a:extLst>
-              <a:ext uri="{FF2B5EF4-FFF2-40B4-BE49-F238E27FC236}">
-                <a16:creationId xmlns="" xmlns:a16="http://schemas.microsoft.com/office/drawing/2014/main" id="{2CDEA406-0DE3-ED2A-DEDA-E72E1267A1F2}"/>
-              </a:ext>
-            </a:extLst>
-          </p:cNvPr>
-          <p:cNvSpPr/>
-          <p:nvPr/>
-        </p:nvSpPr>
-        <p:spPr>
-          <a:xfrm>
-            <a:off x="6324124" y="5077182"/>
-            <a:ext cx="538520" cy="538520"/>
-          </a:xfrm>
-          <a:prstGeom prst="roundRect">
-            <a:avLst>
-              <a:gd name="adj" fmla="val 6668"/>
-            </a:avLst>
-          </a:prstGeom>
-          <a:solidFill>
-            <a:srgbClr val="304755"/>
-          </a:solidFill>
-          <a:ln/>
-        </p:spPr>
-      </p:sp>
-      <p:sp>
-        <p:nvSpPr>
-          <p:cNvPr id="11" name="Text 8">
-            <a:extLst>
-              <a:ext uri="{FF2B5EF4-FFF2-40B4-BE49-F238E27FC236}">
-                <a16:creationId xmlns="" xmlns:a16="http://schemas.microsoft.com/office/drawing/2014/main" id="{F695FB61-72A5-A684-D20B-0E3BCF6F2DEE}"/>
-              </a:ext>
-            </a:extLst>
-          </p:cNvPr>
-          <p:cNvSpPr/>
-          <p:nvPr/>
-        </p:nvSpPr>
-        <p:spPr>
-          <a:xfrm>
-            <a:off x="7101959" y="5159454"/>
-            <a:ext cx="2816185" cy="351949"/>
-          </a:xfrm>
-          <a:prstGeom prst="rect">
-            <a:avLst/>
-          </a:prstGeom>
-          <a:noFill/>
-          <a:ln/>
-        </p:spPr>
-        <p:txBody>
-          <a:bodyPr wrap="none" lIns="0" tIns="0" rIns="0" bIns="0" rtlCol="0" anchor="t"/>
-          <a:lstStyle/>
-          <a:p>
-            <a:pPr marL="0" indent="0" algn="l">
-              <a:lnSpc>
-                <a:spcPts val="2750"/>
-              </a:lnSpc>
-              <a:buNone/>
-            </a:pPr>
-            <a:r>
-              <a:rPr lang="en-US" sz="2200" dirty="0">
-                <a:solidFill>
-                  <a:srgbClr val="CAD6DE"/>
-                </a:solidFill>
-                <a:latin typeface="Unbounded" pitchFamily="34" charset="0"/>
-                <a:ea typeface="Unbounded" pitchFamily="34" charset="-122"/>
-                <a:cs typeface="Unbounded" pitchFamily="34" charset="-120"/>
-              </a:rPr>
-              <a:t>忘記密碼流程</a:t>
-            </a:r>
-            <a:endParaRPr lang="en-US" sz="2200" dirty="0"/>
-          </a:p>
-        </p:txBody>
-      </p:sp>
-      <p:sp>
-        <p:nvSpPr>
-          <p:cNvPr id="12" name="Text 9">
-            <a:extLst>
-              <a:ext uri="{FF2B5EF4-FFF2-40B4-BE49-F238E27FC236}">
-                <a16:creationId xmlns="" xmlns:a16="http://schemas.microsoft.com/office/drawing/2014/main" id="{FC6D28B1-0043-283C-9FE5-8FB166F18ED9}"/>
-              </a:ext>
-            </a:extLst>
-          </p:cNvPr>
-          <p:cNvSpPr/>
-          <p:nvPr/>
-        </p:nvSpPr>
-        <p:spPr>
-          <a:xfrm>
-            <a:off x="7101959" y="5654993"/>
-            <a:ext cx="6690717" cy="383024"/>
-          </a:xfrm>
-          <a:prstGeom prst="rect">
-            <a:avLst/>
-          </a:prstGeom>
-          <a:noFill/>
-          <a:ln/>
-        </p:spPr>
-        <p:txBody>
-          <a:bodyPr wrap="none" lIns="0" tIns="0" rIns="0" bIns="0" rtlCol="0" anchor="t"/>
-          <a:lstStyle/>
-          <a:p>
-            <a:pPr marL="0" indent="0" algn="l">
-              <a:lnSpc>
-                <a:spcPts val="3000"/>
-              </a:lnSpc>
-              <a:buNone/>
-            </a:pPr>
-            <a:r>
-              <a:rPr lang="en-US" sz="1850" dirty="0">
-                <a:solidFill>
-                  <a:srgbClr val="CAD6DE"/>
-                </a:solidFill>
-                <a:latin typeface="Cabin" pitchFamily="34" charset="0"/>
-                <a:ea typeface="Cabin" pitchFamily="34" charset="-122"/>
-                <a:cs typeface="Cabin" pitchFamily="34" charset="-120"/>
-              </a:rPr>
-              <a:t>簡易重設密碼功能，提升使用便利性</a:t>
-            </a:r>
-            <a:endParaRPr lang="en-US" sz="1850" dirty="0"/>
-          </a:p>
-        </p:txBody>
-      </p:sp>
     </p:spTree>
     <p:extLst>
       <p:ext uri="{BB962C8B-B14F-4D97-AF65-F5344CB8AC3E}">
-        <p14:creationId xmlns:p14="http://schemas.microsoft.com/office/powerpoint/2010/main" val="4051262160"/>
+        <p14:creationId xmlns:p14="http://schemas.microsoft.com/office/powerpoint/2010/main" val="1361672668"/>
       </p:ext>
     </p:extLst>
   </p:cSld>
@@ -5780,12 +5426,156 @@
           <a:chExt cx="0" cy="0"/>
         </a:xfrm>
       </p:grpSpPr>
+      <p:sp>
+        <p:nvSpPr>
+          <p:cNvPr id="2" name="Text 0">
+            <a:extLst>
+              <a:ext uri="{FF2B5EF4-FFF2-40B4-BE49-F238E27FC236}">
+                <a16:creationId xmlns:a16="http://schemas.microsoft.com/office/drawing/2014/main" id="{FF282119-4EA9-A517-DBDB-E3E85B403388}"/>
+              </a:ext>
+            </a:extLst>
+          </p:cNvPr>
+          <p:cNvSpPr/>
+          <p:nvPr/>
+        </p:nvSpPr>
+        <p:spPr>
+          <a:xfrm>
+            <a:off x="837724" y="1070833"/>
+            <a:ext cx="5632490" cy="704017"/>
+          </a:xfrm>
+          <a:prstGeom prst="rect">
+            <a:avLst/>
+          </a:prstGeom>
+          <a:noFill/>
+          <a:ln/>
+        </p:spPr>
+        <p:txBody>
+          <a:bodyPr wrap="none" lIns="0" tIns="0" rIns="0" bIns="0" rtlCol="0" anchor="t"/>
+          <a:lstStyle/>
+          <a:p>
+            <a:pPr marL="0" indent="0" algn="l">
+              <a:lnSpc>
+                <a:spcPts val="5500"/>
+              </a:lnSpc>
+              <a:buNone/>
+            </a:pPr>
+            <a:r>
+              <a:rPr lang="en-US" sz="4400" dirty="0">
+                <a:solidFill>
+                  <a:srgbClr val="FFFFFF"/>
+                </a:solidFill>
+                <a:latin typeface="Unbounded" pitchFamily="34" charset="0"/>
+                <a:ea typeface="Unbounded" pitchFamily="34" charset="-122"/>
+                <a:cs typeface="Unbounded" pitchFamily="34" charset="-120"/>
+              </a:rPr>
+              <a:t>後台功能：訂單管理</a:t>
+            </a:r>
+            <a:endParaRPr lang="en-US" sz="4400" dirty="0"/>
+          </a:p>
+        </p:txBody>
+      </p:sp>
+      <p:sp>
+        <p:nvSpPr>
+          <p:cNvPr id="3" name="Text 1">
+            <a:extLst>
+              <a:ext uri="{FF2B5EF4-FFF2-40B4-BE49-F238E27FC236}">
+                <a16:creationId xmlns:a16="http://schemas.microsoft.com/office/drawing/2014/main" id="{193BF335-732B-06E6-28AD-60684F263D36}"/>
+              </a:ext>
+            </a:extLst>
+          </p:cNvPr>
+          <p:cNvSpPr/>
+          <p:nvPr/>
+        </p:nvSpPr>
+        <p:spPr>
+          <a:xfrm>
+            <a:off x="919917" y="2157382"/>
+            <a:ext cx="2816185" cy="351949"/>
+          </a:xfrm>
+          <a:prstGeom prst="rect">
+            <a:avLst/>
+          </a:prstGeom>
+          <a:noFill/>
+          <a:ln/>
+        </p:spPr>
+        <p:txBody>
+          <a:bodyPr wrap="none" lIns="0" tIns="0" rIns="0" bIns="0" rtlCol="0" anchor="t"/>
+          <a:lstStyle/>
+          <a:p>
+            <a:pPr marL="0" indent="0" algn="l">
+              <a:lnSpc>
+                <a:spcPts val="2750"/>
+              </a:lnSpc>
+              <a:buNone/>
+            </a:pPr>
+            <a:r>
+              <a:rPr lang="en-US" sz="2200" dirty="0">
+                <a:solidFill>
+                  <a:srgbClr val="FFFFFF"/>
+                </a:solidFill>
+                <a:latin typeface="Unbounded" pitchFamily="34" charset="0"/>
+                <a:ea typeface="Unbounded" pitchFamily="34" charset="-122"/>
+                <a:cs typeface="Unbounded" pitchFamily="34" charset="-120"/>
+              </a:rPr>
+              <a:t>訂單查看</a:t>
+            </a:r>
+            <a:endParaRPr lang="en-US" sz="2200" dirty="0"/>
+          </a:p>
+        </p:txBody>
+      </p:sp>
+      <p:sp>
+        <p:nvSpPr>
+          <p:cNvPr id="4" name="Text 2">
+            <a:extLst>
+              <a:ext uri="{FF2B5EF4-FFF2-40B4-BE49-F238E27FC236}">
+                <a16:creationId xmlns:a16="http://schemas.microsoft.com/office/drawing/2014/main" id="{CC12874B-9579-9660-A9EA-0418C27E7014}"/>
+              </a:ext>
+            </a:extLst>
+          </p:cNvPr>
+          <p:cNvSpPr/>
+          <p:nvPr/>
+        </p:nvSpPr>
+        <p:spPr>
+          <a:xfrm>
+            <a:off x="919917" y="2748646"/>
+            <a:ext cx="3928586" cy="383024"/>
+          </a:xfrm>
+          <a:prstGeom prst="rect">
+            <a:avLst/>
+          </a:prstGeom>
+          <a:noFill/>
+          <a:ln/>
+        </p:spPr>
+        <p:txBody>
+          <a:bodyPr wrap="none" lIns="0" tIns="0" rIns="0" bIns="0" rtlCol="0" anchor="t"/>
+          <a:lstStyle/>
+          <a:p>
+            <a:pPr marL="0" indent="0" algn="l">
+              <a:lnSpc>
+                <a:spcPts val="3000"/>
+              </a:lnSpc>
+              <a:buNone/>
+            </a:pPr>
+            <a:r>
+              <a:rPr lang="en-US" sz="1850" dirty="0">
+                <a:solidFill>
+                  <a:srgbClr val="CAD6DE"/>
+                </a:solidFill>
+                <a:latin typeface="Cabin" pitchFamily="34" charset="0"/>
+                <a:ea typeface="Cabin" pitchFamily="34" charset="-122"/>
+                <a:cs typeface="Cabin" pitchFamily="34" charset="-120"/>
+              </a:rPr>
+              <a:t>查看詳細訂單與列表資訊</a:t>
+            </a:r>
+            <a:endParaRPr lang="en-US" sz="1850" dirty="0"/>
+          </a:p>
+        </p:txBody>
+      </p:sp>
       <p:pic>
         <p:nvPicPr>
-          <p:cNvPr id="13" name="Image 0" descr="preencoded.png">
-            <a:extLst>
-              <a:ext uri="{FF2B5EF4-FFF2-40B4-BE49-F238E27FC236}">
-                <a16:creationId xmlns="" xmlns:a16="http://schemas.microsoft.com/office/drawing/2014/main" id="{859462BB-E089-1179-F12F-767A4553A5CA}"/>
+          <p:cNvPr id="12" name="圖片 11">
+            <a:extLst>
+              <a:ext uri="{FF2B5EF4-FFF2-40B4-BE49-F238E27FC236}">
+                <a16:creationId xmlns:a16="http://schemas.microsoft.com/office/drawing/2014/main" id="{213555AF-4D65-7AFC-2214-CF047D6380C1}"/>
               </a:ext>
             </a:extLst>
           </p:cNvPr>
@@ -5802,294 +5592,48 @@
         </p:blipFill>
         <p:spPr>
           <a:xfrm>
-            <a:off x="0" y="0"/>
-            <a:ext cx="5486400" cy="8229600"/>
+            <a:off x="6126502" y="418394"/>
+            <a:ext cx="8134029" cy="3829924"/>
           </a:xfrm>
           <a:prstGeom prst="rect">
             <a:avLst/>
           </a:prstGeom>
         </p:spPr>
       </p:pic>
-      <p:sp>
-        <p:nvSpPr>
-          <p:cNvPr id="14" name="Text 0">
-            <a:extLst>
-              <a:ext uri="{FF2B5EF4-FFF2-40B4-BE49-F238E27FC236}">
-                <a16:creationId xmlns="" xmlns:a16="http://schemas.microsoft.com/office/drawing/2014/main" id="{3BB6AD06-1FAD-E83C-8A0F-5E1DB2F28494}"/>
-              </a:ext>
-            </a:extLst>
-          </p:cNvPr>
-          <p:cNvSpPr/>
-          <p:nvPr/>
-        </p:nvSpPr>
-        <p:spPr>
-          <a:xfrm>
-            <a:off x="6324124" y="2696408"/>
-            <a:ext cx="5632490" cy="704017"/>
-          </a:xfrm>
-          <a:prstGeom prst="rect">
-            <a:avLst/>
-          </a:prstGeom>
-          <a:noFill/>
-          <a:ln/>
-        </p:spPr>
-        <p:txBody>
-          <a:bodyPr wrap="none" lIns="0" tIns="0" rIns="0" bIns="0" rtlCol="0" anchor="t"/>
-          <a:lstStyle/>
-          <a:p>
-            <a:pPr marL="0" indent="0" algn="l">
-              <a:lnSpc>
-                <a:spcPts val="5500"/>
-              </a:lnSpc>
-              <a:buNone/>
-            </a:pPr>
-            <a:r>
-              <a:rPr lang="en-US" sz="4400" dirty="0">
-                <a:solidFill>
-                  <a:srgbClr val="FFFFFF"/>
-                </a:solidFill>
-                <a:latin typeface="Unbounded" pitchFamily="34" charset="0"/>
-                <a:ea typeface="Unbounded" pitchFamily="34" charset="-122"/>
-                <a:cs typeface="Unbounded" pitchFamily="34" charset="-120"/>
-              </a:rPr>
-              <a:t>後台功能：商品管理</a:t>
-            </a:r>
-            <a:endParaRPr lang="en-US" sz="4400" dirty="0"/>
-          </a:p>
-        </p:txBody>
-      </p:sp>
-      <p:sp>
-        <p:nvSpPr>
-          <p:cNvPr id="15" name="Shape 1">
-            <a:extLst>
-              <a:ext uri="{FF2B5EF4-FFF2-40B4-BE49-F238E27FC236}">
-                <a16:creationId xmlns="" xmlns:a16="http://schemas.microsoft.com/office/drawing/2014/main" id="{A33C417B-80A3-1650-D9D1-6E4EF0A19D1E}"/>
-              </a:ext>
-            </a:extLst>
-          </p:cNvPr>
-          <p:cNvSpPr/>
-          <p:nvPr/>
-        </p:nvSpPr>
-        <p:spPr>
-          <a:xfrm>
-            <a:off x="6324124" y="3759398"/>
-            <a:ext cx="179427" cy="351949"/>
-          </a:xfrm>
-          <a:prstGeom prst="roundRect">
-            <a:avLst>
-              <a:gd name="adj" fmla="val 20012"/>
-            </a:avLst>
-          </a:prstGeom>
-          <a:solidFill>
-            <a:srgbClr val="304755"/>
-          </a:solidFill>
-          <a:ln/>
-        </p:spPr>
-      </p:sp>
-      <p:sp>
-        <p:nvSpPr>
-          <p:cNvPr id="16" name="Text 2">
-            <a:extLst>
-              <a:ext uri="{FF2B5EF4-FFF2-40B4-BE49-F238E27FC236}">
-                <a16:creationId xmlns="" xmlns:a16="http://schemas.microsoft.com/office/drawing/2014/main" id="{CA008A43-82F8-359E-FEB4-8F6DACD4D05D}"/>
-              </a:ext>
-            </a:extLst>
-          </p:cNvPr>
-          <p:cNvSpPr/>
-          <p:nvPr/>
-        </p:nvSpPr>
-        <p:spPr>
-          <a:xfrm>
-            <a:off x="6862524" y="3759398"/>
-            <a:ext cx="2816185" cy="351949"/>
-          </a:xfrm>
-          <a:prstGeom prst="rect">
-            <a:avLst/>
-          </a:prstGeom>
-          <a:noFill/>
-          <a:ln/>
-        </p:spPr>
-        <p:txBody>
-          <a:bodyPr wrap="none" lIns="0" tIns="0" rIns="0" bIns="0" rtlCol="0" anchor="t"/>
-          <a:lstStyle/>
-          <a:p>
-            <a:pPr marL="0" indent="0" algn="l">
-              <a:lnSpc>
-                <a:spcPts val="2750"/>
-              </a:lnSpc>
-              <a:buNone/>
-            </a:pPr>
-            <a:r>
-              <a:rPr lang="en-US" sz="2200" dirty="0">
-                <a:solidFill>
-                  <a:srgbClr val="CAD6DE"/>
-                </a:solidFill>
-                <a:latin typeface="Unbounded" pitchFamily="34" charset="0"/>
-                <a:ea typeface="Unbounded" pitchFamily="34" charset="-122"/>
-                <a:cs typeface="Unbounded" pitchFamily="34" charset="-120"/>
-              </a:rPr>
-              <a:t>商品新增與修改</a:t>
-            </a:r>
-            <a:endParaRPr lang="en-US" sz="2200" dirty="0"/>
-          </a:p>
-        </p:txBody>
-      </p:sp>
-      <p:sp>
-        <p:nvSpPr>
-          <p:cNvPr id="17" name="Shape 3">
-            <a:extLst>
-              <a:ext uri="{FF2B5EF4-FFF2-40B4-BE49-F238E27FC236}">
-                <a16:creationId xmlns="" xmlns:a16="http://schemas.microsoft.com/office/drawing/2014/main" id="{D62AEC18-DF97-B119-A3E5-F51E0F2CE947}"/>
-              </a:ext>
-            </a:extLst>
-          </p:cNvPr>
-          <p:cNvSpPr/>
-          <p:nvPr/>
-        </p:nvSpPr>
-        <p:spPr>
-          <a:xfrm>
-            <a:off x="6683097" y="4350663"/>
-            <a:ext cx="179427" cy="351949"/>
-          </a:xfrm>
-          <a:prstGeom prst="roundRect">
-            <a:avLst>
-              <a:gd name="adj" fmla="val 20012"/>
-            </a:avLst>
-          </a:prstGeom>
-          <a:solidFill>
-            <a:srgbClr val="304755"/>
-          </a:solidFill>
-          <a:ln/>
-        </p:spPr>
-      </p:sp>
-      <p:sp>
-        <p:nvSpPr>
-          <p:cNvPr id="18" name="Text 4">
-            <a:extLst>
-              <a:ext uri="{FF2B5EF4-FFF2-40B4-BE49-F238E27FC236}">
-                <a16:creationId xmlns="" xmlns:a16="http://schemas.microsoft.com/office/drawing/2014/main" id="{88E4F750-718E-D102-AEF8-2593A6462AAD}"/>
-              </a:ext>
-            </a:extLst>
-          </p:cNvPr>
-          <p:cNvSpPr/>
-          <p:nvPr/>
-        </p:nvSpPr>
-        <p:spPr>
-          <a:xfrm>
-            <a:off x="7221498" y="4350663"/>
-            <a:ext cx="2816185" cy="351949"/>
-          </a:xfrm>
-          <a:prstGeom prst="rect">
-            <a:avLst/>
-          </a:prstGeom>
-          <a:noFill/>
-          <a:ln/>
-        </p:spPr>
-        <p:txBody>
-          <a:bodyPr wrap="none" lIns="0" tIns="0" rIns="0" bIns="0" rtlCol="0" anchor="t"/>
-          <a:lstStyle/>
-          <a:p>
-            <a:pPr marL="0" indent="0" algn="l">
-              <a:lnSpc>
-                <a:spcPts val="2750"/>
-              </a:lnSpc>
-              <a:buNone/>
-            </a:pPr>
-            <a:r>
-              <a:rPr lang="en-US" sz="2200" dirty="0">
-                <a:solidFill>
-                  <a:srgbClr val="CAD6DE"/>
-                </a:solidFill>
-                <a:latin typeface="Unbounded" pitchFamily="34" charset="0"/>
-                <a:ea typeface="Unbounded" pitchFamily="34" charset="-122"/>
-                <a:cs typeface="Unbounded" pitchFamily="34" charset="-120"/>
-              </a:rPr>
-              <a:t>商品分類管理</a:t>
-            </a:r>
-            <a:endParaRPr lang="en-US" sz="2200" dirty="0"/>
-          </a:p>
-        </p:txBody>
-      </p:sp>
-      <p:sp>
-        <p:nvSpPr>
-          <p:cNvPr id="19" name="Shape 5">
-            <a:extLst>
-              <a:ext uri="{FF2B5EF4-FFF2-40B4-BE49-F238E27FC236}">
-                <a16:creationId xmlns="" xmlns:a16="http://schemas.microsoft.com/office/drawing/2014/main" id="{5432BDA9-4F95-67D5-BEE4-D46E966D3BBE}"/>
-              </a:ext>
-            </a:extLst>
-          </p:cNvPr>
-          <p:cNvSpPr/>
-          <p:nvPr/>
-        </p:nvSpPr>
-        <p:spPr>
-          <a:xfrm>
-            <a:off x="7042190" y="4941927"/>
-            <a:ext cx="179427" cy="351949"/>
-          </a:xfrm>
-          <a:prstGeom prst="roundRect">
-            <a:avLst>
-              <a:gd name="adj" fmla="val 20012"/>
-            </a:avLst>
-          </a:prstGeom>
-          <a:solidFill>
-            <a:srgbClr val="304755"/>
-          </a:solidFill>
-          <a:ln/>
-        </p:spPr>
-      </p:sp>
-      <p:sp>
-        <p:nvSpPr>
-          <p:cNvPr id="20" name="Text 6">
-            <a:extLst>
-              <a:ext uri="{FF2B5EF4-FFF2-40B4-BE49-F238E27FC236}">
-                <a16:creationId xmlns="" xmlns:a16="http://schemas.microsoft.com/office/drawing/2014/main" id="{FA5E5E96-FE36-AEC1-EAF3-180A8F4F51AC}"/>
-              </a:ext>
-            </a:extLst>
-          </p:cNvPr>
-          <p:cNvSpPr/>
-          <p:nvPr/>
-        </p:nvSpPr>
-        <p:spPr>
-          <a:xfrm>
-            <a:off x="7580590" y="4941927"/>
-            <a:ext cx="2816185" cy="351949"/>
-          </a:xfrm>
-          <a:prstGeom prst="rect">
-            <a:avLst/>
-          </a:prstGeom>
-          <a:noFill/>
-          <a:ln/>
-        </p:spPr>
-        <p:txBody>
-          <a:bodyPr wrap="none" lIns="0" tIns="0" rIns="0" bIns="0" rtlCol="0" anchor="t"/>
-          <a:lstStyle/>
-          <a:p>
-            <a:pPr marL="0" indent="0" algn="l">
-              <a:lnSpc>
-                <a:spcPts val="2750"/>
-              </a:lnSpc>
-              <a:buNone/>
-            </a:pPr>
-            <a:r>
-              <a:rPr lang="en-US" sz="2200" dirty="0">
-                <a:solidFill>
-                  <a:srgbClr val="CAD6DE"/>
-                </a:solidFill>
-                <a:latin typeface="Unbounded" pitchFamily="34" charset="0"/>
-                <a:ea typeface="Unbounded" pitchFamily="34" charset="-122"/>
-                <a:cs typeface="Unbounded" pitchFamily="34" charset="-120"/>
-              </a:rPr>
-              <a:t>圖片上傳與庫存管控</a:t>
-            </a:r>
-            <a:endParaRPr lang="en-US" sz="2200" dirty="0"/>
-          </a:p>
-        </p:txBody>
-      </p:sp>
+      <p:pic>
+        <p:nvPicPr>
+          <p:cNvPr id="14" name="圖片 13">
+            <a:extLst>
+              <a:ext uri="{FF2B5EF4-FFF2-40B4-BE49-F238E27FC236}">
+                <a16:creationId xmlns:a16="http://schemas.microsoft.com/office/drawing/2014/main" id="{46776221-BA84-4D2B-182B-2C953FB561A7}"/>
+              </a:ext>
+            </a:extLst>
+          </p:cNvPr>
+          <p:cNvPicPr>
+            <a:picLocks noChangeAspect="1"/>
+          </p:cNvPicPr>
+          <p:nvPr/>
+        </p:nvPicPr>
+        <p:blipFill>
+          <a:blip r:embed="rId3"/>
+          <a:stretch>
+            <a:fillRect/>
+          </a:stretch>
+        </p:blipFill>
+        <p:spPr>
+          <a:xfrm>
+            <a:off x="860083" y="3370985"/>
+            <a:ext cx="4615626" cy="4695898"/>
+          </a:xfrm>
+          <a:prstGeom prst="rect">
+            <a:avLst/>
+          </a:prstGeom>
+        </p:spPr>
+      </p:pic>
     </p:spTree>
     <p:extLst>
       <p:ext uri="{BB962C8B-B14F-4D97-AF65-F5344CB8AC3E}">
-        <p14:creationId xmlns:p14="http://schemas.microsoft.com/office/powerpoint/2010/main" val="255648532"/>
+        <p14:creationId xmlns:p14="http://schemas.microsoft.com/office/powerpoint/2010/main" val="3010883950"/>
       </p:ext>
     </p:extLst>
   </p:cSld>
@@ -6102,6 +5646,14 @@
 <file path=ppt/slides/slide2.xml><?xml version="1.0" encoding="utf-8"?>
 <p:sld xmlns:a="http://schemas.openxmlformats.org/drawingml/2006/main" xmlns:r="http://schemas.openxmlformats.org/officeDocument/2006/relationships" xmlns:p="http://schemas.openxmlformats.org/presentationml/2006/main">
   <p:cSld>
+    <p:bg>
+      <p:bgPr>
+        <a:solidFill>
+          <a:schemeClr val="bg1"/>
+        </a:solidFill>
+        <a:effectLst/>
+      </p:bgPr>
+    </p:bg>
     <p:spTree>
       <p:nvGrpSpPr>
         <p:cNvPr id="1" name=""/>
@@ -6121,7 +5673,7 @@
           <p:cNvPr id="2" name="Text 0">
             <a:extLst>
               <a:ext uri="{FF2B5EF4-FFF2-40B4-BE49-F238E27FC236}">
-                <a16:creationId xmlns="" xmlns:a16="http://schemas.microsoft.com/office/drawing/2014/main" id="{43051339-9B16-F8D1-2B54-6670F65E19EA}"/>
+                <a16:creationId xmlns:a16="http://schemas.microsoft.com/office/drawing/2014/main" id="{43051339-9B16-F8D1-2B54-6670F65E19EA}"/>
               </a:ext>
             </a:extLst>
           </p:cNvPr>
@@ -6151,9 +5703,6 @@
             </a:pPr>
             <a:r>
               <a:rPr lang="zh-TW" altLang="en-US" sz="4400" dirty="0">
-                <a:solidFill>
-                  <a:srgbClr val="FFFFFF"/>
-                </a:solidFill>
                 <a:latin typeface="Unbounded" pitchFamily="34" charset="0"/>
                 <a:ea typeface="Unbounded" pitchFamily="34" charset="-122"/>
                 <a:cs typeface="Unbounded" pitchFamily="34" charset="-120"/>
@@ -6169,7 +5718,7 @@
           <p:cNvPr id="3" name="Text 1">
             <a:extLst>
               <a:ext uri="{FF2B5EF4-FFF2-40B4-BE49-F238E27FC236}">
-                <a16:creationId xmlns="" xmlns:a16="http://schemas.microsoft.com/office/drawing/2014/main" id="{0C2EA2AC-9720-E7D0-2018-95BCB5B020ED}"/>
+                <a16:creationId xmlns:a16="http://schemas.microsoft.com/office/drawing/2014/main" id="{0C2EA2AC-9720-E7D0-2018-95BCB5B020ED}"/>
               </a:ext>
             </a:extLst>
           </p:cNvPr>
@@ -6198,9 +5747,6 @@
             </a:pPr>
             <a:r>
               <a:rPr lang="zh-TW" altLang="en-US" sz="2400" dirty="0">
-                <a:solidFill>
-                  <a:srgbClr val="CAD6DE"/>
-                </a:solidFill>
                 <a:latin typeface="Cabin" pitchFamily="34" charset="0"/>
                 <a:ea typeface="Cabin" pitchFamily="34" charset="-122"/>
                 <a:cs typeface="Cabin" pitchFamily="34" charset="-120"/>
@@ -6209,9 +5755,6 @@
             </a:r>
             <a:r>
               <a:rPr lang="en-US" altLang="zh-TW" sz="2400" dirty="0">
-                <a:solidFill>
-                  <a:srgbClr val="CAD6DE"/>
-                </a:solidFill>
                 <a:latin typeface="Cabin" pitchFamily="34" charset="0"/>
                 <a:ea typeface="Cabin" pitchFamily="34" charset="-122"/>
                 <a:cs typeface="Cabin" pitchFamily="34" charset="-120"/>
@@ -6220,9 +5763,6 @@
             </a:r>
             <a:r>
               <a:rPr lang="zh-TW" altLang="en-US" sz="2400" dirty="0">
-                <a:solidFill>
-                  <a:srgbClr val="CAD6DE"/>
-                </a:solidFill>
                 <a:latin typeface="Cabin" pitchFamily="34" charset="0"/>
                 <a:ea typeface="Cabin" pitchFamily="34" charset="-122"/>
                 <a:cs typeface="Cabin" pitchFamily="34" charset="-120"/>
@@ -6238,7 +5778,7 @@
           <p:cNvPr id="4" name="Text 2">
             <a:extLst>
               <a:ext uri="{FF2B5EF4-FFF2-40B4-BE49-F238E27FC236}">
-                <a16:creationId xmlns="" xmlns:a16="http://schemas.microsoft.com/office/drawing/2014/main" id="{32CC4251-045F-A735-674C-7674D5575551}"/>
+                <a16:creationId xmlns:a16="http://schemas.microsoft.com/office/drawing/2014/main" id="{32CC4251-045F-A735-674C-7674D5575551}"/>
               </a:ext>
             </a:extLst>
           </p:cNvPr>
@@ -6266,31 +5806,14 @@
               </a:lnSpc>
             </a:pPr>
             <a:r>
-              <a:rPr lang="zh-TW" altLang="en-US" sz="1850" dirty="0" smtClean="0">
-                <a:solidFill>
-                  <a:srgbClr val="CAD6DE"/>
-                </a:solidFill>
+              <a:rPr lang="zh-TW" altLang="en-US" sz="1850" dirty="0">
                 <a:latin typeface="Cabin" pitchFamily="34" charset="0"/>
                 <a:ea typeface="Cabin" pitchFamily="34" charset="-122"/>
                 <a:cs typeface="Cabin" pitchFamily="34" charset="-120"/>
               </a:rPr>
-              <a:t>整合</a:t>
-            </a:r>
-            <a:r>
-              <a:rPr lang="zh-TW" altLang="en-US" sz="1850" dirty="0">
-                <a:solidFill>
-                  <a:srgbClr val="CAD6DE"/>
-                </a:solidFill>
-                <a:latin typeface="Cabin" pitchFamily="34" charset="0"/>
-                <a:ea typeface="Cabin" pitchFamily="34" charset="-122"/>
-                <a:cs typeface="Cabin" pitchFamily="34" charset="-120"/>
-              </a:rPr>
-              <a:t>買家前台與員工後台功能</a:t>
+              <a:t>整合買家前台與員工後台功能</a:t>
             </a:r>
             <a:endParaRPr lang="en-US" sz="1850" dirty="0">
-              <a:solidFill>
-                <a:srgbClr val="CAD6DE"/>
-              </a:solidFill>
               <a:latin typeface="Cabin" pitchFamily="34" charset="0"/>
               <a:ea typeface="Cabin" pitchFamily="34" charset="-122"/>
               <a:cs typeface="Cabin" pitchFamily="34" charset="-120"/>
@@ -6303,7 +5826,7 @@
           <p:cNvPr id="5" name="Text 1">
             <a:extLst>
               <a:ext uri="{FF2B5EF4-FFF2-40B4-BE49-F238E27FC236}">
-                <a16:creationId xmlns="" xmlns:a16="http://schemas.microsoft.com/office/drawing/2014/main" id="{0C2EA2AC-9720-E7D0-2018-95BCB5B020ED}"/>
+                <a16:creationId xmlns:a16="http://schemas.microsoft.com/office/drawing/2014/main" id="{0C2EA2AC-9720-E7D0-2018-95BCB5B020ED}"/>
               </a:ext>
             </a:extLst>
           </p:cNvPr>
@@ -6332,9 +5855,6 @@
             </a:pPr>
             <a:r>
               <a:rPr lang="zh-TW" altLang="en-US" sz="2400" dirty="0">
-                <a:solidFill>
-                  <a:srgbClr val="CAD6DE"/>
-                </a:solidFill>
                 <a:latin typeface="Cabin" pitchFamily="34" charset="0"/>
                 <a:ea typeface="Cabin" pitchFamily="34" charset="-122"/>
                 <a:cs typeface="Cabin" pitchFamily="34" charset="-120"/>
@@ -6342,9 +5862,6 @@
               <a:t>設計後台管理介面</a:t>
             </a:r>
             <a:endParaRPr lang="en-US" sz="2400" dirty="0">
-              <a:solidFill>
-                <a:srgbClr val="CAD6DE"/>
-              </a:solidFill>
               <a:latin typeface="Cabin" pitchFamily="34" charset="0"/>
               <a:ea typeface="Cabin" pitchFamily="34" charset="-122"/>
               <a:cs typeface="Cabin" pitchFamily="34" charset="-120"/>
@@ -6357,7 +5874,7 @@
           <p:cNvPr id="6" name="Text 2">
             <a:extLst>
               <a:ext uri="{FF2B5EF4-FFF2-40B4-BE49-F238E27FC236}">
-                <a16:creationId xmlns="" xmlns:a16="http://schemas.microsoft.com/office/drawing/2014/main" id="{32CC4251-045F-A735-674C-7674D5575551}"/>
+                <a16:creationId xmlns:a16="http://schemas.microsoft.com/office/drawing/2014/main" id="{32CC4251-045F-A735-674C-7674D5575551}"/>
               </a:ext>
             </a:extLst>
           </p:cNvPr>
@@ -6386,9 +5903,6 @@
             </a:pPr>
             <a:r>
               <a:rPr lang="zh-TW" altLang="en-US" sz="1850" dirty="0">
-                <a:solidFill>
-                  <a:srgbClr val="CAD6DE"/>
-                </a:solidFill>
                 <a:latin typeface="Cabin" pitchFamily="34" charset="0"/>
                 <a:ea typeface="Cabin" pitchFamily="34" charset="-122"/>
                 <a:cs typeface="Cabin" pitchFamily="34" charset="-120"/>
@@ -6396,9 +5910,6 @@
               <a:t>商品分類瀏覽、搜尋、購物車、訂單管理、推薦系統</a:t>
             </a:r>
             <a:endParaRPr lang="en-US" sz="1850" dirty="0">
-              <a:solidFill>
-                <a:srgbClr val="CAD6DE"/>
-              </a:solidFill>
               <a:latin typeface="Cabin" pitchFamily="34" charset="0"/>
               <a:ea typeface="Cabin" pitchFamily="34" charset="-122"/>
               <a:cs typeface="Cabin" pitchFamily="34" charset="-120"/>
@@ -6411,7 +5922,7 @@
           <p:cNvPr id="9" name="Text 1">
             <a:extLst>
               <a:ext uri="{FF2B5EF4-FFF2-40B4-BE49-F238E27FC236}">
-                <a16:creationId xmlns="" xmlns:a16="http://schemas.microsoft.com/office/drawing/2014/main" id="{0C2EA2AC-9720-E7D0-2018-95BCB5B020ED}"/>
+                <a16:creationId xmlns:a16="http://schemas.microsoft.com/office/drawing/2014/main" id="{0C2EA2AC-9720-E7D0-2018-95BCB5B020ED}"/>
               </a:ext>
             </a:extLst>
           </p:cNvPr>
@@ -6440,25 +5951,11 @@
             </a:pPr>
             <a:r>
               <a:rPr lang="zh-TW" altLang="en-US" sz="2400" dirty="0">
-                <a:solidFill>
-                  <a:srgbClr val="CAD6DE"/>
-                </a:solidFill>
                 <a:latin typeface="Cabin" pitchFamily="34" charset="0"/>
                 <a:ea typeface="Cabin" pitchFamily="34" charset="-122"/>
                 <a:cs typeface="Cabin" pitchFamily="34" charset="-120"/>
               </a:rPr>
-              <a:t>實作完整購物流程</a:t>
-            </a:r>
-            <a:r>
-              <a:rPr lang="zh-TW" altLang="en-US" sz="2400" dirty="0" smtClean="0">
-                <a:solidFill>
-                  <a:srgbClr val="CAD6DE"/>
-                </a:solidFill>
-                <a:latin typeface="Cabin" pitchFamily="34" charset="0"/>
-                <a:ea typeface="Cabin" pitchFamily="34" charset="-122"/>
-                <a:cs typeface="Cabin" pitchFamily="34" charset="-120"/>
-              </a:rPr>
-              <a:t>台</a:t>
+              <a:t>實作完整購物流程台</a:t>
             </a:r>
             <a:endParaRPr lang="en-US" sz="2200" dirty="0"/>
           </a:p>
@@ -6469,7 +5966,7 @@
           <p:cNvPr id="10" name="Text 2">
             <a:extLst>
               <a:ext uri="{FF2B5EF4-FFF2-40B4-BE49-F238E27FC236}">
-                <a16:creationId xmlns="" xmlns:a16="http://schemas.microsoft.com/office/drawing/2014/main" id="{32CC4251-045F-A735-674C-7674D5575551}"/>
+                <a16:creationId xmlns:a16="http://schemas.microsoft.com/office/drawing/2014/main" id="{32CC4251-045F-A735-674C-7674D5575551}"/>
               </a:ext>
             </a:extLst>
           </p:cNvPr>
@@ -6498,9 +5995,6 @@
             </a:pPr>
             <a:r>
               <a:rPr lang="zh-TW" altLang="en-US" sz="1850" dirty="0">
-                <a:solidFill>
-                  <a:srgbClr val="CAD6DE"/>
-                </a:solidFill>
                 <a:latin typeface="Cabin" pitchFamily="34" charset="0"/>
                 <a:ea typeface="Cabin" pitchFamily="34" charset="-122"/>
                 <a:cs typeface="Cabin" pitchFamily="34" charset="-120"/>
@@ -6508,9 +6002,6 @@
               <a:t>商品、訂單、會員、推薦系統、瀏覽紀錄管理</a:t>
             </a:r>
             <a:endParaRPr lang="en-US" sz="1850" dirty="0">
-              <a:solidFill>
-                <a:srgbClr val="CAD6DE"/>
-              </a:solidFill>
               <a:latin typeface="Cabin" pitchFamily="34" charset="0"/>
               <a:ea typeface="Cabin" pitchFamily="34" charset="-122"/>
               <a:cs typeface="Cabin" pitchFamily="34" charset="-120"/>
@@ -6550,10 +6041,10 @@
       </p:grpSpPr>
       <p:sp>
         <p:nvSpPr>
-          <p:cNvPr id="2" name="Text 0">
-            <a:extLst>
-              <a:ext uri="{FF2B5EF4-FFF2-40B4-BE49-F238E27FC236}">
-                <a16:creationId xmlns="" xmlns:a16="http://schemas.microsoft.com/office/drawing/2014/main" id="{FF282119-4EA9-A517-DBDB-E3E85B403388}"/>
+          <p:cNvPr id="3" name="Text 0">
+            <a:extLst>
+              <a:ext uri="{FF2B5EF4-FFF2-40B4-BE49-F238E27FC236}">
+                <a16:creationId xmlns:a16="http://schemas.microsoft.com/office/drawing/2014/main" id="{A2FB9310-4B85-E2EC-BA0D-8C555808BCA1}"/>
               </a:ext>
             </a:extLst>
           </p:cNvPr>
@@ -6562,7 +6053,7 @@
         </p:nvSpPr>
         <p:spPr>
           <a:xfrm>
-            <a:off x="837724" y="2868811"/>
+            <a:off x="6324124" y="2106454"/>
             <a:ext cx="5632490" cy="704017"/>
           </a:xfrm>
           <a:prstGeom prst="rect">
@@ -6590,7 +6081,7 @@
                 <a:ea typeface="Unbounded" pitchFamily="34" charset="-122"/>
                 <a:cs typeface="Unbounded" pitchFamily="34" charset="-120"/>
               </a:rPr>
-              <a:t>後台功能：訂單管理</a:t>
+              <a:t>後台功能：使用者管理</a:t>
             </a:r>
             <a:endParaRPr lang="en-US" sz="4400" dirty="0"/>
           </a:p>
@@ -6598,10 +6089,10 @@
       </p:sp>
       <p:sp>
         <p:nvSpPr>
-          <p:cNvPr id="3" name="Text 1">
-            <a:extLst>
-              <a:ext uri="{FF2B5EF4-FFF2-40B4-BE49-F238E27FC236}">
-                <a16:creationId xmlns="" xmlns:a16="http://schemas.microsoft.com/office/drawing/2014/main" id="{193BF335-732B-06E6-28AD-60684F263D36}"/>
+          <p:cNvPr id="4" name="Shape 1">
+            <a:extLst>
+              <a:ext uri="{FF2B5EF4-FFF2-40B4-BE49-F238E27FC236}">
+                <a16:creationId xmlns:a16="http://schemas.microsoft.com/office/drawing/2014/main" id="{BFE1C90B-B77A-517E-C76E-CEA973336C09}"/>
               </a:ext>
             </a:extLst>
           </p:cNvPr>
@@ -6610,7 +6101,35 @@
         </p:nvSpPr>
         <p:spPr>
           <a:xfrm>
-            <a:off x="837724" y="4171117"/>
+            <a:off x="6324124" y="3169444"/>
+            <a:ext cx="3614618" cy="1357193"/>
+          </a:xfrm>
+          <a:prstGeom prst="roundRect">
+            <a:avLst>
+              <a:gd name="adj" fmla="val 2646"/>
+            </a:avLst>
+          </a:prstGeom>
+          <a:solidFill>
+            <a:srgbClr val="304755"/>
+          </a:solidFill>
+          <a:ln/>
+        </p:spPr>
+      </p:sp>
+      <p:sp>
+        <p:nvSpPr>
+          <p:cNvPr id="5" name="Text 2">
+            <a:extLst>
+              <a:ext uri="{FF2B5EF4-FFF2-40B4-BE49-F238E27FC236}">
+                <a16:creationId xmlns:a16="http://schemas.microsoft.com/office/drawing/2014/main" id="{648DA8B2-7BF2-2D26-5396-989491B30F15}"/>
+              </a:ext>
+            </a:extLst>
+          </p:cNvPr>
+          <p:cNvSpPr/>
+          <p:nvPr/>
+        </p:nvSpPr>
+        <p:spPr>
+          <a:xfrm>
+            <a:off x="6563439" y="3408759"/>
             <a:ext cx="2816185" cy="351949"/>
           </a:xfrm>
           <a:prstGeom prst="rect">
@@ -6632,13 +6151,13 @@
             <a:r>
               <a:rPr lang="en-US" sz="2200" dirty="0">
                 <a:solidFill>
-                  <a:srgbClr val="FFFFFF"/>
+                  <a:srgbClr val="CAD6DE"/>
                 </a:solidFill>
                 <a:latin typeface="Unbounded" pitchFamily="34" charset="0"/>
                 <a:ea typeface="Unbounded" pitchFamily="34" charset="-122"/>
                 <a:cs typeface="Unbounded" pitchFamily="34" charset="-120"/>
               </a:rPr>
-              <a:t>訂單查看</a:t>
+              <a:t>用戶資料管理</a:t>
             </a:r>
             <a:endParaRPr lang="en-US" sz="2200" dirty="0"/>
           </a:p>
@@ -6646,10 +6165,10 @@
       </p:sp>
       <p:sp>
         <p:nvSpPr>
-          <p:cNvPr id="4" name="Text 2">
-            <a:extLst>
-              <a:ext uri="{FF2B5EF4-FFF2-40B4-BE49-F238E27FC236}">
-                <a16:creationId xmlns="" xmlns:a16="http://schemas.microsoft.com/office/drawing/2014/main" id="{CC12874B-9579-9660-A9EA-0418C27E7014}"/>
+          <p:cNvPr id="6" name="Text 3">
+            <a:extLst>
+              <a:ext uri="{FF2B5EF4-FFF2-40B4-BE49-F238E27FC236}">
+                <a16:creationId xmlns:a16="http://schemas.microsoft.com/office/drawing/2014/main" id="{B95CB391-9D5A-148C-C8B0-56E4F14A860F}"/>
               </a:ext>
             </a:extLst>
           </p:cNvPr>
@@ -6658,8 +6177,130 @@
         </p:nvSpPr>
         <p:spPr>
           <a:xfrm>
-            <a:off x="837724" y="4762381"/>
-            <a:ext cx="3928586" cy="383024"/>
+            <a:off x="6563439" y="3904297"/>
+            <a:ext cx="3135987" cy="383024"/>
+          </a:xfrm>
+          <a:prstGeom prst="rect">
+            <a:avLst/>
+          </a:prstGeom>
+          <a:noFill/>
+          <a:ln/>
+        </p:spPr>
+        <p:txBody>
+          <a:bodyPr wrap="none" lIns="0" tIns="0" rIns="0" bIns="0" rtlCol="0" anchor="t"/>
+          <a:lstStyle/>
+          <a:p>
+            <a:pPr marL="0" indent="0" algn="l">
+              <a:lnSpc>
+                <a:spcPts val="3000"/>
+              </a:lnSpc>
+              <a:buNone/>
+            </a:pPr>
+            <a:r>
+              <a:rPr lang="zh-TW" altLang="en-US" sz="1850" dirty="0">
+                <a:solidFill>
+                  <a:srgbClr val="CAD6DE"/>
+                </a:solidFill>
+                <a:latin typeface="Cabin" pitchFamily="34" charset="0"/>
+              </a:rPr>
+              <a:t>重設密碼</a:t>
+            </a:r>
+            <a:endParaRPr lang="en-US" sz="1850" dirty="0"/>
+          </a:p>
+        </p:txBody>
+      </p:sp>
+      <p:sp>
+        <p:nvSpPr>
+          <p:cNvPr id="7" name="Shape 4">
+            <a:extLst>
+              <a:ext uri="{FF2B5EF4-FFF2-40B4-BE49-F238E27FC236}">
+                <a16:creationId xmlns:a16="http://schemas.microsoft.com/office/drawing/2014/main" id="{8EDE9A02-B88A-90EB-1C23-EC94FE552F1D}"/>
+              </a:ext>
+            </a:extLst>
+          </p:cNvPr>
+          <p:cNvSpPr/>
+          <p:nvPr/>
+        </p:nvSpPr>
+        <p:spPr>
+          <a:xfrm>
+            <a:off x="10178058" y="3169444"/>
+            <a:ext cx="3614618" cy="1357193"/>
+          </a:xfrm>
+          <a:prstGeom prst="roundRect">
+            <a:avLst>
+              <a:gd name="adj" fmla="val 2646"/>
+            </a:avLst>
+          </a:prstGeom>
+          <a:solidFill>
+            <a:srgbClr val="304755"/>
+          </a:solidFill>
+          <a:ln/>
+        </p:spPr>
+      </p:sp>
+      <p:sp>
+        <p:nvSpPr>
+          <p:cNvPr id="8" name="Text 5">
+            <a:extLst>
+              <a:ext uri="{FF2B5EF4-FFF2-40B4-BE49-F238E27FC236}">
+                <a16:creationId xmlns:a16="http://schemas.microsoft.com/office/drawing/2014/main" id="{074E5190-BE68-FDE7-D4A0-DCD24C488AE1}"/>
+              </a:ext>
+            </a:extLst>
+          </p:cNvPr>
+          <p:cNvSpPr/>
+          <p:nvPr/>
+        </p:nvSpPr>
+        <p:spPr>
+          <a:xfrm>
+            <a:off x="10417373" y="3408759"/>
+            <a:ext cx="2816185" cy="351949"/>
+          </a:xfrm>
+          <a:prstGeom prst="rect">
+            <a:avLst/>
+          </a:prstGeom>
+          <a:noFill/>
+          <a:ln/>
+        </p:spPr>
+        <p:txBody>
+          <a:bodyPr wrap="none" lIns="0" tIns="0" rIns="0" bIns="0" rtlCol="0" anchor="t"/>
+          <a:lstStyle/>
+          <a:p>
+            <a:pPr marL="0" indent="0" algn="l">
+              <a:lnSpc>
+                <a:spcPts val="2750"/>
+              </a:lnSpc>
+              <a:buNone/>
+            </a:pPr>
+            <a:r>
+              <a:rPr lang="en-US" sz="2200" dirty="0">
+                <a:solidFill>
+                  <a:srgbClr val="CAD6DE"/>
+                </a:solidFill>
+                <a:latin typeface="Unbounded" pitchFamily="34" charset="0"/>
+                <a:ea typeface="Unbounded" pitchFamily="34" charset="-122"/>
+                <a:cs typeface="Unbounded" pitchFamily="34" charset="-120"/>
+              </a:rPr>
+              <a:t>權限設定</a:t>
+            </a:r>
+            <a:endParaRPr lang="en-US" sz="2200" dirty="0"/>
+          </a:p>
+        </p:txBody>
+      </p:sp>
+      <p:sp>
+        <p:nvSpPr>
+          <p:cNvPr id="9" name="Text 6">
+            <a:extLst>
+              <a:ext uri="{FF2B5EF4-FFF2-40B4-BE49-F238E27FC236}">
+                <a16:creationId xmlns:a16="http://schemas.microsoft.com/office/drawing/2014/main" id="{2FFF72BB-F1B7-B254-8443-418CD9DEB1B8}"/>
+              </a:ext>
+            </a:extLst>
+          </p:cNvPr>
+          <p:cNvSpPr/>
+          <p:nvPr/>
+        </p:nvSpPr>
+        <p:spPr>
+          <a:xfrm>
+            <a:off x="10417373" y="3904297"/>
+            <a:ext cx="3135987" cy="383024"/>
           </a:xfrm>
           <a:prstGeom prst="rect">
             <a:avLst/>
@@ -6686,7 +6327,7 @@
                 <a:ea typeface="Cabin" pitchFamily="34" charset="-122"/>
                 <a:cs typeface="Cabin" pitchFamily="34" charset="-120"/>
               </a:rPr>
-              <a:t>查看詳細訂單與列表資訊</a:t>
+              <a:t>區分買家、賣家與管理員角色</a:t>
             </a:r>
             <a:endParaRPr lang="en-US" sz="1850" dirty="0"/>
           </a:p>
@@ -6694,10 +6335,10 @@
       </p:sp>
       <p:sp>
         <p:nvSpPr>
-          <p:cNvPr id="5" name="Text 3">
-            <a:extLst>
-              <a:ext uri="{FF2B5EF4-FFF2-40B4-BE49-F238E27FC236}">
-                <a16:creationId xmlns="" xmlns:a16="http://schemas.microsoft.com/office/drawing/2014/main" id="{2E46298F-797D-C4B8-9B03-B795D871DDC9}"/>
+          <p:cNvPr id="10" name="Shape 7">
+            <a:extLst>
+              <a:ext uri="{FF2B5EF4-FFF2-40B4-BE49-F238E27FC236}">
+                <a16:creationId xmlns:a16="http://schemas.microsoft.com/office/drawing/2014/main" id="{76C3A99A-72AD-E257-54EB-021DC6901740}"/>
               </a:ext>
             </a:extLst>
           </p:cNvPr>
@@ -6706,7 +6347,35 @@
         </p:nvSpPr>
         <p:spPr>
           <a:xfrm>
-            <a:off x="5357813" y="4171117"/>
+            <a:off x="6324124" y="4765953"/>
+            <a:ext cx="7468553" cy="1357193"/>
+          </a:xfrm>
+          <a:prstGeom prst="roundRect">
+            <a:avLst>
+              <a:gd name="adj" fmla="val 2646"/>
+            </a:avLst>
+          </a:prstGeom>
+          <a:solidFill>
+            <a:srgbClr val="304755"/>
+          </a:solidFill>
+          <a:ln/>
+        </p:spPr>
+      </p:sp>
+      <p:sp>
+        <p:nvSpPr>
+          <p:cNvPr id="11" name="Text 8">
+            <a:extLst>
+              <a:ext uri="{FF2B5EF4-FFF2-40B4-BE49-F238E27FC236}">
+                <a16:creationId xmlns:a16="http://schemas.microsoft.com/office/drawing/2014/main" id="{14EA59F5-94EC-671B-BA64-C9589F1B13C9}"/>
+              </a:ext>
+            </a:extLst>
+          </p:cNvPr>
+          <p:cNvSpPr/>
+          <p:nvPr/>
+        </p:nvSpPr>
+        <p:spPr>
+          <a:xfrm>
+            <a:off x="6563439" y="5005268"/>
             <a:ext cx="2816185" cy="351949"/>
           </a:xfrm>
           <a:prstGeom prst="rect">
@@ -6728,13 +6397,13 @@
             <a:r>
               <a:rPr lang="en-US" sz="2200" dirty="0">
                 <a:solidFill>
-                  <a:srgbClr val="FFFFFF"/>
+                  <a:srgbClr val="CAD6DE"/>
                 </a:solidFill>
                 <a:latin typeface="Unbounded" pitchFamily="34" charset="0"/>
                 <a:ea typeface="Unbounded" pitchFamily="34" charset="-122"/>
                 <a:cs typeface="Unbounded" pitchFamily="34" charset="-120"/>
               </a:rPr>
-              <a:t>物流與付款模擬</a:t>
+              <a:t>封鎖與解鎖</a:t>
             </a:r>
             <a:endParaRPr lang="en-US" sz="2200" dirty="0"/>
           </a:p>
@@ -6742,10 +6411,10 @@
       </p:sp>
       <p:sp>
         <p:nvSpPr>
-          <p:cNvPr id="6" name="Text 4">
-            <a:extLst>
-              <a:ext uri="{FF2B5EF4-FFF2-40B4-BE49-F238E27FC236}">
-                <a16:creationId xmlns="" xmlns:a16="http://schemas.microsoft.com/office/drawing/2014/main" id="{F85FCEB6-8CAF-E4EF-63B1-52A82BF19099}"/>
+          <p:cNvPr id="12" name="Text 9">
+            <a:extLst>
+              <a:ext uri="{FF2B5EF4-FFF2-40B4-BE49-F238E27FC236}">
+                <a16:creationId xmlns:a16="http://schemas.microsoft.com/office/drawing/2014/main" id="{A05DA9B1-DE03-EB76-D4AD-0087996F857A}"/>
               </a:ext>
             </a:extLst>
           </p:cNvPr>
@@ -6754,8 +6423,8 @@
         </p:nvSpPr>
         <p:spPr>
           <a:xfrm>
-            <a:off x="5357813" y="4762381"/>
-            <a:ext cx="3928586" cy="383024"/>
+            <a:off x="6563439" y="5500807"/>
+            <a:ext cx="6989921" cy="383024"/>
           </a:xfrm>
           <a:prstGeom prst="rect">
             <a:avLst/>
@@ -6782,112 +6451,46 @@
                 <a:ea typeface="Cabin" pitchFamily="34" charset="-122"/>
                 <a:cs typeface="Cabin" pitchFamily="34" charset="-120"/>
               </a:rPr>
-              <a:t>按鈕控制狀態，模擬真實流程</a:t>
+              <a:t>管理使用者存取權限</a:t>
             </a:r>
             <a:endParaRPr lang="en-US" sz="1850" dirty="0"/>
           </a:p>
         </p:txBody>
       </p:sp>
-      <p:sp>
-        <p:nvSpPr>
-          <p:cNvPr id="7" name="Text 5">
-            <a:extLst>
-              <a:ext uri="{FF2B5EF4-FFF2-40B4-BE49-F238E27FC236}">
-                <a16:creationId xmlns="" xmlns:a16="http://schemas.microsoft.com/office/drawing/2014/main" id="{0A81056F-F879-2EBD-35B9-32B96FEE2BEC}"/>
-              </a:ext>
-            </a:extLst>
-          </p:cNvPr>
-          <p:cNvSpPr/>
-          <p:nvPr/>
-        </p:nvSpPr>
-        <p:spPr>
-          <a:xfrm>
-            <a:off x="9877901" y="4171117"/>
-            <a:ext cx="2816185" cy="351949"/>
-          </a:xfrm>
-          <a:prstGeom prst="rect">
-            <a:avLst/>
-          </a:prstGeom>
-          <a:noFill/>
-          <a:ln/>
-        </p:spPr>
-        <p:txBody>
-          <a:bodyPr wrap="none" lIns="0" tIns="0" rIns="0" bIns="0" rtlCol="0" anchor="t"/>
-          <a:lstStyle/>
-          <a:p>
-            <a:pPr marL="0" indent="0" algn="l">
-              <a:lnSpc>
-                <a:spcPts val="2750"/>
-              </a:lnSpc>
-              <a:buNone/>
-            </a:pPr>
-            <a:r>
-              <a:rPr lang="en-US" sz="2200" dirty="0">
-                <a:solidFill>
-                  <a:srgbClr val="FFFFFF"/>
-                </a:solidFill>
-                <a:latin typeface="Unbounded" pitchFamily="34" charset="0"/>
-                <a:ea typeface="Unbounded" pitchFamily="34" charset="-122"/>
-                <a:cs typeface="Unbounded" pitchFamily="34" charset="-120"/>
-              </a:rPr>
-              <a:t>訂單匯出</a:t>
-            </a:r>
-            <a:endParaRPr lang="en-US" sz="2200" dirty="0"/>
-          </a:p>
-        </p:txBody>
-      </p:sp>
-      <p:sp>
-        <p:nvSpPr>
-          <p:cNvPr id="8" name="Text 6">
-            <a:extLst>
-              <a:ext uri="{FF2B5EF4-FFF2-40B4-BE49-F238E27FC236}">
-                <a16:creationId xmlns="" xmlns:a16="http://schemas.microsoft.com/office/drawing/2014/main" id="{1585B788-44A9-395B-ED48-48ED385E293F}"/>
-              </a:ext>
-            </a:extLst>
-          </p:cNvPr>
-          <p:cNvSpPr/>
-          <p:nvPr/>
-        </p:nvSpPr>
-        <p:spPr>
-          <a:xfrm>
-            <a:off x="9877901" y="4762381"/>
-            <a:ext cx="3928586" cy="383024"/>
-          </a:xfrm>
-          <a:prstGeom prst="rect">
-            <a:avLst/>
-          </a:prstGeom>
-          <a:noFill/>
-          <a:ln/>
-        </p:spPr>
-        <p:txBody>
-          <a:bodyPr wrap="none" lIns="0" tIns="0" rIns="0" bIns="0" rtlCol="0" anchor="t"/>
-          <a:lstStyle/>
-          <a:p>
-            <a:pPr marL="0" indent="0" algn="l">
-              <a:lnSpc>
-                <a:spcPts val="3000"/>
-              </a:lnSpc>
-              <a:buNone/>
-            </a:pPr>
-            <a:r>
-              <a:rPr lang="en-US" sz="1850" dirty="0">
-                <a:solidFill>
-                  <a:srgbClr val="CAD6DE"/>
-                </a:solidFill>
-                <a:latin typeface="Cabin" pitchFamily="34" charset="0"/>
-                <a:ea typeface="Cabin" pitchFamily="34" charset="-122"/>
-                <a:cs typeface="Cabin" pitchFamily="34" charset="-120"/>
-              </a:rPr>
-              <a:t>便於資料分析與報表製作</a:t>
-            </a:r>
-            <a:endParaRPr lang="en-US" sz="1850" dirty="0"/>
-          </a:p>
-        </p:txBody>
-      </p:sp>
+      <p:pic>
+        <p:nvPicPr>
+          <p:cNvPr id="16" name="圖片 15">
+            <a:extLst>
+              <a:ext uri="{FF2B5EF4-FFF2-40B4-BE49-F238E27FC236}">
+                <a16:creationId xmlns:a16="http://schemas.microsoft.com/office/drawing/2014/main" id="{2726CE08-A13E-4BC1-EB98-B377DB1F2D38}"/>
+              </a:ext>
+            </a:extLst>
+          </p:cNvPr>
+          <p:cNvPicPr>
+            <a:picLocks noChangeAspect="1"/>
+          </p:cNvPicPr>
+          <p:nvPr/>
+        </p:nvPicPr>
+        <p:blipFill>
+          <a:blip r:embed="rId2"/>
+          <a:stretch>
+            <a:fillRect/>
+          </a:stretch>
+        </p:blipFill>
+        <p:spPr>
+          <a:xfrm>
+            <a:off x="45786" y="748943"/>
+            <a:ext cx="6219778" cy="7076755"/>
+          </a:xfrm>
+          <a:prstGeom prst="rect">
+            <a:avLst/>
+          </a:prstGeom>
+        </p:spPr>
+      </p:pic>
     </p:spTree>
     <p:extLst>
       <p:ext uri="{BB962C8B-B14F-4D97-AF65-F5344CB8AC3E}">
-        <p14:creationId xmlns:p14="http://schemas.microsoft.com/office/powerpoint/2010/main" val="3010883950"/>
+        <p14:creationId xmlns:p14="http://schemas.microsoft.com/office/powerpoint/2010/main" val="383383206"/>
       </p:ext>
     </p:extLst>
   </p:cSld>
@@ -6914,12 +6517,232 @@
           <a:chExt cx="0" cy="0"/>
         </a:xfrm>
       </p:grpSpPr>
+      <p:sp>
+        <p:nvSpPr>
+          <p:cNvPr id="3" name="Text 0">
+            <a:extLst>
+              <a:ext uri="{FF2B5EF4-FFF2-40B4-BE49-F238E27FC236}">
+                <a16:creationId xmlns:a16="http://schemas.microsoft.com/office/drawing/2014/main" id="{8A25FD04-881C-3EC3-752C-F41973696412}"/>
+              </a:ext>
+            </a:extLst>
+          </p:cNvPr>
+          <p:cNvSpPr/>
+          <p:nvPr/>
+        </p:nvSpPr>
+        <p:spPr>
+          <a:xfrm>
+            <a:off x="837724" y="1839516"/>
+            <a:ext cx="7468553" cy="1408033"/>
+          </a:xfrm>
+          <a:prstGeom prst="rect">
+            <a:avLst/>
+          </a:prstGeom>
+          <a:noFill/>
+          <a:ln/>
+        </p:spPr>
+        <p:txBody>
+          <a:bodyPr wrap="square" lIns="0" tIns="0" rIns="0" bIns="0" rtlCol="0" anchor="t"/>
+          <a:lstStyle/>
+          <a:p>
+            <a:pPr marL="0" indent="0" algn="l">
+              <a:lnSpc>
+                <a:spcPts val="5500"/>
+              </a:lnSpc>
+              <a:buNone/>
+            </a:pPr>
+            <a:r>
+              <a:rPr lang="en-US" sz="4400" dirty="0">
+                <a:solidFill>
+                  <a:srgbClr val="FFFFFF"/>
+                </a:solidFill>
+                <a:latin typeface="Unbounded" pitchFamily="34" charset="0"/>
+                <a:ea typeface="Unbounded" pitchFamily="34" charset="-122"/>
+                <a:cs typeface="Unbounded" pitchFamily="34" charset="-120"/>
+              </a:rPr>
+              <a:t>後台功能：推薦系統與搜尋紀錄</a:t>
+            </a:r>
+            <a:endParaRPr lang="en-US" sz="4400" dirty="0"/>
+          </a:p>
+        </p:txBody>
+      </p:sp>
+      <p:sp>
+        <p:nvSpPr>
+          <p:cNvPr id="4" name="Shape 1">
+            <a:extLst>
+              <a:ext uri="{FF2B5EF4-FFF2-40B4-BE49-F238E27FC236}">
+                <a16:creationId xmlns:a16="http://schemas.microsoft.com/office/drawing/2014/main" id="{BC43B4AB-2C8F-7BA6-EFEB-70BDEF76B4C0}"/>
+              </a:ext>
+            </a:extLst>
+          </p:cNvPr>
+          <p:cNvSpPr/>
+          <p:nvPr/>
+        </p:nvSpPr>
+        <p:spPr>
+          <a:xfrm>
+            <a:off x="837724" y="3606522"/>
+            <a:ext cx="538520" cy="538520"/>
+          </a:xfrm>
+          <a:prstGeom prst="roundRect">
+            <a:avLst>
+              <a:gd name="adj" fmla="val 6668"/>
+            </a:avLst>
+          </a:prstGeom>
+          <a:solidFill>
+            <a:srgbClr val="304755"/>
+          </a:solidFill>
+          <a:ln/>
+        </p:spPr>
+      </p:sp>
+      <p:sp>
+        <p:nvSpPr>
+          <p:cNvPr id="5" name="Text 2">
+            <a:extLst>
+              <a:ext uri="{FF2B5EF4-FFF2-40B4-BE49-F238E27FC236}">
+                <a16:creationId xmlns:a16="http://schemas.microsoft.com/office/drawing/2014/main" id="{D378F7F5-789B-2AF5-0F61-F8E4EC130904}"/>
+              </a:ext>
+            </a:extLst>
+          </p:cNvPr>
+          <p:cNvSpPr/>
+          <p:nvPr/>
+        </p:nvSpPr>
+        <p:spPr>
+          <a:xfrm>
+            <a:off x="937974" y="3664506"/>
+            <a:ext cx="337899" cy="422434"/>
+          </a:xfrm>
+          <a:prstGeom prst="rect">
+            <a:avLst/>
+          </a:prstGeom>
+          <a:noFill/>
+          <a:ln/>
+        </p:spPr>
+        <p:txBody>
+          <a:bodyPr wrap="none" lIns="0" tIns="0" rIns="0" bIns="0" rtlCol="0" anchor="t"/>
+          <a:lstStyle/>
+          <a:p>
+            <a:pPr marL="0" indent="0" algn="ctr">
+              <a:lnSpc>
+                <a:spcPts val="2650"/>
+              </a:lnSpc>
+              <a:buNone/>
+            </a:pPr>
+            <a:r>
+              <a:rPr lang="en-US" sz="2650" dirty="0">
+                <a:solidFill>
+                  <a:srgbClr val="CAD6DE"/>
+                </a:solidFill>
+                <a:latin typeface="Unbounded" pitchFamily="34" charset="0"/>
+                <a:ea typeface="Unbounded" pitchFamily="34" charset="-122"/>
+                <a:cs typeface="Unbounded" pitchFamily="34" charset="-120"/>
+              </a:rPr>
+              <a:t>1</a:t>
+            </a:r>
+            <a:endParaRPr lang="en-US" sz="2650" dirty="0"/>
+          </a:p>
+        </p:txBody>
+      </p:sp>
+      <p:sp>
+        <p:nvSpPr>
+          <p:cNvPr id="6" name="Text 3">
+            <a:extLst>
+              <a:ext uri="{FF2B5EF4-FFF2-40B4-BE49-F238E27FC236}">
+                <a16:creationId xmlns:a16="http://schemas.microsoft.com/office/drawing/2014/main" id="{93B8F347-6623-DEB1-0AC6-0F75889CC9EA}"/>
+              </a:ext>
+            </a:extLst>
+          </p:cNvPr>
+          <p:cNvSpPr/>
+          <p:nvPr/>
+        </p:nvSpPr>
+        <p:spPr>
+          <a:xfrm>
+            <a:off x="1615559" y="3688794"/>
+            <a:ext cx="2806898" cy="351949"/>
+          </a:xfrm>
+          <a:prstGeom prst="rect">
+            <a:avLst/>
+          </a:prstGeom>
+          <a:noFill/>
+          <a:ln/>
+        </p:spPr>
+        <p:txBody>
+          <a:bodyPr wrap="none" lIns="0" tIns="0" rIns="0" bIns="0" rtlCol="0" anchor="t"/>
+          <a:lstStyle/>
+          <a:p>
+            <a:pPr marL="0" indent="0" algn="l">
+              <a:lnSpc>
+                <a:spcPts val="2750"/>
+              </a:lnSpc>
+              <a:buNone/>
+            </a:pPr>
+            <a:r>
+              <a:rPr lang="en-US" sz="2200" dirty="0">
+                <a:solidFill>
+                  <a:srgbClr val="CAD6DE"/>
+                </a:solidFill>
+                <a:latin typeface="Unbounded" pitchFamily="34" charset="0"/>
+                <a:ea typeface="Unbounded" pitchFamily="34" charset="-122"/>
+                <a:cs typeface="Unbounded" pitchFamily="34" charset="-120"/>
+              </a:rPr>
+              <a:t>推薦商品管理</a:t>
+            </a:r>
+            <a:endParaRPr lang="en-US" sz="2200" dirty="0"/>
+          </a:p>
+        </p:txBody>
+      </p:sp>
+      <p:sp>
+        <p:nvSpPr>
+          <p:cNvPr id="7" name="Text 4">
+            <a:extLst>
+              <a:ext uri="{FF2B5EF4-FFF2-40B4-BE49-F238E27FC236}">
+                <a16:creationId xmlns:a16="http://schemas.microsoft.com/office/drawing/2014/main" id="{B39BACA9-D0BB-DFEA-0D21-CA26FA0C691B}"/>
+              </a:ext>
+            </a:extLst>
+          </p:cNvPr>
+          <p:cNvSpPr/>
+          <p:nvPr/>
+        </p:nvSpPr>
+        <p:spPr>
+          <a:xfrm>
+            <a:off x="1615559" y="4184332"/>
+            <a:ext cx="2806898" cy="383024"/>
+          </a:xfrm>
+          <a:prstGeom prst="rect">
+            <a:avLst/>
+          </a:prstGeom>
+          <a:noFill/>
+          <a:ln/>
+        </p:spPr>
+        <p:txBody>
+          <a:bodyPr wrap="none" lIns="0" tIns="0" rIns="0" bIns="0" rtlCol="0" anchor="t"/>
+          <a:lstStyle/>
+          <a:p>
+            <a:pPr marL="0" indent="0" algn="l">
+              <a:lnSpc>
+                <a:spcPts val="3000"/>
+              </a:lnSpc>
+              <a:buNone/>
+            </a:pPr>
+            <a:r>
+              <a:rPr lang="en-US" sz="1850" dirty="0" err="1">
+                <a:solidFill>
+                  <a:srgbClr val="CAD6DE"/>
+                </a:solidFill>
+                <a:latin typeface="Cabin" pitchFamily="34" charset="0"/>
+                <a:ea typeface="Cabin" pitchFamily="34" charset="-122"/>
+                <a:cs typeface="Cabin" pitchFamily="34" charset="-120"/>
+              </a:rPr>
+              <a:t>設定熱門商品</a:t>
+            </a:r>
+            <a:endParaRPr lang="en-US" sz="1850" dirty="0"/>
+          </a:p>
+        </p:txBody>
+      </p:sp>
       <p:pic>
         <p:nvPicPr>
-          <p:cNvPr id="2" name="Image 0" descr="preencoded.png">
-            <a:extLst>
-              <a:ext uri="{FF2B5EF4-FFF2-40B4-BE49-F238E27FC236}">
-                <a16:creationId xmlns="" xmlns:a16="http://schemas.microsoft.com/office/drawing/2014/main" id="{288E659A-E955-BF09-666C-1072F60B471D}"/>
+          <p:cNvPr id="17" name="圖片 16">
+            <a:extLst>
+              <a:ext uri="{FF2B5EF4-FFF2-40B4-BE49-F238E27FC236}">
+                <a16:creationId xmlns:a16="http://schemas.microsoft.com/office/drawing/2014/main" id="{C35EDF63-141E-87D5-5A28-F52B8647EB9F}"/>
               </a:ext>
             </a:extLst>
           </p:cNvPr>
@@ -6936,438 +6759,18 @@
         </p:blipFill>
         <p:spPr>
           <a:xfrm>
-            <a:off x="0" y="0"/>
-            <a:ext cx="5486400" cy="8229600"/>
+            <a:off x="4836433" y="2770086"/>
+            <a:ext cx="9559515" cy="2541313"/>
           </a:xfrm>
           <a:prstGeom prst="rect">
             <a:avLst/>
           </a:prstGeom>
         </p:spPr>
       </p:pic>
-      <p:sp>
-        <p:nvSpPr>
-          <p:cNvPr id="3" name="Text 0">
-            <a:extLst>
-              <a:ext uri="{FF2B5EF4-FFF2-40B4-BE49-F238E27FC236}">
-                <a16:creationId xmlns="" xmlns:a16="http://schemas.microsoft.com/office/drawing/2014/main" id="{A2FB9310-4B85-E2EC-BA0D-8C555808BCA1}"/>
-              </a:ext>
-            </a:extLst>
-          </p:cNvPr>
-          <p:cNvSpPr/>
-          <p:nvPr/>
-        </p:nvSpPr>
-        <p:spPr>
-          <a:xfrm>
-            <a:off x="6324124" y="2106454"/>
-            <a:ext cx="5632490" cy="704017"/>
-          </a:xfrm>
-          <a:prstGeom prst="rect">
-            <a:avLst/>
-          </a:prstGeom>
-          <a:noFill/>
-          <a:ln/>
-        </p:spPr>
-        <p:txBody>
-          <a:bodyPr wrap="none" lIns="0" tIns="0" rIns="0" bIns="0" rtlCol="0" anchor="t"/>
-          <a:lstStyle/>
-          <a:p>
-            <a:pPr marL="0" indent="0" algn="l">
-              <a:lnSpc>
-                <a:spcPts val="5500"/>
-              </a:lnSpc>
-              <a:buNone/>
-            </a:pPr>
-            <a:r>
-              <a:rPr lang="en-US" sz="4400" dirty="0">
-                <a:solidFill>
-                  <a:srgbClr val="FFFFFF"/>
-                </a:solidFill>
-                <a:latin typeface="Unbounded" pitchFamily="34" charset="0"/>
-                <a:ea typeface="Unbounded" pitchFamily="34" charset="-122"/>
-                <a:cs typeface="Unbounded" pitchFamily="34" charset="-120"/>
-              </a:rPr>
-              <a:t>後台功能：使用者管理</a:t>
-            </a:r>
-            <a:endParaRPr lang="en-US" sz="4400" dirty="0"/>
-          </a:p>
-        </p:txBody>
-      </p:sp>
-      <p:sp>
-        <p:nvSpPr>
-          <p:cNvPr id="4" name="Shape 1">
-            <a:extLst>
-              <a:ext uri="{FF2B5EF4-FFF2-40B4-BE49-F238E27FC236}">
-                <a16:creationId xmlns="" xmlns:a16="http://schemas.microsoft.com/office/drawing/2014/main" id="{BFE1C90B-B77A-517E-C76E-CEA973336C09}"/>
-              </a:ext>
-            </a:extLst>
-          </p:cNvPr>
-          <p:cNvSpPr/>
-          <p:nvPr/>
-        </p:nvSpPr>
-        <p:spPr>
-          <a:xfrm>
-            <a:off x="6324124" y="3169444"/>
-            <a:ext cx="3614618" cy="1357193"/>
-          </a:xfrm>
-          <a:prstGeom prst="roundRect">
-            <a:avLst>
-              <a:gd name="adj" fmla="val 2646"/>
-            </a:avLst>
-          </a:prstGeom>
-          <a:solidFill>
-            <a:srgbClr val="304755"/>
-          </a:solidFill>
-          <a:ln/>
-        </p:spPr>
-      </p:sp>
-      <p:sp>
-        <p:nvSpPr>
-          <p:cNvPr id="5" name="Text 2">
-            <a:extLst>
-              <a:ext uri="{FF2B5EF4-FFF2-40B4-BE49-F238E27FC236}">
-                <a16:creationId xmlns="" xmlns:a16="http://schemas.microsoft.com/office/drawing/2014/main" id="{648DA8B2-7BF2-2D26-5396-989491B30F15}"/>
-              </a:ext>
-            </a:extLst>
-          </p:cNvPr>
-          <p:cNvSpPr/>
-          <p:nvPr/>
-        </p:nvSpPr>
-        <p:spPr>
-          <a:xfrm>
-            <a:off x="6563439" y="3408759"/>
-            <a:ext cx="2816185" cy="351949"/>
-          </a:xfrm>
-          <a:prstGeom prst="rect">
-            <a:avLst/>
-          </a:prstGeom>
-          <a:noFill/>
-          <a:ln/>
-        </p:spPr>
-        <p:txBody>
-          <a:bodyPr wrap="none" lIns="0" tIns="0" rIns="0" bIns="0" rtlCol="0" anchor="t"/>
-          <a:lstStyle/>
-          <a:p>
-            <a:pPr marL="0" indent="0" algn="l">
-              <a:lnSpc>
-                <a:spcPts val="2750"/>
-              </a:lnSpc>
-              <a:buNone/>
-            </a:pPr>
-            <a:r>
-              <a:rPr lang="en-US" sz="2200" dirty="0">
-                <a:solidFill>
-                  <a:srgbClr val="CAD6DE"/>
-                </a:solidFill>
-                <a:latin typeface="Unbounded" pitchFamily="34" charset="0"/>
-                <a:ea typeface="Unbounded" pitchFamily="34" charset="-122"/>
-                <a:cs typeface="Unbounded" pitchFamily="34" charset="-120"/>
-              </a:rPr>
-              <a:t>用戶資料管理</a:t>
-            </a:r>
-            <a:endParaRPr lang="en-US" sz="2200" dirty="0"/>
-          </a:p>
-        </p:txBody>
-      </p:sp>
-      <p:sp>
-        <p:nvSpPr>
-          <p:cNvPr id="6" name="Text 3">
-            <a:extLst>
-              <a:ext uri="{FF2B5EF4-FFF2-40B4-BE49-F238E27FC236}">
-                <a16:creationId xmlns="" xmlns:a16="http://schemas.microsoft.com/office/drawing/2014/main" id="{B95CB391-9D5A-148C-C8B0-56E4F14A860F}"/>
-              </a:ext>
-            </a:extLst>
-          </p:cNvPr>
-          <p:cNvSpPr/>
-          <p:nvPr/>
-        </p:nvSpPr>
-        <p:spPr>
-          <a:xfrm>
-            <a:off x="6563439" y="3904297"/>
-            <a:ext cx="3135987" cy="383024"/>
-          </a:xfrm>
-          <a:prstGeom prst="rect">
-            <a:avLst/>
-          </a:prstGeom>
-          <a:noFill/>
-          <a:ln/>
-        </p:spPr>
-        <p:txBody>
-          <a:bodyPr wrap="none" lIns="0" tIns="0" rIns="0" bIns="0" rtlCol="0" anchor="t"/>
-          <a:lstStyle/>
-          <a:p>
-            <a:pPr marL="0" indent="0" algn="l">
-              <a:lnSpc>
-                <a:spcPts val="3000"/>
-              </a:lnSpc>
-              <a:buNone/>
-            </a:pPr>
-            <a:r>
-              <a:rPr lang="en-US" sz="1850" dirty="0">
-                <a:solidFill>
-                  <a:srgbClr val="CAD6DE"/>
-                </a:solidFill>
-                <a:latin typeface="Cabin" pitchFamily="34" charset="0"/>
-                <a:ea typeface="Cabin" pitchFamily="34" charset="-122"/>
-                <a:cs typeface="Cabin" pitchFamily="34" charset="-120"/>
-              </a:rPr>
-              <a:t>查看與修改使用者資訊</a:t>
-            </a:r>
-            <a:endParaRPr lang="en-US" sz="1850" dirty="0"/>
-          </a:p>
-        </p:txBody>
-      </p:sp>
-      <p:sp>
-        <p:nvSpPr>
-          <p:cNvPr id="7" name="Shape 4">
-            <a:extLst>
-              <a:ext uri="{FF2B5EF4-FFF2-40B4-BE49-F238E27FC236}">
-                <a16:creationId xmlns="" xmlns:a16="http://schemas.microsoft.com/office/drawing/2014/main" id="{8EDE9A02-B88A-90EB-1C23-EC94FE552F1D}"/>
-              </a:ext>
-            </a:extLst>
-          </p:cNvPr>
-          <p:cNvSpPr/>
-          <p:nvPr/>
-        </p:nvSpPr>
-        <p:spPr>
-          <a:xfrm>
-            <a:off x="10178058" y="3169444"/>
-            <a:ext cx="3614618" cy="1357193"/>
-          </a:xfrm>
-          <a:prstGeom prst="roundRect">
-            <a:avLst>
-              <a:gd name="adj" fmla="val 2646"/>
-            </a:avLst>
-          </a:prstGeom>
-          <a:solidFill>
-            <a:srgbClr val="304755"/>
-          </a:solidFill>
-          <a:ln/>
-        </p:spPr>
-      </p:sp>
-      <p:sp>
-        <p:nvSpPr>
-          <p:cNvPr id="8" name="Text 5">
-            <a:extLst>
-              <a:ext uri="{FF2B5EF4-FFF2-40B4-BE49-F238E27FC236}">
-                <a16:creationId xmlns="" xmlns:a16="http://schemas.microsoft.com/office/drawing/2014/main" id="{074E5190-BE68-FDE7-D4A0-DCD24C488AE1}"/>
-              </a:ext>
-            </a:extLst>
-          </p:cNvPr>
-          <p:cNvSpPr/>
-          <p:nvPr/>
-        </p:nvSpPr>
-        <p:spPr>
-          <a:xfrm>
-            <a:off x="10417373" y="3408759"/>
-            <a:ext cx="2816185" cy="351949"/>
-          </a:xfrm>
-          <a:prstGeom prst="rect">
-            <a:avLst/>
-          </a:prstGeom>
-          <a:noFill/>
-          <a:ln/>
-        </p:spPr>
-        <p:txBody>
-          <a:bodyPr wrap="none" lIns="0" tIns="0" rIns="0" bIns="0" rtlCol="0" anchor="t"/>
-          <a:lstStyle/>
-          <a:p>
-            <a:pPr marL="0" indent="0" algn="l">
-              <a:lnSpc>
-                <a:spcPts val="2750"/>
-              </a:lnSpc>
-              <a:buNone/>
-            </a:pPr>
-            <a:r>
-              <a:rPr lang="en-US" sz="2200" dirty="0">
-                <a:solidFill>
-                  <a:srgbClr val="CAD6DE"/>
-                </a:solidFill>
-                <a:latin typeface="Unbounded" pitchFamily="34" charset="0"/>
-                <a:ea typeface="Unbounded" pitchFamily="34" charset="-122"/>
-                <a:cs typeface="Unbounded" pitchFamily="34" charset="-120"/>
-              </a:rPr>
-              <a:t>權限設定</a:t>
-            </a:r>
-            <a:endParaRPr lang="en-US" sz="2200" dirty="0"/>
-          </a:p>
-        </p:txBody>
-      </p:sp>
-      <p:sp>
-        <p:nvSpPr>
-          <p:cNvPr id="9" name="Text 6">
-            <a:extLst>
-              <a:ext uri="{FF2B5EF4-FFF2-40B4-BE49-F238E27FC236}">
-                <a16:creationId xmlns="" xmlns:a16="http://schemas.microsoft.com/office/drawing/2014/main" id="{2FFF72BB-F1B7-B254-8443-418CD9DEB1B8}"/>
-              </a:ext>
-            </a:extLst>
-          </p:cNvPr>
-          <p:cNvSpPr/>
-          <p:nvPr/>
-        </p:nvSpPr>
-        <p:spPr>
-          <a:xfrm>
-            <a:off x="10417373" y="3904297"/>
-            <a:ext cx="3135987" cy="383024"/>
-          </a:xfrm>
-          <a:prstGeom prst="rect">
-            <a:avLst/>
-          </a:prstGeom>
-          <a:noFill/>
-          <a:ln/>
-        </p:spPr>
-        <p:txBody>
-          <a:bodyPr wrap="none" lIns="0" tIns="0" rIns="0" bIns="0" rtlCol="0" anchor="t"/>
-          <a:lstStyle/>
-          <a:p>
-            <a:pPr marL="0" indent="0" algn="l">
-              <a:lnSpc>
-                <a:spcPts val="3000"/>
-              </a:lnSpc>
-              <a:buNone/>
-            </a:pPr>
-            <a:r>
-              <a:rPr lang="en-US" sz="1850" dirty="0">
-                <a:solidFill>
-                  <a:srgbClr val="CAD6DE"/>
-                </a:solidFill>
-                <a:latin typeface="Cabin" pitchFamily="34" charset="0"/>
-                <a:ea typeface="Cabin" pitchFamily="34" charset="-122"/>
-                <a:cs typeface="Cabin" pitchFamily="34" charset="-120"/>
-              </a:rPr>
-              <a:t>區分買家、賣家與管理員角色</a:t>
-            </a:r>
-            <a:endParaRPr lang="en-US" sz="1850" dirty="0"/>
-          </a:p>
-        </p:txBody>
-      </p:sp>
-      <p:sp>
-        <p:nvSpPr>
-          <p:cNvPr id="10" name="Shape 7">
-            <a:extLst>
-              <a:ext uri="{FF2B5EF4-FFF2-40B4-BE49-F238E27FC236}">
-                <a16:creationId xmlns="" xmlns:a16="http://schemas.microsoft.com/office/drawing/2014/main" id="{76C3A99A-72AD-E257-54EB-021DC6901740}"/>
-              </a:ext>
-            </a:extLst>
-          </p:cNvPr>
-          <p:cNvSpPr/>
-          <p:nvPr/>
-        </p:nvSpPr>
-        <p:spPr>
-          <a:xfrm>
-            <a:off x="6324124" y="4765953"/>
-            <a:ext cx="7468553" cy="1357193"/>
-          </a:xfrm>
-          <a:prstGeom prst="roundRect">
-            <a:avLst>
-              <a:gd name="adj" fmla="val 2646"/>
-            </a:avLst>
-          </a:prstGeom>
-          <a:solidFill>
-            <a:srgbClr val="304755"/>
-          </a:solidFill>
-          <a:ln/>
-        </p:spPr>
-      </p:sp>
-      <p:sp>
-        <p:nvSpPr>
-          <p:cNvPr id="11" name="Text 8">
-            <a:extLst>
-              <a:ext uri="{FF2B5EF4-FFF2-40B4-BE49-F238E27FC236}">
-                <a16:creationId xmlns="" xmlns:a16="http://schemas.microsoft.com/office/drawing/2014/main" id="{14EA59F5-94EC-671B-BA64-C9589F1B13C9}"/>
-              </a:ext>
-            </a:extLst>
-          </p:cNvPr>
-          <p:cNvSpPr/>
-          <p:nvPr/>
-        </p:nvSpPr>
-        <p:spPr>
-          <a:xfrm>
-            <a:off x="6563439" y="5005268"/>
-            <a:ext cx="2816185" cy="351949"/>
-          </a:xfrm>
-          <a:prstGeom prst="rect">
-            <a:avLst/>
-          </a:prstGeom>
-          <a:noFill/>
-          <a:ln/>
-        </p:spPr>
-        <p:txBody>
-          <a:bodyPr wrap="none" lIns="0" tIns="0" rIns="0" bIns="0" rtlCol="0" anchor="t"/>
-          <a:lstStyle/>
-          <a:p>
-            <a:pPr marL="0" indent="0" algn="l">
-              <a:lnSpc>
-                <a:spcPts val="2750"/>
-              </a:lnSpc>
-              <a:buNone/>
-            </a:pPr>
-            <a:r>
-              <a:rPr lang="en-US" sz="2200" dirty="0">
-                <a:solidFill>
-                  <a:srgbClr val="CAD6DE"/>
-                </a:solidFill>
-                <a:latin typeface="Unbounded" pitchFamily="34" charset="0"/>
-                <a:ea typeface="Unbounded" pitchFamily="34" charset="-122"/>
-                <a:cs typeface="Unbounded" pitchFamily="34" charset="-120"/>
-              </a:rPr>
-              <a:t>封鎖與解鎖</a:t>
-            </a:r>
-            <a:endParaRPr lang="en-US" sz="2200" dirty="0"/>
-          </a:p>
-        </p:txBody>
-      </p:sp>
-      <p:sp>
-        <p:nvSpPr>
-          <p:cNvPr id="12" name="Text 9">
-            <a:extLst>
-              <a:ext uri="{FF2B5EF4-FFF2-40B4-BE49-F238E27FC236}">
-                <a16:creationId xmlns="" xmlns:a16="http://schemas.microsoft.com/office/drawing/2014/main" id="{A05DA9B1-DE03-EB76-D4AD-0087996F857A}"/>
-              </a:ext>
-            </a:extLst>
-          </p:cNvPr>
-          <p:cNvSpPr/>
-          <p:nvPr/>
-        </p:nvSpPr>
-        <p:spPr>
-          <a:xfrm>
-            <a:off x="6563439" y="5500807"/>
-            <a:ext cx="6989921" cy="383024"/>
-          </a:xfrm>
-          <a:prstGeom prst="rect">
-            <a:avLst/>
-          </a:prstGeom>
-          <a:noFill/>
-          <a:ln/>
-        </p:spPr>
-        <p:txBody>
-          <a:bodyPr wrap="none" lIns="0" tIns="0" rIns="0" bIns="0" rtlCol="0" anchor="t"/>
-          <a:lstStyle/>
-          <a:p>
-            <a:pPr marL="0" indent="0" algn="l">
-              <a:lnSpc>
-                <a:spcPts val="3000"/>
-              </a:lnSpc>
-              <a:buNone/>
-            </a:pPr>
-            <a:r>
-              <a:rPr lang="en-US" sz="1850" dirty="0">
-                <a:solidFill>
-                  <a:srgbClr val="CAD6DE"/>
-                </a:solidFill>
-                <a:latin typeface="Cabin" pitchFamily="34" charset="0"/>
-                <a:ea typeface="Cabin" pitchFamily="34" charset="-122"/>
-                <a:cs typeface="Cabin" pitchFamily="34" charset="-120"/>
-              </a:rPr>
-              <a:t>管理使用者存取權限</a:t>
-            </a:r>
-            <a:endParaRPr lang="en-US" sz="1850" dirty="0"/>
-          </a:p>
-        </p:txBody>
-      </p:sp>
     </p:spTree>
     <p:extLst>
       <p:ext uri="{BB962C8B-B14F-4D97-AF65-F5344CB8AC3E}">
-        <p14:creationId xmlns:p14="http://schemas.microsoft.com/office/powerpoint/2010/main" val="383383206"/>
+        <p14:creationId xmlns:p14="http://schemas.microsoft.com/office/powerpoint/2010/main" val="1975342029"/>
       </p:ext>
     </p:extLst>
   </p:cSld>
@@ -7394,42 +6797,12 @@
           <a:chExt cx="0" cy="0"/>
         </a:xfrm>
       </p:grpSpPr>
-      <p:pic>
-        <p:nvPicPr>
-          <p:cNvPr id="2" name="Image 0" descr="preencoded.png">
-            <a:extLst>
-              <a:ext uri="{FF2B5EF4-FFF2-40B4-BE49-F238E27FC236}">
-                <a16:creationId xmlns="" xmlns:a16="http://schemas.microsoft.com/office/drawing/2014/main" id="{2EC8ADE7-7B70-A052-F02E-2A8B9BE3CCB7}"/>
-              </a:ext>
-            </a:extLst>
-          </p:cNvPr>
-          <p:cNvPicPr>
-            <a:picLocks noChangeAspect="1"/>
-          </p:cNvPicPr>
-          <p:nvPr/>
-        </p:nvPicPr>
-        <p:blipFill>
-          <a:blip r:embed="rId2"/>
-          <a:stretch>
-            <a:fillRect/>
-          </a:stretch>
-        </p:blipFill>
-        <p:spPr>
-          <a:xfrm>
-            <a:off x="9144000" y="0"/>
-            <a:ext cx="5486400" cy="8229600"/>
-          </a:xfrm>
-          <a:prstGeom prst="rect">
-            <a:avLst/>
-          </a:prstGeom>
-        </p:spPr>
-      </p:pic>
-      <p:sp>
-        <p:nvSpPr>
-          <p:cNvPr id="3" name="Text 0">
-            <a:extLst>
-              <a:ext uri="{FF2B5EF4-FFF2-40B4-BE49-F238E27FC236}">
-                <a16:creationId xmlns="" xmlns:a16="http://schemas.microsoft.com/office/drawing/2014/main" id="{8A25FD04-881C-3EC3-752C-F41973696412}"/>
+      <p:sp>
+        <p:nvSpPr>
+          <p:cNvPr id="2" name="Text 0">
+            <a:extLst>
+              <a:ext uri="{FF2B5EF4-FFF2-40B4-BE49-F238E27FC236}">
+                <a16:creationId xmlns:a16="http://schemas.microsoft.com/office/drawing/2014/main" id="{D86F5ABA-0B58-8CD4-CC56-B5665FB81ADD}"/>
               </a:ext>
             </a:extLst>
           </p:cNvPr>
@@ -7438,8 +6811,8 @@
         </p:nvSpPr>
         <p:spPr>
           <a:xfrm>
-            <a:off x="837724" y="1839516"/>
-            <a:ext cx="7468553" cy="1408033"/>
+            <a:off x="837724" y="2467928"/>
+            <a:ext cx="5632490" cy="704017"/>
           </a:xfrm>
           <a:prstGeom prst="rect">
             <a:avLst/>
@@ -7448,7 +6821,7 @@
           <a:ln/>
         </p:spPr>
         <p:txBody>
-          <a:bodyPr wrap="square" lIns="0" tIns="0" rIns="0" bIns="0" rtlCol="0" anchor="t"/>
+          <a:bodyPr wrap="none" lIns="0" tIns="0" rIns="0" bIns="0" rtlCol="0" anchor="t"/>
           <a:lstStyle/>
           <a:p>
             <a:pPr marL="0" indent="0" algn="l">
@@ -7466,7 +6839,7 @@
                 <a:ea typeface="Unbounded" pitchFamily="34" charset="-122"/>
                 <a:cs typeface="Unbounded" pitchFamily="34" charset="-120"/>
               </a:rPr>
-              <a:t>後台功能：推薦系統與搜尋紀錄</a:t>
+              <a:t>技術總結與未來展望</a:t>
             </a:r>
             <a:endParaRPr lang="en-US" sz="4400" dirty="0"/>
           </a:p>
@@ -7474,10 +6847,10 @@
       </p:sp>
       <p:sp>
         <p:nvSpPr>
-          <p:cNvPr id="4" name="Shape 1">
-            <a:extLst>
-              <a:ext uri="{FF2B5EF4-FFF2-40B4-BE49-F238E27FC236}">
-                <a16:creationId xmlns="" xmlns:a16="http://schemas.microsoft.com/office/drawing/2014/main" id="{BC43B4AB-2C8F-7BA6-EFEB-70BDEF76B4C0}"/>
+          <p:cNvPr id="3" name="Text 1">
+            <a:extLst>
+              <a:ext uri="{FF2B5EF4-FFF2-40B4-BE49-F238E27FC236}">
+                <a16:creationId xmlns:a16="http://schemas.microsoft.com/office/drawing/2014/main" id="{E8FEE2E1-1E85-EEEE-7325-2D108C73AF3D}"/>
               </a:ext>
             </a:extLst>
           </p:cNvPr>
@@ -7486,36 +6859,8 @@
         </p:nvSpPr>
         <p:spPr>
           <a:xfrm>
-            <a:off x="837724" y="3606522"/>
-            <a:ext cx="538520" cy="538520"/>
-          </a:xfrm>
-          <a:prstGeom prst="roundRect">
-            <a:avLst>
-              <a:gd name="adj" fmla="val 6668"/>
-            </a:avLst>
-          </a:prstGeom>
-          <a:solidFill>
-            <a:srgbClr val="304755"/>
-          </a:solidFill>
-          <a:ln/>
-        </p:spPr>
-      </p:sp>
-      <p:sp>
-        <p:nvSpPr>
-          <p:cNvPr id="5" name="Text 2">
-            <a:extLst>
-              <a:ext uri="{FF2B5EF4-FFF2-40B4-BE49-F238E27FC236}">
-                <a16:creationId xmlns="" xmlns:a16="http://schemas.microsoft.com/office/drawing/2014/main" id="{D378F7F5-789B-2AF5-0F61-F8E4EC130904}"/>
-              </a:ext>
-            </a:extLst>
-          </p:cNvPr>
-          <p:cNvSpPr/>
-          <p:nvPr/>
-        </p:nvSpPr>
-        <p:spPr>
-          <a:xfrm>
-            <a:off x="937974" y="3664506"/>
-            <a:ext cx="337899" cy="422434"/>
+            <a:off x="837724" y="3770233"/>
+            <a:ext cx="2816185" cy="351949"/>
           </a:xfrm>
           <a:prstGeom prst="rect">
             <a:avLst/>
@@ -7527,33 +6872,33 @@
           <a:bodyPr wrap="none" lIns="0" tIns="0" rIns="0" bIns="0" rtlCol="0" anchor="t"/>
           <a:lstStyle/>
           <a:p>
-            <a:pPr marL="0" indent="0" algn="ctr">
+            <a:pPr marL="0" indent="0" algn="l">
               <a:lnSpc>
-                <a:spcPts val="2650"/>
+                <a:spcPts val="2750"/>
               </a:lnSpc>
               <a:buNone/>
             </a:pPr>
             <a:r>
-              <a:rPr lang="en-US" sz="2650" dirty="0">
+              <a:rPr lang="en-US" sz="2200" dirty="0">
                 <a:solidFill>
-                  <a:srgbClr val="CAD6DE"/>
+                  <a:srgbClr val="FFFFFF"/>
                 </a:solidFill>
                 <a:latin typeface="Unbounded" pitchFamily="34" charset="0"/>
                 <a:ea typeface="Unbounded" pitchFamily="34" charset="-122"/>
                 <a:cs typeface="Unbounded" pitchFamily="34" charset="-120"/>
               </a:rPr>
-              <a:t>1</a:t>
-            </a:r>
-            <a:endParaRPr lang="en-US" sz="2650" dirty="0"/>
-          </a:p>
-        </p:txBody>
-      </p:sp>
-      <p:sp>
-        <p:nvSpPr>
-          <p:cNvPr id="6" name="Text 3">
-            <a:extLst>
-              <a:ext uri="{FF2B5EF4-FFF2-40B4-BE49-F238E27FC236}">
-                <a16:creationId xmlns="" xmlns:a16="http://schemas.microsoft.com/office/drawing/2014/main" id="{93B8F347-6623-DEB1-0AC6-0F75889CC9EA}"/>
+              <a:t>技術棧優勢</a:t>
+            </a:r>
+            <a:endParaRPr lang="en-US" sz="2200" dirty="0"/>
+          </a:p>
+        </p:txBody>
+      </p:sp>
+      <p:sp>
+        <p:nvSpPr>
+          <p:cNvPr id="4" name="Text 2">
+            <a:extLst>
+              <a:ext uri="{FF2B5EF4-FFF2-40B4-BE49-F238E27FC236}">
+                <a16:creationId xmlns:a16="http://schemas.microsoft.com/office/drawing/2014/main" id="{71C51FCE-3E66-78F1-6A11-6A5C36BF09F3}"/>
               </a:ext>
             </a:extLst>
           </p:cNvPr>
@@ -7562,8 +6907,8 @@
         </p:nvSpPr>
         <p:spPr>
           <a:xfrm>
-            <a:off x="1615559" y="3688794"/>
-            <a:ext cx="2806898" cy="351949"/>
+            <a:off x="837724" y="4361498"/>
+            <a:ext cx="6185535" cy="383024"/>
           </a:xfrm>
           <a:prstGeom prst="rect">
             <a:avLst/>
@@ -7575,59 +6920,12 @@
           <a:bodyPr wrap="none" lIns="0" tIns="0" rIns="0" bIns="0" rtlCol="0" anchor="t"/>
           <a:lstStyle/>
           <a:p>
-            <a:pPr marL="0" indent="0" algn="l">
-              <a:lnSpc>
-                <a:spcPts val="2750"/>
-              </a:lnSpc>
-              <a:buNone/>
-            </a:pPr>
-            <a:r>
-              <a:rPr lang="en-US" sz="2200" dirty="0">
-                <a:solidFill>
-                  <a:srgbClr val="CAD6DE"/>
-                </a:solidFill>
-                <a:latin typeface="Unbounded" pitchFamily="34" charset="0"/>
-                <a:ea typeface="Unbounded" pitchFamily="34" charset="-122"/>
-                <a:cs typeface="Unbounded" pitchFamily="34" charset="-120"/>
-              </a:rPr>
-              <a:t>推薦商品管理</a:t>
-            </a:r>
-            <a:endParaRPr lang="en-US" sz="2200" dirty="0"/>
-          </a:p>
-        </p:txBody>
-      </p:sp>
-      <p:sp>
-        <p:nvSpPr>
-          <p:cNvPr id="7" name="Text 4">
-            <a:extLst>
-              <a:ext uri="{FF2B5EF4-FFF2-40B4-BE49-F238E27FC236}">
-                <a16:creationId xmlns="" xmlns:a16="http://schemas.microsoft.com/office/drawing/2014/main" id="{B39BACA9-D0BB-DFEA-0D21-CA26FA0C691B}"/>
-              </a:ext>
-            </a:extLst>
-          </p:cNvPr>
-          <p:cNvSpPr/>
-          <p:nvPr/>
-        </p:nvSpPr>
-        <p:spPr>
-          <a:xfrm>
-            <a:off x="1615559" y="4184332"/>
-            <a:ext cx="2806898" cy="383024"/>
-          </a:xfrm>
-          <a:prstGeom prst="rect">
-            <a:avLst/>
-          </a:prstGeom>
-          <a:noFill/>
-          <a:ln/>
-        </p:spPr>
-        <p:txBody>
-          <a:bodyPr wrap="none" lIns="0" tIns="0" rIns="0" bIns="0" rtlCol="0" anchor="t"/>
-          <a:lstStyle/>
-          <a:p>
-            <a:pPr marL="0" indent="0" algn="l">
+            <a:pPr marL="342900" indent="-342900" algn="l">
               <a:lnSpc>
                 <a:spcPts val="3000"/>
               </a:lnSpc>
-              <a:buNone/>
+              <a:buSzPct val="100000"/>
+              <a:buChar char="•"/>
             </a:pPr>
             <a:r>
               <a:rPr lang="en-US" sz="1850" dirty="0">
@@ -7638,7 +6936,7 @@
                 <a:ea typeface="Cabin" pitchFamily="34" charset="-122"/>
                 <a:cs typeface="Cabin" pitchFamily="34" charset="-120"/>
               </a:rPr>
-              <a:t>設定熱門與猜你喜歡商品</a:t>
+              <a:t>React 靈活前端</a:t>
             </a:r>
             <a:endParaRPr lang="en-US" sz="1850" dirty="0"/>
           </a:p>
@@ -7646,10 +6944,10 @@
       </p:sp>
       <p:sp>
         <p:nvSpPr>
-          <p:cNvPr id="8" name="Shape 5">
-            <a:extLst>
-              <a:ext uri="{FF2B5EF4-FFF2-40B4-BE49-F238E27FC236}">
-                <a16:creationId xmlns="" xmlns:a16="http://schemas.microsoft.com/office/drawing/2014/main" id="{49CC9E44-22D5-D067-95CE-8E773BCDAA9F}"/>
+          <p:cNvPr id="5" name="Text 3">
+            <a:extLst>
+              <a:ext uri="{FF2B5EF4-FFF2-40B4-BE49-F238E27FC236}">
+                <a16:creationId xmlns:a16="http://schemas.microsoft.com/office/drawing/2014/main" id="{A40FCDB0-C86F-254E-A3E2-9DCE2297BBA6}"/>
               </a:ext>
             </a:extLst>
           </p:cNvPr>
@@ -7658,36 +6956,8 @@
         </p:nvSpPr>
         <p:spPr>
           <a:xfrm>
-            <a:off x="4721662" y="3606522"/>
-            <a:ext cx="538520" cy="538520"/>
-          </a:xfrm>
-          <a:prstGeom prst="roundRect">
-            <a:avLst>
-              <a:gd name="adj" fmla="val 6668"/>
-            </a:avLst>
-          </a:prstGeom>
-          <a:solidFill>
-            <a:srgbClr val="304755"/>
-          </a:solidFill>
-          <a:ln/>
-        </p:spPr>
-      </p:sp>
-      <p:sp>
-        <p:nvSpPr>
-          <p:cNvPr id="9" name="Text 6">
-            <a:extLst>
-              <a:ext uri="{FF2B5EF4-FFF2-40B4-BE49-F238E27FC236}">
-                <a16:creationId xmlns="" xmlns:a16="http://schemas.microsoft.com/office/drawing/2014/main" id="{50933ABE-0DCE-B212-02CF-00213739500E}"/>
-              </a:ext>
-            </a:extLst>
-          </p:cNvPr>
-          <p:cNvSpPr/>
-          <p:nvPr/>
-        </p:nvSpPr>
-        <p:spPr>
-          <a:xfrm>
-            <a:off x="4821912" y="3664506"/>
-            <a:ext cx="337899" cy="422434"/>
+            <a:off x="837724" y="4828223"/>
+            <a:ext cx="6185535" cy="383024"/>
           </a:xfrm>
           <a:prstGeom prst="rect">
             <a:avLst/>
@@ -7699,107 +6969,12 @@
           <a:bodyPr wrap="none" lIns="0" tIns="0" rIns="0" bIns="0" rtlCol="0" anchor="t"/>
           <a:lstStyle/>
           <a:p>
-            <a:pPr marL="0" indent="0" algn="ctr">
-              <a:lnSpc>
-                <a:spcPts val="2650"/>
-              </a:lnSpc>
-              <a:buNone/>
-            </a:pPr>
-            <a:r>
-              <a:rPr lang="en-US" sz="2650" dirty="0">
-                <a:solidFill>
-                  <a:srgbClr val="CAD6DE"/>
-                </a:solidFill>
-                <a:latin typeface="Unbounded" pitchFamily="34" charset="0"/>
-                <a:ea typeface="Unbounded" pitchFamily="34" charset="-122"/>
-                <a:cs typeface="Unbounded" pitchFamily="34" charset="-120"/>
-              </a:rPr>
-              <a:t>2</a:t>
-            </a:r>
-            <a:endParaRPr lang="en-US" sz="2650" dirty="0"/>
-          </a:p>
-        </p:txBody>
-      </p:sp>
-      <p:sp>
-        <p:nvSpPr>
-          <p:cNvPr id="10" name="Text 7">
-            <a:extLst>
-              <a:ext uri="{FF2B5EF4-FFF2-40B4-BE49-F238E27FC236}">
-                <a16:creationId xmlns="" xmlns:a16="http://schemas.microsoft.com/office/drawing/2014/main" id="{E90838E1-8BA6-D0B9-9937-4BB52878B86A}"/>
-              </a:ext>
-            </a:extLst>
-          </p:cNvPr>
-          <p:cNvSpPr/>
-          <p:nvPr/>
-        </p:nvSpPr>
-        <p:spPr>
-          <a:xfrm>
-            <a:off x="5499497" y="3688794"/>
-            <a:ext cx="2806898" cy="351949"/>
-          </a:xfrm>
-          <a:prstGeom prst="rect">
-            <a:avLst/>
-          </a:prstGeom>
-          <a:noFill/>
-          <a:ln/>
-        </p:spPr>
-        <p:txBody>
-          <a:bodyPr wrap="none" lIns="0" tIns="0" rIns="0" bIns="0" rtlCol="0" anchor="t"/>
-          <a:lstStyle/>
-          <a:p>
-            <a:pPr marL="0" indent="0" algn="l">
-              <a:lnSpc>
-                <a:spcPts val="2750"/>
-              </a:lnSpc>
-              <a:buNone/>
-            </a:pPr>
-            <a:r>
-              <a:rPr lang="en-US" sz="2200" dirty="0">
-                <a:solidFill>
-                  <a:srgbClr val="CAD6DE"/>
-                </a:solidFill>
-                <a:latin typeface="Unbounded" pitchFamily="34" charset="0"/>
-                <a:ea typeface="Unbounded" pitchFamily="34" charset="-122"/>
-                <a:cs typeface="Unbounded" pitchFamily="34" charset="-120"/>
-              </a:rPr>
-              <a:t>搜尋關鍵字分析</a:t>
-            </a:r>
-            <a:endParaRPr lang="en-US" sz="2200" dirty="0"/>
-          </a:p>
-        </p:txBody>
-      </p:sp>
-      <p:sp>
-        <p:nvSpPr>
-          <p:cNvPr id="11" name="Text 8">
-            <a:extLst>
-              <a:ext uri="{FF2B5EF4-FFF2-40B4-BE49-F238E27FC236}">
-                <a16:creationId xmlns="" xmlns:a16="http://schemas.microsoft.com/office/drawing/2014/main" id="{CDEF5874-8177-DD87-681B-5A647433874F}"/>
-              </a:ext>
-            </a:extLst>
-          </p:cNvPr>
-          <p:cNvSpPr/>
-          <p:nvPr/>
-        </p:nvSpPr>
-        <p:spPr>
-          <a:xfrm>
-            <a:off x="5499497" y="4184332"/>
-            <a:ext cx="2806898" cy="766048"/>
-          </a:xfrm>
-          <a:prstGeom prst="rect">
-            <a:avLst/>
-          </a:prstGeom>
-          <a:noFill/>
-          <a:ln/>
-        </p:spPr>
-        <p:txBody>
-          <a:bodyPr wrap="square" lIns="0" tIns="0" rIns="0" bIns="0" rtlCol="0" anchor="t"/>
-          <a:lstStyle/>
-          <a:p>
-            <a:pPr marL="0" indent="0" algn="l">
+            <a:pPr marL="342900" indent="-342900" algn="l">
               <a:lnSpc>
                 <a:spcPts val="3000"/>
               </a:lnSpc>
-              <a:buNone/>
+              <a:buSzPct val="100000"/>
+              <a:buChar char="•"/>
             </a:pPr>
             <a:r>
               <a:rPr lang="en-US" sz="1850" dirty="0">
@@ -7810,7 +6985,7 @@
                 <a:ea typeface="Cabin" pitchFamily="34" charset="-122"/>
                 <a:cs typeface="Cabin" pitchFamily="34" charset="-120"/>
               </a:rPr>
-              <a:t>監控與分析使用者搜尋行為</a:t>
+              <a:t>Spring Boot 強大後端</a:t>
             </a:r>
             <a:endParaRPr lang="en-US" sz="1850" dirty="0"/>
           </a:p>
@@ -7818,10 +6993,10 @@
       </p:sp>
       <p:sp>
         <p:nvSpPr>
-          <p:cNvPr id="12" name="Shape 9">
-            <a:extLst>
-              <a:ext uri="{FF2B5EF4-FFF2-40B4-BE49-F238E27FC236}">
-                <a16:creationId xmlns="" xmlns:a16="http://schemas.microsoft.com/office/drawing/2014/main" id="{50EBA055-05F2-F726-C50D-0CA419365B7A}"/>
+          <p:cNvPr id="6" name="Text 4">
+            <a:extLst>
+              <a:ext uri="{FF2B5EF4-FFF2-40B4-BE49-F238E27FC236}">
+                <a16:creationId xmlns:a16="http://schemas.microsoft.com/office/drawing/2014/main" id="{EF21B18F-99E9-492C-5B8C-DE9CA44812F5}"/>
               </a:ext>
             </a:extLst>
           </p:cNvPr>
@@ -7830,36 +7005,8 @@
         </p:nvSpPr>
         <p:spPr>
           <a:xfrm>
-            <a:off x="837724" y="5429131"/>
-            <a:ext cx="538520" cy="538520"/>
-          </a:xfrm>
-          <a:prstGeom prst="roundRect">
-            <a:avLst>
-              <a:gd name="adj" fmla="val 6668"/>
-            </a:avLst>
-          </a:prstGeom>
-          <a:solidFill>
-            <a:srgbClr val="304755"/>
-          </a:solidFill>
-          <a:ln/>
-        </p:spPr>
-      </p:sp>
-      <p:sp>
-        <p:nvSpPr>
-          <p:cNvPr id="13" name="Text 10">
-            <a:extLst>
-              <a:ext uri="{FF2B5EF4-FFF2-40B4-BE49-F238E27FC236}">
-                <a16:creationId xmlns="" xmlns:a16="http://schemas.microsoft.com/office/drawing/2014/main" id="{3BCBA476-3368-29B8-0461-C5C6BC89C818}"/>
-              </a:ext>
-            </a:extLst>
-          </p:cNvPr>
-          <p:cNvSpPr/>
-          <p:nvPr/>
-        </p:nvSpPr>
-        <p:spPr>
-          <a:xfrm>
-            <a:off x="937974" y="5487114"/>
-            <a:ext cx="337899" cy="422434"/>
+            <a:off x="837724" y="5294948"/>
+            <a:ext cx="6185535" cy="383024"/>
           </a:xfrm>
           <a:prstGeom prst="rect">
             <a:avLst/>
@@ -7871,107 +7018,12 @@
           <a:bodyPr wrap="none" lIns="0" tIns="0" rIns="0" bIns="0" rtlCol="0" anchor="t"/>
           <a:lstStyle/>
           <a:p>
-            <a:pPr marL="0" indent="0" algn="ctr">
-              <a:lnSpc>
-                <a:spcPts val="2650"/>
-              </a:lnSpc>
-              <a:buNone/>
-            </a:pPr>
-            <a:r>
-              <a:rPr lang="en-US" sz="2650" dirty="0">
-                <a:solidFill>
-                  <a:srgbClr val="CAD6DE"/>
-                </a:solidFill>
-                <a:latin typeface="Unbounded" pitchFamily="34" charset="0"/>
-                <a:ea typeface="Unbounded" pitchFamily="34" charset="-122"/>
-                <a:cs typeface="Unbounded" pitchFamily="34" charset="-120"/>
-              </a:rPr>
-              <a:t>3</a:t>
-            </a:r>
-            <a:endParaRPr lang="en-US" sz="2650" dirty="0"/>
-          </a:p>
-        </p:txBody>
-      </p:sp>
-      <p:sp>
-        <p:nvSpPr>
-          <p:cNvPr id="14" name="Text 11">
-            <a:extLst>
-              <a:ext uri="{FF2B5EF4-FFF2-40B4-BE49-F238E27FC236}">
-                <a16:creationId xmlns="" xmlns:a16="http://schemas.microsoft.com/office/drawing/2014/main" id="{A05CD35A-97F3-6100-48F1-F8564E1CA21D}"/>
-              </a:ext>
-            </a:extLst>
-          </p:cNvPr>
-          <p:cNvSpPr/>
-          <p:nvPr/>
-        </p:nvSpPr>
-        <p:spPr>
-          <a:xfrm>
-            <a:off x="1615559" y="5511403"/>
-            <a:ext cx="2816185" cy="351949"/>
-          </a:xfrm>
-          <a:prstGeom prst="rect">
-            <a:avLst/>
-          </a:prstGeom>
-          <a:noFill/>
-          <a:ln/>
-        </p:spPr>
-        <p:txBody>
-          <a:bodyPr wrap="none" lIns="0" tIns="0" rIns="0" bIns="0" rtlCol="0" anchor="t"/>
-          <a:lstStyle/>
-          <a:p>
-            <a:pPr marL="0" indent="0" algn="l">
-              <a:lnSpc>
-                <a:spcPts val="2750"/>
-              </a:lnSpc>
-              <a:buNone/>
-            </a:pPr>
-            <a:r>
-              <a:rPr lang="en-US" sz="2200" dirty="0">
-                <a:solidFill>
-                  <a:srgbClr val="CAD6DE"/>
-                </a:solidFill>
-                <a:latin typeface="Unbounded" pitchFamily="34" charset="0"/>
-                <a:ea typeface="Unbounded" pitchFamily="34" charset="-122"/>
-                <a:cs typeface="Unbounded" pitchFamily="34" charset="-120"/>
-              </a:rPr>
-              <a:t>瀏覽紀錄統計</a:t>
-            </a:r>
-            <a:endParaRPr lang="en-US" sz="2200" dirty="0"/>
-          </a:p>
-        </p:txBody>
-      </p:sp>
-      <p:sp>
-        <p:nvSpPr>
-          <p:cNvPr id="15" name="Text 12">
-            <a:extLst>
-              <a:ext uri="{FF2B5EF4-FFF2-40B4-BE49-F238E27FC236}">
-                <a16:creationId xmlns="" xmlns:a16="http://schemas.microsoft.com/office/drawing/2014/main" id="{F6400D47-09BA-D12E-4952-3D12B933BE9C}"/>
-              </a:ext>
-            </a:extLst>
-          </p:cNvPr>
-          <p:cNvSpPr/>
-          <p:nvPr/>
-        </p:nvSpPr>
-        <p:spPr>
-          <a:xfrm>
-            <a:off x="1615559" y="6006941"/>
-            <a:ext cx="6690717" cy="383024"/>
-          </a:xfrm>
-          <a:prstGeom prst="rect">
-            <a:avLst/>
-          </a:prstGeom>
-          <a:noFill/>
-          <a:ln/>
-        </p:spPr>
-        <p:txBody>
-          <a:bodyPr wrap="none" lIns="0" tIns="0" rIns="0" bIns="0" rtlCol="0" anchor="t"/>
-          <a:lstStyle/>
-          <a:p>
-            <a:pPr marL="0" indent="0" algn="l">
+            <a:pPr marL="342900" indent="-342900" algn="l">
               <a:lnSpc>
                 <a:spcPts val="3000"/>
               </a:lnSpc>
-              <a:buNone/>
+              <a:buSzPct val="100000"/>
+              <a:buChar char="•"/>
             </a:pPr>
             <a:r>
               <a:rPr lang="en-US" sz="1850" dirty="0">
@@ -7982,48 +7034,18 @@
                 <a:ea typeface="Cabin" pitchFamily="34" charset="-122"/>
                 <a:cs typeface="Cabin" pitchFamily="34" charset="-120"/>
               </a:rPr>
-              <a:t>深入理解用戶興趣與行為</a:t>
+              <a:t>MySQL 穩定資料庫</a:t>
             </a:r>
             <a:endParaRPr lang="en-US" sz="1850" dirty="0"/>
           </a:p>
         </p:txBody>
       </p:sp>
-    </p:spTree>
-    <p:extLst>
-      <p:ext uri="{BB962C8B-B14F-4D97-AF65-F5344CB8AC3E}">
-        <p14:creationId xmlns:p14="http://schemas.microsoft.com/office/powerpoint/2010/main" val="1975342029"/>
-      </p:ext>
-    </p:extLst>
-  </p:cSld>
-  <p:clrMapOvr>
-    <a:masterClrMapping/>
-  </p:clrMapOvr>
-</p:sld>
-</file>
-
-<file path=ppt/slides/slide23.xml><?xml version="1.0" encoding="utf-8"?>
-<p:sld xmlns:a="http://schemas.openxmlformats.org/drawingml/2006/main" xmlns:r="http://schemas.openxmlformats.org/officeDocument/2006/relationships" xmlns:p="http://schemas.openxmlformats.org/presentationml/2006/main">
-  <p:cSld>
-    <p:spTree>
-      <p:nvGrpSpPr>
-        <p:cNvPr id="1" name=""/>
-        <p:cNvGrpSpPr/>
-        <p:nvPr/>
-      </p:nvGrpSpPr>
-      <p:grpSpPr>
-        <a:xfrm>
-          <a:off x="0" y="0"/>
-          <a:ext cx="0" cy="0"/>
-          <a:chOff x="0" y="0"/>
-          <a:chExt cx="0" cy="0"/>
-        </a:xfrm>
-      </p:grpSpPr>
-      <p:sp>
-        <p:nvSpPr>
-          <p:cNvPr id="2" name="Text 0">
-            <a:extLst>
-              <a:ext uri="{FF2B5EF4-FFF2-40B4-BE49-F238E27FC236}">
-                <a16:creationId xmlns="" xmlns:a16="http://schemas.microsoft.com/office/drawing/2014/main" id="{D86F5ABA-0B58-8CD4-CC56-B5665FB81ADD}"/>
+      <p:sp>
+        <p:nvSpPr>
+          <p:cNvPr id="7" name="Text 5">
+            <a:extLst>
+              <a:ext uri="{FF2B5EF4-FFF2-40B4-BE49-F238E27FC236}">
+                <a16:creationId xmlns:a16="http://schemas.microsoft.com/office/drawing/2014/main" id="{86BEF0FC-6390-1497-F4EC-574402A2FE09}"/>
               </a:ext>
             </a:extLst>
           </p:cNvPr>
@@ -8032,55 +7054,7 @@
         </p:nvSpPr>
         <p:spPr>
           <a:xfrm>
-            <a:off x="837724" y="2467928"/>
-            <a:ext cx="5632490" cy="704017"/>
-          </a:xfrm>
-          <a:prstGeom prst="rect">
-            <a:avLst/>
-          </a:prstGeom>
-          <a:noFill/>
-          <a:ln/>
-        </p:spPr>
-        <p:txBody>
-          <a:bodyPr wrap="none" lIns="0" tIns="0" rIns="0" bIns="0" rtlCol="0" anchor="t"/>
-          <a:lstStyle/>
-          <a:p>
-            <a:pPr marL="0" indent="0" algn="l">
-              <a:lnSpc>
-                <a:spcPts val="5500"/>
-              </a:lnSpc>
-              <a:buNone/>
-            </a:pPr>
-            <a:r>
-              <a:rPr lang="en-US" sz="4400" dirty="0">
-                <a:solidFill>
-                  <a:srgbClr val="FFFFFF"/>
-                </a:solidFill>
-                <a:latin typeface="Unbounded" pitchFamily="34" charset="0"/>
-                <a:ea typeface="Unbounded" pitchFamily="34" charset="-122"/>
-                <a:cs typeface="Unbounded" pitchFamily="34" charset="-120"/>
-              </a:rPr>
-              <a:t>技術總結與未來展望</a:t>
-            </a:r>
-            <a:endParaRPr lang="en-US" sz="4400" dirty="0"/>
-          </a:p>
-        </p:txBody>
-      </p:sp>
-      <p:sp>
-        <p:nvSpPr>
-          <p:cNvPr id="3" name="Text 1">
-            <a:extLst>
-              <a:ext uri="{FF2B5EF4-FFF2-40B4-BE49-F238E27FC236}">
-                <a16:creationId xmlns="" xmlns:a16="http://schemas.microsoft.com/office/drawing/2014/main" id="{E8FEE2E1-1E85-EEEE-7325-2D108C73AF3D}"/>
-              </a:ext>
-            </a:extLst>
-          </p:cNvPr>
-          <p:cNvSpPr/>
-          <p:nvPr/>
-        </p:nvSpPr>
-        <p:spPr>
-          <a:xfrm>
-            <a:off x="837724" y="3770233"/>
+            <a:off x="7614761" y="3770233"/>
             <a:ext cx="2816185" cy="351949"/>
           </a:xfrm>
           <a:prstGeom prst="rect">
@@ -8108,7 +7082,7 @@
                 <a:ea typeface="Unbounded" pitchFamily="34" charset="-122"/>
                 <a:cs typeface="Unbounded" pitchFamily="34" charset="-120"/>
               </a:rPr>
-              <a:t>技術棧優勢</a:t>
+              <a:t>未來功能擴展</a:t>
             </a:r>
             <a:endParaRPr lang="en-US" sz="2200" dirty="0"/>
           </a:p>
@@ -8116,10 +7090,10 @@
       </p:sp>
       <p:sp>
         <p:nvSpPr>
-          <p:cNvPr id="4" name="Text 2">
-            <a:extLst>
-              <a:ext uri="{FF2B5EF4-FFF2-40B4-BE49-F238E27FC236}">
-                <a16:creationId xmlns="" xmlns:a16="http://schemas.microsoft.com/office/drawing/2014/main" id="{71C51FCE-3E66-78F1-6A11-6A5C36BF09F3}"/>
+          <p:cNvPr id="8" name="Text 6">
+            <a:extLst>
+              <a:ext uri="{FF2B5EF4-FFF2-40B4-BE49-F238E27FC236}">
+                <a16:creationId xmlns:a16="http://schemas.microsoft.com/office/drawing/2014/main" id="{80252D43-CF65-35D9-E01C-9E4F536F7CC7}"/>
               </a:ext>
             </a:extLst>
           </p:cNvPr>
@@ -8128,7 +7102,7 @@
         </p:nvSpPr>
         <p:spPr>
           <a:xfrm>
-            <a:off x="837724" y="4361498"/>
+            <a:off x="7614761" y="4361498"/>
             <a:ext cx="6185535" cy="383024"/>
           </a:xfrm>
           <a:prstGeom prst="rect">
@@ -8157,7 +7131,7 @@
                 <a:ea typeface="Cabin" pitchFamily="34" charset="-122"/>
                 <a:cs typeface="Cabin" pitchFamily="34" charset="-120"/>
               </a:rPr>
-              <a:t>React 靈活前端</a:t>
+              <a:t>整合真實物流與支付</a:t>
             </a:r>
             <a:endParaRPr lang="en-US" sz="1850" dirty="0"/>
           </a:p>
@@ -8165,10 +7139,10 @@
       </p:sp>
       <p:sp>
         <p:nvSpPr>
-          <p:cNvPr id="5" name="Text 3">
-            <a:extLst>
-              <a:ext uri="{FF2B5EF4-FFF2-40B4-BE49-F238E27FC236}">
-                <a16:creationId xmlns="" xmlns:a16="http://schemas.microsoft.com/office/drawing/2014/main" id="{A40FCDB0-C86F-254E-A3E2-9DCE2297BBA6}"/>
+          <p:cNvPr id="10" name="Text 8">
+            <a:extLst>
+              <a:ext uri="{FF2B5EF4-FFF2-40B4-BE49-F238E27FC236}">
+                <a16:creationId xmlns:a16="http://schemas.microsoft.com/office/drawing/2014/main" id="{D611A246-5FF8-10E3-B3D6-9B1DA498610E}"/>
               </a:ext>
             </a:extLst>
           </p:cNvPr>
@@ -8177,7 +7151,7 @@
         </p:nvSpPr>
         <p:spPr>
           <a:xfrm>
-            <a:off x="837724" y="4828223"/>
+            <a:off x="7614761" y="4895133"/>
             <a:ext cx="6185535" cy="383024"/>
           </a:xfrm>
           <a:prstGeom prst="rect">
@@ -8198,7 +7172,7 @@
               <a:buChar char="•"/>
             </a:pPr>
             <a:r>
-              <a:rPr lang="en-US" sz="1850" dirty="0">
+              <a:rPr lang="zh-TW" altLang="en-US" sz="1850" dirty="0">
                 <a:solidFill>
                   <a:srgbClr val="CAD6DE"/>
                 </a:solidFill>
@@ -8206,7 +7180,18 @@
                 <a:ea typeface="Cabin" pitchFamily="34" charset="-122"/>
                 <a:cs typeface="Cabin" pitchFamily="34" charset="-120"/>
               </a:rPr>
-              <a:t>Spring Boot 強大後端</a:t>
+              <a:t>完善</a:t>
+            </a:r>
+            <a:r>
+              <a:rPr lang="en-US" sz="1850" dirty="0" err="1">
+                <a:solidFill>
+                  <a:srgbClr val="CAD6DE"/>
+                </a:solidFill>
+                <a:latin typeface="Cabin" pitchFamily="34" charset="0"/>
+                <a:ea typeface="Cabin" pitchFamily="34" charset="-122"/>
+                <a:cs typeface="Cabin" pitchFamily="34" charset="-120"/>
+              </a:rPr>
+              <a:t>推薦系統</a:t>
             </a:r>
             <a:endParaRPr lang="en-US" sz="1850" dirty="0"/>
           </a:p>
@@ -8214,10 +7199,10 @@
       </p:sp>
       <p:sp>
         <p:nvSpPr>
-          <p:cNvPr id="6" name="Text 4">
-            <a:extLst>
-              <a:ext uri="{FF2B5EF4-FFF2-40B4-BE49-F238E27FC236}">
-                <a16:creationId xmlns="" xmlns:a16="http://schemas.microsoft.com/office/drawing/2014/main" id="{EF21B18F-99E9-492C-5B8C-DE9CA44812F5}"/>
+          <p:cNvPr id="11" name="Text 8">
+            <a:extLst>
+              <a:ext uri="{FF2B5EF4-FFF2-40B4-BE49-F238E27FC236}">
+                <a16:creationId xmlns:a16="http://schemas.microsoft.com/office/drawing/2014/main" id="{00062358-1EDA-B75A-D993-678F1ABC08F9}"/>
               </a:ext>
             </a:extLst>
           </p:cNvPr>
@@ -8226,7 +7211,7 @@
         </p:nvSpPr>
         <p:spPr>
           <a:xfrm>
-            <a:off x="837724" y="5294948"/>
+            <a:off x="7614760" y="5935039"/>
             <a:ext cx="6185535" cy="383024"/>
           </a:xfrm>
           <a:prstGeom prst="rect">
@@ -8247,7 +7232,7 @@
               <a:buChar char="•"/>
             </a:pPr>
             <a:r>
-              <a:rPr lang="en-US" sz="1850" dirty="0">
+              <a:rPr lang="zh-TW" altLang="en-US" sz="1850" dirty="0">
                 <a:solidFill>
                   <a:srgbClr val="CAD6DE"/>
                 </a:solidFill>
@@ -8255,7 +7240,18 @@
                 <a:ea typeface="Cabin" pitchFamily="34" charset="-122"/>
                 <a:cs typeface="Cabin" pitchFamily="34" charset="-120"/>
               </a:rPr>
-              <a:t>MySQL 穩定資料庫</a:t>
+              <a:t>完善通知</a:t>
+            </a:r>
+            <a:r>
+              <a:rPr lang="en-US" altLang="zh-TW" sz="1850" dirty="0" err="1">
+                <a:solidFill>
+                  <a:srgbClr val="CAD6DE"/>
+                </a:solidFill>
+                <a:latin typeface="Cabin" pitchFamily="34" charset="0"/>
+                <a:ea typeface="Cabin" pitchFamily="34" charset="-122"/>
+                <a:cs typeface="Cabin" pitchFamily="34" charset="-120"/>
+              </a:rPr>
+              <a:t>系統</a:t>
             </a:r>
             <a:endParaRPr lang="en-US" sz="1850" dirty="0"/>
           </a:p>
@@ -8263,10 +7259,10 @@
       </p:sp>
       <p:sp>
         <p:nvSpPr>
-          <p:cNvPr id="7" name="Text 5">
-            <a:extLst>
-              <a:ext uri="{FF2B5EF4-FFF2-40B4-BE49-F238E27FC236}">
-                <a16:creationId xmlns="" xmlns:a16="http://schemas.microsoft.com/office/drawing/2014/main" id="{86BEF0FC-6390-1497-F4EC-574402A2FE09}"/>
+          <p:cNvPr id="12" name="Text 8">
+            <a:extLst>
+              <a:ext uri="{FF2B5EF4-FFF2-40B4-BE49-F238E27FC236}">
+                <a16:creationId xmlns:a16="http://schemas.microsoft.com/office/drawing/2014/main" id="{53AA341C-D24A-D785-800B-656C55B37B2D}"/>
               </a:ext>
             </a:extLst>
           </p:cNvPr>
@@ -8275,55 +7271,7 @@
         </p:nvSpPr>
         <p:spPr>
           <a:xfrm>
-            <a:off x="7614761" y="3770233"/>
-            <a:ext cx="2816185" cy="351949"/>
-          </a:xfrm>
-          <a:prstGeom prst="rect">
-            <a:avLst/>
-          </a:prstGeom>
-          <a:noFill/>
-          <a:ln/>
-        </p:spPr>
-        <p:txBody>
-          <a:bodyPr wrap="none" lIns="0" tIns="0" rIns="0" bIns="0" rtlCol="0" anchor="t"/>
-          <a:lstStyle/>
-          <a:p>
-            <a:pPr marL="0" indent="0" algn="l">
-              <a:lnSpc>
-                <a:spcPts val="2750"/>
-              </a:lnSpc>
-              <a:buNone/>
-            </a:pPr>
-            <a:r>
-              <a:rPr lang="en-US" sz="2200" dirty="0">
-                <a:solidFill>
-                  <a:srgbClr val="FFFFFF"/>
-                </a:solidFill>
-                <a:latin typeface="Unbounded" pitchFamily="34" charset="0"/>
-                <a:ea typeface="Unbounded" pitchFamily="34" charset="-122"/>
-                <a:cs typeface="Unbounded" pitchFamily="34" charset="-120"/>
-              </a:rPr>
-              <a:t>未來功能擴展</a:t>
-            </a:r>
-            <a:endParaRPr lang="en-US" sz="2200" dirty="0"/>
-          </a:p>
-        </p:txBody>
-      </p:sp>
-      <p:sp>
-        <p:nvSpPr>
-          <p:cNvPr id="8" name="Text 6">
-            <a:extLst>
-              <a:ext uri="{FF2B5EF4-FFF2-40B4-BE49-F238E27FC236}">
-                <a16:creationId xmlns="" xmlns:a16="http://schemas.microsoft.com/office/drawing/2014/main" id="{80252D43-CF65-35D9-E01C-9E4F536F7CC7}"/>
-              </a:ext>
-            </a:extLst>
-          </p:cNvPr>
-          <p:cNvSpPr/>
-          <p:nvPr/>
-        </p:nvSpPr>
-        <p:spPr>
-          <a:xfrm>
-            <a:off x="7614761" y="4361498"/>
+            <a:off x="7614760" y="5379312"/>
             <a:ext cx="6185535" cy="383024"/>
           </a:xfrm>
           <a:prstGeom prst="rect">
@@ -8344,7 +7292,7 @@
               <a:buChar char="•"/>
             </a:pPr>
             <a:r>
-              <a:rPr lang="en-US" sz="1850" dirty="0">
+              <a:rPr lang="zh-TW" altLang="en-US" sz="1850" dirty="0">
                 <a:solidFill>
                   <a:srgbClr val="CAD6DE"/>
                 </a:solidFill>
@@ -8352,48 +7300,10 @@
                 <a:ea typeface="Cabin" pitchFamily="34" charset="-122"/>
                 <a:cs typeface="Cabin" pitchFamily="34" charset="-120"/>
               </a:rPr>
-              <a:t>整合真實物流與支付</a:t>
-            </a:r>
-            <a:endParaRPr lang="en-US" sz="1850" dirty="0"/>
-          </a:p>
-        </p:txBody>
-      </p:sp>
-      <p:sp>
-        <p:nvSpPr>
-          <p:cNvPr id="9" name="Text 7">
-            <a:extLst>
-              <a:ext uri="{FF2B5EF4-FFF2-40B4-BE49-F238E27FC236}">
-                <a16:creationId xmlns="" xmlns:a16="http://schemas.microsoft.com/office/drawing/2014/main" id="{21DC604F-7348-3AC8-09C2-35F3B8C2DDBE}"/>
-              </a:ext>
-            </a:extLst>
-          </p:cNvPr>
-          <p:cNvSpPr/>
-          <p:nvPr/>
-        </p:nvSpPr>
-        <p:spPr>
-          <a:xfrm>
-            <a:off x="7614761" y="4828223"/>
-            <a:ext cx="6185535" cy="383024"/>
-          </a:xfrm>
-          <a:prstGeom prst="rect">
-            <a:avLst/>
-          </a:prstGeom>
-          <a:noFill/>
-          <a:ln/>
-        </p:spPr>
-        <p:txBody>
-          <a:bodyPr wrap="none" lIns="0" tIns="0" rIns="0" bIns="0" rtlCol="0" anchor="t"/>
-          <a:lstStyle/>
-          <a:p>
-            <a:pPr marL="342900" indent="-342900" algn="l">
-              <a:lnSpc>
-                <a:spcPts val="3000"/>
-              </a:lnSpc>
-              <a:buSzPct val="100000"/>
-              <a:buChar char="•"/>
-            </a:pPr>
-            <a:r>
-              <a:rPr lang="en-US" sz="1850" dirty="0">
+              <a:t>完善訂單</a:t>
+            </a:r>
+            <a:r>
+              <a:rPr lang="en-US" altLang="zh-TW" sz="1850" dirty="0" err="1">
                 <a:solidFill>
                   <a:srgbClr val="CAD6DE"/>
                 </a:solidFill>
@@ -8401,56 +7311,7 @@
                 <a:ea typeface="Cabin" pitchFamily="34" charset="-122"/>
                 <a:cs typeface="Cabin" pitchFamily="34" charset="-120"/>
               </a:rPr>
-              <a:t>行銷模組與促銷活動</a:t>
-            </a:r>
-            <a:endParaRPr lang="en-US" sz="1850" dirty="0"/>
-          </a:p>
-        </p:txBody>
-      </p:sp>
-      <p:sp>
-        <p:nvSpPr>
-          <p:cNvPr id="10" name="Text 8">
-            <a:extLst>
-              <a:ext uri="{FF2B5EF4-FFF2-40B4-BE49-F238E27FC236}">
-                <a16:creationId xmlns="" xmlns:a16="http://schemas.microsoft.com/office/drawing/2014/main" id="{D611A246-5FF8-10E3-B3D6-9B1DA498610E}"/>
-              </a:ext>
-            </a:extLst>
-          </p:cNvPr>
-          <p:cNvSpPr/>
-          <p:nvPr/>
-        </p:nvSpPr>
-        <p:spPr>
-          <a:xfrm>
-            <a:off x="7614761" y="5294948"/>
-            <a:ext cx="6185535" cy="383024"/>
-          </a:xfrm>
-          <a:prstGeom prst="rect">
-            <a:avLst/>
-          </a:prstGeom>
-          <a:noFill/>
-          <a:ln/>
-        </p:spPr>
-        <p:txBody>
-          <a:bodyPr wrap="none" lIns="0" tIns="0" rIns="0" bIns="0" rtlCol="0" anchor="t"/>
-          <a:lstStyle/>
-          <a:p>
-            <a:pPr marL="342900" indent="-342900" algn="l">
-              <a:lnSpc>
-                <a:spcPts val="3000"/>
-              </a:lnSpc>
-              <a:buSzPct val="100000"/>
-              <a:buChar char="•"/>
-            </a:pPr>
-            <a:r>
-              <a:rPr lang="en-US" sz="1850" dirty="0">
-                <a:solidFill>
-                  <a:srgbClr val="CAD6DE"/>
-                </a:solidFill>
-                <a:latin typeface="Cabin" pitchFamily="34" charset="0"/>
-                <a:ea typeface="Cabin" pitchFamily="34" charset="-122"/>
-                <a:cs typeface="Cabin" pitchFamily="34" charset="-120"/>
-              </a:rPr>
-              <a:t>AI 個性化推薦系統</a:t>
+              <a:t>物流系統</a:t>
             </a:r>
             <a:endParaRPr lang="en-US" sz="1850" dirty="0"/>
           </a:p>
@@ -8472,6 +7333,14 @@
 <file path=ppt/slides/slide3.xml><?xml version="1.0" encoding="utf-8"?>
 <p:sld xmlns:a="http://schemas.openxmlformats.org/drawingml/2006/main" xmlns:r="http://schemas.openxmlformats.org/officeDocument/2006/relationships" xmlns:p="http://schemas.openxmlformats.org/presentationml/2006/main">
   <p:cSld>
+    <p:bg>
+      <p:bgPr>
+        <a:solidFill>
+          <a:schemeClr val="bg1"/>
+        </a:solidFill>
+        <a:effectLst/>
+      </p:bgPr>
+    </p:bg>
     <p:spTree>
       <p:nvGrpSpPr>
         <p:cNvPr id="1" name=""/>
@@ -8491,7 +7360,7 @@
           <p:cNvPr id="2" name="Text 0">
             <a:extLst>
               <a:ext uri="{FF2B5EF4-FFF2-40B4-BE49-F238E27FC236}">
-                <a16:creationId xmlns="" xmlns:a16="http://schemas.microsoft.com/office/drawing/2014/main" id="{0E5DFD86-DAA3-E24E-C115-87E2A3946D9F}"/>
+                <a16:creationId xmlns:a16="http://schemas.microsoft.com/office/drawing/2014/main" id="{0E5DFD86-DAA3-E24E-C115-87E2A3946D9F}"/>
               </a:ext>
             </a:extLst>
           </p:cNvPr>
@@ -8500,7 +7369,7 @@
         </p:nvSpPr>
         <p:spPr>
           <a:xfrm>
-            <a:off x="837724" y="2677239"/>
+            <a:off x="694849" y="1067514"/>
             <a:ext cx="5632490" cy="704017"/>
           </a:xfrm>
           <a:prstGeom prst="rect">
@@ -8520,408 +7389,59 @@
               <a:buNone/>
             </a:pPr>
             <a:r>
-              <a:rPr lang="en-US" sz="4400" dirty="0">
-                <a:solidFill>
-                  <a:srgbClr val="FFFFFF"/>
-                </a:solidFill>
+              <a:rPr lang="en-US" sz="4400" dirty="0" err="1">
                 <a:latin typeface="Unbounded" pitchFamily="34" charset="0"/>
                 <a:ea typeface="Unbounded" pitchFamily="34" charset="-122"/>
                 <a:cs typeface="Unbounded" pitchFamily="34" charset="-120"/>
               </a:rPr>
-              <a:t>系統架構概覽</a:t>
-            </a:r>
-            <a:endParaRPr lang="en-US" sz="4400" dirty="0"/>
-          </a:p>
-        </p:txBody>
-      </p:sp>
-      <p:sp>
-        <p:nvSpPr>
-          <p:cNvPr id="3" name="Text 1">
-            <a:extLst>
-              <a:ext uri="{FF2B5EF4-FFF2-40B4-BE49-F238E27FC236}">
-                <a16:creationId xmlns="" xmlns:a16="http://schemas.microsoft.com/office/drawing/2014/main" id="{0C2EA2AC-9720-E7D0-2018-95BCB5B020ED}"/>
-              </a:ext>
-            </a:extLst>
-          </p:cNvPr>
-          <p:cNvSpPr/>
-          <p:nvPr/>
-        </p:nvSpPr>
-        <p:spPr>
-          <a:xfrm>
-            <a:off x="837724" y="3979545"/>
-            <a:ext cx="2800826" cy="351949"/>
-          </a:xfrm>
-          <a:prstGeom prst="rect">
-            <a:avLst/>
-          </a:prstGeom>
-          <a:noFill/>
-          <a:ln/>
-        </p:spPr>
-        <p:txBody>
-          <a:bodyPr wrap="none" lIns="0" tIns="0" rIns="0" bIns="0" rtlCol="0" anchor="t"/>
-          <a:lstStyle/>
-          <a:p>
-            <a:pPr marL="0" indent="0" algn="l">
-              <a:lnSpc>
-                <a:spcPts val="2750"/>
-              </a:lnSpc>
-              <a:buNone/>
-            </a:pPr>
-            <a:r>
-              <a:rPr lang="en-US" sz="2200" dirty="0">
-                <a:solidFill>
-                  <a:srgbClr val="FFFFFF"/>
-                </a:solidFill>
+              <a:t>系統架構</a:t>
+            </a:r>
+            <a:r>
+              <a:rPr lang="zh-TW" altLang="en-US" sz="4400" dirty="0">
                 <a:latin typeface="Unbounded" pitchFamily="34" charset="0"/>
                 <a:ea typeface="Unbounded" pitchFamily="34" charset="-122"/>
                 <a:cs typeface="Unbounded" pitchFamily="34" charset="-120"/>
               </a:rPr>
-              <a:t>架構特色</a:t>
-            </a:r>
-            <a:endParaRPr lang="en-US" sz="2200" dirty="0"/>
-          </a:p>
-        </p:txBody>
-      </p:sp>
-      <p:sp>
-        <p:nvSpPr>
-          <p:cNvPr id="4" name="Text 2">
-            <a:extLst>
-              <a:ext uri="{FF2B5EF4-FFF2-40B4-BE49-F238E27FC236}">
-                <a16:creationId xmlns="" xmlns:a16="http://schemas.microsoft.com/office/drawing/2014/main" id="{32CC4251-045F-A735-674C-7674D5575551}"/>
-              </a:ext>
-            </a:extLst>
-          </p:cNvPr>
-          <p:cNvSpPr/>
-          <p:nvPr/>
-        </p:nvSpPr>
-        <p:spPr>
-          <a:xfrm>
-            <a:off x="837724" y="4570809"/>
-            <a:ext cx="2800826" cy="766048"/>
-          </a:xfrm>
-          <a:prstGeom prst="rect">
-            <a:avLst/>
-          </a:prstGeom>
-          <a:noFill/>
-          <a:ln/>
-        </p:spPr>
-        <p:txBody>
-          <a:bodyPr wrap="square" lIns="0" tIns="0" rIns="0" bIns="0" rtlCol="0" anchor="t"/>
-          <a:lstStyle/>
-          <a:p>
-            <a:pPr marL="0" indent="0" algn="l">
-              <a:lnSpc>
-                <a:spcPts val="3000"/>
-              </a:lnSpc>
-              <a:buNone/>
-            </a:pPr>
-            <a:r>
-              <a:rPr lang="en-US" sz="1850" dirty="0">
-                <a:solidFill>
-                  <a:srgbClr val="CAD6DE"/>
-                </a:solidFill>
-                <a:latin typeface="Cabin" pitchFamily="34" charset="0"/>
-                <a:ea typeface="Cabin" pitchFamily="34" charset="-122"/>
-                <a:cs typeface="Cabin" pitchFamily="34" charset="-120"/>
-              </a:rPr>
-              <a:t>採用前後端分離，提升開發與維護效率</a:t>
-            </a:r>
-            <a:endParaRPr lang="en-US" sz="1850" dirty="0"/>
-          </a:p>
-        </p:txBody>
-      </p:sp>
-      <p:sp>
-        <p:nvSpPr>
-          <p:cNvPr id="5" name="Text 3">
-            <a:extLst>
-              <a:ext uri="{FF2B5EF4-FFF2-40B4-BE49-F238E27FC236}">
-                <a16:creationId xmlns="" xmlns:a16="http://schemas.microsoft.com/office/drawing/2014/main" id="{E337984F-AB19-E82B-CA1A-1020BBE5AFF4}"/>
-              </a:ext>
-            </a:extLst>
-          </p:cNvPr>
-          <p:cNvSpPr/>
-          <p:nvPr/>
-        </p:nvSpPr>
-        <p:spPr>
-          <a:xfrm>
-            <a:off x="4230053" y="3979545"/>
-            <a:ext cx="2800826" cy="351949"/>
-          </a:xfrm>
-          <a:prstGeom prst="rect">
-            <a:avLst/>
-          </a:prstGeom>
-          <a:noFill/>
-          <a:ln/>
-        </p:spPr>
-        <p:txBody>
-          <a:bodyPr wrap="none" lIns="0" tIns="0" rIns="0" bIns="0" rtlCol="0" anchor="t"/>
-          <a:lstStyle/>
-          <a:p>
-            <a:pPr marL="0" indent="0" algn="l">
-              <a:lnSpc>
-                <a:spcPts val="2750"/>
-              </a:lnSpc>
-              <a:buNone/>
-            </a:pPr>
-            <a:r>
-              <a:rPr lang="en-US" sz="2200" dirty="0">
-                <a:solidFill>
-                  <a:srgbClr val="FFFFFF"/>
-                </a:solidFill>
-                <a:latin typeface="Unbounded" pitchFamily="34" charset="0"/>
-                <a:ea typeface="Unbounded" pitchFamily="34" charset="-122"/>
-                <a:cs typeface="Unbounded" pitchFamily="34" charset="-120"/>
-              </a:rPr>
-              <a:t>前端技術</a:t>
-            </a:r>
-            <a:endParaRPr lang="en-US" sz="2200" dirty="0"/>
-          </a:p>
-        </p:txBody>
-      </p:sp>
-      <p:sp>
-        <p:nvSpPr>
-          <p:cNvPr id="6" name="Text 4">
-            <a:extLst>
-              <a:ext uri="{FF2B5EF4-FFF2-40B4-BE49-F238E27FC236}">
-                <a16:creationId xmlns="" xmlns:a16="http://schemas.microsoft.com/office/drawing/2014/main" id="{AF2BE53D-7A2C-72E3-9CC9-CDE9FD836F92}"/>
-              </a:ext>
-            </a:extLst>
-          </p:cNvPr>
-          <p:cNvSpPr/>
-          <p:nvPr/>
-        </p:nvSpPr>
-        <p:spPr>
-          <a:xfrm>
-            <a:off x="4230053" y="4570809"/>
-            <a:ext cx="2800826" cy="766048"/>
-          </a:xfrm>
-          <a:prstGeom prst="rect">
-            <a:avLst/>
-          </a:prstGeom>
-          <a:noFill/>
-          <a:ln/>
-        </p:spPr>
-        <p:txBody>
-          <a:bodyPr wrap="square" lIns="0" tIns="0" rIns="0" bIns="0" rtlCol="0" anchor="t"/>
-          <a:lstStyle/>
-          <a:p>
-            <a:pPr marL="0" indent="0" algn="l">
-              <a:lnSpc>
-                <a:spcPts val="3000"/>
-              </a:lnSpc>
-              <a:buNone/>
-            </a:pPr>
-            <a:r>
-              <a:rPr lang="en-US" sz="1850" dirty="0">
-                <a:solidFill>
-                  <a:srgbClr val="CAD6DE"/>
-                </a:solidFill>
-                <a:latin typeface="Cabin" pitchFamily="34" charset="0"/>
-                <a:ea typeface="Cabin" pitchFamily="34" charset="-122"/>
-                <a:cs typeface="Cabin" pitchFamily="34" charset="-120"/>
-              </a:rPr>
-              <a:t>React 提供互動豐富的使用者介面</a:t>
-            </a:r>
-            <a:endParaRPr lang="en-US" sz="1850" dirty="0"/>
-          </a:p>
-        </p:txBody>
-      </p:sp>
-      <p:sp>
-        <p:nvSpPr>
-          <p:cNvPr id="7" name="Text 5">
-            <a:extLst>
-              <a:ext uri="{FF2B5EF4-FFF2-40B4-BE49-F238E27FC236}">
-                <a16:creationId xmlns="" xmlns:a16="http://schemas.microsoft.com/office/drawing/2014/main" id="{233D3FC9-5AEF-8357-5893-F40B55562D83}"/>
-              </a:ext>
-            </a:extLst>
-          </p:cNvPr>
-          <p:cNvSpPr/>
-          <p:nvPr/>
-        </p:nvSpPr>
-        <p:spPr>
-          <a:xfrm>
-            <a:off x="7622381" y="3979545"/>
-            <a:ext cx="2800826" cy="351949"/>
-          </a:xfrm>
-          <a:prstGeom prst="rect">
-            <a:avLst/>
-          </a:prstGeom>
-          <a:noFill/>
-          <a:ln/>
-        </p:spPr>
-        <p:txBody>
-          <a:bodyPr wrap="none" lIns="0" tIns="0" rIns="0" bIns="0" rtlCol="0" anchor="t"/>
-          <a:lstStyle/>
-          <a:p>
-            <a:pPr marL="0" indent="0" algn="l">
-              <a:lnSpc>
-                <a:spcPts val="2750"/>
-              </a:lnSpc>
-              <a:buNone/>
-            </a:pPr>
-            <a:r>
-              <a:rPr lang="en-US" sz="2200" dirty="0">
-                <a:solidFill>
-                  <a:srgbClr val="FFFFFF"/>
-                </a:solidFill>
-                <a:latin typeface="Unbounded" pitchFamily="34" charset="0"/>
-                <a:ea typeface="Unbounded" pitchFamily="34" charset="-122"/>
-                <a:cs typeface="Unbounded" pitchFamily="34" charset="-120"/>
-              </a:rPr>
-              <a:t>後端技術</a:t>
-            </a:r>
-            <a:endParaRPr lang="en-US" sz="2200" dirty="0"/>
-          </a:p>
-        </p:txBody>
-      </p:sp>
-      <p:sp>
-        <p:nvSpPr>
-          <p:cNvPr id="8" name="Text 6">
-            <a:extLst>
-              <a:ext uri="{FF2B5EF4-FFF2-40B4-BE49-F238E27FC236}">
-                <a16:creationId xmlns="" xmlns:a16="http://schemas.microsoft.com/office/drawing/2014/main" id="{9EC85AF8-6AA8-2BD9-194E-FEA9430AE04C}"/>
-              </a:ext>
-            </a:extLst>
-          </p:cNvPr>
-          <p:cNvSpPr/>
-          <p:nvPr/>
-        </p:nvSpPr>
-        <p:spPr>
-          <a:xfrm>
-            <a:off x="7622381" y="4570809"/>
-            <a:ext cx="2800826" cy="766048"/>
-          </a:xfrm>
-          <a:prstGeom prst="rect">
-            <a:avLst/>
-          </a:prstGeom>
-          <a:noFill/>
-          <a:ln/>
-        </p:spPr>
-        <p:txBody>
-          <a:bodyPr wrap="square" lIns="0" tIns="0" rIns="0" bIns="0" rtlCol="0" anchor="t"/>
-          <a:lstStyle/>
-          <a:p>
-            <a:pPr marL="0" indent="0" algn="l">
-              <a:lnSpc>
-                <a:spcPts val="3000"/>
-              </a:lnSpc>
-              <a:buNone/>
-            </a:pPr>
-            <a:r>
-              <a:rPr lang="en-US" sz="1850" dirty="0">
-                <a:solidFill>
-                  <a:srgbClr val="CAD6DE"/>
-                </a:solidFill>
-                <a:latin typeface="Cabin" pitchFamily="34" charset="0"/>
-                <a:ea typeface="Cabin" pitchFamily="34" charset="-122"/>
-                <a:cs typeface="Cabin" pitchFamily="34" charset="-120"/>
-              </a:rPr>
-              <a:t>Spring Boot 負責業務邏輯與資料處理</a:t>
-            </a:r>
-            <a:endParaRPr lang="en-US" sz="1850" dirty="0"/>
-          </a:p>
-        </p:txBody>
-      </p:sp>
-      <p:sp>
-        <p:nvSpPr>
-          <p:cNvPr id="9" name="Text 7">
-            <a:extLst>
-              <a:ext uri="{FF2B5EF4-FFF2-40B4-BE49-F238E27FC236}">
-                <a16:creationId xmlns="" xmlns:a16="http://schemas.microsoft.com/office/drawing/2014/main" id="{85E3F22B-7376-41C8-DED3-23D7DF52A3E1}"/>
-              </a:ext>
-            </a:extLst>
-          </p:cNvPr>
-          <p:cNvSpPr/>
-          <p:nvPr/>
-        </p:nvSpPr>
-        <p:spPr>
-          <a:xfrm>
-            <a:off x="11014710" y="3979545"/>
-            <a:ext cx="2800826" cy="351949"/>
-          </a:xfrm>
-          <a:prstGeom prst="rect">
-            <a:avLst/>
-          </a:prstGeom>
-          <a:noFill/>
-          <a:ln/>
-        </p:spPr>
-        <p:txBody>
-          <a:bodyPr wrap="none" lIns="0" tIns="0" rIns="0" bIns="0" rtlCol="0" anchor="t"/>
-          <a:lstStyle/>
-          <a:p>
-            <a:pPr marL="0" indent="0" algn="l">
-              <a:lnSpc>
-                <a:spcPts val="2750"/>
-              </a:lnSpc>
-              <a:buNone/>
-            </a:pPr>
-            <a:r>
-              <a:rPr lang="en-US" sz="2200" dirty="0">
-                <a:solidFill>
-                  <a:srgbClr val="FFFFFF"/>
-                </a:solidFill>
-                <a:latin typeface="Unbounded" pitchFamily="34" charset="0"/>
-                <a:ea typeface="Unbounded" pitchFamily="34" charset="-122"/>
-                <a:cs typeface="Unbounded" pitchFamily="34" charset="-120"/>
-              </a:rPr>
-              <a:t>資料庫</a:t>
-            </a:r>
-            <a:endParaRPr lang="en-US" sz="2200" dirty="0"/>
-          </a:p>
-        </p:txBody>
-      </p:sp>
-      <p:sp>
-        <p:nvSpPr>
-          <p:cNvPr id="10" name="Text 8">
-            <a:extLst>
-              <a:ext uri="{FF2B5EF4-FFF2-40B4-BE49-F238E27FC236}">
-                <a16:creationId xmlns="" xmlns:a16="http://schemas.microsoft.com/office/drawing/2014/main" id="{AFEACC91-D35A-1C36-2BE3-BC754C6439CF}"/>
-              </a:ext>
-            </a:extLst>
-          </p:cNvPr>
-          <p:cNvSpPr/>
-          <p:nvPr/>
-        </p:nvSpPr>
-        <p:spPr>
-          <a:xfrm>
-            <a:off x="11014710" y="4570809"/>
-            <a:ext cx="2800826" cy="766048"/>
-          </a:xfrm>
-          <a:prstGeom prst="rect">
-            <a:avLst/>
-          </a:prstGeom>
-          <a:noFill/>
-          <a:ln/>
-        </p:spPr>
-        <p:txBody>
-          <a:bodyPr wrap="square" lIns="0" tIns="0" rIns="0" bIns="0" rtlCol="0" anchor="t"/>
-          <a:lstStyle/>
-          <a:p>
-            <a:pPr marL="0" indent="0" algn="l">
-              <a:lnSpc>
-                <a:spcPts val="3000"/>
-              </a:lnSpc>
-              <a:buNone/>
-            </a:pPr>
-            <a:r>
-              <a:rPr lang="en-US" sz="1850" dirty="0">
-                <a:solidFill>
-                  <a:srgbClr val="CAD6DE"/>
-                </a:solidFill>
-                <a:latin typeface="Cabin" pitchFamily="34" charset="0"/>
-                <a:ea typeface="Cabin" pitchFamily="34" charset="-122"/>
-                <a:cs typeface="Cabin" pitchFamily="34" charset="-120"/>
-              </a:rPr>
-              <a:t>MySQL 作為關聯式資料庫存儲系統</a:t>
-            </a:r>
-            <a:endParaRPr lang="en-US" sz="1850" dirty="0"/>
-          </a:p>
-        </p:txBody>
-      </p:sp>
+              <a:t>圖</a:t>
+            </a:r>
+            <a:endParaRPr lang="en-US" sz="4400" dirty="0"/>
+          </a:p>
+        </p:txBody>
+      </p:sp>
+      <p:pic>
+        <p:nvPicPr>
+          <p:cNvPr id="15" name="圖片 14">
+            <a:extLst>
+              <a:ext uri="{FF2B5EF4-FFF2-40B4-BE49-F238E27FC236}">
+                <a16:creationId xmlns:a16="http://schemas.microsoft.com/office/drawing/2014/main" id="{34F118EA-8086-EBDD-26F4-BB2241999274}"/>
+              </a:ext>
+            </a:extLst>
+          </p:cNvPr>
+          <p:cNvPicPr>
+            <a:picLocks noChangeAspect="1"/>
+          </p:cNvPicPr>
+          <p:nvPr/>
+        </p:nvPicPr>
+        <p:blipFill>
+          <a:blip r:embed="rId2"/>
+          <a:stretch>
+            <a:fillRect/>
+          </a:stretch>
+        </p:blipFill>
+        <p:spPr>
+          <a:xfrm>
+            <a:off x="143839" y="2369630"/>
+            <a:ext cx="13746822" cy="4905471"/>
+          </a:xfrm>
+          <a:prstGeom prst="rect">
+            <a:avLst/>
+          </a:prstGeom>
+        </p:spPr>
+      </p:pic>
     </p:spTree>
     <p:extLst>
       <p:ext uri="{BB962C8B-B14F-4D97-AF65-F5344CB8AC3E}">
-        <p14:creationId xmlns:p14="http://schemas.microsoft.com/office/powerpoint/2010/main" val="925474527"/>
+        <p14:creationId xmlns:p14="http://schemas.microsoft.com/office/powerpoint/2010/main" val="3705113731"/>
       </p:ext>
     </p:extLst>
   </p:cSld>
@@ -8934,6 +7454,14 @@
 <file path=ppt/slides/slide4.xml><?xml version="1.0" encoding="utf-8"?>
 <p:sld xmlns:a="http://schemas.openxmlformats.org/drawingml/2006/main" xmlns:r="http://schemas.openxmlformats.org/officeDocument/2006/relationships" xmlns:p="http://schemas.openxmlformats.org/presentationml/2006/main">
   <p:cSld>
+    <p:bg>
+      <p:bgPr>
+        <a:solidFill>
+          <a:schemeClr val="bg1"/>
+        </a:solidFill>
+        <a:effectLst/>
+      </p:bgPr>
+    </p:bg>
     <p:spTree>
       <p:nvGrpSpPr>
         <p:cNvPr id="1" name=""/>
@@ -8953,7 +7481,7 @@
           <p:cNvPr id="2" name="Text 0">
             <a:extLst>
               <a:ext uri="{FF2B5EF4-FFF2-40B4-BE49-F238E27FC236}">
-                <a16:creationId xmlns="" xmlns:a16="http://schemas.microsoft.com/office/drawing/2014/main" id="{0E5DFD86-DAA3-E24E-C115-87E2A3946D9F}"/>
+                <a16:creationId xmlns:a16="http://schemas.microsoft.com/office/drawing/2014/main" id="{C052DEC4-A2C2-F364-8F62-8A1C4A59A339}"/>
               </a:ext>
             </a:extLst>
           </p:cNvPr>
@@ -8962,7 +7490,7 @@
         </p:nvSpPr>
         <p:spPr>
           <a:xfrm>
-            <a:off x="837724" y="2677239"/>
+            <a:off x="817786" y="1164562"/>
             <a:ext cx="5632490" cy="704017"/>
           </a:xfrm>
           <a:prstGeom prst="rect">
@@ -8975,415 +7503,56 @@
           <a:bodyPr wrap="none" lIns="0" tIns="0" rIns="0" bIns="0" rtlCol="0" anchor="t"/>
           <a:lstStyle/>
           <a:p>
-            <a:pPr marL="0" indent="0" algn="l">
+            <a:pPr>
               <a:lnSpc>
                 <a:spcPts val="5500"/>
               </a:lnSpc>
-              <a:buNone/>
             </a:pPr>
             <a:r>
               <a:rPr lang="en-US" sz="4400" dirty="0">
-                <a:solidFill>
-                  <a:srgbClr val="FFFFFF"/>
-                </a:solidFill>
                 <a:latin typeface="Unbounded" pitchFamily="34" charset="0"/>
                 <a:ea typeface="Unbounded" pitchFamily="34" charset="-122"/>
                 <a:cs typeface="Unbounded" pitchFamily="34" charset="-120"/>
               </a:rPr>
-              <a:t>系統架構概覽</a:t>
-            </a:r>
-            <a:endParaRPr lang="en-US" sz="4400" dirty="0"/>
-          </a:p>
-        </p:txBody>
-      </p:sp>
-      <p:sp>
-        <p:nvSpPr>
-          <p:cNvPr id="3" name="Text 1">
-            <a:extLst>
-              <a:ext uri="{FF2B5EF4-FFF2-40B4-BE49-F238E27FC236}">
-                <a16:creationId xmlns="" xmlns:a16="http://schemas.microsoft.com/office/drawing/2014/main" id="{0C2EA2AC-9720-E7D0-2018-95BCB5B020ED}"/>
-              </a:ext>
-            </a:extLst>
-          </p:cNvPr>
-          <p:cNvSpPr/>
-          <p:nvPr/>
-        </p:nvSpPr>
-        <p:spPr>
-          <a:xfrm>
-            <a:off x="837724" y="3979545"/>
-            <a:ext cx="2800826" cy="351949"/>
-          </a:xfrm>
-          <a:prstGeom prst="rect">
-            <a:avLst/>
-          </a:prstGeom>
-          <a:noFill/>
-          <a:ln/>
-        </p:spPr>
-        <p:txBody>
-          <a:bodyPr wrap="none" lIns="0" tIns="0" rIns="0" bIns="0" rtlCol="0" anchor="t"/>
-          <a:lstStyle/>
-          <a:p>
-            <a:pPr marL="0" indent="0" algn="l">
-              <a:lnSpc>
-                <a:spcPts val="2750"/>
-              </a:lnSpc>
-              <a:buNone/>
-            </a:pPr>
-            <a:r>
-              <a:rPr lang="en-US" sz="2200" dirty="0">
-                <a:solidFill>
-                  <a:srgbClr val="FFFFFF"/>
-                </a:solidFill>
-                <a:latin typeface="Unbounded" pitchFamily="34" charset="0"/>
-                <a:ea typeface="Unbounded" pitchFamily="34" charset="-122"/>
-                <a:cs typeface="Unbounded" pitchFamily="34" charset="-120"/>
-              </a:rPr>
-              <a:t>架構特色</a:t>
-            </a:r>
-            <a:endParaRPr lang="en-US" sz="2200" dirty="0"/>
-          </a:p>
-        </p:txBody>
-      </p:sp>
-      <p:sp>
-        <p:nvSpPr>
-          <p:cNvPr id="4" name="Text 2">
-            <a:extLst>
-              <a:ext uri="{FF2B5EF4-FFF2-40B4-BE49-F238E27FC236}">
-                <a16:creationId xmlns="" xmlns:a16="http://schemas.microsoft.com/office/drawing/2014/main" id="{32CC4251-045F-A735-674C-7674D5575551}"/>
-              </a:ext>
-            </a:extLst>
-          </p:cNvPr>
-          <p:cNvSpPr/>
-          <p:nvPr/>
-        </p:nvSpPr>
-        <p:spPr>
-          <a:xfrm>
-            <a:off x="837724" y="4570809"/>
-            <a:ext cx="2800826" cy="766048"/>
-          </a:xfrm>
-          <a:prstGeom prst="rect">
-            <a:avLst/>
-          </a:prstGeom>
-          <a:noFill/>
-          <a:ln/>
-        </p:spPr>
-        <p:txBody>
-          <a:bodyPr wrap="square" lIns="0" tIns="0" rIns="0" bIns="0" rtlCol="0" anchor="t"/>
-          <a:lstStyle/>
-          <a:p>
-            <a:pPr marL="0" indent="0" algn="l">
-              <a:lnSpc>
-                <a:spcPts val="3000"/>
-              </a:lnSpc>
-              <a:buNone/>
-            </a:pPr>
-            <a:r>
-              <a:rPr lang="en-US" sz="1850" dirty="0">
-                <a:solidFill>
-                  <a:srgbClr val="CAD6DE"/>
-                </a:solidFill>
-                <a:latin typeface="Cabin" pitchFamily="34" charset="0"/>
-                <a:ea typeface="Cabin" pitchFamily="34" charset="-122"/>
-                <a:cs typeface="Cabin" pitchFamily="34" charset="-120"/>
-              </a:rPr>
-              <a:t>採用前後端分離，提升開發與維護效率</a:t>
-            </a:r>
-            <a:endParaRPr lang="en-US" sz="1850" dirty="0"/>
-          </a:p>
-        </p:txBody>
-      </p:sp>
-      <p:sp>
-        <p:nvSpPr>
-          <p:cNvPr id="5" name="Text 3">
-            <a:extLst>
-              <a:ext uri="{FF2B5EF4-FFF2-40B4-BE49-F238E27FC236}">
-                <a16:creationId xmlns="" xmlns:a16="http://schemas.microsoft.com/office/drawing/2014/main" id="{E337984F-AB19-E82B-CA1A-1020BBE5AFF4}"/>
-              </a:ext>
-            </a:extLst>
-          </p:cNvPr>
-          <p:cNvSpPr/>
-          <p:nvPr/>
-        </p:nvSpPr>
-        <p:spPr>
-          <a:xfrm>
-            <a:off x="4230053" y="3979545"/>
-            <a:ext cx="2800826" cy="351949"/>
-          </a:xfrm>
-          <a:prstGeom prst="rect">
-            <a:avLst/>
-          </a:prstGeom>
-          <a:noFill/>
-          <a:ln/>
-        </p:spPr>
-        <p:txBody>
-          <a:bodyPr wrap="none" lIns="0" tIns="0" rIns="0" bIns="0" rtlCol="0" anchor="t"/>
-          <a:lstStyle/>
-          <a:p>
-            <a:pPr marL="0" indent="0" algn="l">
-              <a:lnSpc>
-                <a:spcPts val="2750"/>
-              </a:lnSpc>
-              <a:buNone/>
-            </a:pPr>
-            <a:r>
-              <a:rPr lang="en-US" sz="2200" dirty="0">
-                <a:solidFill>
-                  <a:srgbClr val="FFFFFF"/>
-                </a:solidFill>
-                <a:latin typeface="Unbounded" pitchFamily="34" charset="0"/>
-                <a:ea typeface="Unbounded" pitchFamily="34" charset="-122"/>
-                <a:cs typeface="Unbounded" pitchFamily="34" charset="-120"/>
-              </a:rPr>
-              <a:t>前端技術</a:t>
-            </a:r>
-            <a:endParaRPr lang="en-US" sz="2200" dirty="0"/>
-          </a:p>
-        </p:txBody>
-      </p:sp>
-      <p:sp>
-        <p:nvSpPr>
-          <p:cNvPr id="6" name="Text 4">
-            <a:extLst>
-              <a:ext uri="{FF2B5EF4-FFF2-40B4-BE49-F238E27FC236}">
-                <a16:creationId xmlns="" xmlns:a16="http://schemas.microsoft.com/office/drawing/2014/main" id="{AF2BE53D-7A2C-72E3-9CC9-CDE9FD836F92}"/>
-              </a:ext>
-            </a:extLst>
-          </p:cNvPr>
-          <p:cNvSpPr/>
-          <p:nvPr/>
-        </p:nvSpPr>
-        <p:spPr>
-          <a:xfrm>
-            <a:off x="4230053" y="4570809"/>
-            <a:ext cx="2800826" cy="766048"/>
-          </a:xfrm>
-          <a:prstGeom prst="rect">
-            <a:avLst/>
-          </a:prstGeom>
-          <a:noFill/>
-          <a:ln/>
-        </p:spPr>
-        <p:txBody>
-          <a:bodyPr wrap="square" lIns="0" tIns="0" rIns="0" bIns="0" rtlCol="0" anchor="t"/>
-          <a:lstStyle/>
-          <a:p>
-            <a:pPr marL="0" indent="0" algn="l">
-              <a:lnSpc>
-                <a:spcPts val="3000"/>
-              </a:lnSpc>
-              <a:buNone/>
-            </a:pPr>
-            <a:r>
-              <a:rPr lang="en-US" sz="1850" dirty="0">
-                <a:solidFill>
-                  <a:srgbClr val="CAD6DE"/>
-                </a:solidFill>
-                <a:latin typeface="Cabin" pitchFamily="34" charset="0"/>
-                <a:ea typeface="Cabin" pitchFamily="34" charset="-122"/>
-                <a:cs typeface="Cabin" pitchFamily="34" charset="-120"/>
-              </a:rPr>
-              <a:t>React 提供互動豐富的使用者介面</a:t>
-            </a:r>
-            <a:endParaRPr lang="en-US" sz="1850" dirty="0"/>
-          </a:p>
-        </p:txBody>
-      </p:sp>
-      <p:sp>
-        <p:nvSpPr>
-          <p:cNvPr id="7" name="Text 5">
-            <a:extLst>
-              <a:ext uri="{FF2B5EF4-FFF2-40B4-BE49-F238E27FC236}">
-                <a16:creationId xmlns="" xmlns:a16="http://schemas.microsoft.com/office/drawing/2014/main" id="{233D3FC9-5AEF-8357-5893-F40B55562D83}"/>
-              </a:ext>
-            </a:extLst>
-          </p:cNvPr>
-          <p:cNvSpPr/>
-          <p:nvPr/>
-        </p:nvSpPr>
-        <p:spPr>
-          <a:xfrm>
-            <a:off x="7622381" y="3979545"/>
-            <a:ext cx="2800826" cy="351949"/>
-          </a:xfrm>
-          <a:prstGeom prst="rect">
-            <a:avLst/>
-          </a:prstGeom>
-          <a:noFill/>
-          <a:ln/>
-        </p:spPr>
-        <p:txBody>
-          <a:bodyPr wrap="none" lIns="0" tIns="0" rIns="0" bIns="0" rtlCol="0" anchor="t"/>
-          <a:lstStyle/>
-          <a:p>
-            <a:pPr marL="0" indent="0" algn="l">
-              <a:lnSpc>
-                <a:spcPts val="2750"/>
-              </a:lnSpc>
-              <a:buNone/>
-            </a:pPr>
-            <a:r>
-              <a:rPr lang="en-US" sz="2200" dirty="0">
-                <a:solidFill>
-                  <a:srgbClr val="FFFFFF"/>
-                </a:solidFill>
-                <a:latin typeface="Unbounded" pitchFamily="34" charset="0"/>
-                <a:ea typeface="Unbounded" pitchFamily="34" charset="-122"/>
-                <a:cs typeface="Unbounded" pitchFamily="34" charset="-120"/>
-              </a:rPr>
-              <a:t>後端技術</a:t>
-            </a:r>
-            <a:endParaRPr lang="en-US" sz="2200" dirty="0"/>
-          </a:p>
-        </p:txBody>
-      </p:sp>
-      <p:sp>
-        <p:nvSpPr>
-          <p:cNvPr id="8" name="Text 6">
-            <a:extLst>
-              <a:ext uri="{FF2B5EF4-FFF2-40B4-BE49-F238E27FC236}">
-                <a16:creationId xmlns="" xmlns:a16="http://schemas.microsoft.com/office/drawing/2014/main" id="{9EC85AF8-6AA8-2BD9-194E-FEA9430AE04C}"/>
-              </a:ext>
-            </a:extLst>
-          </p:cNvPr>
-          <p:cNvSpPr/>
-          <p:nvPr/>
-        </p:nvSpPr>
-        <p:spPr>
-          <a:xfrm>
-            <a:off x="7622381" y="4570809"/>
-            <a:ext cx="2800826" cy="766048"/>
-          </a:xfrm>
-          <a:prstGeom prst="rect">
-            <a:avLst/>
-          </a:prstGeom>
-          <a:noFill/>
-          <a:ln/>
-        </p:spPr>
-        <p:txBody>
-          <a:bodyPr wrap="square" lIns="0" tIns="0" rIns="0" bIns="0" rtlCol="0" anchor="t"/>
-          <a:lstStyle/>
-          <a:p>
-            <a:pPr marL="0" indent="0" algn="l">
-              <a:lnSpc>
-                <a:spcPts val="3000"/>
-              </a:lnSpc>
-              <a:buNone/>
-            </a:pPr>
-            <a:r>
-              <a:rPr lang="en-US" sz="1850" dirty="0">
-                <a:solidFill>
-                  <a:srgbClr val="CAD6DE"/>
-                </a:solidFill>
-                <a:latin typeface="Cabin" pitchFamily="34" charset="0"/>
-                <a:ea typeface="Cabin" pitchFamily="34" charset="-122"/>
-                <a:cs typeface="Cabin" pitchFamily="34" charset="-120"/>
-              </a:rPr>
-              <a:t>Spring Boot 負責業務邏輯與資料處理</a:t>
-            </a:r>
-            <a:endParaRPr lang="en-US" sz="1850" dirty="0"/>
-          </a:p>
-        </p:txBody>
-      </p:sp>
-      <p:sp>
-        <p:nvSpPr>
-          <p:cNvPr id="9" name="Text 7">
-            <a:extLst>
-              <a:ext uri="{FF2B5EF4-FFF2-40B4-BE49-F238E27FC236}">
-                <a16:creationId xmlns="" xmlns:a16="http://schemas.microsoft.com/office/drawing/2014/main" id="{85E3F22B-7376-41C8-DED3-23D7DF52A3E1}"/>
-              </a:ext>
-            </a:extLst>
-          </p:cNvPr>
-          <p:cNvSpPr/>
-          <p:nvPr/>
-        </p:nvSpPr>
-        <p:spPr>
-          <a:xfrm>
-            <a:off x="11014710" y="3979545"/>
-            <a:ext cx="2800826" cy="351949"/>
-          </a:xfrm>
-          <a:prstGeom prst="rect">
-            <a:avLst/>
-          </a:prstGeom>
-          <a:noFill/>
-          <a:ln/>
-        </p:spPr>
-        <p:txBody>
-          <a:bodyPr wrap="none" lIns="0" tIns="0" rIns="0" bIns="0" rtlCol="0" anchor="t"/>
-          <a:lstStyle/>
-          <a:p>
-            <a:pPr marL="0" indent="0" algn="l">
-              <a:lnSpc>
-                <a:spcPts val="2750"/>
-              </a:lnSpc>
-              <a:buNone/>
-            </a:pPr>
-            <a:r>
-              <a:rPr lang="en-US" sz="2200" dirty="0">
-                <a:solidFill>
-                  <a:srgbClr val="FFFFFF"/>
-                </a:solidFill>
-                <a:latin typeface="Unbounded" pitchFamily="34" charset="0"/>
-                <a:ea typeface="Unbounded" pitchFamily="34" charset="-122"/>
-                <a:cs typeface="Unbounded" pitchFamily="34" charset="-120"/>
-              </a:rPr>
-              <a:t>資料庫</a:t>
-            </a:r>
-            <a:endParaRPr lang="en-US" sz="2200" dirty="0"/>
-          </a:p>
-        </p:txBody>
-      </p:sp>
-      <p:sp>
-        <p:nvSpPr>
-          <p:cNvPr id="10" name="Text 8">
-            <a:extLst>
-              <a:ext uri="{FF2B5EF4-FFF2-40B4-BE49-F238E27FC236}">
-                <a16:creationId xmlns="" xmlns:a16="http://schemas.microsoft.com/office/drawing/2014/main" id="{AFEACC91-D35A-1C36-2BE3-BC754C6439CF}"/>
-              </a:ext>
-            </a:extLst>
-          </p:cNvPr>
-          <p:cNvSpPr/>
-          <p:nvPr/>
-        </p:nvSpPr>
-        <p:spPr>
-          <a:xfrm>
-            <a:off x="11014710" y="4570809"/>
-            <a:ext cx="2800826" cy="766048"/>
-          </a:xfrm>
-          <a:prstGeom prst="rect">
-            <a:avLst/>
-          </a:prstGeom>
-          <a:noFill/>
-          <a:ln/>
-        </p:spPr>
-        <p:txBody>
-          <a:bodyPr wrap="square" lIns="0" tIns="0" rIns="0" bIns="0" rtlCol="0" anchor="t"/>
-          <a:lstStyle/>
-          <a:p>
-            <a:pPr marL="0" indent="0" algn="l">
-              <a:lnSpc>
-                <a:spcPts val="3000"/>
-              </a:lnSpc>
-              <a:buNone/>
-            </a:pPr>
-            <a:r>
-              <a:rPr lang="en-US" sz="1850" dirty="0">
-                <a:solidFill>
-                  <a:srgbClr val="CAD6DE"/>
-                </a:solidFill>
-                <a:latin typeface="Cabin" pitchFamily="34" charset="0"/>
-                <a:ea typeface="Cabin" pitchFamily="34" charset="-122"/>
-                <a:cs typeface="Cabin" pitchFamily="34" charset="-120"/>
-              </a:rPr>
-              <a:t>MySQL 作為關聯式資料庫存儲系統</a:t>
-            </a:r>
-            <a:endParaRPr lang="en-US" sz="1850" dirty="0"/>
-          </a:p>
-        </p:txBody>
-      </p:sp>
+              <a:t>Site-Map</a:t>
+            </a:r>
+          </a:p>
+        </p:txBody>
+      </p:sp>
+      <p:pic>
+        <p:nvPicPr>
+          <p:cNvPr id="3" name="圖片 2"/>
+          <p:cNvPicPr>
+            <a:picLocks noChangeAspect="1"/>
+          </p:cNvPicPr>
+          <p:nvPr/>
+        </p:nvPicPr>
+        <p:blipFill>
+          <a:blip r:embed="rId2">
+            <a:extLst>
+              <a:ext uri="{28A0092B-C50C-407E-A947-70E740481C1C}">
+                <a14:useLocalDpi xmlns:a14="http://schemas.microsoft.com/office/drawing/2010/main" val="0"/>
+              </a:ext>
+            </a:extLst>
+          </a:blip>
+          <a:stretch>
+            <a:fillRect/>
+          </a:stretch>
+        </p:blipFill>
+        <p:spPr>
+          <a:xfrm>
+            <a:off x="4204251" y="1516570"/>
+            <a:ext cx="6629401" cy="6569974"/>
+          </a:xfrm>
+          <a:prstGeom prst="rect">
+            <a:avLst/>
+          </a:prstGeom>
+        </p:spPr>
+      </p:pic>
     </p:spTree>
     <p:extLst>
       <p:ext uri="{BB962C8B-B14F-4D97-AF65-F5344CB8AC3E}">
-        <p14:creationId xmlns:p14="http://schemas.microsoft.com/office/powerpoint/2010/main" val="3258481614"/>
+        <p14:creationId xmlns:p14="http://schemas.microsoft.com/office/powerpoint/2010/main" val="615512071"/>
       </p:ext>
     </p:extLst>
   </p:cSld>
@@ -9396,6 +7565,14 @@
 <file path=ppt/slides/slide5.xml><?xml version="1.0" encoding="utf-8"?>
 <p:sld xmlns:a="http://schemas.openxmlformats.org/drawingml/2006/main" xmlns:r="http://schemas.openxmlformats.org/officeDocument/2006/relationships" xmlns:p="http://schemas.openxmlformats.org/presentationml/2006/main">
   <p:cSld>
+    <p:bg>
+      <p:bgPr>
+        <a:solidFill>
+          <a:schemeClr val="bg1"/>
+        </a:solidFill>
+        <a:effectLst/>
+      </p:bgPr>
+    </p:bg>
     <p:spTree>
       <p:nvGrpSpPr>
         <p:cNvPr id="1" name=""/>
@@ -9415,7 +7592,7 @@
           <p:cNvPr id="2" name="Text 0">
             <a:extLst>
               <a:ext uri="{FF2B5EF4-FFF2-40B4-BE49-F238E27FC236}">
-                <a16:creationId xmlns="" xmlns:a16="http://schemas.microsoft.com/office/drawing/2014/main" id="{0E5DFD86-DAA3-E24E-C115-87E2A3946D9F}"/>
+                <a16:creationId xmlns:a16="http://schemas.microsoft.com/office/drawing/2014/main" id="{C052DEC4-A2C2-F364-8F62-8A1C4A59A339}"/>
               </a:ext>
             </a:extLst>
           </p:cNvPr>
@@ -9424,7 +7601,7 @@
         </p:nvSpPr>
         <p:spPr>
           <a:xfrm>
-            <a:off x="694849" y="1067514"/>
+            <a:off x="817786" y="1164562"/>
             <a:ext cx="5632490" cy="704017"/>
           </a:xfrm>
           <a:prstGeom prst="rect">
@@ -9437,48 +7614,32 @@
           <a:bodyPr wrap="none" lIns="0" tIns="0" rIns="0" bIns="0" rtlCol="0" anchor="t"/>
           <a:lstStyle/>
           <a:p>
-            <a:pPr marL="0" indent="0" algn="l">
+            <a:pPr>
               <a:lnSpc>
                 <a:spcPts val="5500"/>
               </a:lnSpc>
-              <a:buNone/>
             </a:pPr>
             <a:r>
-              <a:rPr lang="en-US" sz="4400" dirty="0" err="1" smtClean="0">
-                <a:solidFill>
-                  <a:srgbClr val="FFFFFF"/>
-                </a:solidFill>
+              <a:rPr lang="en-US" sz="4400" dirty="0">
                 <a:latin typeface="Unbounded" pitchFamily="34" charset="0"/>
                 <a:ea typeface="Unbounded" pitchFamily="34" charset="-122"/>
                 <a:cs typeface="Unbounded" pitchFamily="34" charset="-120"/>
               </a:rPr>
-              <a:t>系統架構</a:t>
-            </a:r>
-            <a:r>
-              <a:rPr lang="zh-TW" altLang="en-US" sz="4400" dirty="0" smtClean="0">
-                <a:solidFill>
-                  <a:srgbClr val="FFFFFF"/>
-                </a:solidFill>
-                <a:latin typeface="Unbounded" pitchFamily="34" charset="0"/>
-                <a:ea typeface="Unbounded" pitchFamily="34" charset="-122"/>
-                <a:cs typeface="Unbounded" pitchFamily="34" charset="-120"/>
-              </a:rPr>
-              <a:t>圖</a:t>
-            </a:r>
-            <a:endParaRPr lang="en-US" sz="4400" dirty="0"/>
+              <a:t>Site-Map</a:t>
+            </a:r>
           </a:p>
         </p:txBody>
       </p:sp>
       <p:pic>
         <p:nvPicPr>
-          <p:cNvPr id="11" name="圖片 10"/>
+          <p:cNvPr id="3" name="圖片 2"/>
           <p:cNvPicPr>
             <a:picLocks noChangeAspect="1"/>
           </p:cNvPicPr>
           <p:nvPr/>
         </p:nvPicPr>
         <p:blipFill>
-          <a:blip r:embed="rId2" cstate="print">
+          <a:blip r:embed="rId2">
             <a:extLst>
               <a:ext uri="{28A0092B-C50C-407E-A947-70E740481C1C}">
                 <a14:useLocalDpi xmlns:a14="http://schemas.microsoft.com/office/drawing/2010/main" val="0"/>
@@ -9491,8 +7652,8 @@
         </p:blipFill>
         <p:spPr>
           <a:xfrm>
-            <a:off x="876095" y="2301604"/>
-            <a:ext cx="13068710" cy="4140741"/>
+            <a:off x="4729453" y="1164562"/>
+            <a:ext cx="5299129" cy="7096171"/>
           </a:xfrm>
           <a:prstGeom prst="rect">
             <a:avLst/>
@@ -9502,7 +7663,7 @@
     </p:spTree>
     <p:extLst>
       <p:ext uri="{BB962C8B-B14F-4D97-AF65-F5344CB8AC3E}">
-        <p14:creationId xmlns:p14="http://schemas.microsoft.com/office/powerpoint/2010/main" val="3705113731"/>
+        <p14:creationId xmlns:p14="http://schemas.microsoft.com/office/powerpoint/2010/main" val="3724482194"/>
       </p:ext>
     </p:extLst>
   </p:cSld>
@@ -9515,6 +7676,14 @@
 <file path=ppt/slides/slide6.xml><?xml version="1.0" encoding="utf-8"?>
 <p:sld xmlns:a="http://schemas.openxmlformats.org/drawingml/2006/main" xmlns:r="http://schemas.openxmlformats.org/officeDocument/2006/relationships" xmlns:p="http://schemas.openxmlformats.org/presentationml/2006/main">
   <p:cSld>
+    <p:bg>
+      <p:bgPr>
+        <a:solidFill>
+          <a:schemeClr val="bg1"/>
+        </a:solidFill>
+        <a:effectLst/>
+      </p:bgPr>
+    </p:bg>
     <p:spTree>
       <p:nvGrpSpPr>
         <p:cNvPr id="1" name=""/>
@@ -9534,7 +7703,7 @@
           <p:cNvPr id="2" name="Text 0">
             <a:extLst>
               <a:ext uri="{FF2B5EF4-FFF2-40B4-BE49-F238E27FC236}">
-                <a16:creationId xmlns="" xmlns:a16="http://schemas.microsoft.com/office/drawing/2014/main" id="{C052DEC4-A2C2-F364-8F62-8A1C4A59A339}"/>
+                <a16:creationId xmlns:a16="http://schemas.microsoft.com/office/drawing/2014/main" id="{C052DEC4-A2C2-F364-8F62-8A1C4A59A339}"/>
               </a:ext>
             </a:extLst>
           </p:cNvPr>
@@ -9562,30 +7731,19 @@
               </a:lnSpc>
             </a:pPr>
             <a:r>
-              <a:rPr lang="en-US" sz="4400" dirty="0" smtClean="0">
-                <a:solidFill>
-                  <a:srgbClr val="FFFFFF"/>
-                </a:solidFill>
+              <a:rPr lang="en-US" sz="4400" dirty="0">
                 <a:latin typeface="Unbounded" pitchFamily="34" charset="0"/>
                 <a:ea typeface="Unbounded" pitchFamily="34" charset="-122"/>
                 <a:cs typeface="Unbounded" pitchFamily="34" charset="-120"/>
               </a:rPr>
               <a:t>Site-Map</a:t>
             </a:r>
-            <a:endParaRPr lang="en-US" sz="4400" dirty="0">
-              <a:solidFill>
-                <a:srgbClr val="FFFFFF"/>
-              </a:solidFill>
-              <a:latin typeface="Unbounded" pitchFamily="34" charset="0"/>
-              <a:ea typeface="Unbounded" pitchFamily="34" charset="-122"/>
-              <a:cs typeface="Unbounded" pitchFamily="34" charset="-120"/>
-            </a:endParaRPr>
           </a:p>
         </p:txBody>
       </p:sp>
       <p:pic>
         <p:nvPicPr>
-          <p:cNvPr id="3" name="圖片 2"/>
+          <p:cNvPr id="4" name="圖片 3"/>
           <p:cNvPicPr>
             <a:picLocks noChangeAspect="1"/>
           </p:cNvPicPr>
@@ -9605,8 +7763,8 @@
         </p:blipFill>
         <p:spPr>
           <a:xfrm>
-            <a:off x="4204251" y="1516570"/>
-            <a:ext cx="6629401" cy="6569974"/>
+            <a:off x="4343274" y="1164562"/>
+            <a:ext cx="5655491" cy="6926880"/>
           </a:xfrm>
           <a:prstGeom prst="rect">
             <a:avLst/>
@@ -9616,7 +7774,7 @@
     </p:spTree>
     <p:extLst>
       <p:ext uri="{BB962C8B-B14F-4D97-AF65-F5344CB8AC3E}">
-        <p14:creationId xmlns:p14="http://schemas.microsoft.com/office/powerpoint/2010/main" val="615512071"/>
+        <p14:creationId xmlns:p14="http://schemas.microsoft.com/office/powerpoint/2010/main" val="4063992731"/>
       </p:ext>
     </p:extLst>
   </p:cSld>
@@ -9629,6 +7787,14 @@
 <file path=ppt/slides/slide7.xml><?xml version="1.0" encoding="utf-8"?>
 <p:sld xmlns:a="http://schemas.openxmlformats.org/drawingml/2006/main" xmlns:r="http://schemas.openxmlformats.org/officeDocument/2006/relationships" xmlns:p="http://schemas.openxmlformats.org/presentationml/2006/main">
   <p:cSld>
+    <p:bg>
+      <p:bgPr>
+        <a:solidFill>
+          <a:schemeClr val="bg1"/>
+        </a:solidFill>
+        <a:effectLst/>
+      </p:bgPr>
+    </p:bg>
     <p:spTree>
       <p:nvGrpSpPr>
         <p:cNvPr id="1" name=""/>
@@ -9648,7 +7814,7 @@
           <p:cNvPr id="2" name="Text 0">
             <a:extLst>
               <a:ext uri="{FF2B5EF4-FFF2-40B4-BE49-F238E27FC236}">
-                <a16:creationId xmlns="" xmlns:a16="http://schemas.microsoft.com/office/drawing/2014/main" id="{C052DEC4-A2C2-F364-8F62-8A1C4A59A339}"/>
+                <a16:creationId xmlns:a16="http://schemas.microsoft.com/office/drawing/2014/main" id="{C052DEC4-A2C2-F364-8F62-8A1C4A59A339}"/>
               </a:ext>
             </a:extLst>
           </p:cNvPr>
@@ -9676,51 +7842,40 @@
               </a:lnSpc>
             </a:pPr>
             <a:r>
-              <a:rPr lang="en-US" sz="4400" dirty="0" smtClean="0">
-                <a:solidFill>
-                  <a:srgbClr val="FFFFFF"/>
-                </a:solidFill>
+              <a:rPr lang="en-US" sz="4400" dirty="0">
                 <a:latin typeface="Unbounded" pitchFamily="34" charset="0"/>
                 <a:ea typeface="Unbounded" pitchFamily="34" charset="-122"/>
                 <a:cs typeface="Unbounded" pitchFamily="34" charset="-120"/>
               </a:rPr>
               <a:t>Site-Map</a:t>
             </a:r>
-            <a:endParaRPr lang="en-US" sz="4400" dirty="0">
-              <a:solidFill>
-                <a:srgbClr val="FFFFFF"/>
-              </a:solidFill>
-              <a:latin typeface="Unbounded" pitchFamily="34" charset="0"/>
-              <a:ea typeface="Unbounded" pitchFamily="34" charset="-122"/>
-              <a:cs typeface="Unbounded" pitchFamily="34" charset="-120"/>
-            </a:endParaRPr>
           </a:p>
         </p:txBody>
       </p:sp>
       <p:pic>
         <p:nvPicPr>
-          <p:cNvPr id="3" name="圖片 2"/>
+          <p:cNvPr id="7" name="圖片 6">
+            <a:extLst>
+              <a:ext uri="{FF2B5EF4-FFF2-40B4-BE49-F238E27FC236}">
+                <a16:creationId xmlns:a16="http://schemas.microsoft.com/office/drawing/2014/main" id="{A37875B8-1DFE-F4DB-F6AA-216F2802C3C9}"/>
+              </a:ext>
+            </a:extLst>
+          </p:cNvPr>
           <p:cNvPicPr>
             <a:picLocks noChangeAspect="1"/>
           </p:cNvPicPr>
           <p:nvPr/>
         </p:nvPicPr>
         <p:blipFill>
-          <a:blip r:embed="rId2">
-            <a:extLst>
-              <a:ext uri="{28A0092B-C50C-407E-A947-70E740481C1C}">
-                <a14:useLocalDpi xmlns:a14="http://schemas.microsoft.com/office/drawing/2010/main" val="0"/>
-              </a:ext>
-            </a:extLst>
-          </a:blip>
+          <a:blip r:embed="rId2"/>
           <a:stretch>
             <a:fillRect/>
           </a:stretch>
         </p:blipFill>
         <p:spPr>
           <a:xfrm>
-            <a:off x="4729453" y="1164562"/>
-            <a:ext cx="5299129" cy="7096171"/>
+            <a:off x="4578623" y="934948"/>
+            <a:ext cx="4363546" cy="8229600"/>
           </a:xfrm>
           <a:prstGeom prst="rect">
             <a:avLst/>
@@ -9730,7 +7885,7 @@
     </p:spTree>
     <p:extLst>
       <p:ext uri="{BB962C8B-B14F-4D97-AF65-F5344CB8AC3E}">
-        <p14:creationId xmlns:p14="http://schemas.microsoft.com/office/powerpoint/2010/main" val="3724482194"/>
+        <p14:creationId xmlns:p14="http://schemas.microsoft.com/office/powerpoint/2010/main" val="890747250"/>
       </p:ext>
     </p:extLst>
   </p:cSld>
@@ -9743,6 +7898,14 @@
 <file path=ppt/slides/slide8.xml><?xml version="1.0" encoding="utf-8"?>
 <p:sld xmlns:a="http://schemas.openxmlformats.org/drawingml/2006/main" xmlns:r="http://schemas.openxmlformats.org/officeDocument/2006/relationships" xmlns:p="http://schemas.openxmlformats.org/presentationml/2006/main">
   <p:cSld>
+    <p:bg>
+      <p:bgPr>
+        <a:solidFill>
+          <a:schemeClr val="bg1"/>
+        </a:solidFill>
+        <a:effectLst/>
+      </p:bgPr>
+    </p:bg>
     <p:spTree>
       <p:nvGrpSpPr>
         <p:cNvPr id="1" name=""/>
@@ -9762,7 +7925,7 @@
           <p:cNvPr id="2" name="Text 0">
             <a:extLst>
               <a:ext uri="{FF2B5EF4-FFF2-40B4-BE49-F238E27FC236}">
-                <a16:creationId xmlns="" xmlns:a16="http://schemas.microsoft.com/office/drawing/2014/main" id="{C052DEC4-A2C2-F364-8F62-8A1C4A59A339}"/>
+                <a16:creationId xmlns:a16="http://schemas.microsoft.com/office/drawing/2014/main" id="{A7F0C4F0-0F36-4ABB-1894-BDD61C4F5D4E}"/>
               </a:ext>
             </a:extLst>
           </p:cNvPr>
@@ -9771,7 +7934,7 @@
         </p:nvSpPr>
         <p:spPr>
           <a:xfrm>
-            <a:off x="817786" y="1164562"/>
+            <a:off x="847603" y="1224196"/>
             <a:ext cx="5632490" cy="704017"/>
           </a:xfrm>
           <a:prstGeom prst="rect">
@@ -9784,26 +7947,29 @@
           <a:bodyPr wrap="none" lIns="0" tIns="0" rIns="0" bIns="0" rtlCol="0" anchor="t"/>
           <a:lstStyle/>
           <a:p>
-            <a:pPr>
+            <a:pPr marL="0" indent="0" algn="l">
               <a:lnSpc>
                 <a:spcPts val="5500"/>
               </a:lnSpc>
+              <a:buNone/>
             </a:pPr>
             <a:r>
-              <a:rPr lang="en-US" sz="4400" dirty="0" smtClean="0">
-                <a:solidFill>
-                  <a:srgbClr val="FFFFFF"/>
-                </a:solidFill>
+              <a:rPr lang="en-US" sz="4400" dirty="0">
                 <a:latin typeface="Unbounded" pitchFamily="34" charset="0"/>
                 <a:ea typeface="Unbounded" pitchFamily="34" charset="-122"/>
                 <a:cs typeface="Unbounded" pitchFamily="34" charset="-120"/>
               </a:rPr>
-              <a:t>Site-Map</a:t>
+              <a:t>ER</a:t>
+            </a:r>
+            <a:r>
+              <a:rPr lang="zh-TW" altLang="en-US" sz="4400" dirty="0">
+                <a:latin typeface="Unbounded" pitchFamily="34" charset="0"/>
+                <a:ea typeface="Unbounded" pitchFamily="34" charset="-122"/>
+                <a:cs typeface="Unbounded" pitchFamily="34" charset="-120"/>
+              </a:rPr>
+              <a:t>圖</a:t>
             </a:r>
             <a:endParaRPr lang="en-US" sz="4400" dirty="0">
-              <a:solidFill>
-                <a:srgbClr val="FFFFFF"/>
-              </a:solidFill>
               <a:latin typeface="Unbounded" pitchFamily="34" charset="0"/>
               <a:ea typeface="Unbounded" pitchFamily="34" charset="-122"/>
               <a:cs typeface="Unbounded" pitchFamily="34" charset="-120"/>
@@ -9813,7 +7979,13 @@
       </p:sp>
       <p:pic>
         <p:nvPicPr>
-          <p:cNvPr id="4" name="圖片 3"/>
+          <p:cNvPr id="6" name="圖片 5" descr="一張含有 文字, 螢幕擷取畫面, 圖表, 字型 的圖片&#10;&#10;AI 產生的內容可能不正確。">
+            <a:extLst>
+              <a:ext uri="{FF2B5EF4-FFF2-40B4-BE49-F238E27FC236}">
+                <a16:creationId xmlns:a16="http://schemas.microsoft.com/office/drawing/2014/main" id="{1F57A988-44DC-264D-2611-5A7690BC9F55}"/>
+              </a:ext>
+            </a:extLst>
+          </p:cNvPr>
           <p:cNvPicPr>
             <a:picLocks noChangeAspect="1"/>
           </p:cNvPicPr>
@@ -9833,8 +8005,8 @@
         </p:blipFill>
         <p:spPr>
           <a:xfrm>
-            <a:off x="4343274" y="1164562"/>
-            <a:ext cx="5655491" cy="6926880"/>
+            <a:off x="2440498" y="0"/>
+            <a:ext cx="10099964" cy="8229600"/>
           </a:xfrm>
           <a:prstGeom prst="rect">
             <a:avLst/>
@@ -9844,7 +8016,7 @@
     </p:spTree>
     <p:extLst>
       <p:ext uri="{BB962C8B-B14F-4D97-AF65-F5344CB8AC3E}">
-        <p14:creationId xmlns:p14="http://schemas.microsoft.com/office/powerpoint/2010/main" val="4063992731"/>
+        <p14:creationId xmlns:p14="http://schemas.microsoft.com/office/powerpoint/2010/main" val="1957535455"/>
       </p:ext>
     </p:extLst>
   </p:cSld>
@@ -9857,6 +8029,14 @@
 <file path=ppt/slides/slide9.xml><?xml version="1.0" encoding="utf-8"?>
 <p:sld xmlns:a="http://schemas.openxmlformats.org/drawingml/2006/main" xmlns:r="http://schemas.openxmlformats.org/officeDocument/2006/relationships" xmlns:p="http://schemas.openxmlformats.org/presentationml/2006/main">
   <p:cSld>
+    <p:bg>
+      <p:bgPr>
+        <a:solidFill>
+          <a:schemeClr val="bg1"/>
+        </a:solidFill>
+        <a:effectLst/>
+      </p:bgPr>
+    </p:bg>
     <p:spTree>
       <p:nvGrpSpPr>
         <p:cNvPr id="1" name=""/>
@@ -9873,10 +8053,10 @@
       </p:grpSpPr>
       <p:sp>
         <p:nvSpPr>
-          <p:cNvPr id="2" name="Text 0">
-            <a:extLst>
-              <a:ext uri="{FF2B5EF4-FFF2-40B4-BE49-F238E27FC236}">
-                <a16:creationId xmlns="" xmlns:a16="http://schemas.microsoft.com/office/drawing/2014/main" id="{C052DEC4-A2C2-F364-8F62-8A1C4A59A339}"/>
+          <p:cNvPr id="3" name="Text 0">
+            <a:extLst>
+              <a:ext uri="{FF2B5EF4-FFF2-40B4-BE49-F238E27FC236}">
+                <a16:creationId xmlns:a16="http://schemas.microsoft.com/office/drawing/2014/main" id="{5C17D3ED-A85C-614C-6F5F-0F8B4B8933E8}"/>
               </a:ext>
             </a:extLst>
           </p:cNvPr>
@@ -9885,7 +8065,7 @@
         </p:nvSpPr>
         <p:spPr>
           <a:xfrm>
-            <a:off x="817786" y="1164562"/>
+            <a:off x="6324124" y="2191583"/>
             <a:ext cx="5632490" cy="704017"/>
           </a:xfrm>
           <a:prstGeom prst="rect">
@@ -9898,57 +8078,146 @@
           <a:bodyPr wrap="none" lIns="0" tIns="0" rIns="0" bIns="0" rtlCol="0" anchor="t"/>
           <a:lstStyle/>
           <a:p>
-            <a:pPr>
+            <a:pPr marL="0" indent="0" algn="l">
               <a:lnSpc>
                 <a:spcPts val="5500"/>
               </a:lnSpc>
+              <a:buNone/>
             </a:pPr>
             <a:r>
-              <a:rPr lang="en-US" sz="4400" dirty="0" smtClean="0">
-                <a:solidFill>
-                  <a:srgbClr val="FFFFFF"/>
-                </a:solidFill>
+              <a:rPr lang="en-US" sz="4400" dirty="0">
                 <a:latin typeface="Unbounded" pitchFamily="34" charset="0"/>
                 <a:ea typeface="Unbounded" pitchFamily="34" charset="-122"/>
                 <a:cs typeface="Unbounded" pitchFamily="34" charset="-120"/>
               </a:rPr>
-              <a:t>Site-Map</a:t>
-            </a:r>
-            <a:endParaRPr lang="en-US" sz="4400" dirty="0">
-              <a:solidFill>
-                <a:srgbClr val="FFFFFF"/>
-              </a:solidFill>
-              <a:latin typeface="Unbounded" pitchFamily="34" charset="0"/>
-              <a:ea typeface="Unbounded" pitchFamily="34" charset="-122"/>
-              <a:cs typeface="Unbounded" pitchFamily="34" charset="-120"/>
-            </a:endParaRPr>
+              <a:t>前台功能：登錄/註冊</a:t>
+            </a:r>
+            <a:endParaRPr lang="en-US" sz="4400" dirty="0"/>
+          </a:p>
+        </p:txBody>
+      </p:sp>
+      <p:sp>
+        <p:nvSpPr>
+          <p:cNvPr id="5" name="Text 2">
+            <a:extLst>
+              <a:ext uri="{FF2B5EF4-FFF2-40B4-BE49-F238E27FC236}">
+                <a16:creationId xmlns:a16="http://schemas.microsoft.com/office/drawing/2014/main" id="{525A2525-6238-2A2C-F363-D7B41FF84E72}"/>
+              </a:ext>
+            </a:extLst>
+          </p:cNvPr>
+          <p:cNvSpPr/>
+          <p:nvPr/>
+        </p:nvSpPr>
+        <p:spPr>
+          <a:xfrm>
+            <a:off x="7101959" y="3336846"/>
+            <a:ext cx="2806898" cy="351949"/>
+          </a:xfrm>
+          <a:prstGeom prst="rect">
+            <a:avLst/>
+          </a:prstGeom>
+          <a:noFill/>
+          <a:ln/>
+        </p:spPr>
+        <p:txBody>
+          <a:bodyPr wrap="none" lIns="0" tIns="0" rIns="0" bIns="0" rtlCol="0" anchor="t"/>
+          <a:lstStyle/>
+          <a:p>
+            <a:pPr marL="0" indent="0" algn="l">
+              <a:lnSpc>
+                <a:spcPts val="2750"/>
+              </a:lnSpc>
+              <a:buNone/>
+            </a:pPr>
+            <a:r>
+              <a:rPr lang="en-US" sz="2200" dirty="0">
+                <a:latin typeface="Unbounded" pitchFamily="34" charset="0"/>
+                <a:ea typeface="Unbounded" pitchFamily="34" charset="-122"/>
+                <a:cs typeface="Unbounded" pitchFamily="34" charset="-120"/>
+              </a:rPr>
+              <a:t>快速註冊流程</a:t>
+            </a:r>
+            <a:endParaRPr lang="en-US" sz="2200" dirty="0"/>
+          </a:p>
+        </p:txBody>
+      </p:sp>
+      <p:sp>
+        <p:nvSpPr>
+          <p:cNvPr id="6" name="Text 3">
+            <a:extLst>
+              <a:ext uri="{FF2B5EF4-FFF2-40B4-BE49-F238E27FC236}">
+                <a16:creationId xmlns:a16="http://schemas.microsoft.com/office/drawing/2014/main" id="{003E8AB1-B42E-162E-6AAE-453861A86BDA}"/>
+              </a:ext>
+            </a:extLst>
+          </p:cNvPr>
+          <p:cNvSpPr/>
+          <p:nvPr/>
+        </p:nvSpPr>
+        <p:spPr>
+          <a:xfrm>
+            <a:off x="7101959" y="3832384"/>
+            <a:ext cx="2806898" cy="766048"/>
+          </a:xfrm>
+          <a:prstGeom prst="rect">
+            <a:avLst/>
+          </a:prstGeom>
+          <a:noFill/>
+          <a:ln/>
+        </p:spPr>
+        <p:txBody>
+          <a:bodyPr wrap="square" lIns="0" tIns="0" rIns="0" bIns="0" rtlCol="0" anchor="t"/>
+          <a:lstStyle/>
+          <a:p>
+            <a:pPr marL="0" indent="0" algn="l">
+              <a:lnSpc>
+                <a:spcPts val="3000"/>
+              </a:lnSpc>
+              <a:buNone/>
+            </a:pPr>
+            <a:r>
+              <a:rPr lang="en-US" sz="1850" dirty="0">
+                <a:latin typeface="Cabin" pitchFamily="34" charset="0"/>
+                <a:ea typeface="Cabin" pitchFamily="34" charset="-122"/>
+                <a:cs typeface="Cabin" pitchFamily="34" charset="-120"/>
+              </a:rPr>
+              <a:t>支援 Email </a:t>
+            </a:r>
+            <a:r>
+              <a:rPr lang="en-US" sz="1850" dirty="0" err="1">
+                <a:latin typeface="Cabin" pitchFamily="34" charset="0"/>
+                <a:ea typeface="Cabin" pitchFamily="34" charset="-122"/>
+                <a:cs typeface="Cabin" pitchFamily="34" charset="-120"/>
+              </a:rPr>
+              <a:t>驗證，流程簡便</a:t>
+            </a:r>
+            <a:endParaRPr lang="en-US" sz="1850" dirty="0"/>
           </a:p>
         </p:txBody>
       </p:sp>
       <p:pic>
         <p:nvPicPr>
-          <p:cNvPr id="3" name="圖片 2"/>
+          <p:cNvPr id="14" name="圖片 13">
+            <a:extLst>
+              <a:ext uri="{FF2B5EF4-FFF2-40B4-BE49-F238E27FC236}">
+                <a16:creationId xmlns:a16="http://schemas.microsoft.com/office/drawing/2014/main" id="{C26A9BA4-61B2-5312-6B04-D837D63F806C}"/>
+              </a:ext>
+            </a:extLst>
+          </p:cNvPr>
           <p:cNvPicPr>
             <a:picLocks noChangeAspect="1"/>
           </p:cNvPicPr>
           <p:nvPr/>
         </p:nvPicPr>
         <p:blipFill>
-          <a:blip r:embed="rId2">
-            <a:extLst>
-              <a:ext uri="{28A0092B-C50C-407E-A947-70E740481C1C}">
-                <a14:useLocalDpi xmlns:a14="http://schemas.microsoft.com/office/drawing/2010/main" val="0"/>
-              </a:ext>
-            </a:extLst>
-          </a:blip>
+          <a:blip r:embed="rId2"/>
           <a:stretch>
             <a:fillRect/>
           </a:stretch>
         </p:blipFill>
         <p:spPr>
           <a:xfrm>
-            <a:off x="4486011" y="1422961"/>
-            <a:ext cx="5751293" cy="6458769"/>
+            <a:off x="1022540" y="1179671"/>
+            <a:ext cx="4181475" cy="5305425"/>
           </a:xfrm>
           <a:prstGeom prst="rect">
             <a:avLst/>
@@ -9958,7 +8227,7 @@
     </p:spTree>
     <p:extLst>
       <p:ext uri="{BB962C8B-B14F-4D97-AF65-F5344CB8AC3E}">
-        <p14:creationId xmlns:p14="http://schemas.microsoft.com/office/powerpoint/2010/main" val="890747250"/>
+        <p14:creationId xmlns:p14="http://schemas.microsoft.com/office/powerpoint/2010/main" val="4051262160"/>
       </p:ext>
     </p:extLst>
   </p:cSld>

--- a/說明用工具/張允豪 購物網站 專題 ver.0.1.pptx
+++ b/說明用工具/張允豪 購物網站 專題 ver.0.1.pptx
@@ -8,25 +8,23 @@
     <p:sldId id="256" r:id="rId2"/>
     <p:sldId id="258" r:id="rId3"/>
     <p:sldId id="275" r:id="rId4"/>
-    <p:sldId id="280" r:id="rId5"/>
-    <p:sldId id="277" r:id="rId6"/>
-    <p:sldId id="278" r:id="rId7"/>
-    <p:sldId id="279" r:id="rId8"/>
-    <p:sldId id="273" r:id="rId9"/>
-    <p:sldId id="265" r:id="rId10"/>
-    <p:sldId id="282" r:id="rId11"/>
-    <p:sldId id="283" r:id="rId12"/>
-    <p:sldId id="286" r:id="rId13"/>
-    <p:sldId id="287" r:id="rId14"/>
-    <p:sldId id="284" r:id="rId15"/>
-    <p:sldId id="285" r:id="rId16"/>
-    <p:sldId id="288" r:id="rId17"/>
-    <p:sldId id="266" r:id="rId18"/>
-    <p:sldId id="289" r:id="rId19"/>
-    <p:sldId id="267" r:id="rId20"/>
-    <p:sldId id="268" r:id="rId21"/>
-    <p:sldId id="269" r:id="rId22"/>
-    <p:sldId id="270" r:id="rId23"/>
+    <p:sldId id="277" r:id="rId5"/>
+    <p:sldId id="279" r:id="rId6"/>
+    <p:sldId id="273" r:id="rId7"/>
+    <p:sldId id="265" r:id="rId8"/>
+    <p:sldId id="282" r:id="rId9"/>
+    <p:sldId id="283" r:id="rId10"/>
+    <p:sldId id="286" r:id="rId11"/>
+    <p:sldId id="287" r:id="rId12"/>
+    <p:sldId id="284" r:id="rId13"/>
+    <p:sldId id="285" r:id="rId14"/>
+    <p:sldId id="288" r:id="rId15"/>
+    <p:sldId id="266" r:id="rId16"/>
+    <p:sldId id="289" r:id="rId17"/>
+    <p:sldId id="267" r:id="rId18"/>
+    <p:sldId id="268" r:id="rId19"/>
+    <p:sldId id="269" r:id="rId20"/>
+    <p:sldId id="270" r:id="rId21"/>
   </p:sldIdLst>
   <p:sldSz cx="14630400" cy="8229600"/>
   <p:notesSz cx="6858000" cy="9144000"/>
@@ -264,7 +262,7 @@
           <a:p>
             <a:fld id="{163F0119-99E8-4B39-9AE3-1AFDAA3321B4}" type="datetimeFigureOut">
               <a:rPr lang="zh-TW" altLang="en-US" smtClean="0"/>
-              <a:t>2025/6/24</a:t>
+              <a:t>2025/6/26</a:t>
             </a:fld>
             <a:endParaRPr lang="zh-TW" altLang="en-US"/>
           </a:p>
@@ -434,7 +432,7 @@
           <a:p>
             <a:fld id="{163F0119-99E8-4B39-9AE3-1AFDAA3321B4}" type="datetimeFigureOut">
               <a:rPr lang="zh-TW" altLang="en-US" smtClean="0"/>
-              <a:t>2025/6/24</a:t>
+              <a:t>2025/6/26</a:t>
             </a:fld>
             <a:endParaRPr lang="zh-TW" altLang="en-US"/>
           </a:p>
@@ -614,7 +612,7 @@
           <a:p>
             <a:fld id="{163F0119-99E8-4B39-9AE3-1AFDAA3321B4}" type="datetimeFigureOut">
               <a:rPr lang="zh-TW" altLang="en-US" smtClean="0"/>
-              <a:t>2025/6/24</a:t>
+              <a:t>2025/6/26</a:t>
             </a:fld>
             <a:endParaRPr lang="zh-TW" altLang="en-US"/>
           </a:p>
@@ -784,7 +782,7 @@
           <a:p>
             <a:fld id="{163F0119-99E8-4B39-9AE3-1AFDAA3321B4}" type="datetimeFigureOut">
               <a:rPr lang="zh-TW" altLang="en-US" smtClean="0"/>
-              <a:t>2025/6/24</a:t>
+              <a:t>2025/6/26</a:t>
             </a:fld>
             <a:endParaRPr lang="zh-TW" altLang="en-US"/>
           </a:p>
@@ -1030,7 +1028,7 @@
           <a:p>
             <a:fld id="{163F0119-99E8-4B39-9AE3-1AFDAA3321B4}" type="datetimeFigureOut">
               <a:rPr lang="zh-TW" altLang="en-US" smtClean="0"/>
-              <a:t>2025/6/24</a:t>
+              <a:t>2025/6/26</a:t>
             </a:fld>
             <a:endParaRPr lang="zh-TW" altLang="en-US"/>
           </a:p>
@@ -1262,7 +1260,7 @@
           <a:p>
             <a:fld id="{163F0119-99E8-4B39-9AE3-1AFDAA3321B4}" type="datetimeFigureOut">
               <a:rPr lang="zh-TW" altLang="en-US" smtClean="0"/>
-              <a:t>2025/6/24</a:t>
+              <a:t>2025/6/26</a:t>
             </a:fld>
             <a:endParaRPr lang="zh-TW" altLang="en-US"/>
           </a:p>
@@ -1629,7 +1627,7 @@
           <a:p>
             <a:fld id="{163F0119-99E8-4B39-9AE3-1AFDAA3321B4}" type="datetimeFigureOut">
               <a:rPr lang="zh-TW" altLang="en-US" smtClean="0"/>
-              <a:t>2025/6/24</a:t>
+              <a:t>2025/6/26</a:t>
             </a:fld>
             <a:endParaRPr lang="zh-TW" altLang="en-US"/>
           </a:p>
@@ -1747,7 +1745,7 @@
           <a:p>
             <a:fld id="{163F0119-99E8-4B39-9AE3-1AFDAA3321B4}" type="datetimeFigureOut">
               <a:rPr lang="zh-TW" altLang="en-US" smtClean="0"/>
-              <a:t>2025/6/24</a:t>
+              <a:t>2025/6/26</a:t>
             </a:fld>
             <a:endParaRPr lang="zh-TW" altLang="en-US"/>
           </a:p>
@@ -1842,7 +1840,7 @@
           <a:p>
             <a:fld id="{163F0119-99E8-4B39-9AE3-1AFDAA3321B4}" type="datetimeFigureOut">
               <a:rPr lang="zh-TW" altLang="en-US" smtClean="0"/>
-              <a:t>2025/6/24</a:t>
+              <a:t>2025/6/26</a:t>
             </a:fld>
             <a:endParaRPr lang="zh-TW" altLang="en-US"/>
           </a:p>
@@ -2119,7 +2117,7 @@
           <a:p>
             <a:fld id="{163F0119-99E8-4B39-9AE3-1AFDAA3321B4}" type="datetimeFigureOut">
               <a:rPr lang="zh-TW" altLang="en-US" smtClean="0"/>
-              <a:t>2025/6/24</a:t>
+              <a:t>2025/6/26</a:t>
             </a:fld>
             <a:endParaRPr lang="zh-TW" altLang="en-US"/>
           </a:p>
@@ -2376,7 +2374,7 @@
           <a:p>
             <a:fld id="{163F0119-99E8-4B39-9AE3-1AFDAA3321B4}" type="datetimeFigureOut">
               <a:rPr lang="zh-TW" altLang="en-US" smtClean="0"/>
-              <a:t>2025/6/24</a:t>
+              <a:t>2025/6/26</a:t>
             </a:fld>
             <a:endParaRPr lang="zh-TW" altLang="en-US"/>
           </a:p>
@@ -2594,7 +2592,7 @@
           <a:p>
             <a:fld id="{163F0119-99E8-4B39-9AE3-1AFDAA3321B4}" type="datetimeFigureOut">
               <a:rPr lang="zh-TW" altLang="en-US" smtClean="0"/>
-              <a:t>2025/6/24</a:t>
+              <a:t>2025/6/26</a:t>
             </a:fld>
             <a:endParaRPr lang="zh-TW" altLang="en-US"/>
           </a:p>
@@ -3053,10 +3051,10 @@
       </p:sp>
       <p:sp>
         <p:nvSpPr>
-          <p:cNvPr id="43" name="Text 2">
-            <a:extLst>
-              <a:ext uri="{FF2B5EF4-FFF2-40B4-BE49-F238E27FC236}">
-                <a16:creationId xmlns:a16="http://schemas.microsoft.com/office/drawing/2014/main" id="{4EFFF814-28DB-132B-F97B-D78810258A97}"/>
+          <p:cNvPr id="44" name="Text 3">
+            <a:extLst>
+              <a:ext uri="{FF2B5EF4-FFF2-40B4-BE49-F238E27FC236}">
+                <a16:creationId xmlns:a16="http://schemas.microsoft.com/office/drawing/2014/main" id="{9AB370BD-A1D1-6909-9B09-0A6E8830B946}"/>
               </a:ext>
             </a:extLst>
           </p:cNvPr>
@@ -3065,7 +3063,7 @@
         </p:nvSpPr>
         <p:spPr>
           <a:xfrm>
-            <a:off x="5317257" y="3938751"/>
+            <a:off x="6005625" y="4271897"/>
             <a:ext cx="7468553" cy="383024"/>
           </a:xfrm>
           <a:prstGeom prst="rect">
@@ -3090,7 +3088,23 @@
                 <a:ea typeface="Cabin" pitchFamily="34" charset="-122"/>
                 <a:cs typeface="Cabin" pitchFamily="34" charset="-120"/>
               </a:rPr>
-              <a:t>技術架構：React + Spring + MySQL</a:t>
+              <a:t>組員：</a:t>
+            </a:r>
+            <a:r>
+              <a:rPr lang="en-US" altLang="zh-TW" sz="1850" dirty="0">
+                <a:latin typeface="Cabin" pitchFamily="34" charset="0"/>
+                <a:ea typeface="Cabin" pitchFamily="34" charset="-122"/>
+                <a:cs typeface="Cabin" pitchFamily="34" charset="-120"/>
+              </a:rPr>
+              <a:t>19_</a:t>
+            </a:r>
+            <a:r>
+              <a:rPr lang="zh-TW" altLang="en-US" sz="1850" dirty="0">
+                <a:latin typeface="Cabin" pitchFamily="34" charset="0"/>
+                <a:ea typeface="Cabin" pitchFamily="34" charset="-122"/>
+                <a:cs typeface="Cabin" pitchFamily="34" charset="-120"/>
+              </a:rPr>
+              <a:t>張允豪</a:t>
             </a:r>
             <a:endParaRPr lang="en-US" sz="1850" dirty="0"/>
           </a:p>
@@ -3098,10 +3112,10 @@
       </p:sp>
       <p:sp>
         <p:nvSpPr>
-          <p:cNvPr id="44" name="Text 3">
-            <a:extLst>
-              <a:ext uri="{FF2B5EF4-FFF2-40B4-BE49-F238E27FC236}">
-                <a16:creationId xmlns:a16="http://schemas.microsoft.com/office/drawing/2014/main" id="{9AB370BD-A1D1-6909-9B09-0A6E8830B946}"/>
+          <p:cNvPr id="2" name="Text 2">
+            <a:extLst>
+              <a:ext uri="{FF2B5EF4-FFF2-40B4-BE49-F238E27FC236}">
+                <a16:creationId xmlns:a16="http://schemas.microsoft.com/office/drawing/2014/main" id="{2E9D9B67-3FAA-0D94-DF6A-982057B29BC1}"/>
               </a:ext>
             </a:extLst>
           </p:cNvPr>
@@ -3110,7 +3124,7 @@
         </p:nvSpPr>
         <p:spPr>
           <a:xfrm>
-            <a:off x="5317257" y="4590975"/>
+            <a:off x="5089514" y="5324867"/>
             <a:ext cx="7468553" cy="383024"/>
           </a:xfrm>
           <a:prstGeom prst="rect">
@@ -3130,30 +3144,32 @@
               <a:buNone/>
             </a:pPr>
             <a:r>
-              <a:rPr lang="en-US" sz="1850" dirty="0" err="1">
-                <a:latin typeface="Cabin" pitchFamily="34" charset="0"/>
-                <a:ea typeface="Cabin" pitchFamily="34" charset="-122"/>
-                <a:cs typeface="Cabin" pitchFamily="34" charset="-120"/>
-              </a:rPr>
-              <a:t>組員</a:t>
-            </a:r>
-            <a:r>
-              <a:rPr lang="en-US" sz="1850" dirty="0">
-                <a:latin typeface="Cabin" pitchFamily="34" charset="0"/>
-                <a:ea typeface="Cabin" pitchFamily="34" charset="-122"/>
-                <a:cs typeface="Cabin" pitchFamily="34" charset="-120"/>
-              </a:rPr>
-              <a:t>：</a:t>
-            </a:r>
-            <a:r>
-              <a:rPr lang="zh-TW" altLang="en-US" sz="1850" dirty="0">
-                <a:latin typeface="Cabin" pitchFamily="34" charset="0"/>
-                <a:ea typeface="Cabin" pitchFamily="34" charset="-122"/>
-                <a:cs typeface="Cabin" pitchFamily="34" charset="-120"/>
-              </a:rPr>
-              <a:t>張允豪</a:t>
-            </a:r>
-            <a:endParaRPr lang="en-US" sz="1850" dirty="0"/>
+              <a:rPr lang="en-US" altLang="zh-TW" sz="2000" b="1" i="0" u="none" strike="noStrike" dirty="0">
+                <a:solidFill>
+                  <a:srgbClr val="1A0DAB"/>
+                </a:solidFill>
+                <a:effectLst/>
+                <a:latin typeface="Arial" panose="020B0604020202020204" pitchFamily="34" charset="0"/>
+                <a:hlinkClick r:id="rId2"/>
+              </a:rPr>
+              <a:t>Java</a:t>
+            </a:r>
+            <a:r>
+              <a:rPr lang="zh-TW" altLang="en-US" sz="2000" b="1" i="0" u="none" strike="noStrike" dirty="0">
+                <a:solidFill>
+                  <a:srgbClr val="1A0DAB"/>
+                </a:solidFill>
+                <a:effectLst/>
+                <a:latin typeface="Arial" panose="020B0604020202020204" pitchFamily="34" charset="0"/>
+                <a:hlinkClick r:id="rId2"/>
+              </a:rPr>
+              <a:t>雲端應用開發工程師實戰養成班</a:t>
+            </a:r>
+            <a:endParaRPr lang="en-US" altLang="zh-TW" sz="1850" dirty="0">
+              <a:latin typeface="Cabin" pitchFamily="34" charset="0"/>
+              <a:ea typeface="Cabin" pitchFamily="34" charset="-122"/>
+              <a:cs typeface="Cabin" pitchFamily="34" charset="-120"/>
+            </a:endParaRPr>
           </a:p>
         </p:txBody>
       </p:sp>
@@ -3242,10 +3258,10 @@
       </p:sp>
       <p:sp>
         <p:nvSpPr>
-          <p:cNvPr id="5" name="Text 2">
-            <a:extLst>
-              <a:ext uri="{FF2B5EF4-FFF2-40B4-BE49-F238E27FC236}">
-                <a16:creationId xmlns:a16="http://schemas.microsoft.com/office/drawing/2014/main" id="{101A07B7-081B-4384-C963-FFC0D5B53663}"/>
+          <p:cNvPr id="14" name="Text 5">
+            <a:extLst>
+              <a:ext uri="{FF2B5EF4-FFF2-40B4-BE49-F238E27FC236}">
+                <a16:creationId xmlns:a16="http://schemas.microsoft.com/office/drawing/2014/main" id="{F636048F-4C36-6D44-AA6F-5D21733034BE}"/>
               </a:ext>
             </a:extLst>
           </p:cNvPr>
@@ -3254,7 +3270,7 @@
         </p:nvSpPr>
         <p:spPr>
           <a:xfrm>
-            <a:off x="1007465" y="2521407"/>
+            <a:off x="1011157" y="2557270"/>
             <a:ext cx="2816185" cy="351949"/>
           </a:xfrm>
           <a:prstGeom prst="rect">
@@ -3267,30 +3283,31 @@
           <a:bodyPr wrap="none" lIns="0" tIns="0" rIns="0" bIns="0" rtlCol="0" anchor="t"/>
           <a:lstStyle/>
           <a:p>
-            <a:pPr marL="0" indent="0" algn="l">
+            <a:pPr>
               <a:lnSpc>
                 <a:spcPts val="2750"/>
               </a:lnSpc>
-              <a:buNone/>
             </a:pPr>
             <a:r>
-              <a:rPr lang="en-US" sz="2200" dirty="0">
+              <a:rPr lang="zh-TW" altLang="en-US" sz="2200" dirty="0">
                 <a:latin typeface="Unbounded" pitchFamily="34" charset="0"/>
                 <a:ea typeface="Unbounded" pitchFamily="34" charset="-122"/>
-                <a:cs typeface="Unbounded" pitchFamily="34" charset="-120"/>
-              </a:rPr>
-              <a:t>最近看過商品</a:t>
-            </a:r>
-            <a:endParaRPr lang="en-US" sz="2200" dirty="0"/>
-          </a:p>
-        </p:txBody>
-      </p:sp>
-      <p:sp>
-        <p:nvSpPr>
-          <p:cNvPr id="6" name="Text 3">
-            <a:extLst>
-              <a:ext uri="{FF2B5EF4-FFF2-40B4-BE49-F238E27FC236}">
-                <a16:creationId xmlns:a16="http://schemas.microsoft.com/office/drawing/2014/main" id="{462400A2-D484-A8F3-CCF3-32E253FD6954}"/>
+              </a:rPr>
+              <a:t>訂單管理</a:t>
+            </a:r>
+            <a:endParaRPr lang="en-US" sz="2200" dirty="0">
+              <a:latin typeface="Unbounded" pitchFamily="34" charset="0"/>
+              <a:ea typeface="Unbounded" pitchFamily="34" charset="-122"/>
+            </a:endParaRPr>
+          </a:p>
+        </p:txBody>
+      </p:sp>
+      <p:sp>
+        <p:nvSpPr>
+          <p:cNvPr id="16" name="Text 6">
+            <a:extLst>
+              <a:ext uri="{FF2B5EF4-FFF2-40B4-BE49-F238E27FC236}">
+                <a16:creationId xmlns:a16="http://schemas.microsoft.com/office/drawing/2014/main" id="{6BBFCEEE-A067-D3FE-98EA-BF5239A138DB}"/>
               </a:ext>
             </a:extLst>
           </p:cNvPr>
@@ -3299,7 +3316,7 @@
         </p:nvSpPr>
         <p:spPr>
           <a:xfrm>
-            <a:off x="1007465" y="3016945"/>
+            <a:off x="1011157" y="3052808"/>
             <a:ext cx="3135987" cy="766048"/>
           </a:xfrm>
           <a:prstGeom prst="rect">
@@ -3312,27 +3329,30 @@
           <a:bodyPr wrap="square" lIns="0" tIns="0" rIns="0" bIns="0" rtlCol="0" anchor="t"/>
           <a:lstStyle/>
           <a:p>
-            <a:pPr marL="0" indent="0" algn="l">
+            <a:pPr>
               <a:lnSpc>
                 <a:spcPts val="3000"/>
               </a:lnSpc>
-              <a:buNone/>
             </a:pPr>
             <a:r>
-              <a:rPr lang="en-US" sz="1850" dirty="0">
+              <a:rPr lang="zh-TW" altLang="en-US" sz="1850" dirty="0">
                 <a:latin typeface="Cabin" pitchFamily="34" charset="0"/>
                 <a:ea typeface="Cabin" pitchFamily="34" charset="-122"/>
                 <a:cs typeface="Cabin" pitchFamily="34" charset="-120"/>
               </a:rPr>
-              <a:t>追蹤瀏覽紀錄，方便用戶回顧商品</a:t>
-            </a:r>
-            <a:endParaRPr lang="en-US" sz="1850" dirty="0"/>
+              <a:t>可以查看，和一定程度的管理訂單</a:t>
+            </a:r>
+            <a:endParaRPr lang="en-US" sz="1850" dirty="0">
+              <a:latin typeface="Cabin" pitchFamily="34" charset="0"/>
+              <a:ea typeface="Cabin" pitchFamily="34" charset="-122"/>
+              <a:cs typeface="Cabin" pitchFamily="34" charset="-120"/>
+            </a:endParaRPr>
           </a:p>
         </p:txBody>
       </p:sp>
       <p:pic>
         <p:nvPicPr>
-          <p:cNvPr id="15" name="圖片 14"/>
+          <p:cNvPr id="5" name="圖片 4"/>
           <p:cNvPicPr>
             <a:picLocks noChangeAspect="1"/>
           </p:cNvPicPr>
@@ -3346,8 +3366,8 @@
         </p:blipFill>
         <p:spPr>
           <a:xfrm>
-            <a:off x="5123061" y="2282091"/>
-            <a:ext cx="9000000" cy="5769536"/>
+            <a:off x="6121625" y="2282091"/>
+            <a:ext cx="7200000" cy="5554286"/>
           </a:xfrm>
           <a:prstGeom prst="rect">
             <a:avLst/>
@@ -3357,7 +3377,7 @@
     </p:spTree>
     <p:extLst>
       <p:ext uri="{BB962C8B-B14F-4D97-AF65-F5344CB8AC3E}">
-        <p14:creationId xmlns:p14="http://schemas.microsoft.com/office/powerpoint/2010/main" val="4210325602"/>
+        <p14:creationId xmlns:p14="http://schemas.microsoft.com/office/powerpoint/2010/main" val="3853908940"/>
       </p:ext>
     </p:extLst>
   </p:cSld>
@@ -3464,21 +3484,22 @@
           <a:bodyPr wrap="none" lIns="0" tIns="0" rIns="0" bIns="0" rtlCol="0" anchor="t"/>
           <a:lstStyle/>
           <a:p>
-            <a:pPr marL="0" indent="0" algn="l">
+            <a:pPr>
               <a:lnSpc>
                 <a:spcPts val="2750"/>
               </a:lnSpc>
-              <a:buNone/>
             </a:pPr>
             <a:r>
-              <a:rPr lang="en-US" sz="2200" dirty="0">
+              <a:rPr lang="zh-TW" altLang="en-US" sz="2200" dirty="0">
                 <a:latin typeface="Unbounded" pitchFamily="34" charset="0"/>
                 <a:ea typeface="Unbounded" pitchFamily="34" charset="-122"/>
-                <a:cs typeface="Unbounded" pitchFamily="34" charset="-120"/>
-              </a:rPr>
-              <a:t>購物車管理</a:t>
-            </a:r>
-            <a:endParaRPr lang="en-US" sz="2200" dirty="0"/>
+              </a:rPr>
+              <a:t>修改個人資料</a:t>
+            </a:r>
+            <a:endParaRPr lang="en-US" sz="2200" dirty="0">
+              <a:latin typeface="Unbounded" pitchFamily="34" charset="0"/>
+              <a:ea typeface="Unbounded" pitchFamily="34" charset="-122"/>
+            </a:endParaRPr>
           </a:p>
         </p:txBody>
       </p:sp>
@@ -3520,7 +3541,7 @@
                 <a:ea typeface="Cabin" pitchFamily="34" charset="-122"/>
                 <a:cs typeface="Cabin" pitchFamily="34" charset="-120"/>
               </a:rPr>
-              <a:t>新增、修改、刪除商品</a:t>
+              <a:t>可以修改預設的資料</a:t>
             </a:r>
             <a:endParaRPr lang="en-US" sz="1850" dirty="0">
               <a:latin typeface="Cabin" pitchFamily="34" charset="0"/>
@@ -3546,8 +3567,8 @@
         </p:blipFill>
         <p:spPr>
           <a:xfrm>
-            <a:off x="4835879" y="2282091"/>
-            <a:ext cx="9000000" cy="3155507"/>
+            <a:off x="6206067" y="2282091"/>
+            <a:ext cx="5400000" cy="4972835"/>
           </a:xfrm>
           <a:prstGeom prst="rect">
             <a:avLst/>
@@ -3557,7 +3578,7 @@
     </p:spTree>
     <p:extLst>
       <p:ext uri="{BB962C8B-B14F-4D97-AF65-F5344CB8AC3E}">
-        <p14:creationId xmlns:p14="http://schemas.microsoft.com/office/powerpoint/2010/main" val="2357158065"/>
+        <p14:creationId xmlns:p14="http://schemas.microsoft.com/office/powerpoint/2010/main" val="1451927989"/>
       </p:ext>
     </p:extLst>
   </p:cSld>
@@ -3664,22 +3685,20 @@
           <a:bodyPr wrap="none" lIns="0" tIns="0" rIns="0" bIns="0" rtlCol="0" anchor="t"/>
           <a:lstStyle/>
           <a:p>
-            <a:pPr>
+            <a:pPr marL="0" indent="0" algn="l">
               <a:lnSpc>
                 <a:spcPts val="2750"/>
               </a:lnSpc>
+              <a:buNone/>
             </a:pPr>
             <a:r>
               <a:rPr lang="zh-TW" altLang="en-US" sz="2200" dirty="0">
                 <a:latin typeface="Unbounded" pitchFamily="34" charset="0"/>
                 <a:ea typeface="Unbounded" pitchFamily="34" charset="-122"/>
               </a:rPr>
-              <a:t>訂單管理</a:t>
-            </a:r>
-            <a:endParaRPr lang="en-US" sz="2200" dirty="0">
-              <a:latin typeface="Unbounded" pitchFamily="34" charset="0"/>
-              <a:ea typeface="Unbounded" pitchFamily="34" charset="-122"/>
-            </a:endParaRPr>
+              <a:t>通知中心</a:t>
+            </a:r>
+            <a:endParaRPr lang="en-US" sz="2200" dirty="0"/>
           </a:p>
         </p:txBody>
       </p:sp>
@@ -3721,7 +3740,7 @@
                 <a:ea typeface="Cabin" pitchFamily="34" charset="-122"/>
                 <a:cs typeface="Cabin" pitchFamily="34" charset="-120"/>
               </a:rPr>
-              <a:t>可以查看，和一定程度的管理訂單</a:t>
+              <a:t>查看系統或管理員發送的個人化通知訊息</a:t>
             </a:r>
             <a:endParaRPr lang="en-US" sz="1850" dirty="0">
               <a:latin typeface="Cabin" pitchFamily="34" charset="0"/>
@@ -3733,7 +3752,7 @@
       </p:sp>
       <p:pic>
         <p:nvPicPr>
-          <p:cNvPr id="5" name="圖片 4"/>
+          <p:cNvPr id="4" name="圖片 3"/>
           <p:cNvPicPr>
             <a:picLocks noChangeAspect="1"/>
           </p:cNvPicPr>
@@ -3747,8 +3766,8 @@
         </p:blipFill>
         <p:spPr>
           <a:xfrm>
-            <a:off x="6121625" y="2282091"/>
-            <a:ext cx="7200000" cy="5554286"/>
+            <a:off x="4625775" y="2282092"/>
+            <a:ext cx="9000000" cy="1923517"/>
           </a:xfrm>
           <a:prstGeom prst="rect">
             <a:avLst/>
@@ -3758,7 +3777,7 @@
     </p:spTree>
     <p:extLst>
       <p:ext uri="{BB962C8B-B14F-4D97-AF65-F5344CB8AC3E}">
-        <p14:creationId xmlns:p14="http://schemas.microsoft.com/office/powerpoint/2010/main" val="3853908940"/>
+        <p14:creationId xmlns:p14="http://schemas.microsoft.com/office/powerpoint/2010/main" val="2083556199"/>
       </p:ext>
     </p:extLst>
   </p:cSld>
@@ -3865,22 +3884,20 @@
           <a:bodyPr wrap="none" lIns="0" tIns="0" rIns="0" bIns="0" rtlCol="0" anchor="t"/>
           <a:lstStyle/>
           <a:p>
-            <a:pPr>
+            <a:pPr marL="0" indent="0" algn="l">
               <a:lnSpc>
                 <a:spcPts val="2750"/>
               </a:lnSpc>
+              <a:buNone/>
             </a:pPr>
             <a:r>
               <a:rPr lang="zh-TW" altLang="en-US" sz="2200" dirty="0">
                 <a:latin typeface="Unbounded" pitchFamily="34" charset="0"/>
                 <a:ea typeface="Unbounded" pitchFamily="34" charset="-122"/>
               </a:rPr>
-              <a:t>修改個人資料</a:t>
-            </a:r>
-            <a:endParaRPr lang="en-US" sz="2200" dirty="0">
-              <a:latin typeface="Unbounded" pitchFamily="34" charset="0"/>
-              <a:ea typeface="Unbounded" pitchFamily="34" charset="-122"/>
-            </a:endParaRPr>
+              <a:t>我的收藏</a:t>
+            </a:r>
+            <a:endParaRPr lang="en-US" sz="2200" dirty="0"/>
           </a:p>
         </p:txBody>
       </p:sp>
@@ -3922,7 +3939,7 @@
                 <a:ea typeface="Cabin" pitchFamily="34" charset="-122"/>
                 <a:cs typeface="Cabin" pitchFamily="34" charset="-120"/>
               </a:rPr>
-              <a:t>可以修改預設的資料</a:t>
+              <a:t>收藏喜愛商品並可快速加入購物車</a:t>
             </a:r>
             <a:endParaRPr lang="en-US" sz="1850" dirty="0">
               <a:latin typeface="Cabin" pitchFamily="34" charset="0"/>
@@ -3948,8 +3965,8 @@
         </p:blipFill>
         <p:spPr>
           <a:xfrm>
-            <a:off x="6206067" y="2282091"/>
-            <a:ext cx="5400000" cy="4972835"/>
+            <a:off x="5020791" y="2282091"/>
+            <a:ext cx="8841459" cy="4736195"/>
           </a:xfrm>
           <a:prstGeom prst="rect">
             <a:avLst/>
@@ -3959,7 +3976,7 @@
     </p:spTree>
     <p:extLst>
       <p:ext uri="{BB962C8B-B14F-4D97-AF65-F5344CB8AC3E}">
-        <p14:creationId xmlns:p14="http://schemas.microsoft.com/office/powerpoint/2010/main" val="1451927989"/>
+        <p14:creationId xmlns:p14="http://schemas.microsoft.com/office/powerpoint/2010/main" val="3111917034"/>
       </p:ext>
     </p:extLst>
   </p:cSld>
@@ -4053,7 +4070,7 @@
         </p:nvSpPr>
         <p:spPr>
           <a:xfrm>
-            <a:off x="1011157" y="2557270"/>
+            <a:off x="1058912" y="2493624"/>
             <a:ext cx="2816185" cy="351949"/>
           </a:xfrm>
           <a:prstGeom prst="rect">
@@ -4066,20 +4083,22 @@
           <a:bodyPr wrap="none" lIns="0" tIns="0" rIns="0" bIns="0" rtlCol="0" anchor="t"/>
           <a:lstStyle/>
           <a:p>
-            <a:pPr marL="0" indent="0" algn="l">
+            <a:pPr>
               <a:lnSpc>
                 <a:spcPts val="2750"/>
               </a:lnSpc>
-              <a:buNone/>
             </a:pPr>
             <a:r>
               <a:rPr lang="zh-TW" altLang="en-US" sz="2200" dirty="0">
                 <a:latin typeface="Unbounded" pitchFamily="34" charset="0"/>
                 <a:ea typeface="Unbounded" pitchFamily="34" charset="-122"/>
               </a:rPr>
-              <a:t>通知中心</a:t>
-            </a:r>
-            <a:endParaRPr lang="en-US" sz="2200" dirty="0"/>
+              <a:t>商品管理</a:t>
+            </a:r>
+            <a:endParaRPr lang="en-US" sz="2200" dirty="0">
+              <a:latin typeface="Unbounded" pitchFamily="34" charset="0"/>
+              <a:ea typeface="Unbounded" pitchFamily="34" charset="-122"/>
+            </a:endParaRPr>
           </a:p>
         </p:txBody>
       </p:sp>
@@ -4097,7 +4116,7 @@
         </p:nvSpPr>
         <p:spPr>
           <a:xfrm>
-            <a:off x="1011157" y="3052808"/>
+            <a:off x="1058912" y="2989162"/>
             <a:ext cx="3135987" cy="766048"/>
           </a:xfrm>
           <a:prstGeom prst="rect">
@@ -4115,15 +4134,10 @@
                 <a:spcPts val="3000"/>
               </a:lnSpc>
             </a:pPr>
-            <a:r>
-              <a:rPr lang="zh-TW" altLang="en-US" sz="1850" dirty="0">
-                <a:latin typeface="Cabin" pitchFamily="34" charset="0"/>
-                <a:ea typeface="Cabin" pitchFamily="34" charset="-122"/>
-                <a:cs typeface="Cabin" pitchFamily="34" charset="-120"/>
-              </a:rPr>
-              <a:t>查看系統或管理員發送的個人化通知訊息</a:t>
-            </a:r>
             <a:endParaRPr lang="en-US" sz="1850" dirty="0">
+              <a:solidFill>
+                <a:srgbClr val="CAD6DE"/>
+              </a:solidFill>
               <a:latin typeface="Cabin" pitchFamily="34" charset="0"/>
               <a:ea typeface="Cabin" pitchFamily="34" charset="-122"/>
               <a:cs typeface="Cabin" pitchFamily="34" charset="-120"/>
@@ -4133,7 +4147,13 @@
       </p:sp>
       <p:pic>
         <p:nvPicPr>
-          <p:cNvPr id="4" name="圖片 3"/>
+          <p:cNvPr id="4" name="圖片 3">
+            <a:extLst>
+              <a:ext uri="{FF2B5EF4-FFF2-40B4-BE49-F238E27FC236}">
+                <a16:creationId xmlns:a16="http://schemas.microsoft.com/office/drawing/2014/main" id="{F735A40E-0876-DC19-B29D-55756CC9AF94}"/>
+              </a:ext>
+            </a:extLst>
+          </p:cNvPr>
           <p:cNvPicPr>
             <a:picLocks noChangeAspect="1"/>
           </p:cNvPicPr>
@@ -4147,8 +4167,86 @@
         </p:blipFill>
         <p:spPr>
           <a:xfrm>
-            <a:off x="4625775" y="2282092"/>
-            <a:ext cx="9000000" cy="1923517"/>
+            <a:off x="6038153" y="246229"/>
+            <a:ext cx="8109361" cy="3944432"/>
+          </a:xfrm>
+          <a:prstGeom prst="rect">
+            <a:avLst/>
+          </a:prstGeom>
+        </p:spPr>
+      </p:pic>
+      <p:sp>
+        <p:nvSpPr>
+          <p:cNvPr id="8" name="Text 6">
+            <a:extLst>
+              <a:ext uri="{FF2B5EF4-FFF2-40B4-BE49-F238E27FC236}">
+                <a16:creationId xmlns:a16="http://schemas.microsoft.com/office/drawing/2014/main" id="{1D5B5560-1CFB-0EF1-820B-C009AD3E3EBE}"/>
+              </a:ext>
+            </a:extLst>
+          </p:cNvPr>
+          <p:cNvSpPr/>
+          <p:nvPr/>
+        </p:nvSpPr>
+        <p:spPr>
+          <a:xfrm>
+            <a:off x="1058912" y="2911318"/>
+            <a:ext cx="3135987" cy="766048"/>
+          </a:xfrm>
+          <a:prstGeom prst="rect">
+            <a:avLst/>
+          </a:prstGeom>
+          <a:noFill/>
+          <a:ln/>
+        </p:spPr>
+        <p:txBody>
+          <a:bodyPr wrap="square" lIns="0" tIns="0" rIns="0" bIns="0" rtlCol="0" anchor="t"/>
+          <a:lstStyle/>
+          <a:p>
+            <a:pPr>
+              <a:lnSpc>
+                <a:spcPts val="3000"/>
+              </a:lnSpc>
+            </a:pPr>
+            <a:r>
+              <a:rPr lang="zh-TW" altLang="en-US" sz="1850" dirty="0">
+                <a:latin typeface="Cabin" pitchFamily="34" charset="0"/>
+                <a:ea typeface="Cabin" pitchFamily="34" charset="-122"/>
+                <a:cs typeface="Cabin" pitchFamily="34" charset="-120"/>
+              </a:rPr>
+              <a:t>可以查看新增上架，和一定程度的編輯商品</a:t>
+            </a:r>
+            <a:endParaRPr lang="en-US" sz="1850" dirty="0">
+              <a:latin typeface="Cabin" pitchFamily="34" charset="0"/>
+              <a:ea typeface="Cabin" pitchFamily="34" charset="-122"/>
+              <a:cs typeface="Cabin" pitchFamily="34" charset="-120"/>
+            </a:endParaRPr>
+          </a:p>
+        </p:txBody>
+      </p:sp>
+      <p:pic>
+        <p:nvPicPr>
+          <p:cNvPr id="10" name="圖片 9">
+            <a:extLst>
+              <a:ext uri="{FF2B5EF4-FFF2-40B4-BE49-F238E27FC236}">
+                <a16:creationId xmlns:a16="http://schemas.microsoft.com/office/drawing/2014/main" id="{57022927-96D9-CD30-5601-FA1CCBE4BA89}"/>
+              </a:ext>
+            </a:extLst>
+          </p:cNvPr>
+          <p:cNvPicPr>
+            <a:picLocks noChangeAspect="1"/>
+          </p:cNvPicPr>
+          <p:nvPr/>
+        </p:nvPicPr>
+        <p:blipFill>
+          <a:blip r:embed="rId3"/>
+          <a:stretch>
+            <a:fillRect/>
+          </a:stretch>
+        </p:blipFill>
+        <p:spPr>
+          <a:xfrm>
+            <a:off x="815905" y="4270937"/>
+            <a:ext cx="6316825" cy="3810668"/>
           </a:xfrm>
           <a:prstGeom prst="rect">
             <a:avLst/>
@@ -4158,7 +4256,7 @@
     </p:spTree>
     <p:extLst>
       <p:ext uri="{BB962C8B-B14F-4D97-AF65-F5344CB8AC3E}">
-        <p14:creationId xmlns:p14="http://schemas.microsoft.com/office/powerpoint/2010/main" val="2083556199"/>
+        <p14:creationId xmlns:p14="http://schemas.microsoft.com/office/powerpoint/2010/main" val="3303974127"/>
       </p:ext>
     </p:extLst>
   </p:cSld>
@@ -4171,14 +4269,6 @@
 <file path=ppt/slides/slide15.xml><?xml version="1.0" encoding="utf-8"?>
 <p:sld xmlns:a="http://schemas.openxmlformats.org/drawingml/2006/main" xmlns:r="http://schemas.openxmlformats.org/officeDocument/2006/relationships" xmlns:p="http://schemas.openxmlformats.org/presentationml/2006/main">
   <p:cSld>
-    <p:bg>
-      <p:bgPr>
-        <a:solidFill>
-          <a:schemeClr val="bg1"/>
-        </a:solidFill>
-        <a:effectLst/>
-      </p:bgPr>
-    </p:bg>
     <p:spTree>
       <p:nvGrpSpPr>
         <p:cNvPr id="1" name=""/>
@@ -4195,10 +4285,10 @@
       </p:grpSpPr>
       <p:sp>
         <p:nvSpPr>
-          <p:cNvPr id="3" name="Text 0">
-            <a:extLst>
-              <a:ext uri="{FF2B5EF4-FFF2-40B4-BE49-F238E27FC236}">
-                <a16:creationId xmlns:a16="http://schemas.microsoft.com/office/drawing/2014/main" id="{8BF2A6AB-1F7E-9633-389D-D723B15A9392}"/>
+          <p:cNvPr id="14" name="Text 0">
+            <a:extLst>
+              <a:ext uri="{FF2B5EF4-FFF2-40B4-BE49-F238E27FC236}">
+                <a16:creationId xmlns:a16="http://schemas.microsoft.com/office/drawing/2014/main" id="{3BB6AD06-1FAD-E83C-8A0F-5E1DB2F28494}"/>
               </a:ext>
             </a:extLst>
           </p:cNvPr>
@@ -4207,8 +4297,8 @@
         </p:nvSpPr>
         <p:spPr>
           <a:xfrm>
-            <a:off x="768150" y="1358291"/>
-            <a:ext cx="6757988" cy="704017"/>
+            <a:off x="7661449" y="2419006"/>
+            <a:ext cx="5632490" cy="704017"/>
           </a:xfrm>
           <a:prstGeom prst="rect">
             <a:avLst/>
@@ -4227,12 +4317,15 @@
               <a:buNone/>
             </a:pPr>
             <a:r>
-              <a:rPr lang="en-US" sz="4400" dirty="0" err="1">
+              <a:rPr lang="en-US" sz="4400" dirty="0">
+                <a:solidFill>
+                  <a:srgbClr val="FFFFFF"/>
+                </a:solidFill>
                 <a:latin typeface="Unbounded" pitchFamily="34" charset="0"/>
                 <a:ea typeface="Unbounded" pitchFamily="34" charset="-122"/>
                 <a:cs typeface="Unbounded" pitchFamily="34" charset="-120"/>
               </a:rPr>
-              <a:t>前台功能</a:t>
+              <a:t>後台功能：商品管理</a:t>
             </a:r>
             <a:endParaRPr lang="en-US" sz="4400" dirty="0"/>
           </a:p>
@@ -4240,10 +4333,10 @@
       </p:sp>
       <p:sp>
         <p:nvSpPr>
-          <p:cNvPr id="14" name="Text 5">
-            <a:extLst>
-              <a:ext uri="{FF2B5EF4-FFF2-40B4-BE49-F238E27FC236}">
-                <a16:creationId xmlns:a16="http://schemas.microsoft.com/office/drawing/2014/main" id="{F636048F-4C36-6D44-AA6F-5D21733034BE}"/>
+          <p:cNvPr id="15" name="Shape 1">
+            <a:extLst>
+              <a:ext uri="{FF2B5EF4-FFF2-40B4-BE49-F238E27FC236}">
+                <a16:creationId xmlns:a16="http://schemas.microsoft.com/office/drawing/2014/main" id="{A33C417B-80A3-1650-D9D1-6E4EF0A19D1E}"/>
               </a:ext>
             </a:extLst>
           </p:cNvPr>
@@ -4252,7 +4345,35 @@
         </p:nvSpPr>
         <p:spPr>
           <a:xfrm>
-            <a:off x="1011157" y="2557270"/>
+            <a:off x="7661449" y="3481996"/>
+            <a:ext cx="179427" cy="351949"/>
+          </a:xfrm>
+          <a:prstGeom prst="roundRect">
+            <a:avLst>
+              <a:gd name="adj" fmla="val 20012"/>
+            </a:avLst>
+          </a:prstGeom>
+          <a:solidFill>
+            <a:srgbClr val="304755"/>
+          </a:solidFill>
+          <a:ln/>
+        </p:spPr>
+      </p:sp>
+      <p:sp>
+        <p:nvSpPr>
+          <p:cNvPr id="16" name="Text 2">
+            <a:extLst>
+              <a:ext uri="{FF2B5EF4-FFF2-40B4-BE49-F238E27FC236}">
+                <a16:creationId xmlns:a16="http://schemas.microsoft.com/office/drawing/2014/main" id="{CA008A43-82F8-359E-FEB4-8F6DACD4D05D}"/>
+              </a:ext>
+            </a:extLst>
+          </p:cNvPr>
+          <p:cNvSpPr/>
+          <p:nvPr/>
+        </p:nvSpPr>
+        <p:spPr>
+          <a:xfrm>
+            <a:off x="8199849" y="3481996"/>
             <a:ext cx="2816185" cy="351949"/>
           </a:xfrm>
           <a:prstGeom prst="rect">
@@ -4272,11 +4393,15 @@
               <a:buNone/>
             </a:pPr>
             <a:r>
-              <a:rPr lang="zh-TW" altLang="en-US" sz="2200" dirty="0">
+              <a:rPr lang="en-US" sz="2200" dirty="0">
+                <a:solidFill>
+                  <a:srgbClr val="CAD6DE"/>
+                </a:solidFill>
                 <a:latin typeface="Unbounded" pitchFamily="34" charset="0"/>
                 <a:ea typeface="Unbounded" pitchFamily="34" charset="-122"/>
-              </a:rPr>
-              <a:t>我的收藏</a:t>
+                <a:cs typeface="Unbounded" pitchFamily="34" charset="-120"/>
+              </a:rPr>
+              <a:t>商品新增與修改</a:t>
             </a:r>
             <a:endParaRPr lang="en-US" sz="2200" dirty="0"/>
           </a:p>
@@ -4284,10 +4409,10 @@
       </p:sp>
       <p:sp>
         <p:nvSpPr>
-          <p:cNvPr id="16" name="Text 6">
-            <a:extLst>
-              <a:ext uri="{FF2B5EF4-FFF2-40B4-BE49-F238E27FC236}">
-                <a16:creationId xmlns:a16="http://schemas.microsoft.com/office/drawing/2014/main" id="{6BBFCEEE-A067-D3FE-98EA-BF5239A138DB}"/>
+          <p:cNvPr id="17" name="Shape 3">
+            <a:extLst>
+              <a:ext uri="{FF2B5EF4-FFF2-40B4-BE49-F238E27FC236}">
+                <a16:creationId xmlns:a16="http://schemas.microsoft.com/office/drawing/2014/main" id="{D62AEC18-DF97-B119-A3E5-F51E0F2CE947}"/>
               </a:ext>
             </a:extLst>
           </p:cNvPr>
@@ -4296,8 +4421,36 @@
         </p:nvSpPr>
         <p:spPr>
           <a:xfrm>
-            <a:off x="1011157" y="3052808"/>
-            <a:ext cx="3135987" cy="766048"/>
+            <a:off x="8020422" y="4073261"/>
+            <a:ext cx="179427" cy="351949"/>
+          </a:xfrm>
+          <a:prstGeom prst="roundRect">
+            <a:avLst>
+              <a:gd name="adj" fmla="val 20012"/>
+            </a:avLst>
+          </a:prstGeom>
+          <a:solidFill>
+            <a:srgbClr val="304755"/>
+          </a:solidFill>
+          <a:ln/>
+        </p:spPr>
+      </p:sp>
+      <p:sp>
+        <p:nvSpPr>
+          <p:cNvPr id="18" name="Text 4">
+            <a:extLst>
+              <a:ext uri="{FF2B5EF4-FFF2-40B4-BE49-F238E27FC236}">
+                <a16:creationId xmlns:a16="http://schemas.microsoft.com/office/drawing/2014/main" id="{88E4F750-718E-D102-AEF8-2593A6462AAD}"/>
+              </a:ext>
+            </a:extLst>
+          </p:cNvPr>
+          <p:cNvSpPr/>
+          <p:nvPr/>
+        </p:nvSpPr>
+        <p:spPr>
+          <a:xfrm>
+            <a:off x="8558823" y="4073261"/>
+            <a:ext cx="2816185" cy="351949"/>
           </a:xfrm>
           <a:prstGeom prst="rect">
             <a:avLst/>
@@ -4306,33 +4459,115 @@
           <a:ln/>
         </p:spPr>
         <p:txBody>
-          <a:bodyPr wrap="square" lIns="0" tIns="0" rIns="0" bIns="0" rtlCol="0" anchor="t"/>
-          <a:lstStyle/>
-          <a:p>
-            <a:pPr>
+          <a:bodyPr wrap="none" lIns="0" tIns="0" rIns="0" bIns="0" rtlCol="0" anchor="t"/>
+          <a:lstStyle/>
+          <a:p>
+            <a:pPr marL="0" indent="0" algn="l">
               <a:lnSpc>
-                <a:spcPts val="3000"/>
+                <a:spcPts val="2750"/>
               </a:lnSpc>
+              <a:buNone/>
             </a:pPr>
             <a:r>
-              <a:rPr lang="zh-TW" altLang="en-US" sz="1850" dirty="0">
-                <a:latin typeface="Cabin" pitchFamily="34" charset="0"/>
-                <a:ea typeface="Cabin" pitchFamily="34" charset="-122"/>
-                <a:cs typeface="Cabin" pitchFamily="34" charset="-120"/>
-              </a:rPr>
-              <a:t>收藏喜愛商品並可快速加入購物車</a:t>
-            </a:r>
-            <a:endParaRPr lang="en-US" sz="1850" dirty="0">
-              <a:latin typeface="Cabin" pitchFamily="34" charset="0"/>
-              <a:ea typeface="Cabin" pitchFamily="34" charset="-122"/>
-              <a:cs typeface="Cabin" pitchFamily="34" charset="-120"/>
-            </a:endParaRPr>
+              <a:rPr lang="en-US" sz="2200" dirty="0">
+                <a:solidFill>
+                  <a:srgbClr val="CAD6DE"/>
+                </a:solidFill>
+                <a:latin typeface="Unbounded" pitchFamily="34" charset="0"/>
+                <a:ea typeface="Unbounded" pitchFamily="34" charset="-122"/>
+                <a:cs typeface="Unbounded" pitchFamily="34" charset="-120"/>
+              </a:rPr>
+              <a:t>商品分類管理</a:t>
+            </a:r>
+            <a:endParaRPr lang="en-US" sz="2200" dirty="0"/>
+          </a:p>
+        </p:txBody>
+      </p:sp>
+      <p:sp>
+        <p:nvSpPr>
+          <p:cNvPr id="19" name="Shape 5">
+            <a:extLst>
+              <a:ext uri="{FF2B5EF4-FFF2-40B4-BE49-F238E27FC236}">
+                <a16:creationId xmlns:a16="http://schemas.microsoft.com/office/drawing/2014/main" id="{5432BDA9-4F95-67D5-BEE4-D46E966D3BBE}"/>
+              </a:ext>
+            </a:extLst>
+          </p:cNvPr>
+          <p:cNvSpPr/>
+          <p:nvPr/>
+        </p:nvSpPr>
+        <p:spPr>
+          <a:xfrm>
+            <a:off x="8379515" y="4664525"/>
+            <a:ext cx="179427" cy="351949"/>
+          </a:xfrm>
+          <a:prstGeom prst="roundRect">
+            <a:avLst>
+              <a:gd name="adj" fmla="val 20012"/>
+            </a:avLst>
+          </a:prstGeom>
+          <a:solidFill>
+            <a:srgbClr val="304755"/>
+          </a:solidFill>
+          <a:ln/>
+        </p:spPr>
+      </p:sp>
+      <p:sp>
+        <p:nvSpPr>
+          <p:cNvPr id="20" name="Text 6">
+            <a:extLst>
+              <a:ext uri="{FF2B5EF4-FFF2-40B4-BE49-F238E27FC236}">
+                <a16:creationId xmlns:a16="http://schemas.microsoft.com/office/drawing/2014/main" id="{FA5E5E96-FE36-AEC1-EAF3-180A8F4F51AC}"/>
+              </a:ext>
+            </a:extLst>
+          </p:cNvPr>
+          <p:cNvSpPr/>
+          <p:nvPr/>
+        </p:nvSpPr>
+        <p:spPr>
+          <a:xfrm>
+            <a:off x="8917915" y="4664525"/>
+            <a:ext cx="2816185" cy="351949"/>
+          </a:xfrm>
+          <a:prstGeom prst="rect">
+            <a:avLst/>
+          </a:prstGeom>
+          <a:noFill/>
+          <a:ln/>
+        </p:spPr>
+        <p:txBody>
+          <a:bodyPr wrap="none" lIns="0" tIns="0" rIns="0" bIns="0" rtlCol="0" anchor="t"/>
+          <a:lstStyle/>
+          <a:p>
+            <a:pPr marL="0" indent="0" algn="l">
+              <a:lnSpc>
+                <a:spcPts val="2750"/>
+              </a:lnSpc>
+              <a:buNone/>
+            </a:pPr>
+            <a:r>
+              <a:rPr lang="en-US" sz="2200" dirty="0">
+                <a:solidFill>
+                  <a:srgbClr val="CAD6DE"/>
+                </a:solidFill>
+                <a:latin typeface="Unbounded" pitchFamily="34" charset="0"/>
+                <a:ea typeface="Unbounded" pitchFamily="34" charset="-122"/>
+                <a:cs typeface="Unbounded" pitchFamily="34" charset="-120"/>
+              </a:rPr>
+              <a:t>圖片上傳與庫存管控</a:t>
+            </a:r>
+            <a:endParaRPr lang="en-US" sz="2200" dirty="0"/>
           </a:p>
         </p:txBody>
       </p:sp>
       <p:pic>
         <p:nvPicPr>
-          <p:cNvPr id="2" name="圖片 1"/>
+          <p:cNvPr id="3" name="圖片 2">
+            <a:extLst>
+              <a:ext uri="{FF2B5EF4-FFF2-40B4-BE49-F238E27FC236}">
+                <a16:creationId xmlns:a16="http://schemas.microsoft.com/office/drawing/2014/main" id="{245A4EB3-EB5B-68F8-A630-E9D47F19EBA3}"/>
+              </a:ext>
+            </a:extLst>
+          </p:cNvPr>
           <p:cNvPicPr>
             <a:picLocks noChangeAspect="1"/>
           </p:cNvPicPr>
@@ -4346,8 +4581,38 @@
         </p:blipFill>
         <p:spPr>
           <a:xfrm>
-            <a:off x="5020791" y="2282091"/>
-            <a:ext cx="8841459" cy="4736195"/>
+            <a:off x="129889" y="606732"/>
+            <a:ext cx="6968953" cy="3660100"/>
+          </a:xfrm>
+          <a:prstGeom prst="rect">
+            <a:avLst/>
+          </a:prstGeom>
+        </p:spPr>
+      </p:pic>
+      <p:pic>
+        <p:nvPicPr>
+          <p:cNvPr id="5" name="圖片 4">
+            <a:extLst>
+              <a:ext uri="{FF2B5EF4-FFF2-40B4-BE49-F238E27FC236}">
+                <a16:creationId xmlns:a16="http://schemas.microsoft.com/office/drawing/2014/main" id="{1DE34FE1-B474-3B95-C075-31B31709CAA9}"/>
+              </a:ext>
+            </a:extLst>
+          </p:cNvPr>
+          <p:cNvPicPr>
+            <a:picLocks noChangeAspect="1"/>
+          </p:cNvPicPr>
+          <p:nvPr/>
+        </p:nvPicPr>
+        <p:blipFill>
+          <a:blip r:embed="rId3"/>
+          <a:stretch>
+            <a:fillRect/>
+          </a:stretch>
+        </p:blipFill>
+        <p:spPr>
+          <a:xfrm>
+            <a:off x="167291" y="4425210"/>
+            <a:ext cx="6931551" cy="2277112"/>
           </a:xfrm>
           <a:prstGeom prst="rect">
             <a:avLst/>
@@ -4357,7 +4622,7 @@
     </p:spTree>
     <p:extLst>
       <p:ext uri="{BB962C8B-B14F-4D97-AF65-F5344CB8AC3E}">
-        <p14:creationId xmlns:p14="http://schemas.microsoft.com/office/powerpoint/2010/main" val="3111917034"/>
+        <p14:creationId xmlns:p14="http://schemas.microsoft.com/office/powerpoint/2010/main" val="255648532"/>
       </p:ext>
     </p:extLst>
   </p:cSld>
@@ -4370,14 +4635,6 @@
 <file path=ppt/slides/slide16.xml><?xml version="1.0" encoding="utf-8"?>
 <p:sld xmlns:a="http://schemas.openxmlformats.org/drawingml/2006/main" xmlns:r="http://schemas.openxmlformats.org/officeDocument/2006/relationships" xmlns:p="http://schemas.openxmlformats.org/presentationml/2006/main">
   <p:cSld>
-    <p:bg>
-      <p:bgPr>
-        <a:solidFill>
-          <a:schemeClr val="bg1"/>
-        </a:solidFill>
-        <a:effectLst/>
-      </p:bgPr>
-    </p:bg>
     <p:spTree>
       <p:nvGrpSpPr>
         <p:cNvPr id="1" name=""/>
@@ -4394,10 +4651,10 @@
       </p:grpSpPr>
       <p:sp>
         <p:nvSpPr>
-          <p:cNvPr id="3" name="Text 0">
-            <a:extLst>
-              <a:ext uri="{FF2B5EF4-FFF2-40B4-BE49-F238E27FC236}">
-                <a16:creationId xmlns:a16="http://schemas.microsoft.com/office/drawing/2014/main" id="{8BF2A6AB-1F7E-9633-389D-D723B15A9392}"/>
+          <p:cNvPr id="14" name="Text 0">
+            <a:extLst>
+              <a:ext uri="{FF2B5EF4-FFF2-40B4-BE49-F238E27FC236}">
+                <a16:creationId xmlns:a16="http://schemas.microsoft.com/office/drawing/2014/main" id="{3BB6AD06-1FAD-E83C-8A0F-5E1DB2F28494}"/>
               </a:ext>
             </a:extLst>
           </p:cNvPr>
@@ -4406,8 +4663,8 @@
         </p:nvSpPr>
         <p:spPr>
           <a:xfrm>
-            <a:off x="768150" y="1358291"/>
-            <a:ext cx="6757988" cy="704017"/>
+            <a:off x="7661449" y="2419006"/>
+            <a:ext cx="5632490" cy="704017"/>
           </a:xfrm>
           <a:prstGeom prst="rect">
             <a:avLst/>
@@ -4427,11 +4684,36 @@
             </a:pPr>
             <a:r>
               <a:rPr lang="en-US" sz="4400" dirty="0" err="1">
+                <a:solidFill>
+                  <a:srgbClr val="FFFFFF"/>
+                </a:solidFill>
                 <a:latin typeface="Unbounded" pitchFamily="34" charset="0"/>
                 <a:ea typeface="Unbounded" pitchFamily="34" charset="-122"/>
                 <a:cs typeface="Unbounded" pitchFamily="34" charset="-120"/>
               </a:rPr>
-              <a:t>前台功能</a:t>
+              <a:t>後台功能</a:t>
+            </a:r>
+            <a:r>
+              <a:rPr lang="en-US" sz="4400" dirty="0">
+                <a:solidFill>
+                  <a:srgbClr val="FFFFFF"/>
+                </a:solidFill>
+                <a:latin typeface="Unbounded" pitchFamily="34" charset="0"/>
+                <a:ea typeface="Unbounded" pitchFamily="34" charset="-122"/>
+                <a:cs typeface="Unbounded" pitchFamily="34" charset="-120"/>
+              </a:rPr>
+              <a:t>：</a:t>
+            </a:r>
+            <a:r>
+              <a:rPr lang="zh-TW" altLang="en-US" sz="4400" dirty="0">
+                <a:solidFill>
+                  <a:srgbClr val="FFFFFF"/>
+                </a:solidFill>
+                <a:latin typeface="Unbounded" pitchFamily="34" charset="0"/>
+                <a:ea typeface="Unbounded" pitchFamily="34" charset="-122"/>
+                <a:cs typeface="Unbounded" pitchFamily="34" charset="-120"/>
+              </a:rPr>
+              <a:t>評論管理</a:t>
             </a:r>
             <a:endParaRPr lang="en-US" sz="4400" dirty="0"/>
           </a:p>
@@ -4439,10 +4721,10 @@
       </p:sp>
       <p:sp>
         <p:nvSpPr>
-          <p:cNvPr id="14" name="Text 5">
-            <a:extLst>
-              <a:ext uri="{FF2B5EF4-FFF2-40B4-BE49-F238E27FC236}">
-                <a16:creationId xmlns:a16="http://schemas.microsoft.com/office/drawing/2014/main" id="{F636048F-4C36-6D44-AA6F-5D21733034BE}"/>
+          <p:cNvPr id="15" name="Shape 1">
+            <a:extLst>
+              <a:ext uri="{FF2B5EF4-FFF2-40B4-BE49-F238E27FC236}">
+                <a16:creationId xmlns:a16="http://schemas.microsoft.com/office/drawing/2014/main" id="{A33C417B-80A3-1650-D9D1-6E4EF0A19D1E}"/>
               </a:ext>
             </a:extLst>
           </p:cNvPr>
@@ -4451,7 +4733,35 @@
         </p:nvSpPr>
         <p:spPr>
           <a:xfrm>
-            <a:off x="1058912" y="2493624"/>
+            <a:off x="7661449" y="3481996"/>
+            <a:ext cx="179427" cy="351949"/>
+          </a:xfrm>
+          <a:prstGeom prst="roundRect">
+            <a:avLst>
+              <a:gd name="adj" fmla="val 20012"/>
+            </a:avLst>
+          </a:prstGeom>
+          <a:solidFill>
+            <a:srgbClr val="304755"/>
+          </a:solidFill>
+          <a:ln/>
+        </p:spPr>
+      </p:sp>
+      <p:sp>
+        <p:nvSpPr>
+          <p:cNvPr id="16" name="Text 2">
+            <a:extLst>
+              <a:ext uri="{FF2B5EF4-FFF2-40B4-BE49-F238E27FC236}">
+                <a16:creationId xmlns:a16="http://schemas.microsoft.com/office/drawing/2014/main" id="{CA008A43-82F8-359E-FEB4-8F6DACD4D05D}"/>
+              </a:ext>
+            </a:extLst>
+          </p:cNvPr>
+          <p:cNvSpPr/>
+          <p:nvPr/>
+        </p:nvSpPr>
+        <p:spPr>
+          <a:xfrm>
+            <a:off x="8199849" y="3481996"/>
             <a:ext cx="2816185" cy="351949"/>
           </a:xfrm>
           <a:prstGeom prst="rect">
@@ -4464,19 +4774,137 @@
           <a:bodyPr wrap="none" lIns="0" tIns="0" rIns="0" bIns="0" rtlCol="0" anchor="t"/>
           <a:lstStyle/>
           <a:p>
-            <a:pPr>
+            <a:pPr marL="0" indent="0" algn="l">
               <a:lnSpc>
                 <a:spcPts val="2750"/>
               </a:lnSpc>
+              <a:buNone/>
             </a:pPr>
             <a:r>
               <a:rPr lang="zh-TW" altLang="en-US" sz="2200" dirty="0">
+                <a:solidFill>
+                  <a:srgbClr val="CAD6DE"/>
+                </a:solidFill>
                 <a:latin typeface="Unbounded" pitchFamily="34" charset="0"/>
                 <a:ea typeface="Unbounded" pitchFamily="34" charset="-122"/>
               </a:rPr>
-              <a:t>商品管理</a:t>
+              <a:t>可以審核評論</a:t>
+            </a:r>
+            <a:endParaRPr lang="en-US" sz="2200" dirty="0"/>
+          </a:p>
+        </p:txBody>
+      </p:sp>
+      <p:sp>
+        <p:nvSpPr>
+          <p:cNvPr id="17" name="Shape 3">
+            <a:extLst>
+              <a:ext uri="{FF2B5EF4-FFF2-40B4-BE49-F238E27FC236}">
+                <a16:creationId xmlns:a16="http://schemas.microsoft.com/office/drawing/2014/main" id="{D62AEC18-DF97-B119-A3E5-F51E0F2CE947}"/>
+              </a:ext>
+            </a:extLst>
+          </p:cNvPr>
+          <p:cNvSpPr/>
+          <p:nvPr/>
+        </p:nvSpPr>
+        <p:spPr>
+          <a:xfrm>
+            <a:off x="8020422" y="4073261"/>
+            <a:ext cx="179427" cy="351949"/>
+          </a:xfrm>
+          <a:prstGeom prst="roundRect">
+            <a:avLst>
+              <a:gd name="adj" fmla="val 20012"/>
+            </a:avLst>
+          </a:prstGeom>
+          <a:solidFill>
+            <a:srgbClr val="304755"/>
+          </a:solidFill>
+          <a:ln/>
+        </p:spPr>
+      </p:sp>
+      <p:sp>
+        <p:nvSpPr>
+          <p:cNvPr id="18" name="Text 4">
+            <a:extLst>
+              <a:ext uri="{FF2B5EF4-FFF2-40B4-BE49-F238E27FC236}">
+                <a16:creationId xmlns:a16="http://schemas.microsoft.com/office/drawing/2014/main" id="{88E4F750-718E-D102-AEF8-2593A6462AAD}"/>
+              </a:ext>
+            </a:extLst>
+          </p:cNvPr>
+          <p:cNvSpPr/>
+          <p:nvPr/>
+        </p:nvSpPr>
+        <p:spPr>
+          <a:xfrm>
+            <a:off x="8558823" y="4073261"/>
+            <a:ext cx="2816185" cy="351949"/>
+          </a:xfrm>
+          <a:prstGeom prst="rect">
+            <a:avLst/>
+          </a:prstGeom>
+          <a:noFill/>
+          <a:ln/>
+        </p:spPr>
+        <p:txBody>
+          <a:bodyPr wrap="none" lIns="0" tIns="0" rIns="0" bIns="0" rtlCol="0" anchor="t"/>
+          <a:lstStyle/>
+          <a:p>
+            <a:pPr marL="0" indent="0" algn="l">
+              <a:lnSpc>
+                <a:spcPts val="2750"/>
+              </a:lnSpc>
+              <a:buNone/>
+            </a:pPr>
+            <a:r>
+              <a:rPr lang="zh-TW" altLang="en-US" sz="2200" dirty="0">
+                <a:solidFill>
+                  <a:srgbClr val="CAD6DE"/>
+                </a:solidFill>
+                <a:latin typeface="Unbounded" pitchFamily="34" charset="0"/>
+              </a:rPr>
+              <a:t>可以執行</a:t>
+            </a:r>
+            <a:r>
+              <a:rPr lang="en-US" altLang="zh-TW" sz="2200" dirty="0">
+                <a:solidFill>
+                  <a:srgbClr val="CAD6DE"/>
+                </a:solidFill>
+                <a:latin typeface="Unbounded" pitchFamily="34" charset="0"/>
+                <a:ea typeface="Unbounded" pitchFamily="34" charset="-122"/>
+              </a:rPr>
+              <a:t>AI</a:t>
+            </a:r>
+            <a:r>
+              <a:rPr lang="zh-TW" altLang="en-US" sz="2200" dirty="0">
+                <a:solidFill>
+                  <a:srgbClr val="CAD6DE"/>
+                </a:solidFill>
+                <a:latin typeface="Unbounded" pitchFamily="34" charset="0"/>
+              </a:rPr>
+              <a:t>審核 </a:t>
+            </a:r>
+            <a:r>
+              <a:rPr lang="en-US" altLang="zh-TW" sz="2200" dirty="0" err="1">
+                <a:solidFill>
+                  <a:srgbClr val="CAD6DE"/>
+                </a:solidFill>
+                <a:latin typeface="Unbounded" pitchFamily="34" charset="0"/>
+              </a:rPr>
+              <a:t>Ollama</a:t>
+            </a:r>
+            <a:r>
+              <a:rPr lang="en-US" altLang="zh-TW" sz="2200" dirty="0">
+                <a:solidFill>
+                  <a:srgbClr val="CAD6DE"/>
+                </a:solidFill>
+                <a:latin typeface="Unbounded" pitchFamily="34" charset="0"/>
+              </a:rPr>
+              <a:t> model:Qwen2:</a:t>
             </a:r>
             <a:endParaRPr lang="en-US" sz="2200" dirty="0">
+              <a:solidFill>
+                <a:srgbClr val="CAD6DE"/>
+              </a:solidFill>
               <a:latin typeface="Unbounded" pitchFamily="34" charset="0"/>
               <a:ea typeface="Unbounded" pitchFamily="34" charset="-122"/>
             </a:endParaRPr>
@@ -4485,10 +4913,10 @@
       </p:sp>
       <p:sp>
         <p:nvSpPr>
-          <p:cNvPr id="16" name="Text 6">
-            <a:extLst>
-              <a:ext uri="{FF2B5EF4-FFF2-40B4-BE49-F238E27FC236}">
-                <a16:creationId xmlns:a16="http://schemas.microsoft.com/office/drawing/2014/main" id="{6BBFCEEE-A067-D3FE-98EA-BF5239A138DB}"/>
+          <p:cNvPr id="19" name="Shape 5">
+            <a:extLst>
+              <a:ext uri="{FF2B5EF4-FFF2-40B4-BE49-F238E27FC236}">
+                <a16:creationId xmlns:a16="http://schemas.microsoft.com/office/drawing/2014/main" id="{5432BDA9-4F95-67D5-BEE4-D46E966D3BBE}"/>
               </a:ext>
             </a:extLst>
           </p:cNvPr>
@@ -4497,8 +4925,36 @@
         </p:nvSpPr>
         <p:spPr>
           <a:xfrm>
-            <a:off x="1058912" y="2989162"/>
-            <a:ext cx="3135987" cy="766048"/>
+            <a:off x="8379515" y="4664525"/>
+            <a:ext cx="179427" cy="351949"/>
+          </a:xfrm>
+          <a:prstGeom prst="roundRect">
+            <a:avLst>
+              <a:gd name="adj" fmla="val 20012"/>
+            </a:avLst>
+          </a:prstGeom>
+          <a:solidFill>
+            <a:srgbClr val="304755"/>
+          </a:solidFill>
+          <a:ln/>
+        </p:spPr>
+      </p:sp>
+      <p:sp>
+        <p:nvSpPr>
+          <p:cNvPr id="20" name="Text 6">
+            <a:extLst>
+              <a:ext uri="{FF2B5EF4-FFF2-40B4-BE49-F238E27FC236}">
+                <a16:creationId xmlns:a16="http://schemas.microsoft.com/office/drawing/2014/main" id="{FA5E5E96-FE36-AEC1-EAF3-180A8F4F51AC}"/>
+              </a:ext>
+            </a:extLst>
+          </p:cNvPr>
+          <p:cNvSpPr/>
+          <p:nvPr/>
+        </p:nvSpPr>
+        <p:spPr>
+          <a:xfrm>
+            <a:off x="8917915" y="4664525"/>
+            <a:ext cx="2816185" cy="351949"/>
           </a:xfrm>
           <a:prstGeom prst="rect">
             <a:avLst/>
@@ -4507,22 +4963,25 @@
           <a:ln/>
         </p:spPr>
         <p:txBody>
-          <a:bodyPr wrap="square" lIns="0" tIns="0" rIns="0" bIns="0" rtlCol="0" anchor="t"/>
-          <a:lstStyle/>
-          <a:p>
-            <a:pPr>
+          <a:bodyPr wrap="none" lIns="0" tIns="0" rIns="0" bIns="0" rtlCol="0" anchor="t"/>
+          <a:lstStyle/>
+          <a:p>
+            <a:pPr marL="0" indent="0" algn="l">
               <a:lnSpc>
-                <a:spcPts val="3000"/>
+                <a:spcPts val="2750"/>
               </a:lnSpc>
+              <a:buNone/>
             </a:pPr>
-            <a:endParaRPr lang="en-US" sz="1850" dirty="0">
-              <a:solidFill>
-                <a:srgbClr val="CAD6DE"/>
-              </a:solidFill>
-              <a:latin typeface="Cabin" pitchFamily="34" charset="0"/>
-              <a:ea typeface="Cabin" pitchFamily="34" charset="-122"/>
-              <a:cs typeface="Cabin" pitchFamily="34" charset="-120"/>
-            </a:endParaRPr>
+            <a:r>
+              <a:rPr lang="zh-TW" altLang="en-US" sz="2200" dirty="0">
+                <a:solidFill>
+                  <a:srgbClr val="CAD6DE"/>
+                </a:solidFill>
+                <a:latin typeface="Unbounded" pitchFamily="34" charset="0"/>
+              </a:rPr>
+              <a:t>可以刪除評論</a:t>
+            </a:r>
+            <a:endParaRPr lang="en-US" sz="2200" dirty="0"/>
           </a:p>
         </p:txBody>
       </p:sp>
@@ -4531,7 +4990,7 @@
           <p:cNvPr id="4" name="圖片 3">
             <a:extLst>
               <a:ext uri="{FF2B5EF4-FFF2-40B4-BE49-F238E27FC236}">
-                <a16:creationId xmlns:a16="http://schemas.microsoft.com/office/drawing/2014/main" id="{F735A40E-0876-DC19-B29D-55756CC9AF94}"/>
+                <a16:creationId xmlns:a16="http://schemas.microsoft.com/office/drawing/2014/main" id="{17CA52FB-2274-2148-F61E-5924170DA93A}"/>
               </a:ext>
             </a:extLst>
           </p:cNvPr>
@@ -4548,86 +5007,8 @@
         </p:blipFill>
         <p:spPr>
           <a:xfrm>
-            <a:off x="6038153" y="246229"/>
-            <a:ext cx="8109361" cy="3944432"/>
-          </a:xfrm>
-          <a:prstGeom prst="rect">
-            <a:avLst/>
-          </a:prstGeom>
-        </p:spPr>
-      </p:pic>
-      <p:sp>
-        <p:nvSpPr>
-          <p:cNvPr id="8" name="Text 6">
-            <a:extLst>
-              <a:ext uri="{FF2B5EF4-FFF2-40B4-BE49-F238E27FC236}">
-                <a16:creationId xmlns:a16="http://schemas.microsoft.com/office/drawing/2014/main" id="{1D5B5560-1CFB-0EF1-820B-C009AD3E3EBE}"/>
-              </a:ext>
-            </a:extLst>
-          </p:cNvPr>
-          <p:cNvSpPr/>
-          <p:nvPr/>
-        </p:nvSpPr>
-        <p:spPr>
-          <a:xfrm>
-            <a:off x="1058912" y="2911318"/>
-            <a:ext cx="3135987" cy="766048"/>
-          </a:xfrm>
-          <a:prstGeom prst="rect">
-            <a:avLst/>
-          </a:prstGeom>
-          <a:noFill/>
-          <a:ln/>
-        </p:spPr>
-        <p:txBody>
-          <a:bodyPr wrap="square" lIns="0" tIns="0" rIns="0" bIns="0" rtlCol="0" anchor="t"/>
-          <a:lstStyle/>
-          <a:p>
-            <a:pPr>
-              <a:lnSpc>
-                <a:spcPts val="3000"/>
-              </a:lnSpc>
-            </a:pPr>
-            <a:r>
-              <a:rPr lang="zh-TW" altLang="en-US" sz="1850" dirty="0">
-                <a:latin typeface="Cabin" pitchFamily="34" charset="0"/>
-                <a:ea typeface="Cabin" pitchFamily="34" charset="-122"/>
-                <a:cs typeface="Cabin" pitchFamily="34" charset="-120"/>
-              </a:rPr>
-              <a:t>可以查看新增上架，和一定程度的編輯商品</a:t>
-            </a:r>
-            <a:endParaRPr lang="en-US" sz="1850" dirty="0">
-              <a:latin typeface="Cabin" pitchFamily="34" charset="0"/>
-              <a:ea typeface="Cabin" pitchFamily="34" charset="-122"/>
-              <a:cs typeface="Cabin" pitchFamily="34" charset="-120"/>
-            </a:endParaRPr>
-          </a:p>
-        </p:txBody>
-      </p:sp>
-      <p:pic>
-        <p:nvPicPr>
-          <p:cNvPr id="10" name="圖片 9">
-            <a:extLst>
-              <a:ext uri="{FF2B5EF4-FFF2-40B4-BE49-F238E27FC236}">
-                <a16:creationId xmlns:a16="http://schemas.microsoft.com/office/drawing/2014/main" id="{57022927-96D9-CD30-5601-FA1CCBE4BA89}"/>
-              </a:ext>
-            </a:extLst>
-          </p:cNvPr>
-          <p:cNvPicPr>
-            <a:picLocks noChangeAspect="1"/>
-          </p:cNvPicPr>
-          <p:nvPr/>
-        </p:nvPicPr>
-        <p:blipFill>
-          <a:blip r:embed="rId3"/>
-          <a:stretch>
-            <a:fillRect/>
-          </a:stretch>
-        </p:blipFill>
-        <p:spPr>
-          <a:xfrm>
-            <a:off x="815905" y="4270937"/>
-            <a:ext cx="6316825" cy="3810668"/>
+            <a:off x="88135" y="3362882"/>
+            <a:ext cx="7487917" cy="2124655"/>
           </a:xfrm>
           <a:prstGeom prst="rect">
             <a:avLst/>
@@ -4637,7 +5018,7 @@
     </p:spTree>
     <p:extLst>
       <p:ext uri="{BB962C8B-B14F-4D97-AF65-F5344CB8AC3E}">
-        <p14:creationId xmlns:p14="http://schemas.microsoft.com/office/powerpoint/2010/main" val="3303974127"/>
+        <p14:creationId xmlns:p14="http://schemas.microsoft.com/office/powerpoint/2010/main" val="1361672668"/>
       </p:ext>
     </p:extLst>
   </p:cSld>
@@ -4666,10 +5047,10 @@
       </p:grpSpPr>
       <p:sp>
         <p:nvSpPr>
-          <p:cNvPr id="14" name="Text 0">
-            <a:extLst>
-              <a:ext uri="{FF2B5EF4-FFF2-40B4-BE49-F238E27FC236}">
-                <a16:creationId xmlns:a16="http://schemas.microsoft.com/office/drawing/2014/main" id="{3BB6AD06-1FAD-E83C-8A0F-5E1DB2F28494}"/>
+          <p:cNvPr id="2" name="Text 0">
+            <a:extLst>
+              <a:ext uri="{FF2B5EF4-FFF2-40B4-BE49-F238E27FC236}">
+                <a16:creationId xmlns:a16="http://schemas.microsoft.com/office/drawing/2014/main" id="{FF282119-4EA9-A517-DBDB-E3E85B403388}"/>
               </a:ext>
             </a:extLst>
           </p:cNvPr>
@@ -4678,7 +5059,7 @@
         </p:nvSpPr>
         <p:spPr>
           <a:xfrm>
-            <a:off x="7661449" y="2419006"/>
+            <a:off x="837724" y="1070833"/>
             <a:ext cx="5632490" cy="704017"/>
           </a:xfrm>
           <a:prstGeom prst="rect">
@@ -4706,7 +5087,7 @@
                 <a:ea typeface="Unbounded" pitchFamily="34" charset="-122"/>
                 <a:cs typeface="Unbounded" pitchFamily="34" charset="-120"/>
               </a:rPr>
-              <a:t>後台功能：商品管理</a:t>
+              <a:t>後台功能：訂單管理</a:t>
             </a:r>
             <a:endParaRPr lang="en-US" sz="4400" dirty="0"/>
           </a:p>
@@ -4714,10 +5095,10 @@
       </p:sp>
       <p:sp>
         <p:nvSpPr>
-          <p:cNvPr id="15" name="Shape 1">
-            <a:extLst>
-              <a:ext uri="{FF2B5EF4-FFF2-40B4-BE49-F238E27FC236}">
-                <a16:creationId xmlns:a16="http://schemas.microsoft.com/office/drawing/2014/main" id="{A33C417B-80A3-1650-D9D1-6E4EF0A19D1E}"/>
+          <p:cNvPr id="3" name="Text 1">
+            <a:extLst>
+              <a:ext uri="{FF2B5EF4-FFF2-40B4-BE49-F238E27FC236}">
+                <a16:creationId xmlns:a16="http://schemas.microsoft.com/office/drawing/2014/main" id="{193BF335-732B-06E6-28AD-60684F263D36}"/>
               </a:ext>
             </a:extLst>
           </p:cNvPr>
@@ -4726,35 +5107,7 @@
         </p:nvSpPr>
         <p:spPr>
           <a:xfrm>
-            <a:off x="7661449" y="3481996"/>
-            <a:ext cx="179427" cy="351949"/>
-          </a:xfrm>
-          <a:prstGeom prst="roundRect">
-            <a:avLst>
-              <a:gd name="adj" fmla="val 20012"/>
-            </a:avLst>
-          </a:prstGeom>
-          <a:solidFill>
-            <a:srgbClr val="304755"/>
-          </a:solidFill>
-          <a:ln/>
-        </p:spPr>
-      </p:sp>
-      <p:sp>
-        <p:nvSpPr>
-          <p:cNvPr id="16" name="Text 2">
-            <a:extLst>
-              <a:ext uri="{FF2B5EF4-FFF2-40B4-BE49-F238E27FC236}">
-                <a16:creationId xmlns:a16="http://schemas.microsoft.com/office/drawing/2014/main" id="{CA008A43-82F8-359E-FEB4-8F6DACD4D05D}"/>
-              </a:ext>
-            </a:extLst>
-          </p:cNvPr>
-          <p:cNvSpPr/>
-          <p:nvPr/>
-        </p:nvSpPr>
-        <p:spPr>
-          <a:xfrm>
-            <a:off x="8199849" y="3481996"/>
+            <a:off x="919917" y="2157382"/>
             <a:ext cx="2816185" cy="351949"/>
           </a:xfrm>
           <a:prstGeom prst="rect">
@@ -4776,13 +5129,13 @@
             <a:r>
               <a:rPr lang="en-US" sz="2200" dirty="0">
                 <a:solidFill>
-                  <a:srgbClr val="CAD6DE"/>
+                  <a:srgbClr val="FFFFFF"/>
                 </a:solidFill>
                 <a:latin typeface="Unbounded" pitchFamily="34" charset="0"/>
                 <a:ea typeface="Unbounded" pitchFamily="34" charset="-122"/>
                 <a:cs typeface="Unbounded" pitchFamily="34" charset="-120"/>
               </a:rPr>
-              <a:t>商品新增與修改</a:t>
+              <a:t>訂單查看</a:t>
             </a:r>
             <a:endParaRPr lang="en-US" sz="2200" dirty="0"/>
           </a:p>
@@ -4790,10 +5143,10 @@
       </p:sp>
       <p:sp>
         <p:nvSpPr>
-          <p:cNvPr id="17" name="Shape 3">
-            <a:extLst>
-              <a:ext uri="{FF2B5EF4-FFF2-40B4-BE49-F238E27FC236}">
-                <a16:creationId xmlns:a16="http://schemas.microsoft.com/office/drawing/2014/main" id="{D62AEC18-DF97-B119-A3E5-F51E0F2CE947}"/>
+          <p:cNvPr id="4" name="Text 2">
+            <a:extLst>
+              <a:ext uri="{FF2B5EF4-FFF2-40B4-BE49-F238E27FC236}">
+                <a16:creationId xmlns:a16="http://schemas.microsoft.com/office/drawing/2014/main" id="{CC12874B-9579-9660-A9EA-0418C27E7014}"/>
               </a:ext>
             </a:extLst>
           </p:cNvPr>
@@ -4802,36 +5155,8 @@
         </p:nvSpPr>
         <p:spPr>
           <a:xfrm>
-            <a:off x="8020422" y="4073261"/>
-            <a:ext cx="179427" cy="351949"/>
-          </a:xfrm>
-          <a:prstGeom prst="roundRect">
-            <a:avLst>
-              <a:gd name="adj" fmla="val 20012"/>
-            </a:avLst>
-          </a:prstGeom>
-          <a:solidFill>
-            <a:srgbClr val="304755"/>
-          </a:solidFill>
-          <a:ln/>
-        </p:spPr>
-      </p:sp>
-      <p:sp>
-        <p:nvSpPr>
-          <p:cNvPr id="18" name="Text 4">
-            <a:extLst>
-              <a:ext uri="{FF2B5EF4-FFF2-40B4-BE49-F238E27FC236}">
-                <a16:creationId xmlns:a16="http://schemas.microsoft.com/office/drawing/2014/main" id="{88E4F750-718E-D102-AEF8-2593A6462AAD}"/>
-              </a:ext>
-            </a:extLst>
-          </p:cNvPr>
-          <p:cNvSpPr/>
-          <p:nvPr/>
-        </p:nvSpPr>
-        <p:spPr>
-          <a:xfrm>
-            <a:off x="8558823" y="4073261"/>
-            <a:ext cx="2816185" cy="351949"/>
+            <a:off x="919917" y="2748646"/>
+            <a:ext cx="3928586" cy="383024"/>
           </a:xfrm>
           <a:prstGeom prst="rect">
             <a:avLst/>
@@ -4845,107 +5170,31 @@
           <a:p>
             <a:pPr marL="0" indent="0" algn="l">
               <a:lnSpc>
-                <a:spcPts val="2750"/>
+                <a:spcPts val="3000"/>
               </a:lnSpc>
               <a:buNone/>
             </a:pPr>
             <a:r>
-              <a:rPr lang="en-US" sz="2200" dirty="0">
+              <a:rPr lang="en-US" sz="1850" dirty="0">
                 <a:solidFill>
                   <a:srgbClr val="CAD6DE"/>
                 </a:solidFill>
-                <a:latin typeface="Unbounded" pitchFamily="34" charset="0"/>
-                <a:ea typeface="Unbounded" pitchFamily="34" charset="-122"/>
-                <a:cs typeface="Unbounded" pitchFamily="34" charset="-120"/>
-              </a:rPr>
-              <a:t>商品分類管理</a:t>
-            </a:r>
-            <a:endParaRPr lang="en-US" sz="2200" dirty="0"/>
-          </a:p>
-        </p:txBody>
-      </p:sp>
-      <p:sp>
-        <p:nvSpPr>
-          <p:cNvPr id="19" name="Shape 5">
-            <a:extLst>
-              <a:ext uri="{FF2B5EF4-FFF2-40B4-BE49-F238E27FC236}">
-                <a16:creationId xmlns:a16="http://schemas.microsoft.com/office/drawing/2014/main" id="{5432BDA9-4F95-67D5-BEE4-D46E966D3BBE}"/>
-              </a:ext>
-            </a:extLst>
-          </p:cNvPr>
-          <p:cNvSpPr/>
-          <p:nvPr/>
-        </p:nvSpPr>
-        <p:spPr>
-          <a:xfrm>
-            <a:off x="8379515" y="4664525"/>
-            <a:ext cx="179427" cy="351949"/>
-          </a:xfrm>
-          <a:prstGeom prst="roundRect">
-            <a:avLst>
-              <a:gd name="adj" fmla="val 20012"/>
-            </a:avLst>
-          </a:prstGeom>
-          <a:solidFill>
-            <a:srgbClr val="304755"/>
-          </a:solidFill>
-          <a:ln/>
-        </p:spPr>
-      </p:sp>
-      <p:sp>
-        <p:nvSpPr>
-          <p:cNvPr id="20" name="Text 6">
-            <a:extLst>
-              <a:ext uri="{FF2B5EF4-FFF2-40B4-BE49-F238E27FC236}">
-                <a16:creationId xmlns:a16="http://schemas.microsoft.com/office/drawing/2014/main" id="{FA5E5E96-FE36-AEC1-EAF3-180A8F4F51AC}"/>
-              </a:ext>
-            </a:extLst>
-          </p:cNvPr>
-          <p:cNvSpPr/>
-          <p:nvPr/>
-        </p:nvSpPr>
-        <p:spPr>
-          <a:xfrm>
-            <a:off x="8917915" y="4664525"/>
-            <a:ext cx="2816185" cy="351949"/>
-          </a:xfrm>
-          <a:prstGeom prst="rect">
-            <a:avLst/>
-          </a:prstGeom>
-          <a:noFill/>
-          <a:ln/>
-        </p:spPr>
-        <p:txBody>
-          <a:bodyPr wrap="none" lIns="0" tIns="0" rIns="0" bIns="0" rtlCol="0" anchor="t"/>
-          <a:lstStyle/>
-          <a:p>
-            <a:pPr marL="0" indent="0" algn="l">
-              <a:lnSpc>
-                <a:spcPts val="2750"/>
-              </a:lnSpc>
-              <a:buNone/>
-            </a:pPr>
-            <a:r>
-              <a:rPr lang="en-US" sz="2200" dirty="0">
-                <a:solidFill>
-                  <a:srgbClr val="CAD6DE"/>
-                </a:solidFill>
-                <a:latin typeface="Unbounded" pitchFamily="34" charset="0"/>
-                <a:ea typeface="Unbounded" pitchFamily="34" charset="-122"/>
-                <a:cs typeface="Unbounded" pitchFamily="34" charset="-120"/>
-              </a:rPr>
-              <a:t>圖片上傳與庫存管控</a:t>
-            </a:r>
-            <a:endParaRPr lang="en-US" sz="2200" dirty="0"/>
+                <a:latin typeface="Cabin" pitchFamily="34" charset="0"/>
+                <a:ea typeface="Cabin" pitchFamily="34" charset="-122"/>
+                <a:cs typeface="Cabin" pitchFamily="34" charset="-120"/>
+              </a:rPr>
+              <a:t>查看詳細訂單與列表資訊</a:t>
+            </a:r>
+            <a:endParaRPr lang="en-US" sz="1850" dirty="0"/>
           </a:p>
         </p:txBody>
       </p:sp>
       <p:pic>
         <p:nvPicPr>
-          <p:cNvPr id="3" name="圖片 2">
-            <a:extLst>
-              <a:ext uri="{FF2B5EF4-FFF2-40B4-BE49-F238E27FC236}">
-                <a16:creationId xmlns:a16="http://schemas.microsoft.com/office/drawing/2014/main" id="{245A4EB3-EB5B-68F8-A630-E9D47F19EBA3}"/>
+          <p:cNvPr id="12" name="圖片 11">
+            <a:extLst>
+              <a:ext uri="{FF2B5EF4-FFF2-40B4-BE49-F238E27FC236}">
+                <a16:creationId xmlns:a16="http://schemas.microsoft.com/office/drawing/2014/main" id="{213555AF-4D65-7AFC-2214-CF047D6380C1}"/>
               </a:ext>
             </a:extLst>
           </p:cNvPr>
@@ -4962,8 +5211,8 @@
         </p:blipFill>
         <p:spPr>
           <a:xfrm>
-            <a:off x="129889" y="606732"/>
-            <a:ext cx="6968953" cy="3660100"/>
+            <a:off x="6126502" y="418394"/>
+            <a:ext cx="8134029" cy="3829924"/>
           </a:xfrm>
           <a:prstGeom prst="rect">
             <a:avLst/>
@@ -4972,10 +5221,10 @@
       </p:pic>
       <p:pic>
         <p:nvPicPr>
-          <p:cNvPr id="5" name="圖片 4">
-            <a:extLst>
-              <a:ext uri="{FF2B5EF4-FFF2-40B4-BE49-F238E27FC236}">
-                <a16:creationId xmlns:a16="http://schemas.microsoft.com/office/drawing/2014/main" id="{1DE34FE1-B474-3B95-C075-31B31709CAA9}"/>
+          <p:cNvPr id="14" name="圖片 13">
+            <a:extLst>
+              <a:ext uri="{FF2B5EF4-FFF2-40B4-BE49-F238E27FC236}">
+                <a16:creationId xmlns:a16="http://schemas.microsoft.com/office/drawing/2014/main" id="{46776221-BA84-4D2B-182B-2C953FB561A7}"/>
               </a:ext>
             </a:extLst>
           </p:cNvPr>
@@ -4992,8 +5241,8 @@
         </p:blipFill>
         <p:spPr>
           <a:xfrm>
-            <a:off x="167291" y="4425210"/>
-            <a:ext cx="6931551" cy="2277112"/>
+            <a:off x="860083" y="3370985"/>
+            <a:ext cx="4615626" cy="4695898"/>
           </a:xfrm>
           <a:prstGeom prst="rect">
             <a:avLst/>
@@ -5003,7 +5252,7 @@
     </p:spTree>
     <p:extLst>
       <p:ext uri="{BB962C8B-B14F-4D97-AF65-F5344CB8AC3E}">
-        <p14:creationId xmlns:p14="http://schemas.microsoft.com/office/powerpoint/2010/main" val="255648532"/>
+        <p14:creationId xmlns:p14="http://schemas.microsoft.com/office/powerpoint/2010/main" val="3010883950"/>
       </p:ext>
     </p:extLst>
   </p:cSld>
@@ -5032,10 +5281,10 @@
       </p:grpSpPr>
       <p:sp>
         <p:nvSpPr>
-          <p:cNvPr id="14" name="Text 0">
-            <a:extLst>
-              <a:ext uri="{FF2B5EF4-FFF2-40B4-BE49-F238E27FC236}">
-                <a16:creationId xmlns:a16="http://schemas.microsoft.com/office/drawing/2014/main" id="{3BB6AD06-1FAD-E83C-8A0F-5E1DB2F28494}"/>
+          <p:cNvPr id="3" name="Text 0">
+            <a:extLst>
+              <a:ext uri="{FF2B5EF4-FFF2-40B4-BE49-F238E27FC236}">
+                <a16:creationId xmlns:a16="http://schemas.microsoft.com/office/drawing/2014/main" id="{A2FB9310-4B85-E2EC-BA0D-8C555808BCA1}"/>
               </a:ext>
             </a:extLst>
           </p:cNvPr>
@@ -5044,7 +5293,7 @@
         </p:nvSpPr>
         <p:spPr>
           <a:xfrm>
-            <a:off x="7661449" y="2419006"/>
+            <a:off x="6324124" y="2106454"/>
             <a:ext cx="5632490" cy="704017"/>
           </a:xfrm>
           <a:prstGeom prst="rect">
@@ -5063,17 +5312,6 @@
               </a:lnSpc>
               <a:buNone/>
             </a:pPr>
-            <a:r>
-              <a:rPr lang="en-US" sz="4400" dirty="0" err="1">
-                <a:solidFill>
-                  <a:srgbClr val="FFFFFF"/>
-                </a:solidFill>
-                <a:latin typeface="Unbounded" pitchFamily="34" charset="0"/>
-                <a:ea typeface="Unbounded" pitchFamily="34" charset="-122"/>
-                <a:cs typeface="Unbounded" pitchFamily="34" charset="-120"/>
-              </a:rPr>
-              <a:t>後台功能</a:t>
-            </a:r>
             <a:r>
               <a:rPr lang="en-US" sz="4400" dirty="0">
                 <a:solidFill>
@@ -5083,18 +5321,7 @@
                 <a:ea typeface="Unbounded" pitchFamily="34" charset="-122"/>
                 <a:cs typeface="Unbounded" pitchFamily="34" charset="-120"/>
               </a:rPr>
-              <a:t>：</a:t>
-            </a:r>
-            <a:r>
-              <a:rPr lang="zh-TW" altLang="en-US" sz="4400" dirty="0">
-                <a:solidFill>
-                  <a:srgbClr val="FFFFFF"/>
-                </a:solidFill>
-                <a:latin typeface="Unbounded" pitchFamily="34" charset="0"/>
-                <a:ea typeface="Unbounded" pitchFamily="34" charset="-122"/>
-                <a:cs typeface="Unbounded" pitchFamily="34" charset="-120"/>
-              </a:rPr>
-              <a:t>評論管理</a:t>
+              <a:t>後台功能：使用者管理</a:t>
             </a:r>
             <a:endParaRPr lang="en-US" sz="4400" dirty="0"/>
           </a:p>
@@ -5102,10 +5329,10 @@
       </p:sp>
       <p:sp>
         <p:nvSpPr>
-          <p:cNvPr id="15" name="Shape 1">
-            <a:extLst>
-              <a:ext uri="{FF2B5EF4-FFF2-40B4-BE49-F238E27FC236}">
-                <a16:creationId xmlns:a16="http://schemas.microsoft.com/office/drawing/2014/main" id="{A33C417B-80A3-1650-D9D1-6E4EF0A19D1E}"/>
+          <p:cNvPr id="4" name="Shape 1">
+            <a:extLst>
+              <a:ext uri="{FF2B5EF4-FFF2-40B4-BE49-F238E27FC236}">
+                <a16:creationId xmlns:a16="http://schemas.microsoft.com/office/drawing/2014/main" id="{BFE1C90B-B77A-517E-C76E-CEA973336C09}"/>
               </a:ext>
             </a:extLst>
           </p:cNvPr>
@@ -5114,12 +5341,12 @@
         </p:nvSpPr>
         <p:spPr>
           <a:xfrm>
-            <a:off x="7661449" y="3481996"/>
-            <a:ext cx="179427" cy="351949"/>
+            <a:off x="6324124" y="3169444"/>
+            <a:ext cx="3614618" cy="1357193"/>
           </a:xfrm>
           <a:prstGeom prst="roundRect">
             <a:avLst>
-              <a:gd name="adj" fmla="val 20012"/>
+              <a:gd name="adj" fmla="val 2646"/>
             </a:avLst>
           </a:prstGeom>
           <a:solidFill>
@@ -5130,10 +5357,10 @@
       </p:sp>
       <p:sp>
         <p:nvSpPr>
-          <p:cNvPr id="16" name="Text 2">
-            <a:extLst>
-              <a:ext uri="{FF2B5EF4-FFF2-40B4-BE49-F238E27FC236}">
-                <a16:creationId xmlns:a16="http://schemas.microsoft.com/office/drawing/2014/main" id="{CA008A43-82F8-359E-FEB4-8F6DACD4D05D}"/>
+          <p:cNvPr id="5" name="Text 2">
+            <a:extLst>
+              <a:ext uri="{FF2B5EF4-FFF2-40B4-BE49-F238E27FC236}">
+                <a16:creationId xmlns:a16="http://schemas.microsoft.com/office/drawing/2014/main" id="{648DA8B2-7BF2-2D26-5396-989491B30F15}"/>
               </a:ext>
             </a:extLst>
           </p:cNvPr>
@@ -5142,7 +5369,7 @@
         </p:nvSpPr>
         <p:spPr>
           <a:xfrm>
-            <a:off x="8199849" y="3481996"/>
+            <a:off x="6563439" y="3408759"/>
             <a:ext cx="2816185" cy="351949"/>
           </a:xfrm>
           <a:prstGeom prst="rect">
@@ -5162,14 +5389,15 @@
               <a:buNone/>
             </a:pPr>
             <a:r>
-              <a:rPr lang="zh-TW" altLang="en-US" sz="2200" dirty="0">
+              <a:rPr lang="en-US" sz="2200" dirty="0">
                 <a:solidFill>
                   <a:srgbClr val="CAD6DE"/>
                 </a:solidFill>
                 <a:latin typeface="Unbounded" pitchFamily="34" charset="0"/>
                 <a:ea typeface="Unbounded" pitchFamily="34" charset="-122"/>
-              </a:rPr>
-              <a:t>可以審核評論</a:t>
+                <a:cs typeface="Unbounded" pitchFamily="34" charset="-120"/>
+              </a:rPr>
+              <a:t>用戶資料管理</a:t>
             </a:r>
             <a:endParaRPr lang="en-US" sz="2200" dirty="0"/>
           </a:p>
@@ -5177,10 +5405,10 @@
       </p:sp>
       <p:sp>
         <p:nvSpPr>
-          <p:cNvPr id="17" name="Shape 3">
-            <a:extLst>
-              <a:ext uri="{FF2B5EF4-FFF2-40B4-BE49-F238E27FC236}">
-                <a16:creationId xmlns:a16="http://schemas.microsoft.com/office/drawing/2014/main" id="{D62AEC18-DF97-B119-A3E5-F51E0F2CE947}"/>
+          <p:cNvPr id="6" name="Text 3">
+            <a:extLst>
+              <a:ext uri="{FF2B5EF4-FFF2-40B4-BE49-F238E27FC236}">
+                <a16:creationId xmlns:a16="http://schemas.microsoft.com/office/drawing/2014/main" id="{B95CB391-9D5A-148C-C8B0-56E4F14A860F}"/>
               </a:ext>
             </a:extLst>
           </p:cNvPr>
@@ -5189,12 +5417,58 @@
         </p:nvSpPr>
         <p:spPr>
           <a:xfrm>
-            <a:off x="8020422" y="4073261"/>
-            <a:ext cx="179427" cy="351949"/>
+            <a:off x="6563439" y="3904297"/>
+            <a:ext cx="3135987" cy="383024"/>
+          </a:xfrm>
+          <a:prstGeom prst="rect">
+            <a:avLst/>
+          </a:prstGeom>
+          <a:noFill/>
+          <a:ln/>
+        </p:spPr>
+        <p:txBody>
+          <a:bodyPr wrap="none" lIns="0" tIns="0" rIns="0" bIns="0" rtlCol="0" anchor="t"/>
+          <a:lstStyle/>
+          <a:p>
+            <a:pPr marL="0" indent="0" algn="l">
+              <a:lnSpc>
+                <a:spcPts val="3000"/>
+              </a:lnSpc>
+              <a:buNone/>
+            </a:pPr>
+            <a:r>
+              <a:rPr lang="zh-TW" altLang="en-US" sz="1850" dirty="0">
+                <a:solidFill>
+                  <a:srgbClr val="CAD6DE"/>
+                </a:solidFill>
+                <a:latin typeface="Cabin" pitchFamily="34" charset="0"/>
+              </a:rPr>
+              <a:t>重設密碼</a:t>
+            </a:r>
+            <a:endParaRPr lang="en-US" sz="1850" dirty="0"/>
+          </a:p>
+        </p:txBody>
+      </p:sp>
+      <p:sp>
+        <p:nvSpPr>
+          <p:cNvPr id="7" name="Shape 4">
+            <a:extLst>
+              <a:ext uri="{FF2B5EF4-FFF2-40B4-BE49-F238E27FC236}">
+                <a16:creationId xmlns:a16="http://schemas.microsoft.com/office/drawing/2014/main" id="{8EDE9A02-B88A-90EB-1C23-EC94FE552F1D}"/>
+              </a:ext>
+            </a:extLst>
+          </p:cNvPr>
+          <p:cNvSpPr/>
+          <p:nvPr/>
+        </p:nvSpPr>
+        <p:spPr>
+          <a:xfrm>
+            <a:off x="10178058" y="3169444"/>
+            <a:ext cx="3614618" cy="1357193"/>
           </a:xfrm>
           <a:prstGeom prst="roundRect">
             <a:avLst>
-              <a:gd name="adj" fmla="val 20012"/>
+              <a:gd name="adj" fmla="val 2646"/>
             </a:avLst>
           </a:prstGeom>
           <a:solidFill>
@@ -5205,10 +5479,10 @@
       </p:sp>
       <p:sp>
         <p:nvSpPr>
-          <p:cNvPr id="18" name="Text 4">
-            <a:extLst>
-              <a:ext uri="{FF2B5EF4-FFF2-40B4-BE49-F238E27FC236}">
-                <a16:creationId xmlns:a16="http://schemas.microsoft.com/office/drawing/2014/main" id="{88E4F750-718E-D102-AEF8-2593A6462AAD}"/>
+          <p:cNvPr id="8" name="Text 5">
+            <a:extLst>
+              <a:ext uri="{FF2B5EF4-FFF2-40B4-BE49-F238E27FC236}">
+                <a16:creationId xmlns:a16="http://schemas.microsoft.com/office/drawing/2014/main" id="{074E5190-BE68-FDE7-D4A0-DCD24C488AE1}"/>
               </a:ext>
             </a:extLst>
           </p:cNvPr>
@@ -5217,7 +5491,7 @@
         </p:nvSpPr>
         <p:spPr>
           <a:xfrm>
-            <a:off x="8558823" y="4073261"/>
+            <a:off x="10417373" y="3408759"/>
             <a:ext cx="2816185" cy="351949"/>
           </a:xfrm>
           <a:prstGeom prst="rect">
@@ -5237,141 +5511,198 @@
               <a:buNone/>
             </a:pPr>
             <a:r>
-              <a:rPr lang="zh-TW" altLang="en-US" sz="2200" dirty="0">
-                <a:solidFill>
-                  <a:srgbClr val="CAD6DE"/>
-                </a:solidFill>
-                <a:latin typeface="Unbounded" pitchFamily="34" charset="0"/>
-              </a:rPr>
-              <a:t>可以執行</a:t>
-            </a:r>
-            <a:r>
-              <a:rPr lang="en-US" altLang="zh-TW" sz="2200" dirty="0">
+              <a:rPr lang="en-US" sz="2200" dirty="0">
                 <a:solidFill>
                   <a:srgbClr val="CAD6DE"/>
                 </a:solidFill>
                 <a:latin typeface="Unbounded" pitchFamily="34" charset="0"/>
                 <a:ea typeface="Unbounded" pitchFamily="34" charset="-122"/>
-              </a:rPr>
-              <a:t>AI</a:t>
-            </a:r>
-            <a:r>
-              <a:rPr lang="zh-TW" altLang="en-US" sz="2200" dirty="0">
+                <a:cs typeface="Unbounded" pitchFamily="34" charset="-120"/>
+              </a:rPr>
+              <a:t>權限設定</a:t>
+            </a:r>
+            <a:endParaRPr lang="en-US" sz="2200" dirty="0"/>
+          </a:p>
+        </p:txBody>
+      </p:sp>
+      <p:sp>
+        <p:nvSpPr>
+          <p:cNvPr id="9" name="Text 6">
+            <a:extLst>
+              <a:ext uri="{FF2B5EF4-FFF2-40B4-BE49-F238E27FC236}">
+                <a16:creationId xmlns:a16="http://schemas.microsoft.com/office/drawing/2014/main" id="{2FFF72BB-F1B7-B254-8443-418CD9DEB1B8}"/>
+              </a:ext>
+            </a:extLst>
+          </p:cNvPr>
+          <p:cNvSpPr/>
+          <p:nvPr/>
+        </p:nvSpPr>
+        <p:spPr>
+          <a:xfrm>
+            <a:off x="10417373" y="3904297"/>
+            <a:ext cx="3135987" cy="383024"/>
+          </a:xfrm>
+          <a:prstGeom prst="rect">
+            <a:avLst/>
+          </a:prstGeom>
+          <a:noFill/>
+          <a:ln/>
+        </p:spPr>
+        <p:txBody>
+          <a:bodyPr wrap="none" lIns="0" tIns="0" rIns="0" bIns="0" rtlCol="0" anchor="t"/>
+          <a:lstStyle/>
+          <a:p>
+            <a:pPr marL="0" indent="0" algn="l">
+              <a:lnSpc>
+                <a:spcPts val="3000"/>
+              </a:lnSpc>
+              <a:buNone/>
+            </a:pPr>
+            <a:r>
+              <a:rPr lang="en-US" sz="1850" dirty="0">
+                <a:solidFill>
+                  <a:srgbClr val="CAD6DE"/>
+                </a:solidFill>
+                <a:latin typeface="Cabin" pitchFamily="34" charset="0"/>
+                <a:ea typeface="Cabin" pitchFamily="34" charset="-122"/>
+                <a:cs typeface="Cabin" pitchFamily="34" charset="-120"/>
+              </a:rPr>
+              <a:t>區分買家、賣家與管理員角色</a:t>
+            </a:r>
+            <a:endParaRPr lang="en-US" sz="1850" dirty="0"/>
+          </a:p>
+        </p:txBody>
+      </p:sp>
+      <p:sp>
+        <p:nvSpPr>
+          <p:cNvPr id="10" name="Shape 7">
+            <a:extLst>
+              <a:ext uri="{FF2B5EF4-FFF2-40B4-BE49-F238E27FC236}">
+                <a16:creationId xmlns:a16="http://schemas.microsoft.com/office/drawing/2014/main" id="{76C3A99A-72AD-E257-54EB-021DC6901740}"/>
+              </a:ext>
+            </a:extLst>
+          </p:cNvPr>
+          <p:cNvSpPr/>
+          <p:nvPr/>
+        </p:nvSpPr>
+        <p:spPr>
+          <a:xfrm>
+            <a:off x="6324124" y="4765953"/>
+            <a:ext cx="7468553" cy="1357193"/>
+          </a:xfrm>
+          <a:prstGeom prst="roundRect">
+            <a:avLst>
+              <a:gd name="adj" fmla="val 2646"/>
+            </a:avLst>
+          </a:prstGeom>
+          <a:solidFill>
+            <a:srgbClr val="304755"/>
+          </a:solidFill>
+          <a:ln/>
+        </p:spPr>
+      </p:sp>
+      <p:sp>
+        <p:nvSpPr>
+          <p:cNvPr id="11" name="Text 8">
+            <a:extLst>
+              <a:ext uri="{FF2B5EF4-FFF2-40B4-BE49-F238E27FC236}">
+                <a16:creationId xmlns:a16="http://schemas.microsoft.com/office/drawing/2014/main" id="{14EA59F5-94EC-671B-BA64-C9589F1B13C9}"/>
+              </a:ext>
+            </a:extLst>
+          </p:cNvPr>
+          <p:cNvSpPr/>
+          <p:nvPr/>
+        </p:nvSpPr>
+        <p:spPr>
+          <a:xfrm>
+            <a:off x="6563439" y="5005268"/>
+            <a:ext cx="2816185" cy="351949"/>
+          </a:xfrm>
+          <a:prstGeom prst="rect">
+            <a:avLst/>
+          </a:prstGeom>
+          <a:noFill/>
+          <a:ln/>
+        </p:spPr>
+        <p:txBody>
+          <a:bodyPr wrap="none" lIns="0" tIns="0" rIns="0" bIns="0" rtlCol="0" anchor="t"/>
+          <a:lstStyle/>
+          <a:p>
+            <a:pPr marL="0" indent="0" algn="l">
+              <a:lnSpc>
+                <a:spcPts val="2750"/>
+              </a:lnSpc>
+              <a:buNone/>
+            </a:pPr>
+            <a:r>
+              <a:rPr lang="en-US" sz="2200" dirty="0">
                 <a:solidFill>
                   <a:srgbClr val="CAD6DE"/>
                 </a:solidFill>
                 <a:latin typeface="Unbounded" pitchFamily="34" charset="0"/>
-              </a:rPr>
-              <a:t>審核 </a:t>
-            </a:r>
-            <a:r>
-              <a:rPr lang="en-US" altLang="zh-TW" sz="2200" dirty="0" err="1">
+                <a:ea typeface="Unbounded" pitchFamily="34" charset="-122"/>
+                <a:cs typeface="Unbounded" pitchFamily="34" charset="-120"/>
+              </a:rPr>
+              <a:t>封鎖與解鎖</a:t>
+            </a:r>
+            <a:endParaRPr lang="en-US" sz="2200" dirty="0"/>
+          </a:p>
+        </p:txBody>
+      </p:sp>
+      <p:sp>
+        <p:nvSpPr>
+          <p:cNvPr id="12" name="Text 9">
+            <a:extLst>
+              <a:ext uri="{FF2B5EF4-FFF2-40B4-BE49-F238E27FC236}">
+                <a16:creationId xmlns:a16="http://schemas.microsoft.com/office/drawing/2014/main" id="{A05DA9B1-DE03-EB76-D4AD-0087996F857A}"/>
+              </a:ext>
+            </a:extLst>
+          </p:cNvPr>
+          <p:cNvSpPr/>
+          <p:nvPr/>
+        </p:nvSpPr>
+        <p:spPr>
+          <a:xfrm>
+            <a:off x="6563439" y="5500807"/>
+            <a:ext cx="6989921" cy="383024"/>
+          </a:xfrm>
+          <a:prstGeom prst="rect">
+            <a:avLst/>
+          </a:prstGeom>
+          <a:noFill/>
+          <a:ln/>
+        </p:spPr>
+        <p:txBody>
+          <a:bodyPr wrap="none" lIns="0" tIns="0" rIns="0" bIns="0" rtlCol="0" anchor="t"/>
+          <a:lstStyle/>
+          <a:p>
+            <a:pPr marL="0" indent="0" algn="l">
+              <a:lnSpc>
+                <a:spcPts val="3000"/>
+              </a:lnSpc>
+              <a:buNone/>
+            </a:pPr>
+            <a:r>
+              <a:rPr lang="en-US" sz="1850" dirty="0">
                 <a:solidFill>
                   <a:srgbClr val="CAD6DE"/>
                 </a:solidFill>
-                <a:latin typeface="Unbounded" pitchFamily="34" charset="0"/>
-              </a:rPr>
-              <a:t>Ollama</a:t>
-            </a:r>
-            <a:r>
-              <a:rPr lang="en-US" altLang="zh-TW" sz="2200" dirty="0">
-                <a:solidFill>
-                  <a:srgbClr val="CAD6DE"/>
-                </a:solidFill>
-                <a:latin typeface="Unbounded" pitchFamily="34" charset="0"/>
-              </a:rPr>
-              <a:t> model:Qwen2:</a:t>
-            </a:r>
-            <a:endParaRPr lang="en-US" sz="2200" dirty="0">
-              <a:solidFill>
-                <a:srgbClr val="CAD6DE"/>
-              </a:solidFill>
-              <a:latin typeface="Unbounded" pitchFamily="34" charset="0"/>
-              <a:ea typeface="Unbounded" pitchFamily="34" charset="-122"/>
-            </a:endParaRPr>
-          </a:p>
-        </p:txBody>
-      </p:sp>
-      <p:sp>
-        <p:nvSpPr>
-          <p:cNvPr id="19" name="Shape 5">
-            <a:extLst>
-              <a:ext uri="{FF2B5EF4-FFF2-40B4-BE49-F238E27FC236}">
-                <a16:creationId xmlns:a16="http://schemas.microsoft.com/office/drawing/2014/main" id="{5432BDA9-4F95-67D5-BEE4-D46E966D3BBE}"/>
-              </a:ext>
-            </a:extLst>
-          </p:cNvPr>
-          <p:cNvSpPr/>
-          <p:nvPr/>
-        </p:nvSpPr>
-        <p:spPr>
-          <a:xfrm>
-            <a:off x="8379515" y="4664525"/>
-            <a:ext cx="179427" cy="351949"/>
-          </a:xfrm>
-          <a:prstGeom prst="roundRect">
-            <a:avLst>
-              <a:gd name="adj" fmla="val 20012"/>
-            </a:avLst>
-          </a:prstGeom>
-          <a:solidFill>
-            <a:srgbClr val="304755"/>
-          </a:solidFill>
-          <a:ln/>
-        </p:spPr>
-      </p:sp>
-      <p:sp>
-        <p:nvSpPr>
-          <p:cNvPr id="20" name="Text 6">
-            <a:extLst>
-              <a:ext uri="{FF2B5EF4-FFF2-40B4-BE49-F238E27FC236}">
-                <a16:creationId xmlns:a16="http://schemas.microsoft.com/office/drawing/2014/main" id="{FA5E5E96-FE36-AEC1-EAF3-180A8F4F51AC}"/>
-              </a:ext>
-            </a:extLst>
-          </p:cNvPr>
-          <p:cNvSpPr/>
-          <p:nvPr/>
-        </p:nvSpPr>
-        <p:spPr>
-          <a:xfrm>
-            <a:off x="8917915" y="4664525"/>
-            <a:ext cx="2816185" cy="351949"/>
-          </a:xfrm>
-          <a:prstGeom prst="rect">
-            <a:avLst/>
-          </a:prstGeom>
-          <a:noFill/>
-          <a:ln/>
-        </p:spPr>
-        <p:txBody>
-          <a:bodyPr wrap="none" lIns="0" tIns="0" rIns="0" bIns="0" rtlCol="0" anchor="t"/>
-          <a:lstStyle/>
-          <a:p>
-            <a:pPr marL="0" indent="0" algn="l">
-              <a:lnSpc>
-                <a:spcPts val="2750"/>
-              </a:lnSpc>
-              <a:buNone/>
-            </a:pPr>
-            <a:r>
-              <a:rPr lang="zh-TW" altLang="en-US" sz="2200" dirty="0">
-                <a:solidFill>
-                  <a:srgbClr val="CAD6DE"/>
-                </a:solidFill>
-                <a:latin typeface="Unbounded" pitchFamily="34" charset="0"/>
-              </a:rPr>
-              <a:t>可以刪除評論</a:t>
-            </a:r>
-            <a:endParaRPr lang="en-US" sz="2200" dirty="0"/>
+                <a:latin typeface="Cabin" pitchFamily="34" charset="0"/>
+                <a:ea typeface="Cabin" pitchFamily="34" charset="-122"/>
+                <a:cs typeface="Cabin" pitchFamily="34" charset="-120"/>
+              </a:rPr>
+              <a:t>管理使用者存取權限</a:t>
+            </a:r>
+            <a:endParaRPr lang="en-US" sz="1850" dirty="0"/>
           </a:p>
         </p:txBody>
       </p:sp>
       <p:pic>
         <p:nvPicPr>
-          <p:cNvPr id="4" name="圖片 3">
-            <a:extLst>
-              <a:ext uri="{FF2B5EF4-FFF2-40B4-BE49-F238E27FC236}">
-                <a16:creationId xmlns:a16="http://schemas.microsoft.com/office/drawing/2014/main" id="{17CA52FB-2274-2148-F61E-5924170DA93A}"/>
+          <p:cNvPr id="16" name="圖片 15">
+            <a:extLst>
+              <a:ext uri="{FF2B5EF4-FFF2-40B4-BE49-F238E27FC236}">
+                <a16:creationId xmlns:a16="http://schemas.microsoft.com/office/drawing/2014/main" id="{2726CE08-A13E-4BC1-EB98-B377DB1F2D38}"/>
               </a:ext>
             </a:extLst>
           </p:cNvPr>
@@ -5388,8 +5719,8 @@
         </p:blipFill>
         <p:spPr>
           <a:xfrm>
-            <a:off x="88135" y="3362882"/>
-            <a:ext cx="7487917" cy="2124655"/>
+            <a:off x="45786" y="748943"/>
+            <a:ext cx="6219778" cy="7076755"/>
           </a:xfrm>
           <a:prstGeom prst="rect">
             <a:avLst/>
@@ -5399,7 +5730,7 @@
     </p:spTree>
     <p:extLst>
       <p:ext uri="{BB962C8B-B14F-4D97-AF65-F5344CB8AC3E}">
-        <p14:creationId xmlns:p14="http://schemas.microsoft.com/office/powerpoint/2010/main" val="1361672668"/>
+        <p14:creationId xmlns:p14="http://schemas.microsoft.com/office/powerpoint/2010/main" val="383383206"/>
       </p:ext>
     </p:extLst>
   </p:cSld>
@@ -5428,10 +5759,10 @@
       </p:grpSpPr>
       <p:sp>
         <p:nvSpPr>
-          <p:cNvPr id="2" name="Text 0">
-            <a:extLst>
-              <a:ext uri="{FF2B5EF4-FFF2-40B4-BE49-F238E27FC236}">
-                <a16:creationId xmlns:a16="http://schemas.microsoft.com/office/drawing/2014/main" id="{FF282119-4EA9-A517-DBDB-E3E85B403388}"/>
+          <p:cNvPr id="3" name="Text 0">
+            <a:extLst>
+              <a:ext uri="{FF2B5EF4-FFF2-40B4-BE49-F238E27FC236}">
+                <a16:creationId xmlns:a16="http://schemas.microsoft.com/office/drawing/2014/main" id="{8A25FD04-881C-3EC3-752C-F41973696412}"/>
               </a:ext>
             </a:extLst>
           </p:cNvPr>
@@ -5440,8 +5771,8 @@
         </p:nvSpPr>
         <p:spPr>
           <a:xfrm>
-            <a:off x="837724" y="1070833"/>
-            <a:ext cx="5632490" cy="704017"/>
+            <a:off x="837724" y="1839516"/>
+            <a:ext cx="7468553" cy="1408033"/>
           </a:xfrm>
           <a:prstGeom prst="rect">
             <a:avLst/>
@@ -5450,7 +5781,7 @@
           <a:ln/>
         </p:spPr>
         <p:txBody>
-          <a:bodyPr wrap="none" lIns="0" tIns="0" rIns="0" bIns="0" rtlCol="0" anchor="t"/>
+          <a:bodyPr wrap="square" lIns="0" tIns="0" rIns="0" bIns="0" rtlCol="0" anchor="t"/>
           <a:lstStyle/>
           <a:p>
             <a:pPr marL="0" indent="0" algn="l">
@@ -5468,7 +5799,7 @@
                 <a:ea typeface="Unbounded" pitchFamily="34" charset="-122"/>
                 <a:cs typeface="Unbounded" pitchFamily="34" charset="-120"/>
               </a:rPr>
-              <a:t>後台功能：訂單管理</a:t>
+              <a:t>後台功能：推薦系統與搜尋紀錄</a:t>
             </a:r>
             <a:endParaRPr lang="en-US" sz="4400" dirty="0"/>
           </a:p>
@@ -5476,10 +5807,10 @@
       </p:sp>
       <p:sp>
         <p:nvSpPr>
-          <p:cNvPr id="3" name="Text 1">
-            <a:extLst>
-              <a:ext uri="{FF2B5EF4-FFF2-40B4-BE49-F238E27FC236}">
-                <a16:creationId xmlns:a16="http://schemas.microsoft.com/office/drawing/2014/main" id="{193BF335-732B-06E6-28AD-60684F263D36}"/>
+          <p:cNvPr id="4" name="Shape 1">
+            <a:extLst>
+              <a:ext uri="{FF2B5EF4-FFF2-40B4-BE49-F238E27FC236}">
+                <a16:creationId xmlns:a16="http://schemas.microsoft.com/office/drawing/2014/main" id="{BC43B4AB-2C8F-7BA6-EFEB-70BDEF76B4C0}"/>
               </a:ext>
             </a:extLst>
           </p:cNvPr>
@@ -5488,8 +5819,84 @@
         </p:nvSpPr>
         <p:spPr>
           <a:xfrm>
-            <a:off x="919917" y="2157382"/>
-            <a:ext cx="2816185" cy="351949"/>
+            <a:off x="837724" y="3606522"/>
+            <a:ext cx="538520" cy="538520"/>
+          </a:xfrm>
+          <a:prstGeom prst="roundRect">
+            <a:avLst>
+              <a:gd name="adj" fmla="val 6668"/>
+            </a:avLst>
+          </a:prstGeom>
+          <a:solidFill>
+            <a:srgbClr val="304755"/>
+          </a:solidFill>
+          <a:ln/>
+        </p:spPr>
+      </p:sp>
+      <p:sp>
+        <p:nvSpPr>
+          <p:cNvPr id="5" name="Text 2">
+            <a:extLst>
+              <a:ext uri="{FF2B5EF4-FFF2-40B4-BE49-F238E27FC236}">
+                <a16:creationId xmlns:a16="http://schemas.microsoft.com/office/drawing/2014/main" id="{D378F7F5-789B-2AF5-0F61-F8E4EC130904}"/>
+              </a:ext>
+            </a:extLst>
+          </p:cNvPr>
+          <p:cNvSpPr/>
+          <p:nvPr/>
+        </p:nvSpPr>
+        <p:spPr>
+          <a:xfrm>
+            <a:off x="937974" y="3664506"/>
+            <a:ext cx="337899" cy="422434"/>
+          </a:xfrm>
+          <a:prstGeom prst="rect">
+            <a:avLst/>
+          </a:prstGeom>
+          <a:noFill/>
+          <a:ln/>
+        </p:spPr>
+        <p:txBody>
+          <a:bodyPr wrap="none" lIns="0" tIns="0" rIns="0" bIns="0" rtlCol="0" anchor="t"/>
+          <a:lstStyle/>
+          <a:p>
+            <a:pPr marL="0" indent="0" algn="ctr">
+              <a:lnSpc>
+                <a:spcPts val="2650"/>
+              </a:lnSpc>
+              <a:buNone/>
+            </a:pPr>
+            <a:r>
+              <a:rPr lang="en-US" sz="2650" dirty="0">
+                <a:solidFill>
+                  <a:srgbClr val="CAD6DE"/>
+                </a:solidFill>
+                <a:latin typeface="Unbounded" pitchFamily="34" charset="0"/>
+                <a:ea typeface="Unbounded" pitchFamily="34" charset="-122"/>
+                <a:cs typeface="Unbounded" pitchFamily="34" charset="-120"/>
+              </a:rPr>
+              <a:t>1</a:t>
+            </a:r>
+            <a:endParaRPr lang="en-US" sz="2650" dirty="0"/>
+          </a:p>
+        </p:txBody>
+      </p:sp>
+      <p:sp>
+        <p:nvSpPr>
+          <p:cNvPr id="6" name="Text 3">
+            <a:extLst>
+              <a:ext uri="{FF2B5EF4-FFF2-40B4-BE49-F238E27FC236}">
+                <a16:creationId xmlns:a16="http://schemas.microsoft.com/office/drawing/2014/main" id="{93B8F347-6623-DEB1-0AC6-0F75889CC9EA}"/>
+              </a:ext>
+            </a:extLst>
+          </p:cNvPr>
+          <p:cNvSpPr/>
+          <p:nvPr/>
+        </p:nvSpPr>
+        <p:spPr>
+          <a:xfrm>
+            <a:off x="1615559" y="3688794"/>
+            <a:ext cx="2806898" cy="351949"/>
           </a:xfrm>
           <a:prstGeom prst="rect">
             <a:avLst/>
@@ -5510,13 +5917,13 @@
             <a:r>
               <a:rPr lang="en-US" sz="2200" dirty="0">
                 <a:solidFill>
-                  <a:srgbClr val="FFFFFF"/>
+                  <a:srgbClr val="CAD6DE"/>
                 </a:solidFill>
                 <a:latin typeface="Unbounded" pitchFamily="34" charset="0"/>
                 <a:ea typeface="Unbounded" pitchFamily="34" charset="-122"/>
                 <a:cs typeface="Unbounded" pitchFamily="34" charset="-120"/>
               </a:rPr>
-              <a:t>訂單查看</a:t>
+              <a:t>推薦商品管理</a:t>
             </a:r>
             <a:endParaRPr lang="en-US" sz="2200" dirty="0"/>
           </a:p>
@@ -5524,10 +5931,10 @@
       </p:sp>
       <p:sp>
         <p:nvSpPr>
-          <p:cNvPr id="4" name="Text 2">
-            <a:extLst>
-              <a:ext uri="{FF2B5EF4-FFF2-40B4-BE49-F238E27FC236}">
-                <a16:creationId xmlns:a16="http://schemas.microsoft.com/office/drawing/2014/main" id="{CC12874B-9579-9660-A9EA-0418C27E7014}"/>
+          <p:cNvPr id="7" name="Text 4">
+            <a:extLst>
+              <a:ext uri="{FF2B5EF4-FFF2-40B4-BE49-F238E27FC236}">
+                <a16:creationId xmlns:a16="http://schemas.microsoft.com/office/drawing/2014/main" id="{B39BACA9-D0BB-DFEA-0D21-CA26FA0C691B}"/>
               </a:ext>
             </a:extLst>
           </p:cNvPr>
@@ -5536,8 +5943,8 @@
         </p:nvSpPr>
         <p:spPr>
           <a:xfrm>
-            <a:off x="919917" y="2748646"/>
-            <a:ext cx="3928586" cy="383024"/>
+            <a:off x="1615559" y="4184332"/>
+            <a:ext cx="2806898" cy="383024"/>
           </a:xfrm>
           <a:prstGeom prst="rect">
             <a:avLst/>
@@ -5556,7 +5963,7 @@
               <a:buNone/>
             </a:pPr>
             <a:r>
-              <a:rPr lang="en-US" sz="1850" dirty="0">
+              <a:rPr lang="en-US" sz="1850" dirty="0" err="1">
                 <a:solidFill>
                   <a:srgbClr val="CAD6DE"/>
                 </a:solidFill>
@@ -5564,7 +5971,7 @@
                 <a:ea typeface="Cabin" pitchFamily="34" charset="-122"/>
                 <a:cs typeface="Cabin" pitchFamily="34" charset="-120"/>
               </a:rPr>
-              <a:t>查看詳細訂單與列表資訊</a:t>
+              <a:t>設定熱門商品</a:t>
             </a:r>
             <a:endParaRPr lang="en-US" sz="1850" dirty="0"/>
           </a:p>
@@ -5572,10 +5979,10 @@
       </p:sp>
       <p:pic>
         <p:nvPicPr>
-          <p:cNvPr id="12" name="圖片 11">
-            <a:extLst>
-              <a:ext uri="{FF2B5EF4-FFF2-40B4-BE49-F238E27FC236}">
-                <a16:creationId xmlns:a16="http://schemas.microsoft.com/office/drawing/2014/main" id="{213555AF-4D65-7AFC-2214-CF047D6380C1}"/>
+          <p:cNvPr id="17" name="圖片 16">
+            <a:extLst>
+              <a:ext uri="{FF2B5EF4-FFF2-40B4-BE49-F238E27FC236}">
+                <a16:creationId xmlns:a16="http://schemas.microsoft.com/office/drawing/2014/main" id="{C35EDF63-141E-87D5-5A28-F52B8647EB9F}"/>
               </a:ext>
             </a:extLst>
           </p:cNvPr>
@@ -5592,38 +5999,8 @@
         </p:blipFill>
         <p:spPr>
           <a:xfrm>
-            <a:off x="6126502" y="418394"/>
-            <a:ext cx="8134029" cy="3829924"/>
-          </a:xfrm>
-          <a:prstGeom prst="rect">
-            <a:avLst/>
-          </a:prstGeom>
-        </p:spPr>
-      </p:pic>
-      <p:pic>
-        <p:nvPicPr>
-          <p:cNvPr id="14" name="圖片 13">
-            <a:extLst>
-              <a:ext uri="{FF2B5EF4-FFF2-40B4-BE49-F238E27FC236}">
-                <a16:creationId xmlns:a16="http://schemas.microsoft.com/office/drawing/2014/main" id="{46776221-BA84-4D2B-182B-2C953FB561A7}"/>
-              </a:ext>
-            </a:extLst>
-          </p:cNvPr>
-          <p:cNvPicPr>
-            <a:picLocks noChangeAspect="1"/>
-          </p:cNvPicPr>
-          <p:nvPr/>
-        </p:nvPicPr>
-        <p:blipFill>
-          <a:blip r:embed="rId3"/>
-          <a:stretch>
-            <a:fillRect/>
-          </a:stretch>
-        </p:blipFill>
-        <p:spPr>
-          <a:xfrm>
-            <a:off x="860083" y="3370985"/>
-            <a:ext cx="4615626" cy="4695898"/>
+            <a:off x="4836433" y="2770086"/>
+            <a:ext cx="9559515" cy="2541313"/>
           </a:xfrm>
           <a:prstGeom prst="rect">
             <a:avLst/>
@@ -5633,7 +6010,7 @@
     </p:spTree>
     <p:extLst>
       <p:ext uri="{BB962C8B-B14F-4D97-AF65-F5344CB8AC3E}">
-        <p14:creationId xmlns:p14="http://schemas.microsoft.com/office/powerpoint/2010/main" val="3010883950"/>
+        <p14:creationId xmlns:p14="http://schemas.microsoft.com/office/powerpoint/2010/main" val="1975342029"/>
       </p:ext>
     </p:extLst>
   </p:cSld>
@@ -6023,764 +6400,6 @@
 </file>
 
 <file path=ppt/slides/slide20.xml><?xml version="1.0" encoding="utf-8"?>
-<p:sld xmlns:a="http://schemas.openxmlformats.org/drawingml/2006/main" xmlns:r="http://schemas.openxmlformats.org/officeDocument/2006/relationships" xmlns:p="http://schemas.openxmlformats.org/presentationml/2006/main">
-  <p:cSld>
-    <p:spTree>
-      <p:nvGrpSpPr>
-        <p:cNvPr id="1" name=""/>
-        <p:cNvGrpSpPr/>
-        <p:nvPr/>
-      </p:nvGrpSpPr>
-      <p:grpSpPr>
-        <a:xfrm>
-          <a:off x="0" y="0"/>
-          <a:ext cx="0" cy="0"/>
-          <a:chOff x="0" y="0"/>
-          <a:chExt cx="0" cy="0"/>
-        </a:xfrm>
-      </p:grpSpPr>
-      <p:sp>
-        <p:nvSpPr>
-          <p:cNvPr id="3" name="Text 0">
-            <a:extLst>
-              <a:ext uri="{FF2B5EF4-FFF2-40B4-BE49-F238E27FC236}">
-                <a16:creationId xmlns:a16="http://schemas.microsoft.com/office/drawing/2014/main" id="{A2FB9310-4B85-E2EC-BA0D-8C555808BCA1}"/>
-              </a:ext>
-            </a:extLst>
-          </p:cNvPr>
-          <p:cNvSpPr/>
-          <p:nvPr/>
-        </p:nvSpPr>
-        <p:spPr>
-          <a:xfrm>
-            <a:off x="6324124" y="2106454"/>
-            <a:ext cx="5632490" cy="704017"/>
-          </a:xfrm>
-          <a:prstGeom prst="rect">
-            <a:avLst/>
-          </a:prstGeom>
-          <a:noFill/>
-          <a:ln/>
-        </p:spPr>
-        <p:txBody>
-          <a:bodyPr wrap="none" lIns="0" tIns="0" rIns="0" bIns="0" rtlCol="0" anchor="t"/>
-          <a:lstStyle/>
-          <a:p>
-            <a:pPr marL="0" indent="0" algn="l">
-              <a:lnSpc>
-                <a:spcPts val="5500"/>
-              </a:lnSpc>
-              <a:buNone/>
-            </a:pPr>
-            <a:r>
-              <a:rPr lang="en-US" sz="4400" dirty="0">
-                <a:solidFill>
-                  <a:srgbClr val="FFFFFF"/>
-                </a:solidFill>
-                <a:latin typeface="Unbounded" pitchFamily="34" charset="0"/>
-                <a:ea typeface="Unbounded" pitchFamily="34" charset="-122"/>
-                <a:cs typeface="Unbounded" pitchFamily="34" charset="-120"/>
-              </a:rPr>
-              <a:t>後台功能：使用者管理</a:t>
-            </a:r>
-            <a:endParaRPr lang="en-US" sz="4400" dirty="0"/>
-          </a:p>
-        </p:txBody>
-      </p:sp>
-      <p:sp>
-        <p:nvSpPr>
-          <p:cNvPr id="4" name="Shape 1">
-            <a:extLst>
-              <a:ext uri="{FF2B5EF4-FFF2-40B4-BE49-F238E27FC236}">
-                <a16:creationId xmlns:a16="http://schemas.microsoft.com/office/drawing/2014/main" id="{BFE1C90B-B77A-517E-C76E-CEA973336C09}"/>
-              </a:ext>
-            </a:extLst>
-          </p:cNvPr>
-          <p:cNvSpPr/>
-          <p:nvPr/>
-        </p:nvSpPr>
-        <p:spPr>
-          <a:xfrm>
-            <a:off x="6324124" y="3169444"/>
-            <a:ext cx="3614618" cy="1357193"/>
-          </a:xfrm>
-          <a:prstGeom prst="roundRect">
-            <a:avLst>
-              <a:gd name="adj" fmla="val 2646"/>
-            </a:avLst>
-          </a:prstGeom>
-          <a:solidFill>
-            <a:srgbClr val="304755"/>
-          </a:solidFill>
-          <a:ln/>
-        </p:spPr>
-      </p:sp>
-      <p:sp>
-        <p:nvSpPr>
-          <p:cNvPr id="5" name="Text 2">
-            <a:extLst>
-              <a:ext uri="{FF2B5EF4-FFF2-40B4-BE49-F238E27FC236}">
-                <a16:creationId xmlns:a16="http://schemas.microsoft.com/office/drawing/2014/main" id="{648DA8B2-7BF2-2D26-5396-989491B30F15}"/>
-              </a:ext>
-            </a:extLst>
-          </p:cNvPr>
-          <p:cNvSpPr/>
-          <p:nvPr/>
-        </p:nvSpPr>
-        <p:spPr>
-          <a:xfrm>
-            <a:off x="6563439" y="3408759"/>
-            <a:ext cx="2816185" cy="351949"/>
-          </a:xfrm>
-          <a:prstGeom prst="rect">
-            <a:avLst/>
-          </a:prstGeom>
-          <a:noFill/>
-          <a:ln/>
-        </p:spPr>
-        <p:txBody>
-          <a:bodyPr wrap="none" lIns="0" tIns="0" rIns="0" bIns="0" rtlCol="0" anchor="t"/>
-          <a:lstStyle/>
-          <a:p>
-            <a:pPr marL="0" indent="0" algn="l">
-              <a:lnSpc>
-                <a:spcPts val="2750"/>
-              </a:lnSpc>
-              <a:buNone/>
-            </a:pPr>
-            <a:r>
-              <a:rPr lang="en-US" sz="2200" dirty="0">
-                <a:solidFill>
-                  <a:srgbClr val="CAD6DE"/>
-                </a:solidFill>
-                <a:latin typeface="Unbounded" pitchFamily="34" charset="0"/>
-                <a:ea typeface="Unbounded" pitchFamily="34" charset="-122"/>
-                <a:cs typeface="Unbounded" pitchFamily="34" charset="-120"/>
-              </a:rPr>
-              <a:t>用戶資料管理</a:t>
-            </a:r>
-            <a:endParaRPr lang="en-US" sz="2200" dirty="0"/>
-          </a:p>
-        </p:txBody>
-      </p:sp>
-      <p:sp>
-        <p:nvSpPr>
-          <p:cNvPr id="6" name="Text 3">
-            <a:extLst>
-              <a:ext uri="{FF2B5EF4-FFF2-40B4-BE49-F238E27FC236}">
-                <a16:creationId xmlns:a16="http://schemas.microsoft.com/office/drawing/2014/main" id="{B95CB391-9D5A-148C-C8B0-56E4F14A860F}"/>
-              </a:ext>
-            </a:extLst>
-          </p:cNvPr>
-          <p:cNvSpPr/>
-          <p:nvPr/>
-        </p:nvSpPr>
-        <p:spPr>
-          <a:xfrm>
-            <a:off x="6563439" y="3904297"/>
-            <a:ext cx="3135987" cy="383024"/>
-          </a:xfrm>
-          <a:prstGeom prst="rect">
-            <a:avLst/>
-          </a:prstGeom>
-          <a:noFill/>
-          <a:ln/>
-        </p:spPr>
-        <p:txBody>
-          <a:bodyPr wrap="none" lIns="0" tIns="0" rIns="0" bIns="0" rtlCol="0" anchor="t"/>
-          <a:lstStyle/>
-          <a:p>
-            <a:pPr marL="0" indent="0" algn="l">
-              <a:lnSpc>
-                <a:spcPts val="3000"/>
-              </a:lnSpc>
-              <a:buNone/>
-            </a:pPr>
-            <a:r>
-              <a:rPr lang="zh-TW" altLang="en-US" sz="1850" dirty="0">
-                <a:solidFill>
-                  <a:srgbClr val="CAD6DE"/>
-                </a:solidFill>
-                <a:latin typeface="Cabin" pitchFamily="34" charset="0"/>
-              </a:rPr>
-              <a:t>重設密碼</a:t>
-            </a:r>
-            <a:endParaRPr lang="en-US" sz="1850" dirty="0"/>
-          </a:p>
-        </p:txBody>
-      </p:sp>
-      <p:sp>
-        <p:nvSpPr>
-          <p:cNvPr id="7" name="Shape 4">
-            <a:extLst>
-              <a:ext uri="{FF2B5EF4-FFF2-40B4-BE49-F238E27FC236}">
-                <a16:creationId xmlns:a16="http://schemas.microsoft.com/office/drawing/2014/main" id="{8EDE9A02-B88A-90EB-1C23-EC94FE552F1D}"/>
-              </a:ext>
-            </a:extLst>
-          </p:cNvPr>
-          <p:cNvSpPr/>
-          <p:nvPr/>
-        </p:nvSpPr>
-        <p:spPr>
-          <a:xfrm>
-            <a:off x="10178058" y="3169444"/>
-            <a:ext cx="3614618" cy="1357193"/>
-          </a:xfrm>
-          <a:prstGeom prst="roundRect">
-            <a:avLst>
-              <a:gd name="adj" fmla="val 2646"/>
-            </a:avLst>
-          </a:prstGeom>
-          <a:solidFill>
-            <a:srgbClr val="304755"/>
-          </a:solidFill>
-          <a:ln/>
-        </p:spPr>
-      </p:sp>
-      <p:sp>
-        <p:nvSpPr>
-          <p:cNvPr id="8" name="Text 5">
-            <a:extLst>
-              <a:ext uri="{FF2B5EF4-FFF2-40B4-BE49-F238E27FC236}">
-                <a16:creationId xmlns:a16="http://schemas.microsoft.com/office/drawing/2014/main" id="{074E5190-BE68-FDE7-D4A0-DCD24C488AE1}"/>
-              </a:ext>
-            </a:extLst>
-          </p:cNvPr>
-          <p:cNvSpPr/>
-          <p:nvPr/>
-        </p:nvSpPr>
-        <p:spPr>
-          <a:xfrm>
-            <a:off x="10417373" y="3408759"/>
-            <a:ext cx="2816185" cy="351949"/>
-          </a:xfrm>
-          <a:prstGeom prst="rect">
-            <a:avLst/>
-          </a:prstGeom>
-          <a:noFill/>
-          <a:ln/>
-        </p:spPr>
-        <p:txBody>
-          <a:bodyPr wrap="none" lIns="0" tIns="0" rIns="0" bIns="0" rtlCol="0" anchor="t"/>
-          <a:lstStyle/>
-          <a:p>
-            <a:pPr marL="0" indent="0" algn="l">
-              <a:lnSpc>
-                <a:spcPts val="2750"/>
-              </a:lnSpc>
-              <a:buNone/>
-            </a:pPr>
-            <a:r>
-              <a:rPr lang="en-US" sz="2200" dirty="0">
-                <a:solidFill>
-                  <a:srgbClr val="CAD6DE"/>
-                </a:solidFill>
-                <a:latin typeface="Unbounded" pitchFamily="34" charset="0"/>
-                <a:ea typeface="Unbounded" pitchFamily="34" charset="-122"/>
-                <a:cs typeface="Unbounded" pitchFamily="34" charset="-120"/>
-              </a:rPr>
-              <a:t>權限設定</a:t>
-            </a:r>
-            <a:endParaRPr lang="en-US" sz="2200" dirty="0"/>
-          </a:p>
-        </p:txBody>
-      </p:sp>
-      <p:sp>
-        <p:nvSpPr>
-          <p:cNvPr id="9" name="Text 6">
-            <a:extLst>
-              <a:ext uri="{FF2B5EF4-FFF2-40B4-BE49-F238E27FC236}">
-                <a16:creationId xmlns:a16="http://schemas.microsoft.com/office/drawing/2014/main" id="{2FFF72BB-F1B7-B254-8443-418CD9DEB1B8}"/>
-              </a:ext>
-            </a:extLst>
-          </p:cNvPr>
-          <p:cNvSpPr/>
-          <p:nvPr/>
-        </p:nvSpPr>
-        <p:spPr>
-          <a:xfrm>
-            <a:off x="10417373" y="3904297"/>
-            <a:ext cx="3135987" cy="383024"/>
-          </a:xfrm>
-          <a:prstGeom prst="rect">
-            <a:avLst/>
-          </a:prstGeom>
-          <a:noFill/>
-          <a:ln/>
-        </p:spPr>
-        <p:txBody>
-          <a:bodyPr wrap="none" lIns="0" tIns="0" rIns="0" bIns="0" rtlCol="0" anchor="t"/>
-          <a:lstStyle/>
-          <a:p>
-            <a:pPr marL="0" indent="0" algn="l">
-              <a:lnSpc>
-                <a:spcPts val="3000"/>
-              </a:lnSpc>
-              <a:buNone/>
-            </a:pPr>
-            <a:r>
-              <a:rPr lang="en-US" sz="1850" dirty="0">
-                <a:solidFill>
-                  <a:srgbClr val="CAD6DE"/>
-                </a:solidFill>
-                <a:latin typeface="Cabin" pitchFamily="34" charset="0"/>
-                <a:ea typeface="Cabin" pitchFamily="34" charset="-122"/>
-                <a:cs typeface="Cabin" pitchFamily="34" charset="-120"/>
-              </a:rPr>
-              <a:t>區分買家、賣家與管理員角色</a:t>
-            </a:r>
-            <a:endParaRPr lang="en-US" sz="1850" dirty="0"/>
-          </a:p>
-        </p:txBody>
-      </p:sp>
-      <p:sp>
-        <p:nvSpPr>
-          <p:cNvPr id="10" name="Shape 7">
-            <a:extLst>
-              <a:ext uri="{FF2B5EF4-FFF2-40B4-BE49-F238E27FC236}">
-                <a16:creationId xmlns:a16="http://schemas.microsoft.com/office/drawing/2014/main" id="{76C3A99A-72AD-E257-54EB-021DC6901740}"/>
-              </a:ext>
-            </a:extLst>
-          </p:cNvPr>
-          <p:cNvSpPr/>
-          <p:nvPr/>
-        </p:nvSpPr>
-        <p:spPr>
-          <a:xfrm>
-            <a:off x="6324124" y="4765953"/>
-            <a:ext cx="7468553" cy="1357193"/>
-          </a:xfrm>
-          <a:prstGeom prst="roundRect">
-            <a:avLst>
-              <a:gd name="adj" fmla="val 2646"/>
-            </a:avLst>
-          </a:prstGeom>
-          <a:solidFill>
-            <a:srgbClr val="304755"/>
-          </a:solidFill>
-          <a:ln/>
-        </p:spPr>
-      </p:sp>
-      <p:sp>
-        <p:nvSpPr>
-          <p:cNvPr id="11" name="Text 8">
-            <a:extLst>
-              <a:ext uri="{FF2B5EF4-FFF2-40B4-BE49-F238E27FC236}">
-                <a16:creationId xmlns:a16="http://schemas.microsoft.com/office/drawing/2014/main" id="{14EA59F5-94EC-671B-BA64-C9589F1B13C9}"/>
-              </a:ext>
-            </a:extLst>
-          </p:cNvPr>
-          <p:cNvSpPr/>
-          <p:nvPr/>
-        </p:nvSpPr>
-        <p:spPr>
-          <a:xfrm>
-            <a:off x="6563439" y="5005268"/>
-            <a:ext cx="2816185" cy="351949"/>
-          </a:xfrm>
-          <a:prstGeom prst="rect">
-            <a:avLst/>
-          </a:prstGeom>
-          <a:noFill/>
-          <a:ln/>
-        </p:spPr>
-        <p:txBody>
-          <a:bodyPr wrap="none" lIns="0" tIns="0" rIns="0" bIns="0" rtlCol="0" anchor="t"/>
-          <a:lstStyle/>
-          <a:p>
-            <a:pPr marL="0" indent="0" algn="l">
-              <a:lnSpc>
-                <a:spcPts val="2750"/>
-              </a:lnSpc>
-              <a:buNone/>
-            </a:pPr>
-            <a:r>
-              <a:rPr lang="en-US" sz="2200" dirty="0">
-                <a:solidFill>
-                  <a:srgbClr val="CAD6DE"/>
-                </a:solidFill>
-                <a:latin typeface="Unbounded" pitchFamily="34" charset="0"/>
-                <a:ea typeface="Unbounded" pitchFamily="34" charset="-122"/>
-                <a:cs typeface="Unbounded" pitchFamily="34" charset="-120"/>
-              </a:rPr>
-              <a:t>封鎖與解鎖</a:t>
-            </a:r>
-            <a:endParaRPr lang="en-US" sz="2200" dirty="0"/>
-          </a:p>
-        </p:txBody>
-      </p:sp>
-      <p:sp>
-        <p:nvSpPr>
-          <p:cNvPr id="12" name="Text 9">
-            <a:extLst>
-              <a:ext uri="{FF2B5EF4-FFF2-40B4-BE49-F238E27FC236}">
-                <a16:creationId xmlns:a16="http://schemas.microsoft.com/office/drawing/2014/main" id="{A05DA9B1-DE03-EB76-D4AD-0087996F857A}"/>
-              </a:ext>
-            </a:extLst>
-          </p:cNvPr>
-          <p:cNvSpPr/>
-          <p:nvPr/>
-        </p:nvSpPr>
-        <p:spPr>
-          <a:xfrm>
-            <a:off x="6563439" y="5500807"/>
-            <a:ext cx="6989921" cy="383024"/>
-          </a:xfrm>
-          <a:prstGeom prst="rect">
-            <a:avLst/>
-          </a:prstGeom>
-          <a:noFill/>
-          <a:ln/>
-        </p:spPr>
-        <p:txBody>
-          <a:bodyPr wrap="none" lIns="0" tIns="0" rIns="0" bIns="0" rtlCol="0" anchor="t"/>
-          <a:lstStyle/>
-          <a:p>
-            <a:pPr marL="0" indent="0" algn="l">
-              <a:lnSpc>
-                <a:spcPts val="3000"/>
-              </a:lnSpc>
-              <a:buNone/>
-            </a:pPr>
-            <a:r>
-              <a:rPr lang="en-US" sz="1850" dirty="0">
-                <a:solidFill>
-                  <a:srgbClr val="CAD6DE"/>
-                </a:solidFill>
-                <a:latin typeface="Cabin" pitchFamily="34" charset="0"/>
-                <a:ea typeface="Cabin" pitchFamily="34" charset="-122"/>
-                <a:cs typeface="Cabin" pitchFamily="34" charset="-120"/>
-              </a:rPr>
-              <a:t>管理使用者存取權限</a:t>
-            </a:r>
-            <a:endParaRPr lang="en-US" sz="1850" dirty="0"/>
-          </a:p>
-        </p:txBody>
-      </p:sp>
-      <p:pic>
-        <p:nvPicPr>
-          <p:cNvPr id="16" name="圖片 15">
-            <a:extLst>
-              <a:ext uri="{FF2B5EF4-FFF2-40B4-BE49-F238E27FC236}">
-                <a16:creationId xmlns:a16="http://schemas.microsoft.com/office/drawing/2014/main" id="{2726CE08-A13E-4BC1-EB98-B377DB1F2D38}"/>
-              </a:ext>
-            </a:extLst>
-          </p:cNvPr>
-          <p:cNvPicPr>
-            <a:picLocks noChangeAspect="1"/>
-          </p:cNvPicPr>
-          <p:nvPr/>
-        </p:nvPicPr>
-        <p:blipFill>
-          <a:blip r:embed="rId2"/>
-          <a:stretch>
-            <a:fillRect/>
-          </a:stretch>
-        </p:blipFill>
-        <p:spPr>
-          <a:xfrm>
-            <a:off x="45786" y="748943"/>
-            <a:ext cx="6219778" cy="7076755"/>
-          </a:xfrm>
-          <a:prstGeom prst="rect">
-            <a:avLst/>
-          </a:prstGeom>
-        </p:spPr>
-      </p:pic>
-    </p:spTree>
-    <p:extLst>
-      <p:ext uri="{BB962C8B-B14F-4D97-AF65-F5344CB8AC3E}">
-        <p14:creationId xmlns:p14="http://schemas.microsoft.com/office/powerpoint/2010/main" val="383383206"/>
-      </p:ext>
-    </p:extLst>
-  </p:cSld>
-  <p:clrMapOvr>
-    <a:masterClrMapping/>
-  </p:clrMapOvr>
-</p:sld>
-</file>
-
-<file path=ppt/slides/slide21.xml><?xml version="1.0" encoding="utf-8"?>
-<p:sld xmlns:a="http://schemas.openxmlformats.org/drawingml/2006/main" xmlns:r="http://schemas.openxmlformats.org/officeDocument/2006/relationships" xmlns:p="http://schemas.openxmlformats.org/presentationml/2006/main">
-  <p:cSld>
-    <p:spTree>
-      <p:nvGrpSpPr>
-        <p:cNvPr id="1" name=""/>
-        <p:cNvGrpSpPr/>
-        <p:nvPr/>
-      </p:nvGrpSpPr>
-      <p:grpSpPr>
-        <a:xfrm>
-          <a:off x="0" y="0"/>
-          <a:ext cx="0" cy="0"/>
-          <a:chOff x="0" y="0"/>
-          <a:chExt cx="0" cy="0"/>
-        </a:xfrm>
-      </p:grpSpPr>
-      <p:sp>
-        <p:nvSpPr>
-          <p:cNvPr id="3" name="Text 0">
-            <a:extLst>
-              <a:ext uri="{FF2B5EF4-FFF2-40B4-BE49-F238E27FC236}">
-                <a16:creationId xmlns:a16="http://schemas.microsoft.com/office/drawing/2014/main" id="{8A25FD04-881C-3EC3-752C-F41973696412}"/>
-              </a:ext>
-            </a:extLst>
-          </p:cNvPr>
-          <p:cNvSpPr/>
-          <p:nvPr/>
-        </p:nvSpPr>
-        <p:spPr>
-          <a:xfrm>
-            <a:off x="837724" y="1839516"/>
-            <a:ext cx="7468553" cy="1408033"/>
-          </a:xfrm>
-          <a:prstGeom prst="rect">
-            <a:avLst/>
-          </a:prstGeom>
-          <a:noFill/>
-          <a:ln/>
-        </p:spPr>
-        <p:txBody>
-          <a:bodyPr wrap="square" lIns="0" tIns="0" rIns="0" bIns="0" rtlCol="0" anchor="t"/>
-          <a:lstStyle/>
-          <a:p>
-            <a:pPr marL="0" indent="0" algn="l">
-              <a:lnSpc>
-                <a:spcPts val="5500"/>
-              </a:lnSpc>
-              <a:buNone/>
-            </a:pPr>
-            <a:r>
-              <a:rPr lang="en-US" sz="4400" dirty="0">
-                <a:solidFill>
-                  <a:srgbClr val="FFFFFF"/>
-                </a:solidFill>
-                <a:latin typeface="Unbounded" pitchFamily="34" charset="0"/>
-                <a:ea typeface="Unbounded" pitchFamily="34" charset="-122"/>
-                <a:cs typeface="Unbounded" pitchFamily="34" charset="-120"/>
-              </a:rPr>
-              <a:t>後台功能：推薦系統與搜尋紀錄</a:t>
-            </a:r>
-            <a:endParaRPr lang="en-US" sz="4400" dirty="0"/>
-          </a:p>
-        </p:txBody>
-      </p:sp>
-      <p:sp>
-        <p:nvSpPr>
-          <p:cNvPr id="4" name="Shape 1">
-            <a:extLst>
-              <a:ext uri="{FF2B5EF4-FFF2-40B4-BE49-F238E27FC236}">
-                <a16:creationId xmlns:a16="http://schemas.microsoft.com/office/drawing/2014/main" id="{BC43B4AB-2C8F-7BA6-EFEB-70BDEF76B4C0}"/>
-              </a:ext>
-            </a:extLst>
-          </p:cNvPr>
-          <p:cNvSpPr/>
-          <p:nvPr/>
-        </p:nvSpPr>
-        <p:spPr>
-          <a:xfrm>
-            <a:off x="837724" y="3606522"/>
-            <a:ext cx="538520" cy="538520"/>
-          </a:xfrm>
-          <a:prstGeom prst="roundRect">
-            <a:avLst>
-              <a:gd name="adj" fmla="val 6668"/>
-            </a:avLst>
-          </a:prstGeom>
-          <a:solidFill>
-            <a:srgbClr val="304755"/>
-          </a:solidFill>
-          <a:ln/>
-        </p:spPr>
-      </p:sp>
-      <p:sp>
-        <p:nvSpPr>
-          <p:cNvPr id="5" name="Text 2">
-            <a:extLst>
-              <a:ext uri="{FF2B5EF4-FFF2-40B4-BE49-F238E27FC236}">
-                <a16:creationId xmlns:a16="http://schemas.microsoft.com/office/drawing/2014/main" id="{D378F7F5-789B-2AF5-0F61-F8E4EC130904}"/>
-              </a:ext>
-            </a:extLst>
-          </p:cNvPr>
-          <p:cNvSpPr/>
-          <p:nvPr/>
-        </p:nvSpPr>
-        <p:spPr>
-          <a:xfrm>
-            <a:off x="937974" y="3664506"/>
-            <a:ext cx="337899" cy="422434"/>
-          </a:xfrm>
-          <a:prstGeom prst="rect">
-            <a:avLst/>
-          </a:prstGeom>
-          <a:noFill/>
-          <a:ln/>
-        </p:spPr>
-        <p:txBody>
-          <a:bodyPr wrap="none" lIns="0" tIns="0" rIns="0" bIns="0" rtlCol="0" anchor="t"/>
-          <a:lstStyle/>
-          <a:p>
-            <a:pPr marL="0" indent="0" algn="ctr">
-              <a:lnSpc>
-                <a:spcPts val="2650"/>
-              </a:lnSpc>
-              <a:buNone/>
-            </a:pPr>
-            <a:r>
-              <a:rPr lang="en-US" sz="2650" dirty="0">
-                <a:solidFill>
-                  <a:srgbClr val="CAD6DE"/>
-                </a:solidFill>
-                <a:latin typeface="Unbounded" pitchFamily="34" charset="0"/>
-                <a:ea typeface="Unbounded" pitchFamily="34" charset="-122"/>
-                <a:cs typeface="Unbounded" pitchFamily="34" charset="-120"/>
-              </a:rPr>
-              <a:t>1</a:t>
-            </a:r>
-            <a:endParaRPr lang="en-US" sz="2650" dirty="0"/>
-          </a:p>
-        </p:txBody>
-      </p:sp>
-      <p:sp>
-        <p:nvSpPr>
-          <p:cNvPr id="6" name="Text 3">
-            <a:extLst>
-              <a:ext uri="{FF2B5EF4-FFF2-40B4-BE49-F238E27FC236}">
-                <a16:creationId xmlns:a16="http://schemas.microsoft.com/office/drawing/2014/main" id="{93B8F347-6623-DEB1-0AC6-0F75889CC9EA}"/>
-              </a:ext>
-            </a:extLst>
-          </p:cNvPr>
-          <p:cNvSpPr/>
-          <p:nvPr/>
-        </p:nvSpPr>
-        <p:spPr>
-          <a:xfrm>
-            <a:off x="1615559" y="3688794"/>
-            <a:ext cx="2806898" cy="351949"/>
-          </a:xfrm>
-          <a:prstGeom prst="rect">
-            <a:avLst/>
-          </a:prstGeom>
-          <a:noFill/>
-          <a:ln/>
-        </p:spPr>
-        <p:txBody>
-          <a:bodyPr wrap="none" lIns="0" tIns="0" rIns="0" bIns="0" rtlCol="0" anchor="t"/>
-          <a:lstStyle/>
-          <a:p>
-            <a:pPr marL="0" indent="0" algn="l">
-              <a:lnSpc>
-                <a:spcPts val="2750"/>
-              </a:lnSpc>
-              <a:buNone/>
-            </a:pPr>
-            <a:r>
-              <a:rPr lang="en-US" sz="2200" dirty="0">
-                <a:solidFill>
-                  <a:srgbClr val="CAD6DE"/>
-                </a:solidFill>
-                <a:latin typeface="Unbounded" pitchFamily="34" charset="0"/>
-                <a:ea typeface="Unbounded" pitchFamily="34" charset="-122"/>
-                <a:cs typeface="Unbounded" pitchFamily="34" charset="-120"/>
-              </a:rPr>
-              <a:t>推薦商品管理</a:t>
-            </a:r>
-            <a:endParaRPr lang="en-US" sz="2200" dirty="0"/>
-          </a:p>
-        </p:txBody>
-      </p:sp>
-      <p:sp>
-        <p:nvSpPr>
-          <p:cNvPr id="7" name="Text 4">
-            <a:extLst>
-              <a:ext uri="{FF2B5EF4-FFF2-40B4-BE49-F238E27FC236}">
-                <a16:creationId xmlns:a16="http://schemas.microsoft.com/office/drawing/2014/main" id="{B39BACA9-D0BB-DFEA-0D21-CA26FA0C691B}"/>
-              </a:ext>
-            </a:extLst>
-          </p:cNvPr>
-          <p:cNvSpPr/>
-          <p:nvPr/>
-        </p:nvSpPr>
-        <p:spPr>
-          <a:xfrm>
-            <a:off x="1615559" y="4184332"/>
-            <a:ext cx="2806898" cy="383024"/>
-          </a:xfrm>
-          <a:prstGeom prst="rect">
-            <a:avLst/>
-          </a:prstGeom>
-          <a:noFill/>
-          <a:ln/>
-        </p:spPr>
-        <p:txBody>
-          <a:bodyPr wrap="none" lIns="0" tIns="0" rIns="0" bIns="0" rtlCol="0" anchor="t"/>
-          <a:lstStyle/>
-          <a:p>
-            <a:pPr marL="0" indent="0" algn="l">
-              <a:lnSpc>
-                <a:spcPts val="3000"/>
-              </a:lnSpc>
-              <a:buNone/>
-            </a:pPr>
-            <a:r>
-              <a:rPr lang="en-US" sz="1850" dirty="0" err="1">
-                <a:solidFill>
-                  <a:srgbClr val="CAD6DE"/>
-                </a:solidFill>
-                <a:latin typeface="Cabin" pitchFamily="34" charset="0"/>
-                <a:ea typeface="Cabin" pitchFamily="34" charset="-122"/>
-                <a:cs typeface="Cabin" pitchFamily="34" charset="-120"/>
-              </a:rPr>
-              <a:t>設定熱門商品</a:t>
-            </a:r>
-            <a:endParaRPr lang="en-US" sz="1850" dirty="0"/>
-          </a:p>
-        </p:txBody>
-      </p:sp>
-      <p:pic>
-        <p:nvPicPr>
-          <p:cNvPr id="17" name="圖片 16">
-            <a:extLst>
-              <a:ext uri="{FF2B5EF4-FFF2-40B4-BE49-F238E27FC236}">
-                <a16:creationId xmlns:a16="http://schemas.microsoft.com/office/drawing/2014/main" id="{C35EDF63-141E-87D5-5A28-F52B8647EB9F}"/>
-              </a:ext>
-            </a:extLst>
-          </p:cNvPr>
-          <p:cNvPicPr>
-            <a:picLocks noChangeAspect="1"/>
-          </p:cNvPicPr>
-          <p:nvPr/>
-        </p:nvPicPr>
-        <p:blipFill>
-          <a:blip r:embed="rId2"/>
-          <a:stretch>
-            <a:fillRect/>
-          </a:stretch>
-        </p:blipFill>
-        <p:spPr>
-          <a:xfrm>
-            <a:off x="4836433" y="2770086"/>
-            <a:ext cx="9559515" cy="2541313"/>
-          </a:xfrm>
-          <a:prstGeom prst="rect">
-            <a:avLst/>
-          </a:prstGeom>
-        </p:spPr>
-      </p:pic>
-    </p:spTree>
-    <p:extLst>
-      <p:ext uri="{BB962C8B-B14F-4D97-AF65-F5344CB8AC3E}">
-        <p14:creationId xmlns:p14="http://schemas.microsoft.com/office/powerpoint/2010/main" val="1975342029"/>
-      </p:ext>
-    </p:extLst>
-  </p:cSld>
-  <p:clrMapOvr>
-    <a:masterClrMapping/>
-  </p:clrMapOvr>
-</p:sld>
-</file>
-
-<file path=ppt/slides/slide22.xml><?xml version="1.0" encoding="utf-8"?>
 <p:sld xmlns:a="http://schemas.openxmlformats.org/drawingml/2006/main" xmlns:r="http://schemas.openxmlformats.org/officeDocument/2006/relationships" xmlns:p="http://schemas.openxmlformats.org/presentationml/2006/main">
   <p:cSld>
     <p:spTree>
@@ -7541,8 +7160,38 @@
         </p:blipFill>
         <p:spPr>
           <a:xfrm>
-            <a:off x="4204251" y="1516570"/>
-            <a:ext cx="6629401" cy="6569974"/>
+            <a:off x="3634031" y="995271"/>
+            <a:ext cx="5299129" cy="7096171"/>
+          </a:xfrm>
+          <a:prstGeom prst="rect">
+            <a:avLst/>
+          </a:prstGeom>
+        </p:spPr>
+      </p:pic>
+      <p:pic>
+        <p:nvPicPr>
+          <p:cNvPr id="4" name="圖片 3"/>
+          <p:cNvPicPr>
+            <a:picLocks noChangeAspect="1"/>
+          </p:cNvPicPr>
+          <p:nvPr/>
+        </p:nvPicPr>
+        <p:blipFill>
+          <a:blip r:embed="rId3">
+            <a:extLst>
+              <a:ext uri="{28A0092B-C50C-407E-A947-70E740481C1C}">
+                <a14:useLocalDpi xmlns:a14="http://schemas.microsoft.com/office/drawing/2010/main" val="0"/>
+              </a:ext>
+            </a:extLst>
+          </a:blip>
+          <a:stretch>
+            <a:fillRect/>
+          </a:stretch>
+        </p:blipFill>
+        <p:spPr>
+          <a:xfrm>
+            <a:off x="8473485" y="1164562"/>
+            <a:ext cx="5655491" cy="6926880"/>
           </a:xfrm>
           <a:prstGeom prst="rect">
             <a:avLst/>
@@ -7552,7 +7201,7 @@
     </p:spTree>
     <p:extLst>
       <p:ext uri="{BB962C8B-B14F-4D97-AF65-F5344CB8AC3E}">
-        <p14:creationId xmlns:p14="http://schemas.microsoft.com/office/powerpoint/2010/main" val="615512071"/>
+        <p14:creationId xmlns:p14="http://schemas.microsoft.com/office/powerpoint/2010/main" val="3724482194"/>
       </p:ext>
     </p:extLst>
   </p:cSld>
@@ -7632,28 +7281,28 @@
       </p:sp>
       <p:pic>
         <p:nvPicPr>
-          <p:cNvPr id="3" name="圖片 2"/>
+          <p:cNvPr id="7" name="圖片 6">
+            <a:extLst>
+              <a:ext uri="{FF2B5EF4-FFF2-40B4-BE49-F238E27FC236}">
+                <a16:creationId xmlns:a16="http://schemas.microsoft.com/office/drawing/2014/main" id="{A37875B8-1DFE-F4DB-F6AA-216F2802C3C9}"/>
+              </a:ext>
+            </a:extLst>
+          </p:cNvPr>
           <p:cNvPicPr>
             <a:picLocks noChangeAspect="1"/>
           </p:cNvPicPr>
           <p:nvPr/>
         </p:nvPicPr>
         <p:blipFill>
-          <a:blip r:embed="rId2">
-            <a:extLst>
-              <a:ext uri="{28A0092B-C50C-407E-A947-70E740481C1C}">
-                <a14:useLocalDpi xmlns:a14="http://schemas.microsoft.com/office/drawing/2010/main" val="0"/>
-              </a:ext>
-            </a:extLst>
-          </a:blip>
+          <a:blip r:embed="rId2"/>
           <a:stretch>
             <a:fillRect/>
           </a:stretch>
         </p:blipFill>
         <p:spPr>
           <a:xfrm>
-            <a:off x="4729453" y="1164562"/>
-            <a:ext cx="5299129" cy="7096171"/>
+            <a:off x="5801248" y="719190"/>
+            <a:ext cx="4363546" cy="8229600"/>
           </a:xfrm>
           <a:prstGeom prst="rect">
             <a:avLst/>
@@ -7663,7 +7312,7 @@
     </p:spTree>
     <p:extLst>
       <p:ext uri="{BB962C8B-B14F-4D97-AF65-F5344CB8AC3E}">
-        <p14:creationId xmlns:p14="http://schemas.microsoft.com/office/powerpoint/2010/main" val="3724482194"/>
+        <p14:creationId xmlns:p14="http://schemas.microsoft.com/office/powerpoint/2010/main" val="890747250"/>
       </p:ext>
     </p:extLst>
   </p:cSld>
@@ -7703,7 +7352,7 @@
           <p:cNvPr id="2" name="Text 0">
             <a:extLst>
               <a:ext uri="{FF2B5EF4-FFF2-40B4-BE49-F238E27FC236}">
-                <a16:creationId xmlns:a16="http://schemas.microsoft.com/office/drawing/2014/main" id="{C052DEC4-A2C2-F364-8F62-8A1C4A59A339}"/>
+                <a16:creationId xmlns:a16="http://schemas.microsoft.com/office/drawing/2014/main" id="{A7F0C4F0-0F36-4ABB-1894-BDD61C4F5D4E}"/>
               </a:ext>
             </a:extLst>
           </p:cNvPr>
@@ -7712,7 +7361,7 @@
         </p:nvSpPr>
         <p:spPr>
           <a:xfrm>
-            <a:off x="817786" y="1164562"/>
+            <a:off x="847603" y="1224196"/>
             <a:ext cx="5632490" cy="704017"/>
           </a:xfrm>
           <a:prstGeom prst="rect">
@@ -7725,10 +7374,11 @@
           <a:bodyPr wrap="none" lIns="0" tIns="0" rIns="0" bIns="0" rtlCol="0" anchor="t"/>
           <a:lstStyle/>
           <a:p>
-            <a:pPr>
+            <a:pPr marL="0" indent="0" algn="l">
               <a:lnSpc>
                 <a:spcPts val="5500"/>
               </a:lnSpc>
+              <a:buNone/>
             </a:pPr>
             <a:r>
               <a:rPr lang="en-US" sz="4400" dirty="0">
@@ -7736,14 +7386,33 @@
                 <a:ea typeface="Unbounded" pitchFamily="34" charset="-122"/>
                 <a:cs typeface="Unbounded" pitchFamily="34" charset="-120"/>
               </a:rPr>
-              <a:t>Site-Map</a:t>
-            </a:r>
+              <a:t>ER</a:t>
+            </a:r>
+            <a:r>
+              <a:rPr lang="zh-TW" altLang="en-US" sz="4400" dirty="0">
+                <a:latin typeface="Unbounded" pitchFamily="34" charset="0"/>
+                <a:ea typeface="Unbounded" pitchFamily="34" charset="-122"/>
+                <a:cs typeface="Unbounded" pitchFamily="34" charset="-120"/>
+              </a:rPr>
+              <a:t>圖</a:t>
+            </a:r>
+            <a:endParaRPr lang="en-US" sz="4400" dirty="0">
+              <a:latin typeface="Unbounded" pitchFamily="34" charset="0"/>
+              <a:ea typeface="Unbounded" pitchFamily="34" charset="-122"/>
+              <a:cs typeface="Unbounded" pitchFamily="34" charset="-120"/>
+            </a:endParaRPr>
           </a:p>
         </p:txBody>
       </p:sp>
       <p:pic>
         <p:nvPicPr>
-          <p:cNvPr id="4" name="圖片 3"/>
+          <p:cNvPr id="6" name="圖片 5" descr="一張含有 文字, 螢幕擷取畫面, 圖表, 字型 的圖片&#10;&#10;AI 產生的內容可能不正確。">
+            <a:extLst>
+              <a:ext uri="{FF2B5EF4-FFF2-40B4-BE49-F238E27FC236}">
+                <a16:creationId xmlns:a16="http://schemas.microsoft.com/office/drawing/2014/main" id="{1F57A988-44DC-264D-2611-5A7690BC9F55}"/>
+              </a:ext>
+            </a:extLst>
+          </p:cNvPr>
           <p:cNvPicPr>
             <a:picLocks noChangeAspect="1"/>
           </p:cNvPicPr>
@@ -7763,8 +7432,8 @@
         </p:blipFill>
         <p:spPr>
           <a:xfrm>
-            <a:off x="4343274" y="1164562"/>
-            <a:ext cx="5655491" cy="6926880"/>
+            <a:off x="2440498" y="0"/>
+            <a:ext cx="10099964" cy="8229600"/>
           </a:xfrm>
           <a:prstGeom prst="rect">
             <a:avLst/>
@@ -7774,7 +7443,7 @@
     </p:spTree>
     <p:extLst>
       <p:ext uri="{BB962C8B-B14F-4D97-AF65-F5344CB8AC3E}">
-        <p14:creationId xmlns:p14="http://schemas.microsoft.com/office/powerpoint/2010/main" val="4063992731"/>
+        <p14:creationId xmlns:p14="http://schemas.microsoft.com/office/powerpoint/2010/main" val="1957535455"/>
       </p:ext>
     </p:extLst>
   </p:cSld>
@@ -7811,10 +7480,10 @@
       </p:grpSpPr>
       <p:sp>
         <p:nvSpPr>
-          <p:cNvPr id="2" name="Text 0">
-            <a:extLst>
-              <a:ext uri="{FF2B5EF4-FFF2-40B4-BE49-F238E27FC236}">
-                <a16:creationId xmlns:a16="http://schemas.microsoft.com/office/drawing/2014/main" id="{C052DEC4-A2C2-F364-8F62-8A1C4A59A339}"/>
+          <p:cNvPr id="3" name="Text 0">
+            <a:extLst>
+              <a:ext uri="{FF2B5EF4-FFF2-40B4-BE49-F238E27FC236}">
+                <a16:creationId xmlns:a16="http://schemas.microsoft.com/office/drawing/2014/main" id="{5C17D3ED-A85C-614C-6F5F-0F8B4B8933E8}"/>
               </a:ext>
             </a:extLst>
           </p:cNvPr>
@@ -7823,7 +7492,7 @@
         </p:nvSpPr>
         <p:spPr>
           <a:xfrm>
-            <a:off x="817786" y="1164562"/>
+            <a:off x="6324124" y="2191583"/>
             <a:ext cx="5632490" cy="704017"/>
           </a:xfrm>
           <a:prstGeom prst="rect">
@@ -7836,10 +7505,11 @@
           <a:bodyPr wrap="none" lIns="0" tIns="0" rIns="0" bIns="0" rtlCol="0" anchor="t"/>
           <a:lstStyle/>
           <a:p>
-            <a:pPr>
+            <a:pPr marL="0" indent="0" algn="l">
               <a:lnSpc>
                 <a:spcPts val="5500"/>
               </a:lnSpc>
+              <a:buNone/>
             </a:pPr>
             <a:r>
               <a:rPr lang="en-US" sz="4400" dirty="0">
@@ -7847,17 +7517,116 @@
                 <a:ea typeface="Unbounded" pitchFamily="34" charset="-122"/>
                 <a:cs typeface="Unbounded" pitchFamily="34" charset="-120"/>
               </a:rPr>
-              <a:t>Site-Map</a:t>
-            </a:r>
+              <a:t>前台功能：登錄/註冊</a:t>
+            </a:r>
+            <a:endParaRPr lang="en-US" sz="4400" dirty="0"/>
+          </a:p>
+        </p:txBody>
+      </p:sp>
+      <p:sp>
+        <p:nvSpPr>
+          <p:cNvPr id="5" name="Text 2">
+            <a:extLst>
+              <a:ext uri="{FF2B5EF4-FFF2-40B4-BE49-F238E27FC236}">
+                <a16:creationId xmlns:a16="http://schemas.microsoft.com/office/drawing/2014/main" id="{525A2525-6238-2A2C-F363-D7B41FF84E72}"/>
+              </a:ext>
+            </a:extLst>
+          </p:cNvPr>
+          <p:cNvSpPr/>
+          <p:nvPr/>
+        </p:nvSpPr>
+        <p:spPr>
+          <a:xfrm>
+            <a:off x="7101959" y="3336846"/>
+            <a:ext cx="2806898" cy="351949"/>
+          </a:xfrm>
+          <a:prstGeom prst="rect">
+            <a:avLst/>
+          </a:prstGeom>
+          <a:noFill/>
+          <a:ln/>
+        </p:spPr>
+        <p:txBody>
+          <a:bodyPr wrap="none" lIns="0" tIns="0" rIns="0" bIns="0" rtlCol="0" anchor="t"/>
+          <a:lstStyle/>
+          <a:p>
+            <a:pPr marL="0" indent="0" algn="l">
+              <a:lnSpc>
+                <a:spcPts val="2750"/>
+              </a:lnSpc>
+              <a:buNone/>
+            </a:pPr>
+            <a:r>
+              <a:rPr lang="en-US" sz="2200" dirty="0">
+                <a:latin typeface="Unbounded" pitchFamily="34" charset="0"/>
+                <a:ea typeface="Unbounded" pitchFamily="34" charset="-122"/>
+                <a:cs typeface="Unbounded" pitchFamily="34" charset="-120"/>
+              </a:rPr>
+              <a:t>快速註冊流程</a:t>
+            </a:r>
+            <a:endParaRPr lang="en-US" sz="2200" dirty="0"/>
+          </a:p>
+        </p:txBody>
+      </p:sp>
+      <p:sp>
+        <p:nvSpPr>
+          <p:cNvPr id="6" name="Text 3">
+            <a:extLst>
+              <a:ext uri="{FF2B5EF4-FFF2-40B4-BE49-F238E27FC236}">
+                <a16:creationId xmlns:a16="http://schemas.microsoft.com/office/drawing/2014/main" id="{003E8AB1-B42E-162E-6AAE-453861A86BDA}"/>
+              </a:ext>
+            </a:extLst>
+          </p:cNvPr>
+          <p:cNvSpPr/>
+          <p:nvPr/>
+        </p:nvSpPr>
+        <p:spPr>
+          <a:xfrm>
+            <a:off x="7101959" y="3832384"/>
+            <a:ext cx="2806898" cy="766048"/>
+          </a:xfrm>
+          <a:prstGeom prst="rect">
+            <a:avLst/>
+          </a:prstGeom>
+          <a:noFill/>
+          <a:ln/>
+        </p:spPr>
+        <p:txBody>
+          <a:bodyPr wrap="square" lIns="0" tIns="0" rIns="0" bIns="0" rtlCol="0" anchor="t"/>
+          <a:lstStyle/>
+          <a:p>
+            <a:pPr marL="0" indent="0" algn="l">
+              <a:lnSpc>
+                <a:spcPts val="3000"/>
+              </a:lnSpc>
+              <a:buNone/>
+            </a:pPr>
+            <a:r>
+              <a:rPr lang="en-US" sz="1850" dirty="0">
+                <a:latin typeface="Cabin" pitchFamily="34" charset="0"/>
+                <a:ea typeface="Cabin" pitchFamily="34" charset="-122"/>
+                <a:cs typeface="Cabin" pitchFamily="34" charset="-120"/>
+              </a:rPr>
+              <a:t>支援 Email </a:t>
+            </a:r>
+            <a:r>
+              <a:rPr lang="en-US" sz="1850" dirty="0" err="1">
+                <a:latin typeface="Cabin" pitchFamily="34" charset="0"/>
+                <a:ea typeface="Cabin" pitchFamily="34" charset="-122"/>
+                <a:cs typeface="Cabin" pitchFamily="34" charset="-120"/>
+              </a:rPr>
+              <a:t>驗證，流程簡便</a:t>
+            </a:r>
+            <a:endParaRPr lang="en-US" sz="1850" dirty="0"/>
           </a:p>
         </p:txBody>
       </p:sp>
       <p:pic>
         <p:nvPicPr>
-          <p:cNvPr id="7" name="圖片 6">
-            <a:extLst>
-              <a:ext uri="{FF2B5EF4-FFF2-40B4-BE49-F238E27FC236}">
-                <a16:creationId xmlns:a16="http://schemas.microsoft.com/office/drawing/2014/main" id="{A37875B8-1DFE-F4DB-F6AA-216F2802C3C9}"/>
+          <p:cNvPr id="14" name="圖片 13">
+            <a:extLst>
+              <a:ext uri="{FF2B5EF4-FFF2-40B4-BE49-F238E27FC236}">
+                <a16:creationId xmlns:a16="http://schemas.microsoft.com/office/drawing/2014/main" id="{C26A9BA4-61B2-5312-6B04-D837D63F806C}"/>
               </a:ext>
             </a:extLst>
           </p:cNvPr>
@@ -7874,8 +7643,8 @@
         </p:blipFill>
         <p:spPr>
           <a:xfrm>
-            <a:off x="4578623" y="934948"/>
-            <a:ext cx="4363546" cy="8229600"/>
+            <a:off x="1022540" y="1179671"/>
+            <a:ext cx="4181475" cy="5305425"/>
           </a:xfrm>
           <a:prstGeom prst="rect">
             <a:avLst/>
@@ -7885,7 +7654,7 @@
     </p:spTree>
     <p:extLst>
       <p:ext uri="{BB962C8B-B14F-4D97-AF65-F5344CB8AC3E}">
-        <p14:creationId xmlns:p14="http://schemas.microsoft.com/office/powerpoint/2010/main" val="890747250"/>
+        <p14:creationId xmlns:p14="http://schemas.microsoft.com/office/powerpoint/2010/main" val="4051262160"/>
       </p:ext>
     </p:extLst>
   </p:cSld>
@@ -7922,10 +7691,10 @@
       </p:grpSpPr>
       <p:sp>
         <p:nvSpPr>
-          <p:cNvPr id="2" name="Text 0">
-            <a:extLst>
-              <a:ext uri="{FF2B5EF4-FFF2-40B4-BE49-F238E27FC236}">
-                <a16:creationId xmlns:a16="http://schemas.microsoft.com/office/drawing/2014/main" id="{A7F0C4F0-0F36-4ABB-1894-BDD61C4F5D4E}"/>
+          <p:cNvPr id="3" name="Text 0">
+            <a:extLst>
+              <a:ext uri="{FF2B5EF4-FFF2-40B4-BE49-F238E27FC236}">
+                <a16:creationId xmlns:a16="http://schemas.microsoft.com/office/drawing/2014/main" id="{8BF2A6AB-1F7E-9633-389D-D723B15A9392}"/>
               </a:ext>
             </a:extLst>
           </p:cNvPr>
@@ -7934,8 +7703,8 @@
         </p:nvSpPr>
         <p:spPr>
           <a:xfrm>
-            <a:off x="847603" y="1224196"/>
-            <a:ext cx="5632490" cy="704017"/>
+            <a:off x="768150" y="1358291"/>
+            <a:ext cx="6757988" cy="704017"/>
           </a:xfrm>
           <a:prstGeom prst="rect">
             <a:avLst/>
@@ -7954,59 +7723,125 @@
               <a:buNone/>
             </a:pPr>
             <a:r>
-              <a:rPr lang="en-US" sz="4400" dirty="0">
+              <a:rPr lang="en-US" sz="4400" dirty="0" err="1">
                 <a:latin typeface="Unbounded" pitchFamily="34" charset="0"/>
                 <a:ea typeface="Unbounded" pitchFamily="34" charset="-122"/>
                 <a:cs typeface="Unbounded" pitchFamily="34" charset="-120"/>
               </a:rPr>
-              <a:t>ER</a:t>
-            </a:r>
-            <a:r>
-              <a:rPr lang="zh-TW" altLang="en-US" sz="4400" dirty="0">
+              <a:t>前台功能</a:t>
+            </a:r>
+            <a:endParaRPr lang="en-US" sz="4400" dirty="0"/>
+          </a:p>
+        </p:txBody>
+      </p:sp>
+      <p:sp>
+        <p:nvSpPr>
+          <p:cNvPr id="5" name="Text 2">
+            <a:extLst>
+              <a:ext uri="{FF2B5EF4-FFF2-40B4-BE49-F238E27FC236}">
+                <a16:creationId xmlns:a16="http://schemas.microsoft.com/office/drawing/2014/main" id="{101A07B7-081B-4384-C963-FFC0D5B53663}"/>
+              </a:ext>
+            </a:extLst>
+          </p:cNvPr>
+          <p:cNvSpPr/>
+          <p:nvPr/>
+        </p:nvSpPr>
+        <p:spPr>
+          <a:xfrm>
+            <a:off x="1007465" y="2521407"/>
+            <a:ext cx="2816185" cy="351949"/>
+          </a:xfrm>
+          <a:prstGeom prst="rect">
+            <a:avLst/>
+          </a:prstGeom>
+          <a:noFill/>
+          <a:ln/>
+        </p:spPr>
+        <p:txBody>
+          <a:bodyPr wrap="none" lIns="0" tIns="0" rIns="0" bIns="0" rtlCol="0" anchor="t"/>
+          <a:lstStyle/>
+          <a:p>
+            <a:pPr marL="0" indent="0" algn="l">
+              <a:lnSpc>
+                <a:spcPts val="2750"/>
+              </a:lnSpc>
+              <a:buNone/>
+            </a:pPr>
+            <a:r>
+              <a:rPr lang="en-US" sz="2200" dirty="0">
                 <a:latin typeface="Unbounded" pitchFamily="34" charset="0"/>
                 <a:ea typeface="Unbounded" pitchFamily="34" charset="-122"/>
                 <a:cs typeface="Unbounded" pitchFamily="34" charset="-120"/>
               </a:rPr>
-              <a:t>圖</a:t>
-            </a:r>
-            <a:endParaRPr lang="en-US" sz="4400" dirty="0">
-              <a:latin typeface="Unbounded" pitchFamily="34" charset="0"/>
-              <a:ea typeface="Unbounded" pitchFamily="34" charset="-122"/>
-              <a:cs typeface="Unbounded" pitchFamily="34" charset="-120"/>
-            </a:endParaRPr>
+              <a:t>最近看過商品</a:t>
+            </a:r>
+            <a:endParaRPr lang="en-US" sz="2200" dirty="0"/>
+          </a:p>
+        </p:txBody>
+      </p:sp>
+      <p:sp>
+        <p:nvSpPr>
+          <p:cNvPr id="6" name="Text 3">
+            <a:extLst>
+              <a:ext uri="{FF2B5EF4-FFF2-40B4-BE49-F238E27FC236}">
+                <a16:creationId xmlns:a16="http://schemas.microsoft.com/office/drawing/2014/main" id="{462400A2-D484-A8F3-CCF3-32E253FD6954}"/>
+              </a:ext>
+            </a:extLst>
+          </p:cNvPr>
+          <p:cNvSpPr/>
+          <p:nvPr/>
+        </p:nvSpPr>
+        <p:spPr>
+          <a:xfrm>
+            <a:off x="1007465" y="3016945"/>
+            <a:ext cx="3135987" cy="766048"/>
+          </a:xfrm>
+          <a:prstGeom prst="rect">
+            <a:avLst/>
+          </a:prstGeom>
+          <a:noFill/>
+          <a:ln/>
+        </p:spPr>
+        <p:txBody>
+          <a:bodyPr wrap="square" lIns="0" tIns="0" rIns="0" bIns="0" rtlCol="0" anchor="t"/>
+          <a:lstStyle/>
+          <a:p>
+            <a:pPr marL="0" indent="0" algn="l">
+              <a:lnSpc>
+                <a:spcPts val="3000"/>
+              </a:lnSpc>
+              <a:buNone/>
+            </a:pPr>
+            <a:r>
+              <a:rPr lang="en-US" sz="1850" dirty="0">
+                <a:latin typeface="Cabin" pitchFamily="34" charset="0"/>
+                <a:ea typeface="Cabin" pitchFamily="34" charset="-122"/>
+                <a:cs typeface="Cabin" pitchFamily="34" charset="-120"/>
+              </a:rPr>
+              <a:t>追蹤瀏覽紀錄，方便用戶回顧商品</a:t>
+            </a:r>
+            <a:endParaRPr lang="en-US" sz="1850" dirty="0"/>
           </a:p>
         </p:txBody>
       </p:sp>
       <p:pic>
         <p:nvPicPr>
-          <p:cNvPr id="6" name="圖片 5" descr="一張含有 文字, 螢幕擷取畫面, 圖表, 字型 的圖片&#10;&#10;AI 產生的內容可能不正確。">
-            <a:extLst>
-              <a:ext uri="{FF2B5EF4-FFF2-40B4-BE49-F238E27FC236}">
-                <a16:creationId xmlns:a16="http://schemas.microsoft.com/office/drawing/2014/main" id="{1F57A988-44DC-264D-2611-5A7690BC9F55}"/>
-              </a:ext>
-            </a:extLst>
-          </p:cNvPr>
+          <p:cNvPr id="15" name="圖片 14"/>
           <p:cNvPicPr>
             <a:picLocks noChangeAspect="1"/>
           </p:cNvPicPr>
           <p:nvPr/>
         </p:nvPicPr>
         <p:blipFill>
-          <a:blip r:embed="rId2">
-            <a:extLst>
-              <a:ext uri="{28A0092B-C50C-407E-A947-70E740481C1C}">
-                <a14:useLocalDpi xmlns:a14="http://schemas.microsoft.com/office/drawing/2010/main" val="0"/>
-              </a:ext>
-            </a:extLst>
-          </a:blip>
+          <a:blip r:embed="rId2"/>
           <a:stretch>
             <a:fillRect/>
           </a:stretch>
         </p:blipFill>
         <p:spPr>
           <a:xfrm>
-            <a:off x="2440498" y="0"/>
-            <a:ext cx="10099964" cy="8229600"/>
+            <a:off x="5123061" y="2282091"/>
+            <a:ext cx="9000000" cy="5769536"/>
           </a:xfrm>
           <a:prstGeom prst="rect">
             <a:avLst/>
@@ -8016,7 +7851,7 @@
     </p:spTree>
     <p:extLst>
       <p:ext uri="{BB962C8B-B14F-4D97-AF65-F5344CB8AC3E}">
-        <p14:creationId xmlns:p14="http://schemas.microsoft.com/office/powerpoint/2010/main" val="1957535455"/>
+        <p14:creationId xmlns:p14="http://schemas.microsoft.com/office/powerpoint/2010/main" val="4210325602"/>
       </p:ext>
     </p:extLst>
   </p:cSld>
@@ -8056,7 +7891,7 @@
           <p:cNvPr id="3" name="Text 0">
             <a:extLst>
               <a:ext uri="{FF2B5EF4-FFF2-40B4-BE49-F238E27FC236}">
-                <a16:creationId xmlns:a16="http://schemas.microsoft.com/office/drawing/2014/main" id="{5C17D3ED-A85C-614C-6F5F-0F8B4B8933E8}"/>
+                <a16:creationId xmlns:a16="http://schemas.microsoft.com/office/drawing/2014/main" id="{8BF2A6AB-1F7E-9633-389D-D723B15A9392}"/>
               </a:ext>
             </a:extLst>
           </p:cNvPr>
@@ -8065,8 +7900,8 @@
         </p:nvSpPr>
         <p:spPr>
           <a:xfrm>
-            <a:off x="6324124" y="2191583"/>
-            <a:ext cx="5632490" cy="704017"/>
+            <a:off x="768150" y="1358291"/>
+            <a:ext cx="6757988" cy="704017"/>
           </a:xfrm>
           <a:prstGeom prst="rect">
             <a:avLst/>
@@ -8085,12 +7920,12 @@
               <a:buNone/>
             </a:pPr>
             <a:r>
-              <a:rPr lang="en-US" sz="4400" dirty="0">
+              <a:rPr lang="en-US" sz="4400" dirty="0" err="1">
                 <a:latin typeface="Unbounded" pitchFamily="34" charset="0"/>
                 <a:ea typeface="Unbounded" pitchFamily="34" charset="-122"/>
                 <a:cs typeface="Unbounded" pitchFamily="34" charset="-120"/>
               </a:rPr>
-              <a:t>前台功能：登錄/註冊</a:t>
+              <a:t>前台功能</a:t>
             </a:r>
             <a:endParaRPr lang="en-US" sz="4400" dirty="0"/>
           </a:p>
@@ -8098,10 +7933,10 @@
       </p:sp>
       <p:sp>
         <p:nvSpPr>
-          <p:cNvPr id="5" name="Text 2">
-            <a:extLst>
-              <a:ext uri="{FF2B5EF4-FFF2-40B4-BE49-F238E27FC236}">
-                <a16:creationId xmlns:a16="http://schemas.microsoft.com/office/drawing/2014/main" id="{525A2525-6238-2A2C-F363-D7B41FF84E72}"/>
+          <p:cNvPr id="14" name="Text 5">
+            <a:extLst>
+              <a:ext uri="{FF2B5EF4-FFF2-40B4-BE49-F238E27FC236}">
+                <a16:creationId xmlns:a16="http://schemas.microsoft.com/office/drawing/2014/main" id="{F636048F-4C36-6D44-AA6F-5D21733034BE}"/>
               </a:ext>
             </a:extLst>
           </p:cNvPr>
@@ -8110,8 +7945,8 @@
         </p:nvSpPr>
         <p:spPr>
           <a:xfrm>
-            <a:off x="7101959" y="3336846"/>
-            <a:ext cx="2806898" cy="351949"/>
+            <a:off x="1011157" y="2557270"/>
+            <a:ext cx="2816185" cy="351949"/>
           </a:xfrm>
           <a:prstGeom prst="rect">
             <a:avLst/>
@@ -8135,7 +7970,7 @@
                 <a:ea typeface="Unbounded" pitchFamily="34" charset="-122"/>
                 <a:cs typeface="Unbounded" pitchFamily="34" charset="-120"/>
               </a:rPr>
-              <a:t>快速註冊流程</a:t>
+              <a:t>購物車管理</a:t>
             </a:r>
             <a:endParaRPr lang="en-US" sz="2200" dirty="0"/>
           </a:p>
@@ -8143,10 +7978,10 @@
       </p:sp>
       <p:sp>
         <p:nvSpPr>
-          <p:cNvPr id="6" name="Text 3">
-            <a:extLst>
-              <a:ext uri="{FF2B5EF4-FFF2-40B4-BE49-F238E27FC236}">
-                <a16:creationId xmlns:a16="http://schemas.microsoft.com/office/drawing/2014/main" id="{003E8AB1-B42E-162E-6AAE-453861A86BDA}"/>
+          <p:cNvPr id="16" name="Text 6">
+            <a:extLst>
+              <a:ext uri="{FF2B5EF4-FFF2-40B4-BE49-F238E27FC236}">
+                <a16:creationId xmlns:a16="http://schemas.microsoft.com/office/drawing/2014/main" id="{6BBFCEEE-A067-D3FE-98EA-BF5239A138DB}"/>
               </a:ext>
             </a:extLst>
           </p:cNvPr>
@@ -8155,8 +7990,8 @@
         </p:nvSpPr>
         <p:spPr>
           <a:xfrm>
-            <a:off x="7101959" y="3832384"/>
-            <a:ext cx="2806898" cy="766048"/>
+            <a:off x="1011157" y="3052808"/>
+            <a:ext cx="3135987" cy="766048"/>
           </a:xfrm>
           <a:prstGeom prst="rect">
             <a:avLst/>
@@ -8168,41 +8003,30 @@
           <a:bodyPr wrap="square" lIns="0" tIns="0" rIns="0" bIns="0" rtlCol="0" anchor="t"/>
           <a:lstStyle/>
           <a:p>
-            <a:pPr marL="0" indent="0" algn="l">
+            <a:pPr>
               <a:lnSpc>
                 <a:spcPts val="3000"/>
               </a:lnSpc>
-              <a:buNone/>
             </a:pPr>
             <a:r>
-              <a:rPr lang="en-US" sz="1850" dirty="0">
+              <a:rPr lang="zh-TW" altLang="en-US" sz="1850" dirty="0">
                 <a:latin typeface="Cabin" pitchFamily="34" charset="0"/>
                 <a:ea typeface="Cabin" pitchFamily="34" charset="-122"/>
                 <a:cs typeface="Cabin" pitchFamily="34" charset="-120"/>
               </a:rPr>
-              <a:t>支援 Email </a:t>
-            </a:r>
-            <a:r>
-              <a:rPr lang="en-US" sz="1850" dirty="0" err="1">
-                <a:latin typeface="Cabin" pitchFamily="34" charset="0"/>
-                <a:ea typeface="Cabin" pitchFamily="34" charset="-122"/>
-                <a:cs typeface="Cabin" pitchFamily="34" charset="-120"/>
-              </a:rPr>
-              <a:t>驗證，流程簡便</a:t>
-            </a:r>
-            <a:endParaRPr lang="en-US" sz="1850" dirty="0"/>
+              <a:t>新增、修改、刪除商品</a:t>
+            </a:r>
+            <a:endParaRPr lang="en-US" sz="1850" dirty="0">
+              <a:latin typeface="Cabin" pitchFamily="34" charset="0"/>
+              <a:ea typeface="Cabin" pitchFamily="34" charset="-122"/>
+              <a:cs typeface="Cabin" pitchFamily="34" charset="-120"/>
+            </a:endParaRPr>
           </a:p>
         </p:txBody>
       </p:sp>
       <p:pic>
         <p:nvPicPr>
-          <p:cNvPr id="14" name="圖片 13">
-            <a:extLst>
-              <a:ext uri="{FF2B5EF4-FFF2-40B4-BE49-F238E27FC236}">
-                <a16:creationId xmlns:a16="http://schemas.microsoft.com/office/drawing/2014/main" id="{C26A9BA4-61B2-5312-6B04-D837D63F806C}"/>
-              </a:ext>
-            </a:extLst>
-          </p:cNvPr>
+          <p:cNvPr id="2" name="圖片 1"/>
           <p:cNvPicPr>
             <a:picLocks noChangeAspect="1"/>
           </p:cNvPicPr>
@@ -8216,8 +8040,8 @@
         </p:blipFill>
         <p:spPr>
           <a:xfrm>
-            <a:off x="1022540" y="1179671"/>
-            <a:ext cx="4181475" cy="5305425"/>
+            <a:off x="4835879" y="2282091"/>
+            <a:ext cx="9000000" cy="3155507"/>
           </a:xfrm>
           <a:prstGeom prst="rect">
             <a:avLst/>
@@ -8227,7 +8051,7 @@
     </p:spTree>
     <p:extLst>
       <p:ext uri="{BB962C8B-B14F-4D97-AF65-F5344CB8AC3E}">
-        <p14:creationId xmlns:p14="http://schemas.microsoft.com/office/powerpoint/2010/main" val="4051262160"/>
+        <p14:creationId xmlns:p14="http://schemas.microsoft.com/office/powerpoint/2010/main" val="2357158065"/>
       </p:ext>
     </p:extLst>
   </p:cSld>
